--- a/Curso Gas B/00 - El Reglamento de Gas - estructura, ambito y generalidades/00 - El Reglamento de Gas - Vídeo 2.pptx
+++ b/Curso Gas B/00 - El Reglamento de Gas - estructura, ambito y generalidades/00 - El Reglamento de Gas - Vídeo 2.pptx
@@ -20,6 +20,7 @@
     <p:sldId id="268" r:id="rId20"/>
     <p:sldId id="269" r:id="rId21"/>
     <p:sldId id="270" r:id="rId22"/>
+    <p:sldId id="271" r:id="rId23"/>
   </p:sldIdLst>
   <p:sldSz cx="12191695" cy="6858000" type="screen4x3"/>
   <p:notesSz cx="6858000" cy="9144000"/>
@@ -516,12 +517,12 @@
           <a:lstStyle/>
           <a:p>
             <a:r>
-              <a:t>N1: Ya sabemos qué regula el Reglamento; ahora, ¿cómo se lleva a la obra?</a:t>
-            </a:r>
-          </a:p>
-          <a:p>
-            <a:r>
-              <a:t>N2: En este vídeo vemos lo que más se parece al día a día del gasista: qué materiales puedes usar y, sobre todo, el camino completo desde que terminas una instalación hasta que tiene gas. Diseño, ejecución, pruebas, certificados, puesta en servicio y comunicación a la Administración. Es el itinerario que vas a repetir en cada obra, así que conviene tenerlo grabado en orden, porque saltarte un paso casi siempre significa quedarte sin gas hasta arreglarlo.</a:t>
+              <a:t>N1: Ya sabemos qué regula el Reglamento y con qué palabras. ¿Y ahora?</a:t>
+            </a:r>
+          </a:p>
+          <a:p>
+            <a:r>
+              <a:t>N2: Ahora toca lo que más se parece a tu día a día: qué materiales puedes usar y, sobre todo, el camino completo desde que terminas una instalación hasta que tiene gas. Diseño, ejecución, pruebas, certificados, puesta en servicio y comunicación a la Administración. Es el itinerario que vas a repetir en cada obra, así que conviene tenerlo grabado en orden, porque saltarte un paso deja la instalación coja y casi siempre sin gas hasta que lo arreglas.</a:t>
             </a:r>
           </a:p>
         </p:txBody>
@@ -591,12 +592,12 @@
           <a:lstStyle/>
           <a:p>
             <a:r>
-              <a:t>N1: Una casa lleva años cerrada, ¿se reengancha sin más?</a:t>
-            </a:r>
-          </a:p>
-          <a:p>
-            <a:r>
-              <a:t>N2: Para poner en servicio, el responsable debe recibir copia de los certificados. Puede pedirse un suministro de gas provisional para las pruebas de funcionamiento, y la responsabilidad de esas pruebas recae en la empresa instaladora. Pero retén esto, que cae fijo: si una instalación lleva más de un año sin gas, una casa cerrada, una herencia parada, no se reengancha sin más; se trata como si fuera nueva, con papeles y pruebas incluidos. Menos de un año y con su certificado de control periódico en vigor, sí se puede restablecer el suministro. El año es tu fecha de caducidad mental.</a:t>
+              <a:t>N1: ¿Cuántos certificados salen al terminar y quién firma cada uno?</a:t>
+            </a:r>
+          </a:p>
+          <a:p>
+            <a:r>
+              <a:t>N2: El certificado de instalación es tu factura de que está bien hecho, el documento estrella: sin él no hay gas. Lo firma quien ejecutó la instalación, con las pruebas favorables. Luego, solo en instalaciones que necesitan proyecto, aparece el certificado de dirección de obra, que lo firma el director de obra. Y solo cuando la ITC obligó a que viniera el organismo de control, aparece el certificado de inspección. Idea clave: siempre hay certificado de instalación; los otros dos, solo a veces. En obra, sin ese boletín no puedes pedir el gas.</a:t>
             </a:r>
           </a:p>
         </p:txBody>
@@ -666,12 +667,12 @@
           <a:lstStyle/>
           <a:p>
             <a:r>
-              <a:t>N1: ¿Quién avisa a la Administración y en cuánto tiempo?</a:t>
-            </a:r>
-          </a:p>
-          <a:p>
-            <a:r>
-              <a:t>N2: Salvo excepciones de las ITC, el titular presenta la documentación antes de que pasen treinta días desde la puesta en servicio, ante el órgano competente de la Comunidad Autónoma. Ojo a dos datos que se preguntan juntos: quién comunica es el titular, el dueño, no la empresa instaladora, aunque en la práctica lo tramite la instaladora en su nombre; y el plazo cuenta desde la puesta en servicio, no desde que acabaste el montaje. Se acompaña la identificación de la instalación, la documentación técnica y los certificados que correspondan.</a:t>
+              <a:t>N1: Una casa lleva mucho tiempo cerrada. ¿Se reengancha el gas sin más?</a:t>
+            </a:r>
+          </a:p>
+          <a:p>
+            <a:r>
+              <a:t>N2: Para poner en servicio, el responsable recibe copia de los certificados. Y para pruebas de funcionamiento, la empresa instaladora puede pedir al distribuidor un suministro provisional, siempre con la responsabilidad de la instalación en sus manos. Pero retén esta regla porque cae fijo: si una instalación lleva más de un año sin gas, una casa cerrada, una herencia parada, no se reengancha sin más; se trata como si fuera nueva, con sus papeles y sus pruebas. Si lleva menos de un año y tiene su certificado de control periódico en vigor, se puede restablecer. El año es tu fecha de caducidad mental.</a:t>
             </a:r>
           </a:p>
         </p:txBody>
@@ -741,12 +742,12 @@
           <a:lstStyle/>
           <a:p>
             <a:r>
-              <a:t>N1: ¿La puesta en marcha es solo encender y ya?</a:t>
-            </a:r>
-          </a:p>
-          <a:p>
-            <a:r>
-              <a:t>N2: No. La puesta en marcha de los aparatos se hace según la ITC-ICG cero ocho, y no es 'darle al botón': es verificar que la caldera o el calentador funcionan con su gas y su presión, y que la combustión cae dentro de lo que marca el fabricante. Hacerla mal o saltártela es la puerta directa a mala combustión, llama amarilla, ennegrecido, aparato que se apaga y monóxido de carbono. Quien la realiza emite y entrega al usuario un certificado de puesta en marcha. Ese papel es la prueba de que el aparato arrancó bien.</a:t>
+              <a:t>N1: ¿Quién avisa a la Administración y en cuánto tiempo?</a:t>
+            </a:r>
+          </a:p>
+          <a:p>
+            <a:r>
+              <a:t>N2: Aquí van dos datos que se preguntan juntos: quién y cuándo. Quién comunica es el titular, el dueño, no la empresa instaladora. En la práctica lo suele tramitar la instaladora en nombre del titular, pero la responsabilidad de comunicar es del titular. Y cuándo: antes de que pasen treinta días desde la puesta en servicio, ante el órgano competente de la Comunidad Autónoma. Ojo, el plazo se cuenta desde la puesta en servicio, desde que entra el gas, no desde que acabaste el montaje. Con la comunicación entrega la documentación técnica y el certificado de instalación.</a:t>
             </a:r>
           </a:p>
         </p:txBody>
@@ -816,12 +817,12 @@
           <a:lstStyle/>
           <a:p>
             <a:r>
-              <a:t>N1: ¿Quién firma cada certificado?</a:t>
-            </a:r>
-          </a:p>
-          <a:p>
-            <a:r>
-              <a:t>N2: Aquí está una de las preguntas más repetidas del examen, así que no la mezcles. El certificado de instalación lo firma la empresa que ejecutó. El de dirección de obra lo firma el director de obra, y solo aparece si hubo proyecto, es decir, obra grande. Y el de puesta en marcha del aparato lo firma el agente de puesta en marcha, según la ITC-ICG cero ocho, y se entrega al usuario. Asocia cada papel con quién lo firma y no fallarás: ejecutas, diriges, arrancas.</a:t>
+              <a:t>N1: La puesta en marcha del aparato, ¿es encender y ya está?</a:t>
+            </a:r>
+          </a:p>
+          <a:p>
+            <a:r>
+              <a:t>N2: No. La puesta en marcha se hace según la ITC-ICG cero ocho, y no es solo darle al botón. Es verificar que la caldera o el calentador funcionan con su gas y su presión, y que la combustión cae dentro de lo que marca el fabricante. Hacerla mal o saltártela es la puerta directa a mala combustión, llama amarilla, ennegrecido, aparato que se apaga y monóxido de carbono. Quien la realiza emite y entrega al usuario un certificado de puesta en marcha. Ese papel es la prueba de que el aparato arrancó bien y en condiciones seguras.</a:t>
             </a:r>
           </a:p>
         </p:txBody>
@@ -891,12 +892,12 @@
           <a:lstStyle/>
           <a:p>
             <a:r>
-              <a:t>N1: ¿Qué tiene derecho a recibir el cliente?</a:t>
-            </a:r>
-          </a:p>
-          <a:p>
-            <a:r>
-              <a:t>N2: En las receptoras, como anexo al certificado de instalación que entregas al titular, la empresa instaladora prepara unas instrucciones de correcto uso y mantenimiento. Y algo que no puedes olvidar: incluyen un croquis del trazado, con materiales, uniones y válvulas. El cliente tiene derecho a saber por dónde van sus tubos, y se lo entregas tú. Además, el suministrador facilita a sus clientes, por escrito y con periodicidad al menos bienal, recomendaciones de uso y seguridad. 'Bienal' es cada dos años; no lo confundas con 'bianual', que sería dos veces al año.</a:t>
+              <a:t>N1: ¿Qué información tiene derecho a recibir el cliente?</a:t>
+            </a:r>
+          </a:p>
+          <a:p>
+            <a:r>
+              <a:t>N2: Como anexo al certificado de instalación que entregas al titular, la empresa instaladora confecciona unas instrucciones de uso y mantenimiento. Y en todo caso incluyen un croquis del trazado, con materiales, uniones y válvulas: el cliente tiene derecho a saber por dónde van sus tubos, y ese plano se lo entregas tú con la instalación. Además, el suministrador facilita a sus clientes, por escrito y con periodicidad al menos bienal, recomendaciones de seguridad. Bienal significa cada dos años, no lo confundas con bianual, que sería dos veces al año. Aquí es cada dos años como mínimo.</a:t>
             </a:r>
           </a:p>
         </p:txBody>
@@ -966,12 +967,97 @@
           <a:lstStyle/>
           <a:p>
             <a:r>
-              <a:t>N1: ¿Qué te llevas de este vídeo?</a:t>
-            </a:r>
-          </a:p>
-          <a:p>
-            <a:r>
-              <a:t>N2: Primero, el itinerario completo que repites en cada obra: diseño, autorización si aplica, ejecución, pruebas, certificados, puesta en servicio, comunicación y puesta en marcha; saltarte un paso deja la obra coja y sin gas. Segundo, el certificado de instalación, el boletín, es tu documento estrella: lo firma quien ejecuta, copia al titular, y el titular lo comunica a la Comunidad Autónoma antes de treinta días. Y tercero, dos reglas de oro: la del año, una instalación parada más de un año se trata como nueva; y no confundas los tres certificados de arranque, cada uno lo firma alguien. En el último vídeo cerramos el articulado: mantenimiento, inspección frente a revisión y las reglas finales.</a:t>
+              <a:t>N1: Repaso rápido antes de cerrar. ¿Tienes los cuatro pilares?</a:t>
+            </a:r>
+          </a:p>
+          <a:p>
+            <a:r>
+              <a:t>N2: Uno, la película de ocho pasos: diseño, autorización, ejecución, pruebas, certificados, puesta en servicio, comunicación y puesta en marcha, en ese orden. Dos, de los tres certificados de arranque, el de instalación siempre; el de dirección de obra solo si hubo proyecto, y el de inspección solo si la ITC lo exige. Tres, el titular comunica a la Comunidad Autónoma antes de treinta días. Y cuatro, la regla del año: parada de más de un año se trata como instalación nueva. Recítalos en voz alta y sigue.</a:t>
+            </a:r>
+          </a:p>
+        </p:txBody>
+      </p:sp>
+      <p:sp>
+        <p:nvSpPr>
+          <p:cNvPr id="4" name="Slide Number Placeholder 3"/>
+          <p:cNvSpPr>
+            <a:spLocks noGrp="1"/>
+          </p:cNvSpPr>
+          <p:nvPr>
+            <p:ph type="sldNum" idx="5" sz="quarter"/>
+          </p:nvPr>
+        </p:nvSpPr>
+        <p:spPr/>
+      </p:sp>
+    </p:spTree>
+  </p:cSld>
+  <p:clrMapOvr>
+    <a:masterClrMapping/>
+  </p:clrMapOvr>
+</p:notes>
+</file>
+
+<file path=ppt/notesSlides/notesSlide16.xml><?xml version="1.0" encoding="utf-8"?>
+<p:notes xmlns:a="http://schemas.openxmlformats.org/drawingml/2006/main" xmlns:p="http://schemas.openxmlformats.org/presentationml/2006/main" xmlns:r="http://schemas.openxmlformats.org/officeDocument/2006/relationships">
+  <p:cSld>
+    <p:spTree>
+      <p:nvGrpSpPr>
+        <p:cNvPr id="1" name=""/>
+        <p:cNvGrpSpPr/>
+        <p:nvPr/>
+      </p:nvGrpSpPr>
+      <p:grpSpPr>
+        <a:xfrm>
+          <a:off x="0" y="0"/>
+          <a:ext cx="0" cy="0"/>
+          <a:chOff x="0" y="0"/>
+          <a:chExt cx="0" cy="0"/>
+        </a:xfrm>
+      </p:grpSpPr>
+      <p:sp>
+        <p:nvSpPr>
+          <p:cNvPr id="2" name="Slide Image Placeholder 1"/>
+          <p:cNvSpPr>
+            <a:spLocks noGrp="1"/>
+          </p:cNvSpPr>
+          <p:nvPr>
+            <p:ph type="sldImg" idx="2"/>
+          </p:nvPr>
+        </p:nvSpPr>
+        <p:spPr/>
+      </p:sp>
+      <p:sp>
+        <p:nvSpPr>
+          <p:cNvPr id="3" name="Notes Placeholder 2"/>
+          <p:cNvSpPr>
+            <a:spLocks noGrp="1"/>
+          </p:cNvSpPr>
+          <p:nvPr>
+            <p:ph type="body" idx="3" sz="quarter"/>
+          </p:nvPr>
+        </p:nvSpPr>
+        <p:spPr/>
+        <p:txBody>
+          <a:bodyPr/>
+          <a:lstStyle/>
+          <a:p>
+            <a:r>
+              <a:t>N1: Gran final. ¿Qué eres capaz de hacer hoy que ayer no?</a:t>
+            </a:r>
+          </a:p>
+          <a:p>
+            <a:r>
+              <a:t>N2: Hoy ya sabes llevar una instalación de cero a tener gas sin perderte. Primer logro: recorres los ocho pasos del artículo quinto en orden, del diseño a la puesta en marcha, y sabes que saltarte uno deja la obra sin gas. Segundo: no confundes los tres certificados de arranque; el de instalación lo firma quien ejecuta y no falta nunca, el de dirección de obra solo si hubo proyecto, y el de puesta en marcha va del aparato y se entrega al usuario. Tercero: distingues la prueba, que haces tú, de la inspección, que hace un árbitro independiente.</a:t>
+            </a:r>
+          </a:p>
+          <a:p>
+            <a:r>
+              <a:t>N1: ¿Y dónde se nota todo esto de verdad?</a:t>
+            </a:r>
+          </a:p>
+          <a:p>
+            <a:r>
+              <a:t>N2: En el examen te preguntan quién firma cada certificado y en cuántos días comunica el titular; ahora lo respondes sin dudar, treinta días y el titular. Y en la obra se nota cuando entregas un boletín limpio con su croquis, o cuando te llega una casa cerrada más de un año y, en vez de reenganchar sin más, la tratas como nueva y te ahorras un disgusto. Recuerda: firmar es responsabilizarse, y hoy ya sabes exactamente de qué respondes. En el último vídeo del tema cerramos el articulado: mantenimiento, la diferencia estrella entre inspección y revisión, y las reglas finales. Te espero para el gran cierre.</a:t>
             </a:r>
           </a:p>
         </p:txBody>
@@ -1041,12 +1127,12 @@
           <a:lstStyle/>
           <a:p>
             <a:r>
-              <a:t>N1: ¿Qué números vertebran este vídeo?</a:t>
-            </a:r>
-          </a:p>
-          <a:p>
-            <a:r>
-              <a:t>N2: Ocho pasos en el artículo quinto, de diseño a puesta en marcha, que son la película completa de una instalación; tres certificados de arranque que no debes confundir, porque cada uno lo firma alguien distinto; y treinta días, el plazo que tiene el titular para comunicar la instalación a la Administración desde la puesta en servicio. Estos tres números son de los que más se preguntan y de los que más se usan en obra.</a:t>
+              <a:t>N1: ¿Qué tres números marcan este vídeo?</a:t>
+            </a:r>
+          </a:p>
+          <a:p>
+            <a:r>
+              <a:t>N2: Ocho pasos ordenados en el artículo quinto, desde el diseño hasta el arranque de los aparatos: esa es la película de toda obra. Treinta días es el plazo que tiene el titular para comunicar la instalación a la Comunidad Autónoma después de la puesta en servicio. Y tres certificados de arranque que no debes confundir jamás: el de instalación, el de dirección de obra y el de puesta en marcha del aparato. Con estos tres números tienes el mapa del vídeo.</a:t>
             </a:r>
           </a:p>
         </p:txBody>
@@ -1116,12 +1202,12 @@
           <a:lstStyle/>
           <a:p>
             <a:r>
-              <a:t>N1: ¿Qué tiene que llevar cualquier material que montas?</a:t>
-            </a:r>
-          </a:p>
-          <a:p>
-            <a:r>
-              <a:t>N2: Los materiales, equipos y aparatos deben cumplir las directivas europeas o, en su defecto, el Reglamento y sus ITC. Y tienen que llevar un marcado visible e indeleble. 'Indeleble' significa que no se borra: piénsalo como el DNI del material, grabado y permanente. ¿Por qué? Porque dentro de diez años, cuando alguien revise ese tubo o esa válvula, tiene que poder leer todavía de qué es y quién lo fabricó; una pegatina que se cae no vale. Ese marcado incluye fabricante, marca y modelo, y las instrucciones deben estar al menos en castellano. Si en el examen ves 'las instrucciones pueden venir solo en inglés', es falso: el castellano es el mínimo obligatorio.</a:t>
+              <a:t>N1: ¿Por qué el material tiene que llevar un marcado que no se borre?</a:t>
+            </a:r>
+          </a:p>
+          <a:p>
+            <a:r>
+              <a:t>N2: Indeleble significa que no se borra. El Reglamento lo exige porque dentro de diez años, cuando alguien revise ese tubo o esa válvula, tiene que poder leer todavía de qué es y quién lo hizo. Una pegatina que se cae no vale. Piensa en el marcado como el documento de identidad del material: grabado, permanente y legible, con el fabricante, la marca y el modelo. Y se consideran conformes los materiales amparados por certificados y marcas de conformidad a normas. En obra, si la etiqueta ya no se lee, ese material te va a dar problemas el día que haya que reclamar.</a:t>
             </a:r>
           </a:p>
         </p:txBody>
@@ -1191,12 +1277,12 @@
           <a:lstStyle/>
           <a:p>
             <a:r>
-              <a:t>N1: ¿Cómo no perderte entre tantos subapartados?</a:t>
-            </a:r>
-          </a:p>
-          <a:p>
-            <a:r>
-              <a:t>N2: El artículo quinto es una sola historia con ocho capítulos, en orden. Primero el diseño, los papeles; luego la autorización, por si hace falta permiso; después la ejecución, el montaje; las pruebas, para ver si aguanta; los certificados, las firmas; la puesta en servicio, que es cuando por fin hay gas; la comunicación, avisar a la Administración; y la puesta en marcha, arrancar los aparatos. Si te sabes la película en orden, los detalles caen solos. Vamos capítulo a capítulo.</a:t>
+              <a:t>N1: ¿En qué idioma tienen que venir las instrucciones del material?</a:t>
+            </a:r>
+          </a:p>
+          <a:p>
+            <a:r>
+              <a:t>N2: Al menos en castellano. Esta frase cae tal cual en el examen. Si ves una opción que dice que las instrucciones pueden venir solo en inglés, es falsa: el castellano es el mínimo obligatorio. Pueden venir además en otros idiomas, sin problema, pero en castellano siempre. Y esas instrucciones deben incluir lo necesario para el uso específico del equipo. Es una de esas preguntas cortas que regalan un punto si la tienes clara.</a:t>
             </a:r>
           </a:p>
         </p:txBody>
@@ -1266,12 +1352,12 @@
           <a:lstStyle/>
           <a:p>
             <a:r>
-              <a:t>N1: ¿Quién firma los papeles de una instalación?</a:t>
-            </a:r>
-          </a:p>
-          <a:p>
-            <a:r>
-              <a:t>N2: Cada instalación necesita una documentación técnica que acredite que cumple. Regla mental: instalación grande o complicada, proyecto, que lo firma un técnico titulado, un ingeniero; instalación normal o pequeña, memoria técnica, que la puede firmar el propio instalador en su categoría. Es como ir al médico: un catarro lo ve el de cabecera, memoria; una operación seria, el especialista, proyecto. Y cuidado con la frase clave: quien firma es directamente responsable. En gas la firma no es un trámite; si firmas la memoria y algo está mal, respondes tú. Por eso no se firma nada que no hayas comprobado.</a:t>
+              <a:t>N1: El artículo quinto tiene muchos subapartados. ¿Cómo no perderse?</a:t>
+            </a:r>
+          </a:p>
+          <a:p>
+            <a:r>
+              <a:t>N2: No lo veas como una lista suelta, velo como una historia con ocho capítulos en orden. Primero el diseño, los papeles. Segundo la autorización, por si hace falta permiso. Tercero la ejecución, el montaje. Cuarto las pruebas, a ver si aguanta. Quinto los certificados, las firmas. Sexto la puesta en servicio, es decir, ya entra el gas. Séptimo la comunicación, avisar a la Administración. Y octavo la puesta en marcha, arrancar los aparatos. Si te sabes la película en orden, los detalles caen solos. Grábate esta secuencia porque es el guion de todas tus obras.</a:t>
             </a:r>
           </a:p>
         </p:txBody>
@@ -1341,12 +1427,12 @@
           <a:lstStyle/>
           <a:p>
             <a:r>
-              <a:t>N1: ¿Toda instalación necesita permiso previo?</a:t>
-            </a:r>
-          </a:p>
-          <a:p>
-            <a:r>
-              <a:t>N2: No confundas autorización con comunicación. La autorización administrativa, el permiso previo, solo se pide cuando lo exige la Ley del sector de hidrocarburos y así lo dice la ITC; se reserva a casos gordos. La mayoría de instalaciones no necesitan que la Administración les dé permiso antes: basta con avisar después, que es la comunicación del apartado cinco punto siete. En categoría B lo normal es hacer y comunicar, no pedir permiso y quedarte esperando.</a:t>
+              <a:t>N1: Cada instalación necesita papeles, pero ¿proyecto o memoria técnica?</a:t>
+            </a:r>
+          </a:p>
+          <a:p>
+            <a:r>
+              <a:t>N2: Regla mental sencilla: instalación grande o complicada, proyecto, que lo firma un técnico titulado, un ingeniero. Instalación normal o pequeña, memoria técnica, que la puede firmar el instalador en la categoría que marque la ITC-ICG cero nueve. Es como ir al médico: un catarro lo ve tu médico de cabecera, que sería la memoria; una operación seria, el especialista, que sería el proyecto. Y retén esto: quien firma es directamente responsable de que todo se ajuste al Reglamento. En gas la firma no es un trámite; si firmas y algo está mal, respondes tú. Por eso no se firma nada que no hayas comprobado.</a:t>
             </a:r>
           </a:p>
         </p:txBody>
@@ -1416,12 +1502,12 @@
           <a:lstStyle/>
           <a:p>
             <a:r>
-              <a:t>N1: Al montar, ¿qué hay que vigilar con las demás instalaciones?</a:t>
-            </a:r>
-          </a:p>
-          <a:p>
-            <a:r>
-              <a:t>N2: Las instalaciones las realizan las empresas que determine cada ITC. Y cuando tu tubo de gas convive con otras energías o servicios, hay que tomar medidas de precaución. 'Cruces y paralelismos' es un tema que volverás a ver en la norma UNE: cuando el gas se cruza o va en paralelo con la luz, el agua o el saneamiento, hay que respetar distancias mínimas de seguridad para que no se toquen ni se afecten. Aquí el Reglamento solo lo enuncia; el 'cuántos centímetros' está en la norma técnica.</a:t>
+              <a:t>N1: ¿Toda instalación necesita que la Administración dé permiso antes?</a:t>
+            </a:r>
+          </a:p>
+          <a:p>
+            <a:r>
+              <a:t>N2: No, y aquí está una confusión muy típica. No mezcles autorización con comunicación. La autorización es un permiso previo, y solo se pide cuando lo exige la Ley de hidrocarburos y así lo dice la ITC: se reserva a los casos gordos. La mayoría de instalaciones no necesitan que nadie les dé permiso antes; basta con avisar después, que es la comunicación del apartado siete. En Gas B lo normal es hacer y comunicar, no pedir permiso y esperar. Si te lo preguntan, la autorización previa es la excepción, no la regla.</a:t>
             </a:r>
           </a:p>
         </p:txBody>
@@ -1491,12 +1577,12 @@
           <a:lstStyle/>
           <a:p>
             <a:r>
-              <a:t>N1: ¿Quién comprueba que la instalación aguanta?</a:t>
-            </a:r>
-          </a:p>
-          <a:p>
-            <a:r>
-              <a:t>N2: Distingue dos figuras que suenan parecido. La prueba la hace el que monta: compruebas tu propio trabajo, por ejemplo la prueba de estanquidad, antes de meter gas. La inspección la hace un tercero independiente, el organismo de control, y solo cuando la ITC lo exige. Uno es 'revisar lo mío', el otro es 'que me revise un árbitro'. Y ojo con la estanquidad: darla por buena sin hacerla es dejar que la fuga aparezca con el gas ya dentro y el cliente en casa. Esa prueba es tu red contra la fuga.</a:t>
+              <a:t>N1: Cuando tu tubo se cruza con la luz o el agua, ¿qué manda?</a:t>
+            </a:r>
+          </a:p>
+          <a:p>
+            <a:r>
+              <a:t>N2: Las instalaciones las ejecutan las empresas que determine cada ITC. Y cuando tu tubo de gas se cruza o va en paralelo con otros servicios, la electricidad, el agua, el saneamiento, hay que respetar distancias mínimas de seguridad para que no se toquen ni se afecten entre ellos. Eso son los cruces y paralelismos, un tema que volverás a ver a fondo en las normas UNE. Aquí el Reglamento solo lo enuncia; el cuántos centímetros exactos está en la norma técnica. De momento quédate con la idea de que el gas nunca va pegado a otro servicio sin respetar su distancia.</a:t>
             </a:r>
           </a:p>
         </p:txBody>
@@ -1566,12 +1652,12 @@
           <a:lstStyle/>
           <a:p>
             <a:r>
-              <a:t>N1: ¿Qué papeles salen al terminar la instalación?</a:t>
-            </a:r>
-          </a:p>
-          <a:p>
-            <a:r>
-              <a:t>N2: Con las pruebas favorables, la empresa que ejecutó emite el certificado de instalación, el famoso boletín: es el documento estrella, sin él no hay gas, y lo firma quien montó. Si la instalación necesitó proyecto, aparece además el certificado de dirección de obra, que firma el director de obra. Y si la ITC obligó a que viniera el organismo de control, este emite su certificado de inspección. Idea clara: certificado de instalación siempre; los otros dos, solo a veces.</a:t>
+              <a:t>N1: ¿Quién comprueba que la instalación está bien antes de dar gas?</a:t>
+            </a:r>
+          </a:p>
+          <a:p>
+            <a:r>
+              <a:t>N2: Distingue dos figuras que suenan parecido pero no lo son. La prueba la hace el que monta: compruebas tu propio trabajo, por ejemplo la prueba de estanquidad, antes de meter gas. La inspección la hace un tercero independiente, el organismo de control, y solo cuando la ITC lo pide. Uno es revisar lo mío, el otro es que me revise un árbitro. Y ojo con la estanquidad: darla por buena sin hacerla de verdad es dejar que la fuga aparezca con el gas ya dentro y el cliente en casa. Esa prueba es tu red de seguridad; no te la saltes nunca.</a:t>
             </a:r>
           </a:p>
         </p:txBody>
@@ -4684,7 +4770,7 @@
                 </a:solidFill>
                 <a:latin typeface="Montserrat"/>
               </a:rPr>
-              <a:t>El Reglamento de Gas</a:t>
+              <a:t>Materiales y puesta en servicio</a:t>
             </a:r>
           </a:p>
           <a:p>
@@ -4695,7 +4781,7 @@
                 </a:solidFill>
                 <a:latin typeface="Montserrat"/>
               </a:rPr>
-              <a:t>Materiales y puesta en servicio</a:t>
+              <a:t>Del montaje terminado a la instalación con gas</a:t>
             </a:r>
           </a:p>
         </p:txBody>
@@ -4826,7 +4912,7 @@
                 </a:solidFill>
                 <a:latin typeface="Montserrat"/>
               </a:rPr>
-              <a:t>010 / 015</a:t>
+              <a:t>010 / 016</a:t>
             </a:r>
           </a:p>
         </p:txBody>
@@ -4894,7 +4980,7 @@
                 </a:solidFill>
                 <a:latin typeface="Montserrat"/>
               </a:rPr>
-              <a:t>ARTÍCULO 5.6 · PUESTA EN SERVICIO</a:t>
+              <a:t>ARTÍCULO 5.5 · CERTIFICADOS</a:t>
             </a:r>
           </a:p>
         </p:txBody>
@@ -4928,7 +5014,7 @@
                 </a:solidFill>
                 <a:latin typeface="Montserrat"/>
               </a:rPr>
-              <a:t>La regla del año</a:t>
+              <a:t>El boletín es tu documento estrella</a:t>
             </a:r>
           </a:p>
         </p:txBody>
@@ -4976,7 +5062,7 @@
                 </a:solidFill>
                 <a:latin typeface="Montserrat"/>
               </a:rPr>
-              <a:t>El responsable recibe copia de certificados</a:t>
+              <a:t>Instalación: siempre, lo firma quien ejecuta</a:t>
             </a:r>
           </a:p>
           <a:p>
@@ -5001,7 +5087,7 @@
                 </a:solidFill>
                 <a:latin typeface="Montserrat"/>
               </a:rPr>
-              <a:t>Suministro provisional para pruebas</a:t>
+              <a:t>Dirección de obra: solo si hubo proyecto</a:t>
             </a:r>
           </a:p>
           <a:p>
@@ -5026,39 +5112,14 @@
                 </a:solidFill>
                 <a:latin typeface="Montserrat"/>
               </a:rPr>
-              <a:t>Parada +1 año: se trata como nueva</a:t>
-            </a:r>
-          </a:p>
-          <a:p>
-            <a:pPr>
-              <a:spcAft>
-                <a:spcPts val="1000"/>
-              </a:spcAft>
-            </a:pPr>
-            <a:r>
-              <a:rPr sz="1600" b="1" i="0">
-                <a:solidFill>
-                  <a:srgbClr val="2E3A80"/>
-                </a:solidFill>
-                <a:latin typeface="Montserrat"/>
-              </a:rPr>
-              <a:t>•  </a:t>
-            </a:r>
-            <a:r>
-              <a:rPr sz="1600" b="0" i="0">
-                <a:solidFill>
-                  <a:srgbClr val="1B2330"/>
-                </a:solidFill>
-                <a:latin typeface="Montserrat"/>
-              </a:rPr>
-              <a:t>Menos de un año y control en vigor: se restablece</a:t>
-            </a:r>
-          </a:p>
-        </p:txBody>
-      </p:sp>
-      <p:sp>
-        <p:nvSpPr>
-          <p:cNvPr id="8" name="imgph" descr="IMGQ:closed empty house interior"/>
+              <a:t>Inspección: solo si la ITC lo exige</a:t>
+            </a:r>
+          </a:p>
+        </p:txBody>
+      </p:sp>
+      <p:sp>
+        <p:nvSpPr>
+          <p:cNvPr id="8" name="imgph" descr="IMGQ:signing official certificate form"/>
           <p:cNvSpPr/>
           <p:nvPr/>
         </p:nvSpPr>
@@ -5144,7 +5205,7 @@
                 </a:solidFill>
                 <a:latin typeface="Montserrat"/>
               </a:rPr>
-              <a:t>closed empty house interior</a:t>
+              <a:t>signing official certificate form</a:t>
             </a:r>
           </a:p>
         </p:txBody>
@@ -5241,7 +5302,7 @@
                 </a:solidFill>
                 <a:latin typeface="Montserrat"/>
               </a:rPr>
-              <a:t>011 / 015</a:t>
+              <a:t>011 / 016</a:t>
             </a:r>
           </a:p>
         </p:txBody>
@@ -5309,7 +5370,7 @@
                 </a:solidFill>
                 <a:latin typeface="Montserrat"/>
               </a:rPr>
-              <a:t>ARTÍCULO 5.7 · COMUNICACIÓN</a:t>
+              <a:t>ARTÍCULO 5.6 · PUESTA EN SERVICIO</a:t>
             </a:r>
           </a:p>
         </p:txBody>
@@ -5343,7 +5404,7 @@
                 </a:solidFill>
                 <a:latin typeface="Montserrat"/>
               </a:rPr>
-              <a:t>Avisar a la Administración</a:t>
+              <a:t>La regla del año</a:t>
             </a:r>
           </a:p>
         </p:txBody>
@@ -5391,7 +5452,7 @@
                 </a:solidFill>
                 <a:latin typeface="Montserrat"/>
               </a:rPr>
-              <a:t>Lo presenta el titular</a:t>
+              <a:t>Recibir copia de los certificados</a:t>
             </a:r>
           </a:p>
           <a:p>
@@ -5416,7 +5477,7 @@
                 </a:solidFill>
                 <a:latin typeface="Montserrat"/>
               </a:rPr>
-              <a:t>Antes de 30 días desde la puesta en servicio</a:t>
+              <a:t>Suministro provisional para pruebas</a:t>
             </a:r>
           </a:p>
           <a:p>
@@ -5441,39 +5502,14 @@
                 </a:solidFill>
                 <a:latin typeface="Montserrat"/>
               </a:rPr>
-              <a:t>Ante la Comunidad Autónoma</a:t>
-            </a:r>
-          </a:p>
-          <a:p>
-            <a:pPr>
-              <a:spcAft>
-                <a:spcPts val="1000"/>
-              </a:spcAft>
-            </a:pPr>
-            <a:r>
-              <a:rPr sz="1600" b="1" i="0">
-                <a:solidFill>
-                  <a:srgbClr val="2E3A80"/>
-                </a:solidFill>
-                <a:latin typeface="Montserrat"/>
-              </a:rPr>
-              <a:t>•  </a:t>
-            </a:r>
-            <a:r>
-              <a:rPr sz="1600" b="0" i="0">
-                <a:solidFill>
-                  <a:srgbClr val="1B2330"/>
-                </a:solidFill>
-                <a:latin typeface="Montserrat"/>
-              </a:rPr>
-              <a:t>Con documentación y certificados</a:t>
-            </a:r>
-          </a:p>
-        </p:txBody>
-      </p:sp>
-      <p:sp>
-        <p:nvSpPr>
-          <p:cNvPr id="8" name="imgph" descr="IMGQ:person filing paperwork office desk"/>
+              <a:t>Parada +1 año: se trata como nueva</a:t>
+            </a:r>
+          </a:p>
+        </p:txBody>
+      </p:sp>
+      <p:sp>
+        <p:nvSpPr>
+          <p:cNvPr id="8" name="imgph" descr="IMGQ:gas meter installation apartment wall"/>
           <p:cNvSpPr/>
           <p:nvPr/>
         </p:nvSpPr>
@@ -5559,7 +5595,7 @@
                 </a:solidFill>
                 <a:latin typeface="Montserrat"/>
               </a:rPr>
-              <a:t>person filing paperwork office desk</a:t>
+              <a:t>gas meter installation apartment wall</a:t>
             </a:r>
           </a:p>
         </p:txBody>
@@ -5656,7 +5692,7 @@
                 </a:solidFill>
                 <a:latin typeface="Montserrat"/>
               </a:rPr>
-              <a:t>012 / 015</a:t>
+              <a:t>012 / 016</a:t>
             </a:r>
           </a:p>
         </p:txBody>
@@ -5724,7 +5760,7 @@
                 </a:solidFill>
                 <a:latin typeface="Montserrat"/>
               </a:rPr>
-              <a:t>ARTÍCULO 5.8 · PUESTA EN MARCHA</a:t>
+              <a:t>ARTÍCULO 5.7 · COMUNICACIÓN</a:t>
             </a:r>
           </a:p>
         </p:txBody>
@@ -5758,7 +5794,7 @@
                 </a:solidFill>
                 <a:latin typeface="Montserrat"/>
               </a:rPr>
-              <a:t>Arrancar los aparatos</a:t>
+              <a:t>Treinta días y lo presenta el titular</a:t>
             </a:r>
           </a:p>
         </p:txBody>
@@ -5806,7 +5842,7 @@
                 </a:solidFill>
                 <a:latin typeface="Montserrat"/>
               </a:rPr>
-              <a:t>Según la ITC-ICG 08</a:t>
+              <a:t>El titular comunica, no la instaladora</a:t>
             </a:r>
           </a:p>
           <a:p>
@@ -5831,7 +5867,7 @@
                 </a:solidFill>
                 <a:latin typeface="Montserrat"/>
               </a:rPr>
-              <a:t>Verifica gas, presión y combustión</a:t>
+              <a:t>Ante la Comunidad Autónoma</a:t>
             </a:r>
           </a:p>
           <a:p>
@@ -5856,39 +5892,14 @@
                 </a:solidFill>
                 <a:latin typeface="Montserrat"/>
               </a:rPr>
-              <a:t>Certificado de puesta en marcha</a:t>
-            </a:r>
-          </a:p>
-          <a:p>
-            <a:pPr>
-              <a:spcAft>
-                <a:spcPts val="1000"/>
-              </a:spcAft>
-            </a:pPr>
-            <a:r>
-              <a:rPr sz="1600" b="1" i="0">
-                <a:solidFill>
-                  <a:srgbClr val="2E3A80"/>
-                </a:solidFill>
-                <a:latin typeface="Montserrat"/>
-              </a:rPr>
-              <a:t>•  </a:t>
-            </a:r>
-            <a:r>
-              <a:rPr sz="1600" b="0" i="0">
-                <a:solidFill>
-                  <a:srgbClr val="1B2330"/>
-                </a:solidFill>
-                <a:latin typeface="Montserrat"/>
-              </a:rPr>
-              <a:t>Se entrega al usuario</a:t>
-            </a:r>
-          </a:p>
-        </p:txBody>
-      </p:sp>
-      <p:sp>
-        <p:nvSpPr>
-          <p:cNvPr id="8" name="imgph" descr="IMGQ:technician checking boiler flame"/>
+              <a:t>Antes de 30 días desde puesta en servicio</a:t>
+            </a:r>
+          </a:p>
+        </p:txBody>
+      </p:sp>
+      <p:sp>
+        <p:nvSpPr>
+          <p:cNvPr id="8" name="imgph" descr="IMGQ:person filling paperwork office desk"/>
           <p:cNvSpPr/>
           <p:nvPr/>
         </p:nvSpPr>
@@ -5974,7 +5985,7 @@
                 </a:solidFill>
                 <a:latin typeface="Montserrat"/>
               </a:rPr>
-              <a:t>technician checking boiler flame</a:t>
+              <a:t>person filling paperwork office desk</a:t>
             </a:r>
           </a:p>
         </p:txBody>
@@ -6071,7 +6082,7 @@
                 </a:solidFill>
                 <a:latin typeface="Montserrat"/>
               </a:rPr>
-              <a:t>013 / 015</a:t>
+              <a:t>013 / 016</a:t>
             </a:r>
           </a:p>
         </p:txBody>
@@ -6139,7 +6150,7 @@
                 </a:solidFill>
                 <a:latin typeface="Montserrat"/>
               </a:rPr>
-              <a:t>ARTÍCULO 5 · NO LOS CONFUNDAS</a:t>
+              <a:t>ARTÍCULO 5.8 · PUESTA EN MARCHA</a:t>
             </a:r>
           </a:p>
         </p:txBody>
@@ -6173,7 +6184,7 @@
                 </a:solidFill>
                 <a:latin typeface="Montserrat"/>
               </a:rPr>
-              <a:t>Tres certificados, tres firmas</a:t>
+              <a:t>Arrancar el aparato, no solo encenderlo</a:t>
             </a:r>
           </a:p>
         </p:txBody>
@@ -6221,7 +6232,7 @@
                 </a:solidFill>
                 <a:latin typeface="Montserrat"/>
               </a:rPr>
-              <a:t>Instalación: la empresa que ejecutó</a:t>
+              <a:t>Según la ITC-ICG 08</a:t>
             </a:r>
           </a:p>
           <a:p>
@@ -6246,7 +6257,7 @@
                 </a:solidFill>
                 <a:latin typeface="Montserrat"/>
               </a:rPr>
-              <a:t>Dirección de obra: el director (si hay proyecto)</a:t>
+              <a:t>Verifica gas, presión y combustión</a:t>
             </a:r>
           </a:p>
           <a:p>
@@ -6271,39 +6282,14 @@
                 </a:solidFill>
                 <a:latin typeface="Montserrat"/>
               </a:rPr>
-              <a:t>Puesta en marcha: el agente (ICG 08)</a:t>
-            </a:r>
-          </a:p>
-          <a:p>
-            <a:pPr>
-              <a:spcAft>
-                <a:spcPts val="1000"/>
-              </a:spcAft>
-            </a:pPr>
-            <a:r>
-              <a:rPr sz="1600" b="1" i="0">
-                <a:solidFill>
-                  <a:srgbClr val="2E3A80"/>
-                </a:solidFill>
-                <a:latin typeface="Montserrat"/>
-              </a:rPr>
-              <a:t>•  </a:t>
-            </a:r>
-            <a:r>
-              <a:rPr sz="1600" b="0" i="0">
-                <a:solidFill>
-                  <a:srgbClr val="1B2330"/>
-                </a:solidFill>
-                <a:latin typeface="Montserrat"/>
-              </a:rPr>
-              <a:t>Cada uno lo firma alguien distinto</a:t>
-            </a:r>
-          </a:p>
-        </p:txBody>
-      </p:sp>
-      <p:sp>
-        <p:nvSpPr>
-          <p:cNvPr id="8" name="imgph" descr="IMGQ:three documents stack signatures"/>
+              <a:t>Certificado que se entrega al usuario</a:t>
+            </a:r>
+          </a:p>
+        </p:txBody>
+      </p:sp>
+      <p:sp>
+        <p:nvSpPr>
+          <p:cNvPr id="8" name="imgph" descr="IMGQ:technician adjusting gas boiler"/>
           <p:cNvSpPr/>
           <p:nvPr/>
         </p:nvSpPr>
@@ -6389,7 +6375,7 @@
                 </a:solidFill>
                 <a:latin typeface="Montserrat"/>
               </a:rPr>
-              <a:t>three documents stack signatures</a:t>
+              <a:t>technician adjusting gas boiler</a:t>
             </a:r>
           </a:p>
         </p:txBody>
@@ -6486,7 +6472,7 @@
                 </a:solidFill>
                 <a:latin typeface="Montserrat"/>
               </a:rPr>
-              <a:t>014 / 015</a:t>
+              <a:t>014 / 016</a:t>
             </a:r>
           </a:p>
         </p:txBody>
@@ -6554,7 +6540,7 @@
                 </a:solidFill>
                 <a:latin typeface="Montserrat"/>
               </a:rPr>
-              <a:t>ARTÍCULO 6 · INFORMACIÓN A USUARIOS</a:t>
+              <a:t>ARTÍCULO 6 · INFORMACIÓN AL USUARIO</a:t>
             </a:r>
           </a:p>
         </p:txBody>
@@ -6588,7 +6574,7 @@
                 </a:solidFill>
                 <a:latin typeface="Montserrat"/>
               </a:rPr>
-              <a:t>Lo que recibe el cliente</a:t>
+              <a:t>El croquis y el recordatorio bienal</a:t>
             </a:r>
           </a:p>
         </p:txBody>
@@ -6661,7 +6647,7 @@
                 </a:solidFill>
                 <a:latin typeface="Montserrat"/>
               </a:rPr>
-              <a:t>Croquis del trazado obligatorio</a:t>
+              <a:t>Croquis del trazado, anexo al boletín</a:t>
             </a:r>
           </a:p>
           <a:p>
@@ -6686,39 +6672,14 @@
                 </a:solidFill>
                 <a:latin typeface="Montserrat"/>
               </a:rPr>
-              <a:t>Anexo al certificado de instalación</a:t>
-            </a:r>
-          </a:p>
-          <a:p>
-            <a:pPr>
-              <a:spcAft>
-                <a:spcPts val="1000"/>
-              </a:spcAft>
-            </a:pPr>
-            <a:r>
-              <a:rPr sz="1600" b="1" i="0">
-                <a:solidFill>
-                  <a:srgbClr val="2E3A80"/>
-                </a:solidFill>
-                <a:latin typeface="Montserrat"/>
-              </a:rPr>
-              <a:t>•  </a:t>
-            </a:r>
-            <a:r>
-              <a:rPr sz="1600" b="0" i="0">
-                <a:solidFill>
-                  <a:srgbClr val="1B2330"/>
-                </a:solidFill>
-                <a:latin typeface="Montserrat"/>
-              </a:rPr>
-              <a:t>Suministrador: recordatorio bienal</a:t>
-            </a:r>
-          </a:p>
-        </p:txBody>
-      </p:sp>
-      <p:sp>
-        <p:nvSpPr>
-          <p:cNvPr id="8" name="imgph" descr="IMGQ:hand drawn pipe layout sketch"/>
+              <a:t>Suministrador recuerda, mínimo cada dos años</a:t>
+            </a:r>
+          </a:p>
+        </p:txBody>
+      </p:sp>
+      <p:sp>
+        <p:nvSpPr>
+          <p:cNvPr id="8" name="imgph" descr="IMGQ:hand drawn house pipe sketch plan"/>
           <p:cNvSpPr/>
           <p:nvPr/>
         </p:nvSpPr>
@@ -6804,7 +6765,7 @@
                 </a:solidFill>
                 <a:latin typeface="Montserrat"/>
               </a:rPr>
-              <a:t>hand drawn pipe layout sketch</a:t>
+              <a:t>hand drawn house pipe sketch plan</a:t>
             </a:r>
           </a:p>
         </p:txBody>
@@ -6901,7 +6862,7 @@
                 </a:solidFill>
                 <a:latin typeface="Montserrat"/>
               </a:rPr>
-              <a:t>015 / 015</a:t>
+              <a:t>015 / 016</a:t>
             </a:r>
           </a:p>
         </p:txBody>
@@ -6948,8 +6909,8 @@
         </p:nvSpPr>
         <p:spPr>
           <a:xfrm>
-            <a:off x="822960" y="640080"/>
-            <a:ext cx="10058400" cy="914400"/>
+            <a:off x="822960" y="457200"/>
+            <a:ext cx="8229600" cy="365760"/>
           </a:xfrm>
           <a:prstGeom prst="rect">
             <a:avLst/>
@@ -6963,13 +6924,13 @@
           <a:lstStyle/>
           <a:p>
             <a:r>
-              <a:rPr sz="3000" b="1" i="0">
-                <a:solidFill>
-                  <a:srgbClr val="1E2761"/>
-                </a:solidFill>
-                <a:latin typeface="Montserrat"/>
-              </a:rPr>
-              <a:t>Qué me llevo</a:t>
+              <a:rPr sz="1200" b="1" i="0">
+                <a:solidFill>
+                  <a:srgbClr val="64748B"/>
+                </a:solidFill>
+                <a:latin typeface="Montserrat"/>
+              </a:rPr>
+              <a:t>REPASO RELÁMPAGO</a:t>
             </a:r>
           </a:p>
         </p:txBody>
@@ -6982,8 +6943,8 @@
         </p:nvSpPr>
         <p:spPr>
           <a:xfrm>
-            <a:off x="822960" y="2011680"/>
-            <a:ext cx="10058400" cy="3657600"/>
+            <a:off x="822960" y="868680"/>
+            <a:ext cx="10515600" cy="914400"/>
           </a:xfrm>
           <a:prstGeom prst="rect">
             <a:avLst/>
@@ -6996,78 +6957,561 @@
           </a:bodyPr>
           <a:lstStyle/>
           <a:p>
+            <a:r>
+              <a:rPr sz="2700" b="1" i="0">
+                <a:solidFill>
+                  <a:srgbClr val="1E2761"/>
+                </a:solidFill>
+                <a:latin typeface="Montserrat"/>
+              </a:rPr>
+              <a:t>Fíjalo en treinta segundos</a:t>
+            </a:r>
+          </a:p>
+        </p:txBody>
+      </p:sp>
+      <p:sp>
+        <p:nvSpPr>
+          <p:cNvPr id="7" name="TextBox 6"/>
+          <p:cNvSpPr txBox="1"/>
+          <p:nvPr/>
+        </p:nvSpPr>
+        <p:spPr>
+          <a:xfrm>
+            <a:off x="822960" y="1920240"/>
+            <a:ext cx="4983480" cy="4206240"/>
+          </a:xfrm>
+          <a:prstGeom prst="rect">
+            <a:avLst/>
+          </a:prstGeom>
+          <a:noFill/>
+        </p:spPr>
+        <p:txBody>
+          <a:bodyPr wrap="square">
+            <a:spAutoFit/>
+          </a:bodyPr>
+          <a:lstStyle/>
+          <a:p>
             <a:pPr>
               <a:spcAft>
-                <a:spcPts val="1400"/>
+                <a:spcPts val="1000"/>
               </a:spcAft>
             </a:pPr>
             <a:r>
-              <a:rPr sz="2000" b="1" i="0">
+              <a:rPr sz="1600" b="1" i="0">
                 <a:solidFill>
                   <a:srgbClr val="2E3A80"/>
                 </a:solidFill>
                 <a:latin typeface="Montserrat"/>
               </a:rPr>
-              <a:t>✓  </a:t>
-            </a:r>
-            <a:r>
-              <a:rPr sz="2000" b="0" i="0">
+              <a:t>•  </a:t>
+            </a:r>
+            <a:r>
+              <a:rPr sz="1600" b="0" i="0">
                 <a:solidFill>
                   <a:srgbClr val="1B2330"/>
                 </a:solidFill>
                 <a:latin typeface="Montserrat"/>
               </a:rPr>
-              <a:t>El itinerario: diseño → … → puesta en marcha</a:t>
+              <a:t>Ocho pasos: del diseño al arranque</a:t>
             </a:r>
           </a:p>
           <a:p>
             <a:pPr>
               <a:spcAft>
-                <a:spcPts val="1400"/>
+                <a:spcPts val="1000"/>
               </a:spcAft>
             </a:pPr>
             <a:r>
-              <a:rPr sz="2000" b="1" i="0">
+              <a:rPr sz="1600" b="1" i="0">
                 <a:solidFill>
                   <a:srgbClr val="2E3A80"/>
                 </a:solidFill>
                 <a:latin typeface="Montserrat"/>
               </a:rPr>
-              <a:t>✓  </a:t>
-            </a:r>
-            <a:r>
-              <a:rPr sz="2000" b="0" i="0">
+              <a:t>•  </a:t>
+            </a:r>
+            <a:r>
+              <a:rPr sz="1600" b="0" i="0">
                 <a:solidFill>
                   <a:srgbClr val="1B2330"/>
                 </a:solidFill>
                 <a:latin typeface="Montserrat"/>
               </a:rPr>
-              <a:t>El boletín manda: sin él no hay gas</a:t>
+              <a:t>Boletín siempre; los otros dos, a veces</a:t>
             </a:r>
           </a:p>
           <a:p>
             <a:pPr>
               <a:spcAft>
-                <a:spcPts val="1400"/>
+                <a:spcPts val="1000"/>
               </a:spcAft>
             </a:pPr>
             <a:r>
+              <a:rPr sz="1600" b="1" i="0">
+                <a:solidFill>
+                  <a:srgbClr val="2E3A80"/>
+                </a:solidFill>
+                <a:latin typeface="Montserrat"/>
+              </a:rPr>
+              <a:t>•  </a:t>
+            </a:r>
+            <a:r>
+              <a:rPr sz="1600" b="0" i="0">
+                <a:solidFill>
+                  <a:srgbClr val="1B2330"/>
+                </a:solidFill>
+                <a:latin typeface="Montserrat"/>
+              </a:rPr>
+              <a:t>Titular comunica en 30 días</a:t>
+            </a:r>
+          </a:p>
+          <a:p>
+            <a:pPr>
+              <a:spcAft>
+                <a:spcPts val="1000"/>
+              </a:spcAft>
+            </a:pPr>
+            <a:r>
+              <a:rPr sz="1600" b="1" i="0">
+                <a:solidFill>
+                  <a:srgbClr val="2E3A80"/>
+                </a:solidFill>
+                <a:latin typeface="Montserrat"/>
+              </a:rPr>
+              <a:t>•  </a:t>
+            </a:r>
+            <a:r>
+              <a:rPr sz="1600" b="0" i="0">
+                <a:solidFill>
+                  <a:srgbClr val="1B2330"/>
+                </a:solidFill>
+                <a:latin typeface="Montserrat"/>
+              </a:rPr>
+              <a:t>Parada +1 año = como nueva</a:t>
+            </a:r>
+          </a:p>
+        </p:txBody>
+      </p:sp>
+      <p:sp>
+        <p:nvSpPr>
+          <p:cNvPr id="8" name="imgph" descr="IMGQ:gas installation checklist clipboard"/>
+          <p:cNvSpPr/>
+          <p:nvPr/>
+        </p:nvSpPr>
+        <p:spPr>
+          <a:xfrm>
+            <a:off x="5806440" y="1051560"/>
+            <a:ext cx="5298947" cy="4629150"/>
+          </a:xfrm>
+          <a:prstGeom prst="roundRect">
+            <a:avLst/>
+          </a:prstGeom>
+          <a:solidFill>
+            <a:srgbClr val="F3F6FB"/>
+          </a:solidFill>
+          <a:ln w="12700">
+            <a:solidFill>
+              <a:srgbClr val="C7D2E6"/>
+            </a:solidFill>
+          </a:ln>
+          <a:effectLst/>
+        </p:spPr>
+        <p:style>
+          <a:lnRef idx="1">
+            <a:schemeClr val="accent1"/>
+          </a:lnRef>
+          <a:fillRef idx="3">
+            <a:schemeClr val="accent1"/>
+          </a:fillRef>
+          <a:effectRef idx="2">
+            <a:schemeClr val="accent1"/>
+          </a:effectRef>
+          <a:fontRef idx="minor">
+            <a:schemeClr val="lt1"/>
+          </a:fontRef>
+        </p:style>
+        <p:txBody>
+          <a:bodyPr rtlCol="0" anchor="ctr"/>
+          <a:lstStyle/>
+          <a:p>
+            <a:pPr algn="ctr"/>
+          </a:p>
+        </p:txBody>
+      </p:sp>
+      <p:sp>
+        <p:nvSpPr>
+          <p:cNvPr id="9" name="TextBox 8"/>
+          <p:cNvSpPr txBox="1"/>
+          <p:nvPr/>
+        </p:nvSpPr>
+        <p:spPr>
+          <a:xfrm>
+            <a:off x="6080760" y="2726055"/>
+            <a:ext cx="4750307" cy="1280160"/>
+          </a:xfrm>
+          <a:prstGeom prst="rect">
+            <a:avLst/>
+          </a:prstGeom>
+          <a:noFill/>
+        </p:spPr>
+        <p:txBody>
+          <a:bodyPr wrap="square">
+            <a:spAutoFit/>
+          </a:bodyPr>
+          <a:lstStyle/>
+          <a:p>
+            <a:pPr algn="ctr"/>
+            <a:r>
+              <a:rPr sz="1400" b="1" i="0">
+                <a:solidFill>
+                  <a:srgbClr val="64748B"/>
+                </a:solidFill>
+                <a:latin typeface="Montserrat"/>
+              </a:rPr>
+              <a:t>IMAGEN REALISTA</a:t>
+            </a:r>
+          </a:p>
+          <a:p>
+            <a:pPr algn="ctr"/>
+            <a:r>
+              <a:rPr sz="1100" b="0" i="1">
+                <a:solidFill>
+                  <a:srgbClr val="64748B"/>
+                </a:solidFill>
+                <a:latin typeface="Montserrat"/>
+              </a:rPr>
+              <a:t>gas installation checklist clipboard</a:t>
+            </a:r>
+          </a:p>
+        </p:txBody>
+      </p:sp>
+    </p:spTree>
+  </p:cSld>
+  <p:clrMapOvr>
+    <a:masterClrMapping/>
+  </p:clrMapOvr>
+</p:sld>
+</file>
+
+<file path=ppt/slides/slide16.xml><?xml version="1.0" encoding="utf-8"?>
+<p:sld xmlns:a="http://schemas.openxmlformats.org/drawingml/2006/main" xmlns:p="http://schemas.openxmlformats.org/presentationml/2006/main" xmlns:r="http://schemas.openxmlformats.org/officeDocument/2006/relationships">
+  <p:cSld>
+    <p:spTree>
+      <p:nvGrpSpPr>
+        <p:cNvPr id="1" name=""/>
+        <p:cNvGrpSpPr/>
+        <p:nvPr/>
+      </p:nvGrpSpPr>
+      <p:grpSpPr/>
+      <p:sp>
+        <p:nvSpPr>
+          <p:cNvPr id="2" name="Rectangle 1"/>
+          <p:cNvSpPr/>
+          <p:nvPr/>
+        </p:nvSpPr>
+        <p:spPr>
+          <a:xfrm>
+            <a:off x="0" y="0"/>
+            <a:ext cx="12191695" cy="6858000"/>
+          </a:xfrm>
+          <a:prstGeom prst="rect">
+            <a:avLst/>
+          </a:prstGeom>
+          <a:solidFill>
+            <a:srgbClr val="1E2761"/>
+          </a:solidFill>
+          <a:ln>
+            <a:noFill/>
+          </a:ln>
+          <a:effectLst/>
+        </p:spPr>
+        <p:style>
+          <a:lnRef idx="1">
+            <a:schemeClr val="accent1"/>
+          </a:lnRef>
+          <a:fillRef idx="3">
+            <a:schemeClr val="accent1"/>
+          </a:fillRef>
+          <a:effectRef idx="2">
+            <a:schemeClr val="accent1"/>
+          </a:effectRef>
+          <a:fontRef idx="minor">
+            <a:schemeClr val="lt1"/>
+          </a:fontRef>
+        </p:style>
+        <p:txBody>
+          <a:bodyPr rtlCol="0" anchor="ctr"/>
+          <a:lstStyle/>
+          <a:p>
+            <a:pPr algn="ctr"/>
+          </a:p>
+        </p:txBody>
+      </p:sp>
+      <p:sp>
+        <p:nvSpPr>
+          <p:cNvPr id="3" name="TextBox 2"/>
+          <p:cNvSpPr txBox="1"/>
+          <p:nvPr/>
+        </p:nvSpPr>
+        <p:spPr>
+          <a:xfrm>
+            <a:off x="822960" y="640080"/>
+            <a:ext cx="10515600" cy="457200"/>
+          </a:xfrm>
+          <a:prstGeom prst="rect">
+            <a:avLst/>
+          </a:prstGeom>
+          <a:noFill/>
+        </p:spPr>
+        <p:txBody>
+          <a:bodyPr wrap="square">
+            <a:spAutoFit/>
+          </a:bodyPr>
+          <a:lstStyle/>
+          <a:p>
+            <a:r>
+              <a:rPr sz="1400" b="1" i="0">
+                <a:solidFill>
+                  <a:srgbClr val="CADCFC"/>
+                </a:solidFill>
+                <a:latin typeface="Montserrat"/>
+              </a:rPr>
+              <a:t>LO QUE YA DOMINAS</a:t>
+            </a:r>
+          </a:p>
+        </p:txBody>
+      </p:sp>
+      <p:sp>
+        <p:nvSpPr>
+          <p:cNvPr id="4" name="TextBox 3"/>
+          <p:cNvSpPr txBox="1"/>
+          <p:nvPr/>
+        </p:nvSpPr>
+        <p:spPr>
+          <a:xfrm>
+            <a:off x="822960" y="1143000"/>
+            <a:ext cx="10515600" cy="1097280"/>
+          </a:xfrm>
+          <a:prstGeom prst="rect">
+            <a:avLst/>
+          </a:prstGeom>
+          <a:noFill/>
+        </p:spPr>
+        <p:txBody>
+          <a:bodyPr wrap="square">
+            <a:spAutoFit/>
+          </a:bodyPr>
+          <a:lstStyle/>
+          <a:p>
+            <a:r>
+              <a:rPr sz="3400" b="1" i="0">
+                <a:solidFill>
+                  <a:srgbClr val="FFFFFF"/>
+                </a:solidFill>
+                <a:latin typeface="Montserrat"/>
+              </a:rPr>
+              <a:t>Ya llevas una instalación de cero a gas</a:t>
+            </a:r>
+          </a:p>
+        </p:txBody>
+      </p:sp>
+      <p:sp>
+        <p:nvSpPr>
+          <p:cNvPr id="5" name="TextBox 4"/>
+          <p:cNvSpPr txBox="1"/>
+          <p:nvPr/>
+        </p:nvSpPr>
+        <p:spPr>
+          <a:xfrm>
+            <a:off x="822960" y="2514600"/>
+            <a:ext cx="10515600" cy="2834640"/>
+          </a:xfrm>
+          <a:prstGeom prst="rect">
+            <a:avLst/>
+          </a:prstGeom>
+          <a:noFill/>
+        </p:spPr>
+        <p:txBody>
+          <a:bodyPr wrap="square">
+            <a:spAutoFit/>
+          </a:bodyPr>
+          <a:lstStyle/>
+          <a:p>
+            <a:pPr>
+              <a:spcAft>
+                <a:spcPts val="1200"/>
+              </a:spcAft>
+            </a:pPr>
+            <a:r>
               <a:rPr sz="2000" b="1" i="0">
                 <a:solidFill>
-                  <a:srgbClr val="2E3A80"/>
+                  <a:srgbClr val="CADCFC"/>
                 </a:solidFill>
                 <a:latin typeface="Montserrat"/>
               </a:rPr>
               <a:t>✓  </a:t>
             </a:r>
             <a:r>
-              <a:rPr sz="2000" b="0" i="0">
-                <a:solidFill>
-                  <a:srgbClr val="1B2330"/>
-                </a:solidFill>
-                <a:latin typeface="Montserrat"/>
-              </a:rPr>
-              <a:t>La regla del año y los 30 días</a:t>
+              <a:rPr sz="1900" b="0" i="0">
+                <a:solidFill>
+                  <a:srgbClr val="FFFFFF"/>
+                </a:solidFill>
+                <a:latin typeface="Montserrat"/>
+              </a:rPr>
+              <a:t>Recorres los ocho pasos sin saltarte ninguno</a:t>
+            </a:r>
+          </a:p>
+          <a:p>
+            <a:pPr>
+              <a:spcAft>
+                <a:spcPts val="1200"/>
+              </a:spcAft>
+            </a:pPr>
+            <a:r>
+              <a:rPr sz="2000" b="1" i="0">
+                <a:solidFill>
+                  <a:srgbClr val="CADCFC"/>
+                </a:solidFill>
+                <a:latin typeface="Montserrat"/>
+              </a:rPr>
+              <a:t>✓  </a:t>
+            </a:r>
+            <a:r>
+              <a:rPr sz="1900" b="0" i="0">
+                <a:solidFill>
+                  <a:srgbClr val="FFFFFF"/>
+                </a:solidFill>
+                <a:latin typeface="Montserrat"/>
+              </a:rPr>
+              <a:t>Sabes qué certificado firma cada quién</a:t>
+            </a:r>
+          </a:p>
+          <a:p>
+            <a:pPr>
+              <a:spcAft>
+                <a:spcPts val="1200"/>
+              </a:spcAft>
+            </a:pPr>
+            <a:r>
+              <a:rPr sz="2000" b="1" i="0">
+                <a:solidFill>
+                  <a:srgbClr val="CADCFC"/>
+                </a:solidFill>
+                <a:latin typeface="Montserrat"/>
+              </a:rPr>
+              <a:t>✓  </a:t>
+            </a:r>
+            <a:r>
+              <a:rPr sz="1900" b="0" i="0">
+                <a:solidFill>
+                  <a:srgbClr val="FFFFFF"/>
+                </a:solidFill>
+                <a:latin typeface="Montserrat"/>
+              </a:rPr>
+              <a:t>Distingues prueba de inspección al vuelo</a:t>
+            </a:r>
+          </a:p>
+          <a:p>
+            <a:pPr>
+              <a:spcAft>
+                <a:spcPts val="1200"/>
+              </a:spcAft>
+            </a:pPr>
+            <a:r>
+              <a:rPr sz="2000" b="1" i="0">
+                <a:solidFill>
+                  <a:srgbClr val="CADCFC"/>
+                </a:solidFill>
+                <a:latin typeface="Montserrat"/>
+              </a:rPr>
+              <a:t>✓  </a:t>
+            </a:r>
+            <a:r>
+              <a:rPr sz="1900" b="0" i="0">
+                <a:solidFill>
+                  <a:srgbClr val="FFFFFF"/>
+                </a:solidFill>
+                <a:latin typeface="Montserrat"/>
+              </a:rPr>
+              <a:t>La regla del año ya no se te escapa</a:t>
+            </a:r>
+          </a:p>
+        </p:txBody>
+      </p:sp>
+      <p:sp>
+        <p:nvSpPr>
+          <p:cNvPr id="6" name="Rounded Rectangle 5"/>
+          <p:cNvSpPr/>
+          <p:nvPr/>
+        </p:nvSpPr>
+        <p:spPr>
+          <a:xfrm>
+            <a:off x="822960" y="5532120"/>
+            <a:ext cx="10515600" cy="777240"/>
+          </a:xfrm>
+          <a:prstGeom prst="roundRect">
+            <a:avLst/>
+          </a:prstGeom>
+          <a:solidFill>
+            <a:srgbClr val="2E3A80"/>
+          </a:solidFill>
+          <a:ln>
+            <a:noFill/>
+          </a:ln>
+          <a:effectLst/>
+        </p:spPr>
+        <p:style>
+          <a:lnRef idx="1">
+            <a:schemeClr val="accent1"/>
+          </a:lnRef>
+          <a:fillRef idx="3">
+            <a:schemeClr val="accent1"/>
+          </a:fillRef>
+          <a:effectRef idx="2">
+            <a:schemeClr val="accent1"/>
+          </a:effectRef>
+          <a:fontRef idx="minor">
+            <a:schemeClr val="lt1"/>
+          </a:fontRef>
+        </p:style>
+        <p:txBody>
+          <a:bodyPr rtlCol="0" anchor="ctr"/>
+          <a:lstStyle/>
+          <a:p>
+            <a:pPr algn="ctr"/>
+          </a:p>
+        </p:txBody>
+      </p:sp>
+      <p:sp>
+        <p:nvSpPr>
+          <p:cNvPr id="7" name="TextBox 6"/>
+          <p:cNvSpPr txBox="1"/>
+          <p:nvPr/>
+        </p:nvSpPr>
+        <p:spPr>
+          <a:xfrm>
+            <a:off x="1051560" y="5605272"/>
+            <a:ext cx="10058400" cy="640080"/>
+          </a:xfrm>
+          <a:prstGeom prst="rect">
+            <a:avLst/>
+          </a:prstGeom>
+          <a:noFill/>
+        </p:spPr>
+        <p:txBody>
+          <a:bodyPr wrap="square">
+            <a:spAutoFit/>
+          </a:bodyPr>
+          <a:lstStyle/>
+          <a:p>
+            <a:r>
+              <a:rPr sz="1500" b="1" i="1">
+                <a:solidFill>
+                  <a:srgbClr val="CADCFC"/>
+                </a:solidFill>
+                <a:latin typeface="Montserrat"/>
+              </a:rPr>
+              <a:t>Firmar es responsabilizarse, y hoy ya sabes de qué respondes. Nos vemos en el cierre del tema.</a:t>
             </a:r>
           </a:p>
         </p:txBody>
@@ -7164,7 +7608,7 @@
                 </a:solidFill>
                 <a:latin typeface="Montserrat"/>
               </a:rPr>
-              <a:t>002 / 015</a:t>
+              <a:t>002 / 016</a:t>
             </a:r>
           </a:p>
         </p:txBody>
@@ -7429,7 +7873,7 @@
                 </a:solidFill>
                 <a:latin typeface="Montserrat"/>
               </a:rPr>
-              <a:t>3</a:t>
+              <a:t>30</a:t>
             </a:r>
           </a:p>
         </p:txBody>
@@ -7464,7 +7908,7 @@
                 </a:solidFill>
                 <a:latin typeface="Montserrat"/>
               </a:rPr>
-              <a:t>certificados de arranque</a:t>
+              <a:t>días para comunicar (titular)</a:t>
             </a:r>
           </a:p>
         </p:txBody>
@@ -7545,7 +7989,7 @@
                 </a:solidFill>
                 <a:latin typeface="Montserrat"/>
               </a:rPr>
-              <a:t>30</a:t>
+              <a:t>3</a:t>
             </a:r>
           </a:p>
         </p:txBody>
@@ -7580,7 +8024,7 @@
                 </a:solidFill>
                 <a:latin typeface="Montserrat"/>
               </a:rPr>
-              <a:t>días para comunicar</a:t>
+              <a:t>certificados de arranque</a:t>
             </a:r>
           </a:p>
         </p:txBody>
@@ -7677,7 +8121,7 @@
                 </a:solidFill>
                 <a:latin typeface="Montserrat"/>
               </a:rPr>
-              <a:t>003 / 015</a:t>
+              <a:t>003 / 016</a:t>
             </a:r>
           </a:p>
         </p:txBody>
@@ -7745,7 +8189,7 @@
                 </a:solidFill>
                 <a:latin typeface="Montserrat"/>
               </a:rPr>
-              <a:t>ARTÍCULO 4 · MATERIALES Y APARATOS</a:t>
+              <a:t>ARTÍCULO 4 · MATERIALES</a:t>
             </a:r>
           </a:p>
         </p:txBody>
@@ -7827,7 +8271,7 @@
                 </a:solidFill>
                 <a:latin typeface="Montserrat"/>
               </a:rPr>
-              <a:t>Cumplen directivas europeas o el Reglamento</a:t>
+              <a:t>Marcado visible e indeleble</a:t>
             </a:r>
           </a:p>
           <a:p>
@@ -7852,7 +8296,7 @@
                 </a:solidFill>
                 <a:latin typeface="Montserrat"/>
               </a:rPr>
-              <a:t>Marcado visible e indeleble</a:t>
+              <a:t>Fabricante, marca y modelo</a:t>
             </a:r>
           </a:p>
           <a:p>
@@ -7877,39 +8321,14 @@
                 </a:solidFill>
                 <a:latin typeface="Montserrat"/>
               </a:rPr>
-              <a:t>Fabricante, marca y modelo</a:t>
-            </a:r>
-          </a:p>
-          <a:p>
-            <a:pPr>
-              <a:spcAft>
-                <a:spcPts val="1000"/>
-              </a:spcAft>
-            </a:pPr>
-            <a:r>
-              <a:rPr sz="1600" b="1" i="0">
-                <a:solidFill>
-                  <a:srgbClr val="2E3A80"/>
-                </a:solidFill>
-                <a:latin typeface="Montserrat"/>
-              </a:rPr>
-              <a:t>•  </a:t>
-            </a:r>
-            <a:r>
-              <a:rPr sz="1600" b="0" i="0">
-                <a:solidFill>
-                  <a:srgbClr val="1B2330"/>
-                </a:solidFill>
-                <a:latin typeface="Montserrat"/>
-              </a:rPr>
-              <a:t>Instrucciones al menos en castellano</a:t>
-            </a:r>
-          </a:p>
-        </p:txBody>
-      </p:sp>
-      <p:sp>
-        <p:nvSpPr>
-          <p:cNvPr id="8" name="imgph" descr="IMGQ:copper pipe fittings label marking"/>
+              <a:t>Certificados y marcas de conformidad</a:t>
+            </a:r>
+          </a:p>
+        </p:txBody>
+      </p:sp>
+      <p:sp>
+        <p:nvSpPr>
+          <p:cNvPr id="8" name="imgph" descr="IMGQ:gas valve stamped marking metal"/>
           <p:cNvSpPr/>
           <p:nvPr/>
         </p:nvSpPr>
@@ -7995,7 +8414,7 @@
                 </a:solidFill>
                 <a:latin typeface="Montserrat"/>
               </a:rPr>
-              <a:t>copper pipe fittings label marking</a:t>
+              <a:t>gas valve stamped marking metal</a:t>
             </a:r>
           </a:p>
         </p:txBody>
@@ -8092,7 +8511,7 @@
                 </a:solidFill>
                 <a:latin typeface="Montserrat"/>
               </a:rPr>
-              <a:t>004 / 015</a:t>
+              <a:t>004 / 016</a:t>
             </a:r>
           </a:p>
         </p:txBody>
@@ -8160,7 +8579,7 @@
                 </a:solidFill>
                 <a:latin typeface="Montserrat"/>
               </a:rPr>
-              <a:t>ARTÍCULO 5 · PUESTA EN SERVICIO</a:t>
+              <a:t>ARTÍCULO 4 · INSTRUCCIONES</a:t>
             </a:r>
           </a:p>
         </p:txBody>
@@ -8194,7 +8613,7 @@
                 </a:solidFill>
                 <a:latin typeface="Montserrat"/>
               </a:rPr>
-              <a:t>La película, en ocho capítulos</a:t>
+              <a:t>Al menos en castellano</a:t>
             </a:r>
           </a:p>
         </p:txBody>
@@ -8242,7 +8661,7 @@
                 </a:solidFill>
                 <a:latin typeface="Montserrat"/>
               </a:rPr>
-              <a:t>Diseño → autorización → ejecución</a:t>
+              <a:t>Instrucciones mínimo en castellano</a:t>
             </a:r>
           </a:p>
           <a:p>
@@ -8267,7 +8686,7 @@
                 </a:solidFill>
                 <a:latin typeface="Montserrat"/>
               </a:rPr>
-              <a:t>Pruebas → certificados → puesta en servicio</a:t>
+              <a:t>Otros idiomas: permitidos como extra</a:t>
             </a:r>
           </a:p>
           <a:p>
@@ -8292,39 +8711,14 @@
                 </a:solidFill>
                 <a:latin typeface="Montserrat"/>
               </a:rPr>
-              <a:t>Comunicación → puesta en marcha</a:t>
-            </a:r>
-          </a:p>
-          <a:p>
-            <a:pPr>
-              <a:spcAft>
-                <a:spcPts val="1000"/>
-              </a:spcAft>
-            </a:pPr>
-            <a:r>
-              <a:rPr sz="1600" b="1" i="0">
-                <a:solidFill>
-                  <a:srgbClr val="2E3A80"/>
-                </a:solidFill>
-                <a:latin typeface="Montserrat"/>
-              </a:rPr>
-              <a:t>•  </a:t>
-            </a:r>
-            <a:r>
-              <a:rPr sz="1600" b="0" i="0">
-                <a:solidFill>
-                  <a:srgbClr val="1B2330"/>
-                </a:solidFill>
-                <a:latin typeface="Montserrat"/>
-              </a:rPr>
-              <a:t>Siempre en este orden</a:t>
-            </a:r>
-          </a:p>
-        </p:txBody>
-      </p:sp>
-      <p:sp>
-        <p:nvSpPr>
-          <p:cNvPr id="8" name="imgph" descr="IMGQ:gas installation checklist clipboard"/>
+              <a:t>Indicaciones para el uso específico</a:t>
+            </a:r>
+          </a:p>
+        </p:txBody>
+      </p:sp>
+      <p:sp>
+        <p:nvSpPr>
+          <p:cNvPr id="8" name="imgph" descr="IMGQ:appliance instruction manual booklet"/>
           <p:cNvSpPr/>
           <p:nvPr/>
         </p:nvSpPr>
@@ -8410,7 +8804,7 @@
                 </a:solidFill>
                 <a:latin typeface="Montserrat"/>
               </a:rPr>
-              <a:t>gas installation checklist clipboard</a:t>
+              <a:t>appliance instruction manual booklet</a:t>
             </a:r>
           </a:p>
         </p:txBody>
@@ -8507,7 +8901,7 @@
                 </a:solidFill>
                 <a:latin typeface="Montserrat"/>
               </a:rPr>
-              <a:t>005 / 015</a:t>
+              <a:t>005 / 016</a:t>
             </a:r>
           </a:p>
         </p:txBody>
@@ -8575,7 +8969,7 @@
                 </a:solidFill>
                 <a:latin typeface="Montserrat"/>
               </a:rPr>
-              <a:t>ARTÍCULO 5.1 · DISEÑO</a:t>
+              <a:t>ARTÍCULO 5 · PUESTA EN SERVICIO</a:t>
             </a:r>
           </a:p>
         </p:txBody>
@@ -8609,7 +9003,7 @@
                 </a:solidFill>
                 <a:latin typeface="Montserrat"/>
               </a:rPr>
-              <a:t>¿Proyecto o memoria técnica?</a:t>
+              <a:t>La película en ocho capítulos</a:t>
             </a:r>
           </a:p>
         </p:txBody>
@@ -8657,7 +9051,7 @@
                 </a:solidFill>
                 <a:latin typeface="Montserrat"/>
               </a:rPr>
-              <a:t>Proyecto: técnico facultativo competente</a:t>
+              <a:t>Diseño → autorización → ejecución</a:t>
             </a:r>
           </a:p>
           <a:p>
@@ -8682,7 +9076,7 @@
                 </a:solidFill>
                 <a:latin typeface="Montserrat"/>
               </a:rPr>
-              <a:t>Memoria técnica: la firma el instalador</a:t>
+              <a:t>Pruebas → certificados → puesta en servicio</a:t>
             </a:r>
           </a:p>
           <a:p>
@@ -8707,7 +9101,7 @@
                 </a:solidFill>
                 <a:latin typeface="Montserrat"/>
               </a:rPr>
-              <a:t>El tamaño lo marca cada ITC</a:t>
+              <a:t>Comunicación → puesta en marcha</a:t>
             </a:r>
           </a:p>
           <a:p>
@@ -8732,14 +9126,14 @@
                 </a:solidFill>
                 <a:latin typeface="Montserrat"/>
               </a:rPr>
-              <a:t>Quien firma, responde</a:t>
-            </a:r>
-          </a:p>
-        </p:txBody>
-      </p:sp>
-      <p:sp>
-        <p:nvSpPr>
-          <p:cNvPr id="8" name="imgph" descr="IMGQ:engineer reviewing technical drawings"/>
+              <a:t>En orden, sin saltarse pasos</a:t>
+            </a:r>
+          </a:p>
+        </p:txBody>
+      </p:sp>
+      <p:sp>
+        <p:nvSpPr>
+          <p:cNvPr id="8" name="imgph" descr="IMGQ:gas installation pipework new building"/>
           <p:cNvSpPr/>
           <p:nvPr/>
         </p:nvSpPr>
@@ -8825,7 +9219,7 @@
                 </a:solidFill>
                 <a:latin typeface="Montserrat"/>
               </a:rPr>
-              <a:t>engineer reviewing technical drawings</a:t>
+              <a:t>gas installation pipework new building</a:t>
             </a:r>
           </a:p>
         </p:txBody>
@@ -8922,7 +9316,7 @@
                 </a:solidFill>
                 <a:latin typeface="Montserrat"/>
               </a:rPr>
-              <a:t>006 / 015</a:t>
+              <a:t>006 / 016</a:t>
             </a:r>
           </a:p>
         </p:txBody>
@@ -8990,7 +9384,7 @@
                 </a:solidFill>
                 <a:latin typeface="Montserrat"/>
               </a:rPr>
-              <a:t>ARTÍCULO 5.2 · AUTORIZACIÓN</a:t>
+              <a:t>ARTÍCULO 5.1 · DISEÑO</a:t>
             </a:r>
           </a:p>
         </p:txBody>
@@ -9024,7 +9418,7 @@
                 </a:solidFill>
                 <a:latin typeface="Montserrat"/>
               </a:rPr>
-              <a:t>Autorización no es comunicación</a:t>
+              <a:t>¿Proyecto o memoria técnica?</a:t>
             </a:r>
           </a:p>
         </p:txBody>
@@ -9072,7 +9466,7 @@
                 </a:solidFill>
                 <a:latin typeface="Montserrat"/>
               </a:rPr>
-              <a:t>Autorización: solo si lo exige la ley</a:t>
+              <a:t>Proyecto: técnico facultativo competente</a:t>
             </a:r>
           </a:p>
           <a:p>
@@ -9097,7 +9491,7 @@
                 </a:solidFill>
                 <a:latin typeface="Montserrat"/>
               </a:rPr>
-              <a:t>Lo normal: hacer y comunicar después</a:t>
+              <a:t>Memoria técnica: puede firmarla el instalador</a:t>
             </a:r>
           </a:p>
           <a:p>
@@ -9122,14 +9516,14 @@
                 </a:solidFill>
                 <a:latin typeface="Montserrat"/>
               </a:rPr>
-              <a:t>No pedir permiso y esperar</a:t>
-            </a:r>
-          </a:p>
-        </p:txBody>
-      </p:sp>
-      <p:sp>
-        <p:nvSpPr>
-          <p:cNvPr id="8" name="imgph" descr="IMGQ:government office permit stamp"/>
+              <a:t>Quien firma es directamente responsable</a:t>
+            </a:r>
+          </a:p>
+        </p:txBody>
+      </p:sp>
+      <p:sp>
+        <p:nvSpPr>
+          <p:cNvPr id="8" name="imgph" descr="IMGQ:engineer reviewing technical drawings"/>
           <p:cNvSpPr/>
           <p:nvPr/>
         </p:nvSpPr>
@@ -9215,7 +9609,7 @@
                 </a:solidFill>
                 <a:latin typeface="Montserrat"/>
               </a:rPr>
-              <a:t>government office permit stamp</a:t>
+              <a:t>engineer reviewing technical drawings</a:t>
             </a:r>
           </a:p>
         </p:txBody>
@@ -9312,7 +9706,7 @@
                 </a:solidFill>
                 <a:latin typeface="Montserrat"/>
               </a:rPr>
-              <a:t>007 / 015</a:t>
+              <a:t>007 / 016</a:t>
             </a:r>
           </a:p>
         </p:txBody>
@@ -9380,7 +9774,7 @@
                 </a:solidFill>
                 <a:latin typeface="Montserrat"/>
               </a:rPr>
-              <a:t>ARTÍCULO 5.3 · EJECUCIÓN</a:t>
+              <a:t>ARTÍCULO 5.2 · AUTORIZACIÓN</a:t>
             </a:r>
           </a:p>
         </p:txBody>
@@ -9414,7 +9808,7 @@
                 </a:solidFill>
                 <a:latin typeface="Montserrat"/>
               </a:rPr>
-              <a:t>El montaje</a:t>
+              <a:t>Autorización no es comunicación</a:t>
             </a:r>
           </a:p>
         </p:txBody>
@@ -9462,7 +9856,7 @@
                 </a:solidFill>
                 <a:latin typeface="Montserrat"/>
               </a:rPr>
-              <a:t>La ejecutan las empresas que fije la ITC</a:t>
+              <a:t>Autorización: permiso previo, casos gordos</a:t>
             </a:r>
           </a:p>
           <a:p>
@@ -9487,7 +9881,7 @@
                 </a:solidFill>
                 <a:latin typeface="Montserrat"/>
               </a:rPr>
-              <a:t>Cuidado con otras energías</a:t>
+              <a:t>Solo si lo exige la ley</a:t>
             </a:r>
           </a:p>
           <a:p>
@@ -9512,14 +9906,14 @@
                 </a:solidFill>
                 <a:latin typeface="Montserrat"/>
               </a:rPr>
-              <a:t>Cruces y paralelismos: distancias mínimas</a:t>
-            </a:r>
-          </a:p>
-        </p:txBody>
-      </p:sp>
-      <p:sp>
-        <p:nvSpPr>
-          <p:cNvPr id="8" name="imgph" descr="IMGQ:plumber installing gas pipe wall"/>
+              <a:t>En Gas B lo normal: hacer y comunicar</a:t>
+            </a:r>
+          </a:p>
+        </p:txBody>
+      </p:sp>
+      <p:sp>
+        <p:nvSpPr>
+          <p:cNvPr id="8" name="imgph" descr="IMGQ:official government stamp document"/>
           <p:cNvSpPr/>
           <p:nvPr/>
         </p:nvSpPr>
@@ -9605,7 +9999,7 @@
                 </a:solidFill>
                 <a:latin typeface="Montserrat"/>
               </a:rPr>
-              <a:t>plumber installing gas pipe wall</a:t>
+              <a:t>official government stamp document</a:t>
             </a:r>
           </a:p>
         </p:txBody>
@@ -9702,7 +10096,7 @@
                 </a:solidFill>
                 <a:latin typeface="Montserrat"/>
               </a:rPr>
-              <a:t>008 / 015</a:t>
+              <a:t>008 / 016</a:t>
             </a:r>
           </a:p>
         </p:txBody>
@@ -9770,7 +10164,7 @@
                 </a:solidFill>
                 <a:latin typeface="Montserrat"/>
               </a:rPr>
-              <a:t>ARTÍCULO 5.4 · PRUEBAS E INSPECCIONES</a:t>
+              <a:t>ARTÍCULO 5.3 · EJECUCIÓN</a:t>
             </a:r>
           </a:p>
         </p:txBody>
@@ -9804,7 +10198,7 @@
                 </a:solidFill>
                 <a:latin typeface="Montserrat"/>
               </a:rPr>
-              <a:t>Prueba no es inspección</a:t>
+              <a:t>Cruces y paralelismos</a:t>
             </a:r>
           </a:p>
         </p:txBody>
@@ -9852,7 +10246,7 @@
                 </a:solidFill>
                 <a:latin typeface="Montserrat"/>
               </a:rPr>
-              <a:t>Prueba: la hace quien monta</a:t>
+              <a:t>Ejecutan las empresas que marque la ITC</a:t>
             </a:r>
           </a:p>
           <a:p>
@@ -9877,7 +10271,7 @@
                 </a:solidFill>
                 <a:latin typeface="Montserrat"/>
               </a:rPr>
-              <a:t>Estanquidad antes de meter gas</a:t>
+              <a:t>Distancias con luz, agua y saneamiento</a:t>
             </a:r>
           </a:p>
           <a:p>
@@ -9902,39 +10296,14 @@
                 </a:solidFill>
                 <a:latin typeface="Montserrat"/>
               </a:rPr>
-              <a:t>Inspección: un tercero independiente</a:t>
-            </a:r>
-          </a:p>
-          <a:p>
-            <a:pPr>
-              <a:spcAft>
-                <a:spcPts val="1000"/>
-              </a:spcAft>
-            </a:pPr>
-            <a:r>
-              <a:rPr sz="1600" b="1" i="0">
-                <a:solidFill>
-                  <a:srgbClr val="2E3A80"/>
-                </a:solidFill>
-                <a:latin typeface="Montserrat"/>
-              </a:rPr>
-              <a:t>•  </a:t>
-            </a:r>
-            <a:r>
-              <a:rPr sz="1600" b="0" i="0">
-                <a:solidFill>
-                  <a:srgbClr val="1B2330"/>
-                </a:solidFill>
-                <a:latin typeface="Montserrat"/>
-              </a:rPr>
-              <a:t>Solo si la ITC la pide</a:t>
-            </a:r>
-          </a:p>
-        </p:txBody>
-      </p:sp>
-      <p:sp>
-        <p:nvSpPr>
-          <p:cNvPr id="8" name="imgph" descr="IMGQ:pressure gauge testing gas pipe"/>
+              <a:t>El Reglamento lo enuncia; la UNE da los cm</a:t>
+            </a:r>
+          </a:p>
+        </p:txBody>
+      </p:sp>
+      <p:sp>
+        <p:nvSpPr>
+          <p:cNvPr id="8" name="imgph" descr="IMGQ:underground utility pipes trench"/>
           <p:cNvSpPr/>
           <p:nvPr/>
         </p:nvSpPr>
@@ -10020,7 +10389,7 @@
                 </a:solidFill>
                 <a:latin typeface="Montserrat"/>
               </a:rPr>
-              <a:t>pressure gauge testing gas pipe</a:t>
+              <a:t>underground utility pipes trench</a:t>
             </a:r>
           </a:p>
         </p:txBody>
@@ -10117,7 +10486,7 @@
                 </a:solidFill>
                 <a:latin typeface="Montserrat"/>
               </a:rPr>
-              <a:t>009 / 015</a:t>
+              <a:t>009 / 016</a:t>
             </a:r>
           </a:p>
         </p:txBody>
@@ -10185,7 +10554,7 @@
                 </a:solidFill>
                 <a:latin typeface="Montserrat"/>
               </a:rPr>
-              <a:t>ARTÍCULO 5.5 · CERTIFICADOS</a:t>
+              <a:t>ARTÍCULO 5.4 · PRUEBAS E INSPECCIONES</a:t>
             </a:r>
           </a:p>
         </p:txBody>
@@ -10219,7 +10588,7 @@
                 </a:solidFill>
                 <a:latin typeface="Montserrat"/>
               </a:rPr>
-              <a:t>El boletín manda</a:t>
+              <a:t>Prueba tuya, inspección de un tercero</a:t>
             </a:r>
           </a:p>
         </p:txBody>
@@ -10267,7 +10636,7 @@
                 </a:solidFill>
                 <a:latin typeface="Montserrat"/>
               </a:rPr>
-              <a:t>Instalación: SIEMPRE, lo firma quien ejecuta</a:t>
+              <a:t>Prueba: la hace quien monta</a:t>
             </a:r>
           </a:p>
           <a:p>
@@ -10292,7 +10661,7 @@
                 </a:solidFill>
                 <a:latin typeface="Montserrat"/>
               </a:rPr>
-              <a:t>Dirección de obra: solo si hubo proyecto</a:t>
+              <a:t>Estanquidad antes de meter gas</a:t>
             </a:r>
           </a:p>
           <a:p>
@@ -10317,39 +10686,14 @@
                 </a:solidFill>
                 <a:latin typeface="Montserrat"/>
               </a:rPr>
-              <a:t>Inspección: solo si la ITC lo exige</a:t>
-            </a:r>
-          </a:p>
-          <a:p>
-            <a:pPr>
-              <a:spcAft>
-                <a:spcPts val="1000"/>
-              </a:spcAft>
-            </a:pPr>
-            <a:r>
-              <a:rPr sz="1600" b="1" i="0">
-                <a:solidFill>
-                  <a:srgbClr val="2E3A80"/>
-                </a:solidFill>
-                <a:latin typeface="Montserrat"/>
-              </a:rPr>
-              <a:t>•  </a:t>
-            </a:r>
-            <a:r>
-              <a:rPr sz="1600" b="0" i="0">
-                <a:solidFill>
-                  <a:srgbClr val="1B2330"/>
-                </a:solidFill>
-                <a:latin typeface="Montserrat"/>
-              </a:rPr>
-              <a:t>Sin certificado no hay gas</a:t>
-            </a:r>
-          </a:p>
-        </p:txBody>
-      </p:sp>
-      <p:sp>
-        <p:nvSpPr>
-          <p:cNvPr id="8" name="imgph" descr="IMGQ:signing installation certificate document"/>
+              <a:t>Inspección: organismo de control, si la ITC lo pide</a:t>
+            </a:r>
+          </a:p>
+        </p:txBody>
+      </p:sp>
+      <p:sp>
+        <p:nvSpPr>
+          <p:cNvPr id="8" name="imgph" descr="IMGQ:pressure gauge gas pipe testing"/>
           <p:cNvSpPr/>
           <p:nvPr/>
         </p:nvSpPr>
@@ -10435,7 +10779,7 @@
                 </a:solidFill>
                 <a:latin typeface="Montserrat"/>
               </a:rPr>
-              <a:t>signing installation certificate document</a:t>
+              <a:t>pressure gauge gas pipe testing</a:t>
             </a:r>
           </a:p>
         </p:txBody>

--- a/Curso Gas B/00 - El Reglamento de Gas - estructura, ambito y generalidades/00 - El Reglamento de Gas - Vídeo 2.pptx
+++ b/Curso Gas B/00 - El Reglamento de Gas - estructura, ambito y generalidades/00 - El Reglamento de Gas - Vídeo 2.pptx
@@ -21,6 +21,7 @@
     <p:sldId id="269" r:id="rId21"/>
     <p:sldId id="270" r:id="rId22"/>
     <p:sldId id="271" r:id="rId23"/>
+    <p:sldId id="272" r:id="rId24"/>
   </p:sldIdLst>
   <p:sldSz cx="12191695" cy="6858000" type="screen4x3"/>
   <p:notesSz cx="6858000" cy="9144000"/>
@@ -522,7 +523,7 @@
           </a:p>
           <a:p>
             <a:r>
-              <a:t>N2: Ahora toca lo que más se parece a tu día a día: qué materiales puedes usar y, sobre todo, el camino completo desde que terminas una instalación hasta que tiene gas. Diseño, ejecución, pruebas, certificados, puesta en servicio y comunicación a la Administración. Es el itinerario que vas a repetir en cada obra, así que conviene tenerlo grabado en orden, porque saltarte un paso deja la instalación coja y casi siempre sin gas hasta que lo arreglas.</a:t>
+              <a:t>N2: Ahora toca lo que más se parece a tu día a día en la obra: primero, qué materiales puedes usar; y después, lo importante, el camino completo desde que terminas una instalación hasta que tiene gas. Ese camino tiene nombre y orden: diseño, ejecución, pruebas, certificados, puesta en servicio, comunicación a la Administración y arranque de los aparatos. Es el itinerario que vas a repetir en cada obra de tu vida, así que la meta de hoy es que te lo grabes en orden. Y te doy la razón de peso: saltarte un paso deja la instalación coja y, casi siempre, sin gas hasta que lo arreglas.</a:t>
             </a:r>
           </a:p>
         </p:txBody>
@@ -597,7 +598,7 @@
           </a:p>
           <a:p>
             <a:r>
-              <a:t>N2: El certificado de instalación es tu factura de que está bien hecho, el documento estrella: sin él no hay gas. Lo firma quien ejecutó la instalación, con las pruebas favorables. Luego, solo en instalaciones que necesitan proyecto, aparece el certificado de dirección de obra, que lo firma el director de obra. Y solo cuando la ITC obligó a que viniera el organismo de control, aparece el certificado de inspección. Idea clave: siempre hay certificado de instalación; los otros dos, solo a veces. En obra, sin ese boletín no puedes pedir el gas.</a:t>
+              <a:t>N2: Al acabar, y con las pruebas favorables, salen certificados, pero no todos aparecen siempre. El certificado de instalación es tu factura de que está bien hecho, el documento estrella: sin él no hay gas, así de claro. Lo firma quien ejecutó la instalación, o sea, tu empresa. Después, solo en instalaciones que necesitan proyecto, aparece el certificado de dirección de obra, que lo firma el director de obra. Y solo cuando la ITC obligó a que viniera el organismo de control, aparece el certificado de inspección. La idea que te salva en el examen: siempre hay certificado de instalación; los otros dos, solo a veces. En obra la traducción es literal: sin ese boletín firmado, no puedes ni pedir el gas a la compañía.</a:t>
             </a:r>
           </a:p>
         </p:txBody>
@@ -672,7 +673,7 @@
           </a:p>
           <a:p>
             <a:r>
-              <a:t>N2: Para poner en servicio, el responsable recibe copia de los certificados. Y para pruebas de funcionamiento, la empresa instaladora puede pedir al distribuidor un suministro provisional, siempre con la responsabilidad de la instalación en sus manos. Pero retén esta regla porque cae fijo: si una instalación lleva más de un año sin gas, una casa cerrada, una herencia parada, no se reengancha sin más; se trata como si fuera nueva, con sus papeles y sus pruebas. Si lleva menos de un año y tiene su certificado de control periódico en vigor, se puede restablecer. El año es tu fecha de caducidad mental.</a:t>
+              <a:t>N2: Vamos con el paso en que ya entra el gas. Para poner en servicio, el responsable primero recibe copia de los certificados que acabamos de ver. Y para las pruebas de funcionamiento, la empresa instaladora puede pedir al distribuidor un suministro provisional de gas, siempre asumiendo ella la responsabilidad de la instalación y de las pruebas. Hasta aquí, lo normal. Pero ahora retén esta regla porque cae fijo en el examen: si una instalación lleva más de un año sin gas, una casa cerrada, una herencia parada, no se reengancha sin más; se trata como si fuera nueva, con todos sus papeles y sus pruebas. Si lleva menos de un año y conserva su certificado de control periódico en vigor, entonces sí se puede restablecer directamente. Piensa en 'el año' como una fecha de caducidad mental: pasado el año, borrón y cuenta nueva.</a:t>
             </a:r>
           </a:p>
         </p:txBody>
@@ -747,7 +748,7 @@
           </a:p>
           <a:p>
             <a:r>
-              <a:t>N2: Aquí van dos datos que se preguntan juntos: quién y cuándo. Quién comunica es el titular, el dueño, no la empresa instaladora. En la práctica lo suele tramitar la instaladora en nombre del titular, pero la responsabilidad de comunicar es del titular. Y cuándo: antes de que pasen treinta días desde la puesta en servicio, ante el órgano competente de la Comunidad Autónoma. Ojo, el plazo se cuenta desde la puesta en servicio, desde que entra el gas, no desde que acabaste el montaje. Con la comunicación entrega la documentación técnica y el certificado de instalación.</a:t>
+              <a:t>N2: Aquí van dos datos que el examen pregunta siempre juntos: quién y cuándo. El quién es el titular, el dueño de la instalación, no la empresa instaladora. En la práctica lo suele tramitar la instaladora en nombre del titular, por comodidad, pero la responsabilidad legal de comunicar es del titular, que no se te olvide. Y el cuándo: antes de que pasen treinta días desde la puesta en servicio, ante el órgano competente de la Comunidad Autónoma. Cuidado con un detalle que meten como trampa: el plazo se cuenta desde la puesta en servicio, desde que entra el gas, no desde que acabaste el montaje. Junto con esa comunicación se entrega la documentación técnica y el certificado de instalación. Regla para recordarlo: es el dueño quien avisa, y tiene un mes.</a:t>
             </a:r>
           </a:p>
         </p:txBody>
@@ -822,7 +823,7 @@
           </a:p>
           <a:p>
             <a:r>
-              <a:t>N2: No. La puesta en marcha se hace según la ITC-ICG cero ocho, y no es solo darle al botón. Es verificar que la caldera o el calentador funcionan con su gas y su presión, y que la combustión cae dentro de lo que marca el fabricante. Hacerla mal o saltártela es la puerta directa a mala combustión, llama amarilla, ennegrecido, aparato que se apaga y monóxido de carbono. Quien la realiza emite y entrega al usuario un certificado de puesta en marcha. Ese papel es la prueba de que el aparato arrancó bien y en condiciones seguras.</a:t>
+              <a:t>N2: No, y esta distinción es importante. La puesta en marcha se hace según la ITC-ICG cero ocho, y no consiste en darle al botón y ver que enciende. Es verificar tres cosas: que la caldera o el calentador funcionan con el gas para el que fueron diseñados, con su presión correcta, y que la combustión cae dentro de los parámetros que marca el fabricante. Por qué se hace bien: hacerla mal o saltártela es la puerta directa a la mala combustión, la llama amarilla, el ennegrecido, el aparato que se apaga solo y el monóxido de carbono. Quien la realiza emite y entrega al usuario, no al titular, un certificado de puesta en marcha. Ese papel es la prueba de que el aparato arrancó bien y en condiciones seguras. Piénsalo como el 'estreno' controlado del aparato, no como un simple encendido.</a:t>
             </a:r>
           </a:p>
         </p:txBody>
@@ -892,12 +893,12 @@
           <a:lstStyle/>
           <a:p>
             <a:r>
-              <a:t>N1: ¿Qué información tiene derecho a recibir el cliente?</a:t>
-            </a:r>
-          </a:p>
-          <a:p>
-            <a:r>
-              <a:t>N2: Como anexo al certificado de instalación que entregas al titular, la empresa instaladora confecciona unas instrucciones de uso y mantenimiento. Y en todo caso incluyen un croquis del trazado, con materiales, uniones y válvulas: el cliente tiene derecho a saber por dónde van sus tubos, y ese plano se lo entregas tú con la instalación. Además, el suministrador facilita a sus clientes, por escrito y con periodicidad al menos bienal, recomendaciones de seguridad. Bienal significa cada dos años, no lo confundas con bianual, que sería dos veces al año. Aquí es cada dos años como mínimo.</a:t>
+              <a:t>N1: Se juntan tres certificados y me lío. ¿Cómo los separo de una vez?</a:t>
+            </a:r>
+          </a:p>
+          <a:p>
+            <a:r>
+              <a:t>N2: Paramos un momento a ordenar los tres, porque 'quién firma cada uno' es de las preguntas más repetidas de todo el examen. Míralos como tres papeles distintos, cada uno con su firmante. El certificado de instalación lo firma la empresa que ejecutó la obra, y no falta nunca. El certificado de dirección de obra lo firma el director de obra, y solo aparece si hubo proyecto, es decir, obra grande. Y el certificado de puesta en marcha lo firma el agente de puesta en marcha, va del aparato y se entrega al usuario. Truco para fijarlo: instalación va de la obra, dirección de obra va del proyecto, puesta en marcha va del aparato. Si asocias cada certificado con su 'de qué va', ya no los cruzas ni con trampa.</a:t>
             </a:r>
           </a:p>
         </p:txBody>
@@ -967,12 +968,12 @@
           <a:lstStyle/>
           <a:p>
             <a:r>
-              <a:t>N1: Repaso rápido antes de cerrar. ¿Tienes los cuatro pilares?</a:t>
-            </a:r>
-          </a:p>
-          <a:p>
-            <a:r>
-              <a:t>N2: Uno, la película de ocho pasos: diseño, autorización, ejecución, pruebas, certificados, puesta en servicio, comunicación y puesta en marcha, en ese orden. Dos, de los tres certificados de arranque, el de instalación siempre; el de dirección de obra solo si hubo proyecto, y el de inspección solo si la ITC lo exige. Tres, el titular comunica a la Comunidad Autónoma antes de treinta días. Y cuatro, la regla del año: parada de más de un año se trata como instalación nueva. Recítalos en voz alta y sigue.</a:t>
+              <a:t>N1: ¿Qué información tiene derecho a recibir el cliente?</a:t>
+            </a:r>
+          </a:p>
+          <a:p>
+            <a:r>
+              <a:t>N2: Bastante, y parte se la das tú. Como anexo al certificado de instalación que entregas al titular, la empresa instaladora confecciona unas instrucciones de uso y mantenimiento. Y en todo caso incluyen un croquis del trazado, o sea un dibujo de por dónde van los tubos, con sus materiales, uniones y válvulas. El cliente tiene derecho a saber por dónde pasa su gas, y ese plano se lo entregas tú con la instalación. Además, por su lado, el suministrador facilita a sus clientes, por escrito y con periodicidad al menos bienal, recomendaciones de seguridad. Ojo a la palabra: bienal significa cada dos años; no la confundas con bianual, que sería dos veces al año. Aquí es cada dos años como mínimo. Un recordatorio de seguridad que llega puntual y un croquis claro son detalles de un buen profesional.</a:t>
             </a:r>
           </a:p>
         </p:txBody>
@@ -1042,12 +1043,87 @@
           <a:lstStyle/>
           <a:p>
             <a:r>
-              <a:t>N1: Gran final. ¿Qué eres capaz de hacer hoy que ayer no?</a:t>
-            </a:r>
-          </a:p>
-          <a:p>
-            <a:r>
-              <a:t>N2: Hoy ya sabes llevar una instalación de cero a tener gas sin perderte. Primer logro: recorres los ocho pasos del artículo quinto en orden, del diseño a la puesta en marcha, y sabes que saltarte uno deja la obra sin gas. Segundo: no confundes los tres certificados de arranque; el de instalación lo firma quien ejecuta y no falta nunca, el de dirección de obra solo si hubo proyecto, y el de puesta en marcha va del aparato y se entrega al usuario. Tercero: distingues la prueba, que haces tú, de la inspección, que hace un árbitro independiente.</a:t>
+              <a:t>N1: Repaso rápido antes de cerrar. ¿Tengo los cuatro pilares?</a:t>
+            </a:r>
+          </a:p>
+          <a:p>
+            <a:r>
+              <a:t>N2: Vamos a fijarlos en treinta segundos y en voz alta. Uno, la película de ocho pasos: diseño, autorización, ejecución, pruebas, certificados, puesta en servicio, comunicación y puesta en marcha, en ese orden exacto. Dos, de los tres certificados de arranque, el de instalación siempre; el de dirección de obra solo si hubo proyecto; y el de inspección solo si la ITC lo exige. Tres, el titular comunica a la Comunidad Autónoma antes de treinta días desde la puesta en servicio. Y cuatro, la regla del año: una instalación parada más de un año se trata como si fuera nueva. Recítalos una vez de carrerilla y, si los sueltas sin trabarte, tienes el vídeo dominado.</a:t>
+            </a:r>
+          </a:p>
+        </p:txBody>
+      </p:sp>
+      <p:sp>
+        <p:nvSpPr>
+          <p:cNvPr id="4" name="Slide Number Placeholder 3"/>
+          <p:cNvSpPr>
+            <a:spLocks noGrp="1"/>
+          </p:cNvSpPr>
+          <p:nvPr>
+            <p:ph type="sldNum" idx="5" sz="quarter"/>
+          </p:nvPr>
+        </p:nvSpPr>
+        <p:spPr/>
+      </p:sp>
+    </p:spTree>
+  </p:cSld>
+  <p:clrMapOvr>
+    <a:masterClrMapping/>
+  </p:clrMapOvr>
+</p:notes>
+</file>
+
+<file path=ppt/notesSlides/notesSlide17.xml><?xml version="1.0" encoding="utf-8"?>
+<p:notes xmlns:a="http://schemas.openxmlformats.org/drawingml/2006/main" xmlns:p="http://schemas.openxmlformats.org/presentationml/2006/main" xmlns:r="http://schemas.openxmlformats.org/officeDocument/2006/relationships">
+  <p:cSld>
+    <p:spTree>
+      <p:nvGrpSpPr>
+        <p:cNvPr id="1" name=""/>
+        <p:cNvGrpSpPr/>
+        <p:nvPr/>
+      </p:nvGrpSpPr>
+      <p:grpSpPr>
+        <a:xfrm>
+          <a:off x="0" y="0"/>
+          <a:ext cx="0" cy="0"/>
+          <a:chOff x="0" y="0"/>
+          <a:chExt cx="0" cy="0"/>
+        </a:xfrm>
+      </p:grpSpPr>
+      <p:sp>
+        <p:nvSpPr>
+          <p:cNvPr id="2" name="Slide Image Placeholder 1"/>
+          <p:cNvSpPr>
+            <a:spLocks noGrp="1"/>
+          </p:cNvSpPr>
+          <p:nvPr>
+            <p:ph type="sldImg" idx="2"/>
+          </p:nvPr>
+        </p:nvSpPr>
+        <p:spPr/>
+      </p:sp>
+      <p:sp>
+        <p:nvSpPr>
+          <p:cNvPr id="3" name="Notes Placeholder 2"/>
+          <p:cNvSpPr>
+            <a:spLocks noGrp="1"/>
+          </p:cNvSpPr>
+          <p:nvPr>
+            <p:ph type="body" idx="3" sz="quarter"/>
+          </p:nvPr>
+        </p:nvSpPr>
+        <p:spPr/>
+        <p:txBody>
+          <a:bodyPr/>
+          <a:lstStyle/>
+          <a:p>
+            <a:r>
+              <a:t>N1: Gran final. ¿Qué soy capaz de hacer hoy que ayer no?</a:t>
+            </a:r>
+          </a:p>
+          <a:p>
+            <a:r>
+              <a:t>N2: Reconstruyamos lo aprendido, que cada pieza se apoya en la anterior. Empezaste por los materiales: con su DNI grabado e indeleble y sus instrucciones al menos en castellano, porque dentro de años alguien tiene que saber qué montaste. De ahí pasaste a la joya del vídeo: la película de ocho pasos del artículo quinto, del diseño a la puesta en marcha, y ahora sabes que saltarte uno deja la obra sin gas. Con eso llegaron tus logros: recorres esos ocho pasos en orden; no confundes los tres certificados de arranque, porque el de instalación lo firma quien ejecuta y no falta nunca, el de dirección de obra solo si hubo proyecto, y el de puesta en marcha va del aparato y se entrega al usuario; y distingues la prueba, que haces tú, de la inspección, que hace un árbitro independiente.</a:t>
             </a:r>
           </a:p>
           <a:p>
@@ -1057,7 +1133,7 @@
           </a:p>
           <a:p>
             <a:r>
-              <a:t>N2: En el examen te preguntan quién firma cada certificado y en cuántos días comunica el titular; ahora lo respondes sin dudar, treinta días y el titular. Y en la obra se nota cuando entregas un boletín limpio con su croquis, o cuando te llega una casa cerrada más de un año y, en vez de reenganchar sin más, la tratas como nueva y te ahorras un disgusto. Recuerda: firmar es responsabilizarse, y hoy ya sabes exactamente de qué respondes. En el último vídeo del tema cerramos el articulado: mantenimiento, la diferencia estrella entre inspección y revisión, y las reglas finales. Te espero para el gran cierre.</a:t>
+              <a:t>N2: En el examen se nota enseguida: te preguntan quién firma cada certificado y en cuántos días comunica el titular, y ahora respondes sin pestañear, treinta días y el titular. Pero en la obra vale todavía más. Se nota cuando entregas un boletín limpio con su croquis del trazado, y se nota cuando te llega una casa cerrada más de un año y, en lugar de reenganchar el gas sin más, la tratas como nueva y te ahorras un disgusto y una posible fuga. Recuerda la frase que resume el vídeo: firmar es responsabilizarse, y hoy ya sabes exactamente de qué respondes. Eso te hace más gasista que ayer. En el último vídeo del tema cerramos el articulado: el mantenimiento, la diferencia estrella entre inspección y revisión, y las reglas finales del Reglamento. Te espero para el gran cierre.</a:t>
             </a:r>
           </a:p>
         </p:txBody>
@@ -1132,7 +1208,7 @@
           </a:p>
           <a:p>
             <a:r>
-              <a:t>N2: Ocho pasos ordenados en el artículo quinto, desde el diseño hasta el arranque de los aparatos: esa es la película de toda obra. Treinta días es el plazo que tiene el titular para comunicar la instalación a la Comunidad Autónoma después de la puesta en servicio. Y tres certificados de arranque que no debes confundir jamás: el de instalación, el de dirección de obra y el de puesta en marcha del aparato. Con estos tres números tienes el mapa del vídeo.</a:t>
+              <a:t>N2: Estos tres números son el mapa. Ocho pasos ordenados en el artículo quinto, desde el diseño hasta el arranque de los aparatos: esa es la película de toda obra. Treinta días es el plazo que tiene el titular, el dueño, para comunicar la instalación a la Comunidad Autónoma después de la puesta en servicio. Y tres certificados de arranque que no debes confundir jamás, porque el examen los cruza: el de instalación, el de dirección de obra y el de puesta en marcha del aparato. Si sujetas estos tres números, tienes dónde colgar todo lo demás del vídeo.</a:t>
             </a:r>
           </a:p>
         </p:txBody>
@@ -1207,7 +1283,7 @@
           </a:p>
           <a:p>
             <a:r>
-              <a:t>N2: Indeleble significa que no se borra. El Reglamento lo exige porque dentro de diez años, cuando alguien revise ese tubo o esa válvula, tiene que poder leer todavía de qué es y quién lo hizo. Una pegatina que se cae no vale. Piensa en el marcado como el documento de identidad del material: grabado, permanente y legible, con el fabricante, la marca y el modelo. Y se consideran conformes los materiales amparados por certificados y marcas de conformidad a normas. En obra, si la etiqueta ya no se lee, ese material te va a dar problemas el día que haya que reclamar.</a:t>
+              <a:t>N2: Empecemos por la palabra rara: indeleble significa que no se borra. El Reglamento lo exige por una razón muy práctica. Dentro de diez años, cuando alguien revise ese tubo o esa válvula, tiene que poder leer todavía de qué material es y quién lo fabricó. Una pegatina que se despega no sirve para eso. Por eso te propongo verlo como el documento de identidad del material: grabado, permanente y legible, con el fabricante, la marca y el modelo. Y hay un atajo de confianza: se consideran conformes los materiales amparados por certificados y marcas de conformidad a normas otorgados por las entidades de certificación. En obra la moraleja es directa: si la etiqueta ya no se lee, ese material te va a dar problemas el día que haya que reclamar, porque no sabrás ni qué es ni a quién.</a:t>
             </a:r>
           </a:p>
         </p:txBody>
@@ -1282,7 +1358,7 @@
           </a:p>
           <a:p>
             <a:r>
-              <a:t>N2: Al menos en castellano. Esta frase cae tal cual en el examen. Si ves una opción que dice que las instrucciones pueden venir solo en inglés, es falsa: el castellano es el mínimo obligatorio. Pueden venir además en otros idiomas, sin problema, pero en castellano siempre. Y esas instrucciones deben incluir lo necesario para el uso específico del equipo. Es una de esas preguntas cortas que regalan un punto si la tienes clara.</a:t>
+              <a:t>N2: Respuesta corta y que cae tal cual en el examen: al menos en castellano. Fíjate en el 'al menos', porque es la clave. Significa que el castellano es el mínimo obligatorio, el suelo. Pueden venir además en inglés, en francés o en los idiomas que quieran, sin problema, pero en castellano siempre. ¿Cómo te lo van a intentar colar? Con una opción que diga que las instrucciones pueden venir solo en inglés: eso es falso, sáltatela. Y no olvides el fondo: esas instrucciones deben incluir lo necesario para el uso específico del equipo, para que quien lo instale y quien lo use sepan manejarlo bien. Es una de esas preguntas cortas que te regalan un punto si la tienes clara.</a:t>
             </a:r>
           </a:p>
         </p:txBody>
@@ -1357,7 +1433,7 @@
           </a:p>
           <a:p>
             <a:r>
-              <a:t>N2: No lo veas como una lista suelta, velo como una historia con ocho capítulos en orden. Primero el diseño, los papeles. Segundo la autorización, por si hace falta permiso. Tercero la ejecución, el montaje. Cuarto las pruebas, a ver si aguanta. Quinto los certificados, las firmas. Sexto la puesta en servicio, es decir, ya entra el gas. Séptimo la comunicación, avisar a la Administración. Y octavo la puesta en marcha, arrancar los aparatos. Si te sabes la película en orden, los detalles caen solos. Grábate esta secuencia porque es el guion de todas tus obras.</a:t>
+              <a:t>N2: El secreto es no verlo como una lista suelta de normas, sino como una película con ocho capítulos que van en orden. Te la cuento entera para que la veas moverse. Capítulo uno, el diseño: los papeles. Dos, la autorización: por si hace falta pedir permiso. Tres, la ejecución: el montaje físico. Cuatro, las pruebas: a ver si aguanta. Cinco, los certificados: las firmas. Seis, la puesta en servicio: aquí ya entra el gas. Siete, la comunicación: avisar a la Administración. Y ocho, la puesta en marcha: arrancar los aparatos. Cuando te sabes la película en orden, los detalles de cada capítulo caen solos, porque cada uno tiene sentido después del anterior. Graba esta secuencia, porque es literalmente el guion de todas tus obras.</a:t>
             </a:r>
           </a:p>
         </p:txBody>
@@ -1432,7 +1508,7 @@
           </a:p>
           <a:p>
             <a:r>
-              <a:t>N2: Regla mental sencilla: instalación grande o complicada, proyecto, que lo firma un técnico titulado, un ingeniero. Instalación normal o pequeña, memoria técnica, que la puede firmar el instalador en la categoría que marque la ITC-ICG cero nueve. Es como ir al médico: un catarro lo ve tu médico de cabecera, que sería la memoria; una operación seria, el especialista, que sería el proyecto. Y retén esto: quien firma es directamente responsable de que todo se ajuste al Reglamento. En gas la firma no es un trámite; si firmas y algo está mal, respondes tú. Por eso no se firma nada que no hayas comprobado.</a:t>
+              <a:t>N2: Toda instalación necesita una documentación técnica que demuestre que cumple, y adopta una de dos formas. Regla mental sencilla: instalación grande o complicada, proyecto, que lo firma un técnico titulado, un ingeniero; instalación normal o pequeña, memoria técnica, que la puede firmar el instalador en la categoría que marque la ITC-ICG cero nueve. La comparación que lo fija: es como ir al médico. Un catarro lo ve tu médico de cabecera, esa es la memoria; una operación seria la lleva el especialista, ese es el proyecto. Y el tamaño de cada caso lo decide su ITC. Ahora la parte seria, y retenla: quien firma es directamente responsable de que todo se ajuste al Reglamento. En gas la firma no es un trámite; si firmas y algo está mal, respondes tú. Por eso hay una norma de oro que te acompañará toda la vida: no se firma nada que no hayas comprobado con tus manos.</a:t>
             </a:r>
           </a:p>
         </p:txBody>
@@ -1502,12 +1578,12 @@
           <a:lstStyle/>
           <a:p>
             <a:r>
-              <a:t>N1: ¿Toda instalación necesita que la Administración dé permiso antes?</a:t>
-            </a:r>
-          </a:p>
-          <a:p>
-            <a:r>
-              <a:t>N2: No, y aquí está una confusión muy típica. No mezcles autorización con comunicación. La autorización es un permiso previo, y solo se pide cuando lo exige la Ley de hidrocarburos y así lo dice la ITC: se reserva a los casos gordos. La mayoría de instalaciones no necesitan que nadie les dé permiso antes; basta con avisar después, que es la comunicación del apartado siete. En Gas B lo normal es hacer y comunicar, no pedir permiso y esperar. Si te lo preguntan, la autorización previa es la excepción, no la regla.</a:t>
+              <a:t>N1: ¿Toda instalación necesita que la Administración dé permiso antes de empezar?</a:t>
+            </a:r>
+          </a:p>
+          <a:p>
+            <a:r>
+              <a:t>N2: No, y aquí hay una confusión muy típica que conviene deshacer ya. No mezcles autorización con comunicación, porque suenan parecido pero son momentos opuestos. La autorización es un permiso previo, pedir antes de hacer, y solo se exige cuando lo manda la Ley de hidrocarburos y así lo dice la ITC: se reserva a los casos gordos, las instalaciones grandes. La comunicación, en cambio, es avisar después de hacer, y de esa hablaremos en el paso siete. Para que lo fijes: en Gas B lo normal es hacer y comunicar, no pedir permiso y esperar. Si en el examen te preguntan, la autorización previa es la excepción, no la regla; la inmensa mayoría de instalaciones domésticas no la necesitan.</a:t>
             </a:r>
           </a:p>
         </p:txBody>
@@ -1577,12 +1653,12 @@
           <a:lstStyle/>
           <a:p>
             <a:r>
-              <a:t>N1: Cuando tu tubo se cruza con la luz o el agua, ¿qué manda?</a:t>
-            </a:r>
-          </a:p>
-          <a:p>
-            <a:r>
-              <a:t>N2: Las instalaciones las ejecutan las empresas que determine cada ITC. Y cuando tu tubo de gas se cruza o va en paralelo con otros servicios, la electricidad, el agua, el saneamiento, hay que respetar distancias mínimas de seguridad para que no se toquen ni se afecten entre ellos. Eso son los cruces y paralelismos, un tema que volverás a ver a fondo en las normas UNE. Aquí el Reglamento solo lo enuncia; el cuántos centímetros exactos está en la norma técnica. De momento quédate con la idea de que el gas nunca va pegado a otro servicio sin respetar su distancia.</a:t>
+              <a:t>N1: Cuando mi tubo de gas se cruza con la luz o el agua, ¿qué manda?</a:t>
+            </a:r>
+          </a:p>
+          <a:p>
+            <a:r>
+              <a:t>N2: Vamos por partes. Las instalaciones las ejecutan las empresas que determine cada ITC, no cualquiera. Y cuando tu tubo de gas se encuentra con otros servicios, aparecen dos situaciones con nombre propio: el cruce, cuando lo atraviesa, y el paralelismo, cuando va al lado en la misma dirección. En ambos casos, con la electricidad, el agua o el saneamiento, hay que respetar distancias mínimas de seguridad para que no se toquen ni se afecten entre ellos, por ejemplo para que un cable no caliente tu tubo. Ese es el sentido de 'cruces y paralelismos'. Aquí el Reglamento solo lo enuncia, dice que hay que respetarlas; el cuántos centímetros exactos lo encontrarás en la norma UNE, que verás más adelante. De momento quédate con la idea firme: el gas nunca va pegado a otro servicio sin respetar su distancia.</a:t>
             </a:r>
           </a:p>
         </p:txBody>
@@ -1657,7 +1733,7 @@
           </a:p>
           <a:p>
             <a:r>
-              <a:t>N2: Distingue dos figuras que suenan parecido pero no lo son. La prueba la hace el que monta: compruebas tu propio trabajo, por ejemplo la prueba de estanquidad, antes de meter gas. La inspección la hace un tercero independiente, el organismo de control, y solo cuando la ITC lo pide. Uno es revisar lo mío, el otro es que me revise un árbitro. Y ojo con la estanquidad: darla por buena sin hacerla de verdad es dejar que la fuga aparezca con el gas ya dentro y el cliente en casa. Esa prueba es tu red de seguridad; no te la saltes nunca.</a:t>
+              <a:t>N2: Aquí hay dos figuras que suenan parecido pero no son lo mismo, y confundirlas es un error clásico. La prueba la hace el que monta: eres tú comprobando tu propio trabajo, por ejemplo la prueba de estanquidad, que consiste en verificar que no se escapa ni una burbuja de gas, y se hace antes de meter gas de verdad. La inspección, en cambio, la hace un tercero independiente, el organismo de control, y solo cuando la ITC lo pide. La diferencia en una frase: una es revisar lo mío, la otra es que me revise un árbitro de fuera. Y una advertencia con la estanquidad, porque va tu firma y una casa de por medio: darla por buena sin hacerla de verdad es dejar que la fuga aparezca con el gas ya dentro y el cliente en casa. Esa prueba es tu red de seguridad; no te la saltes jamás.</a:t>
             </a:r>
           </a:p>
         </p:txBody>
@@ -4912,7 +4988,7 @@
                 </a:solidFill>
                 <a:latin typeface="Montserrat"/>
               </a:rPr>
-              <a:t>010 / 016</a:t>
+              <a:t>010 / 017</a:t>
             </a:r>
           </a:p>
         </p:txBody>
@@ -5302,7 +5378,7 @@
                 </a:solidFill>
                 <a:latin typeface="Montserrat"/>
               </a:rPr>
-              <a:t>011 / 016</a:t>
+              <a:t>011 / 017</a:t>
             </a:r>
           </a:p>
         </p:txBody>
@@ -5692,7 +5768,7 @@
                 </a:solidFill>
                 <a:latin typeface="Montserrat"/>
               </a:rPr>
-              <a:t>012 / 016</a:t>
+              <a:t>012 / 017</a:t>
             </a:r>
           </a:p>
         </p:txBody>
@@ -6082,7 +6158,7 @@
                 </a:solidFill>
                 <a:latin typeface="Montserrat"/>
               </a:rPr>
-              <a:t>013 / 016</a:t>
+              <a:t>013 / 017</a:t>
             </a:r>
           </a:p>
         </p:txBody>
@@ -6472,7 +6548,7 @@
                 </a:solidFill>
                 <a:latin typeface="Montserrat"/>
               </a:rPr>
-              <a:t>014 / 016</a:t>
+              <a:t>014 / 017</a:t>
             </a:r>
           </a:p>
         </p:txBody>
@@ -6540,7 +6616,7 @@
                 </a:solidFill>
                 <a:latin typeface="Montserrat"/>
               </a:rPr>
-              <a:t>ARTÍCULO 6 · INFORMACIÓN AL USUARIO</a:t>
+              <a:t>ARTÍCULO 5 · LOS TRES CERTIFICADOS</a:t>
             </a:r>
           </a:p>
         </p:txBody>
@@ -6574,7 +6650,7 @@
                 </a:solidFill>
                 <a:latin typeface="Montserrat"/>
               </a:rPr>
-              <a:t>El croquis y el recordatorio bienal</a:t>
+              <a:t>Quién firma cada papel</a:t>
             </a:r>
           </a:p>
         </p:txBody>
@@ -6622,7 +6698,7 @@
                 </a:solidFill>
                 <a:latin typeface="Montserrat"/>
               </a:rPr>
-              <a:t>Instrucciones de uso y mantenimiento</a:t>
+              <a:t>Instalación: la empresa que ejecuta</a:t>
             </a:r>
           </a:p>
           <a:p>
@@ -6647,7 +6723,7 @@
                 </a:solidFill>
                 <a:latin typeface="Montserrat"/>
               </a:rPr>
-              <a:t>Croquis del trazado, anexo al boletín</a:t>
+              <a:t>Dirección de obra: el director (si hay proyecto)</a:t>
             </a:r>
           </a:p>
           <a:p>
@@ -6672,14 +6748,14 @@
                 </a:solidFill>
                 <a:latin typeface="Montserrat"/>
               </a:rPr>
-              <a:t>Suministrador recuerda, mínimo cada dos años</a:t>
-            </a:r>
-          </a:p>
-        </p:txBody>
-      </p:sp>
-      <p:sp>
-        <p:nvSpPr>
-          <p:cNvPr id="8" name="imgph" descr="IMGQ:hand drawn house pipe sketch plan"/>
+              <a:t>Puesta en marcha: el agente, al usuario</a:t>
+            </a:r>
+          </a:p>
+        </p:txBody>
+      </p:sp>
+      <p:sp>
+        <p:nvSpPr>
+          <p:cNvPr id="8" name="imgph" descr="IMGQ:stack of official signed documents desk"/>
           <p:cNvSpPr/>
           <p:nvPr/>
         </p:nvSpPr>
@@ -6765,7 +6841,7 @@
                 </a:solidFill>
                 <a:latin typeface="Montserrat"/>
               </a:rPr>
-              <a:t>hand drawn house pipe sketch plan</a:t>
+              <a:t>stack of official signed documents desk</a:t>
             </a:r>
           </a:p>
         </p:txBody>
@@ -6862,7 +6938,7 @@
                 </a:solidFill>
                 <a:latin typeface="Montserrat"/>
               </a:rPr>
-              <a:t>015 / 016</a:t>
+              <a:t>015 / 017</a:t>
             </a:r>
           </a:p>
         </p:txBody>
@@ -6930,7 +7006,7 @@
                 </a:solidFill>
                 <a:latin typeface="Montserrat"/>
               </a:rPr>
-              <a:t>REPASO RELÁMPAGO</a:t>
+              <a:t>ARTÍCULO 6 · INFORMACIÓN AL USUARIO</a:t>
             </a:r>
           </a:p>
         </p:txBody>
@@ -6964,7 +7040,7 @@
                 </a:solidFill>
                 <a:latin typeface="Montserrat"/>
               </a:rPr>
-              <a:t>Fíjalo en treinta segundos</a:t>
+              <a:t>El croquis y el recordatorio bienal</a:t>
             </a:r>
           </a:p>
         </p:txBody>
@@ -7012,7 +7088,7 @@
                 </a:solidFill>
                 <a:latin typeface="Montserrat"/>
               </a:rPr>
-              <a:t>Ocho pasos: del diseño al arranque</a:t>
+              <a:t>Instrucciones de uso y mantenimiento</a:t>
             </a:r>
           </a:p>
           <a:p>
@@ -7037,7 +7113,7 @@
                 </a:solidFill>
                 <a:latin typeface="Montserrat"/>
               </a:rPr>
-              <a:t>Boletín siempre; los otros dos, a veces</a:t>
+              <a:t>Croquis del trazado, anexo al boletín</a:t>
             </a:r>
           </a:p>
           <a:p>
@@ -7062,39 +7138,14 @@
                 </a:solidFill>
                 <a:latin typeface="Montserrat"/>
               </a:rPr>
-              <a:t>Titular comunica en 30 días</a:t>
-            </a:r>
-          </a:p>
-          <a:p>
-            <a:pPr>
-              <a:spcAft>
-                <a:spcPts val="1000"/>
-              </a:spcAft>
-            </a:pPr>
-            <a:r>
-              <a:rPr sz="1600" b="1" i="0">
-                <a:solidFill>
-                  <a:srgbClr val="2E3A80"/>
-                </a:solidFill>
-                <a:latin typeface="Montserrat"/>
-              </a:rPr>
-              <a:t>•  </a:t>
-            </a:r>
-            <a:r>
-              <a:rPr sz="1600" b="0" i="0">
-                <a:solidFill>
-                  <a:srgbClr val="1B2330"/>
-                </a:solidFill>
-                <a:latin typeface="Montserrat"/>
-              </a:rPr>
-              <a:t>Parada +1 año = como nueva</a:t>
-            </a:r>
-          </a:p>
-        </p:txBody>
-      </p:sp>
-      <p:sp>
-        <p:nvSpPr>
-          <p:cNvPr id="8" name="imgph" descr="IMGQ:gas installation checklist clipboard"/>
+              <a:t>Suministrador recuerda, mínimo cada dos años</a:t>
+            </a:r>
+          </a:p>
+        </p:txBody>
+      </p:sp>
+      <p:sp>
+        <p:nvSpPr>
+          <p:cNvPr id="8" name="imgph" descr="IMGQ:hand drawn house pipe sketch plan"/>
           <p:cNvSpPr/>
           <p:nvPr/>
         </p:nvSpPr>
@@ -7180,7 +7231,7 @@
                 </a:solidFill>
                 <a:latin typeface="Montserrat"/>
               </a:rPr>
-              <a:t>gas installation checklist clipboard</a:t>
+              <a:t>hand drawn house pipe sketch plan</a:t>
             </a:r>
           </a:p>
         </p:txBody>
@@ -7218,6 +7269,421 @@
             <a:avLst/>
           </a:prstGeom>
           <a:solidFill>
+            <a:srgbClr val="FFFFFF"/>
+          </a:solidFill>
+          <a:ln>
+            <a:noFill/>
+          </a:ln>
+          <a:effectLst/>
+        </p:spPr>
+        <p:style>
+          <a:lnRef idx="1">
+            <a:schemeClr val="accent1"/>
+          </a:lnRef>
+          <a:fillRef idx="3">
+            <a:schemeClr val="accent1"/>
+          </a:fillRef>
+          <a:effectRef idx="2">
+            <a:schemeClr val="accent1"/>
+          </a:effectRef>
+          <a:fontRef idx="minor">
+            <a:schemeClr val="lt1"/>
+          </a:fontRef>
+        </p:style>
+        <p:txBody>
+          <a:bodyPr rtlCol="0" anchor="ctr"/>
+          <a:lstStyle/>
+          <a:p>
+            <a:pPr algn="ctr"/>
+          </a:p>
+        </p:txBody>
+      </p:sp>
+      <p:sp>
+        <p:nvSpPr>
+          <p:cNvPr id="3" name="TextBox 2"/>
+          <p:cNvSpPr txBox="1"/>
+          <p:nvPr/>
+        </p:nvSpPr>
+        <p:spPr>
+          <a:xfrm>
+            <a:off x="10607040" y="320040"/>
+            <a:ext cx="1371600" cy="365760"/>
+          </a:xfrm>
+          <a:prstGeom prst="rect">
+            <a:avLst/>
+          </a:prstGeom>
+          <a:noFill/>
+        </p:spPr>
+        <p:txBody>
+          <a:bodyPr wrap="square">
+            <a:spAutoFit/>
+          </a:bodyPr>
+          <a:lstStyle/>
+          <a:p>
+            <a:pPr algn="r"/>
+            <a:r>
+              <a:rPr sz="1000" b="1" i="0">
+                <a:solidFill>
+                  <a:srgbClr val="64748B"/>
+                </a:solidFill>
+                <a:latin typeface="Montserrat"/>
+              </a:rPr>
+              <a:t>016 / 017</a:t>
+            </a:r>
+          </a:p>
+        </p:txBody>
+      </p:sp>
+      <p:sp>
+        <p:nvSpPr>
+          <p:cNvPr id="4" name="TextBox 3"/>
+          <p:cNvSpPr txBox="1"/>
+          <p:nvPr/>
+        </p:nvSpPr>
+        <p:spPr>
+          <a:xfrm>
+            <a:off x="457200" y="6419088"/>
+            <a:ext cx="8229600" cy="365760"/>
+          </a:xfrm>
+          <a:prstGeom prst="rect">
+            <a:avLst/>
+          </a:prstGeom>
+          <a:noFill/>
+        </p:spPr>
+        <p:txBody>
+          <a:bodyPr wrap="square">
+            <a:spAutoFit/>
+          </a:bodyPr>
+          <a:lstStyle/>
+          <a:p>
+            <a:r>
+              <a:rPr sz="900" b="0" i="0">
+                <a:solidFill>
+                  <a:srgbClr val="64748B"/>
+                </a:solidFill>
+                <a:latin typeface="Montserrat"/>
+              </a:rPr>
+              <a:t>Curso Gas B · Tema 00 · El Reglamento de Gas</a:t>
+            </a:r>
+          </a:p>
+        </p:txBody>
+      </p:sp>
+      <p:sp>
+        <p:nvSpPr>
+          <p:cNvPr id="5" name="TextBox 4"/>
+          <p:cNvSpPr txBox="1"/>
+          <p:nvPr/>
+        </p:nvSpPr>
+        <p:spPr>
+          <a:xfrm>
+            <a:off x="822960" y="457200"/>
+            <a:ext cx="8229600" cy="365760"/>
+          </a:xfrm>
+          <a:prstGeom prst="rect">
+            <a:avLst/>
+          </a:prstGeom>
+          <a:noFill/>
+        </p:spPr>
+        <p:txBody>
+          <a:bodyPr wrap="square">
+            <a:spAutoFit/>
+          </a:bodyPr>
+          <a:lstStyle/>
+          <a:p>
+            <a:r>
+              <a:rPr sz="1200" b="1" i="0">
+                <a:solidFill>
+                  <a:srgbClr val="64748B"/>
+                </a:solidFill>
+                <a:latin typeface="Montserrat"/>
+              </a:rPr>
+              <a:t>REPASO RELÁMPAGO</a:t>
+            </a:r>
+          </a:p>
+        </p:txBody>
+      </p:sp>
+      <p:sp>
+        <p:nvSpPr>
+          <p:cNvPr id="6" name="TextBox 5"/>
+          <p:cNvSpPr txBox="1"/>
+          <p:nvPr/>
+        </p:nvSpPr>
+        <p:spPr>
+          <a:xfrm>
+            <a:off x="822960" y="868680"/>
+            <a:ext cx="10515600" cy="914400"/>
+          </a:xfrm>
+          <a:prstGeom prst="rect">
+            <a:avLst/>
+          </a:prstGeom>
+          <a:noFill/>
+        </p:spPr>
+        <p:txBody>
+          <a:bodyPr wrap="square">
+            <a:spAutoFit/>
+          </a:bodyPr>
+          <a:lstStyle/>
+          <a:p>
+            <a:r>
+              <a:rPr sz="2700" b="1" i="0">
+                <a:solidFill>
+                  <a:srgbClr val="1E2761"/>
+                </a:solidFill>
+                <a:latin typeface="Montserrat"/>
+              </a:rPr>
+              <a:t>Fíjalo en treinta segundos</a:t>
+            </a:r>
+          </a:p>
+        </p:txBody>
+      </p:sp>
+      <p:sp>
+        <p:nvSpPr>
+          <p:cNvPr id="7" name="TextBox 6"/>
+          <p:cNvSpPr txBox="1"/>
+          <p:nvPr/>
+        </p:nvSpPr>
+        <p:spPr>
+          <a:xfrm>
+            <a:off x="822960" y="1920240"/>
+            <a:ext cx="4983480" cy="4206240"/>
+          </a:xfrm>
+          <a:prstGeom prst="rect">
+            <a:avLst/>
+          </a:prstGeom>
+          <a:noFill/>
+        </p:spPr>
+        <p:txBody>
+          <a:bodyPr wrap="square">
+            <a:spAutoFit/>
+          </a:bodyPr>
+          <a:lstStyle/>
+          <a:p>
+            <a:pPr>
+              <a:spcAft>
+                <a:spcPts val="1000"/>
+              </a:spcAft>
+            </a:pPr>
+            <a:r>
+              <a:rPr sz="1600" b="1" i="0">
+                <a:solidFill>
+                  <a:srgbClr val="2E3A80"/>
+                </a:solidFill>
+                <a:latin typeface="Montserrat"/>
+              </a:rPr>
+              <a:t>•  </a:t>
+            </a:r>
+            <a:r>
+              <a:rPr sz="1600" b="0" i="0">
+                <a:solidFill>
+                  <a:srgbClr val="1B2330"/>
+                </a:solidFill>
+                <a:latin typeface="Montserrat"/>
+              </a:rPr>
+              <a:t>Ocho pasos: del diseño al arranque</a:t>
+            </a:r>
+          </a:p>
+          <a:p>
+            <a:pPr>
+              <a:spcAft>
+                <a:spcPts val="1000"/>
+              </a:spcAft>
+            </a:pPr>
+            <a:r>
+              <a:rPr sz="1600" b="1" i="0">
+                <a:solidFill>
+                  <a:srgbClr val="2E3A80"/>
+                </a:solidFill>
+                <a:latin typeface="Montserrat"/>
+              </a:rPr>
+              <a:t>•  </a:t>
+            </a:r>
+            <a:r>
+              <a:rPr sz="1600" b="0" i="0">
+                <a:solidFill>
+                  <a:srgbClr val="1B2330"/>
+                </a:solidFill>
+                <a:latin typeface="Montserrat"/>
+              </a:rPr>
+              <a:t>Boletín siempre; los otros dos, a veces</a:t>
+            </a:r>
+          </a:p>
+          <a:p>
+            <a:pPr>
+              <a:spcAft>
+                <a:spcPts val="1000"/>
+              </a:spcAft>
+            </a:pPr>
+            <a:r>
+              <a:rPr sz="1600" b="1" i="0">
+                <a:solidFill>
+                  <a:srgbClr val="2E3A80"/>
+                </a:solidFill>
+                <a:latin typeface="Montserrat"/>
+              </a:rPr>
+              <a:t>•  </a:t>
+            </a:r>
+            <a:r>
+              <a:rPr sz="1600" b="0" i="0">
+                <a:solidFill>
+                  <a:srgbClr val="1B2330"/>
+                </a:solidFill>
+                <a:latin typeface="Montserrat"/>
+              </a:rPr>
+              <a:t>Titular comunica en 30 días</a:t>
+            </a:r>
+          </a:p>
+          <a:p>
+            <a:pPr>
+              <a:spcAft>
+                <a:spcPts val="1000"/>
+              </a:spcAft>
+            </a:pPr>
+            <a:r>
+              <a:rPr sz="1600" b="1" i="0">
+                <a:solidFill>
+                  <a:srgbClr val="2E3A80"/>
+                </a:solidFill>
+                <a:latin typeface="Montserrat"/>
+              </a:rPr>
+              <a:t>•  </a:t>
+            </a:r>
+            <a:r>
+              <a:rPr sz="1600" b="0" i="0">
+                <a:solidFill>
+                  <a:srgbClr val="1B2330"/>
+                </a:solidFill>
+                <a:latin typeface="Montserrat"/>
+              </a:rPr>
+              <a:t>Parada +1 año = como nueva</a:t>
+            </a:r>
+          </a:p>
+        </p:txBody>
+      </p:sp>
+      <p:sp>
+        <p:nvSpPr>
+          <p:cNvPr id="8" name="imgph" descr="IMGQ:gas installation checklist clipboard"/>
+          <p:cNvSpPr/>
+          <p:nvPr/>
+        </p:nvSpPr>
+        <p:spPr>
+          <a:xfrm>
+            <a:off x="5806440" y="1051560"/>
+            <a:ext cx="5298947" cy="4629150"/>
+          </a:xfrm>
+          <a:prstGeom prst="roundRect">
+            <a:avLst/>
+          </a:prstGeom>
+          <a:solidFill>
+            <a:srgbClr val="F3F6FB"/>
+          </a:solidFill>
+          <a:ln w="12700">
+            <a:solidFill>
+              <a:srgbClr val="C7D2E6"/>
+            </a:solidFill>
+          </a:ln>
+          <a:effectLst/>
+        </p:spPr>
+        <p:style>
+          <a:lnRef idx="1">
+            <a:schemeClr val="accent1"/>
+          </a:lnRef>
+          <a:fillRef idx="3">
+            <a:schemeClr val="accent1"/>
+          </a:fillRef>
+          <a:effectRef idx="2">
+            <a:schemeClr val="accent1"/>
+          </a:effectRef>
+          <a:fontRef idx="minor">
+            <a:schemeClr val="lt1"/>
+          </a:fontRef>
+        </p:style>
+        <p:txBody>
+          <a:bodyPr rtlCol="0" anchor="ctr"/>
+          <a:lstStyle/>
+          <a:p>
+            <a:pPr algn="ctr"/>
+          </a:p>
+        </p:txBody>
+      </p:sp>
+      <p:sp>
+        <p:nvSpPr>
+          <p:cNvPr id="9" name="TextBox 8"/>
+          <p:cNvSpPr txBox="1"/>
+          <p:nvPr/>
+        </p:nvSpPr>
+        <p:spPr>
+          <a:xfrm>
+            <a:off x="6080760" y="2726055"/>
+            <a:ext cx="4750307" cy="1280160"/>
+          </a:xfrm>
+          <a:prstGeom prst="rect">
+            <a:avLst/>
+          </a:prstGeom>
+          <a:noFill/>
+        </p:spPr>
+        <p:txBody>
+          <a:bodyPr wrap="square">
+            <a:spAutoFit/>
+          </a:bodyPr>
+          <a:lstStyle/>
+          <a:p>
+            <a:pPr algn="ctr"/>
+            <a:r>
+              <a:rPr sz="1400" b="1" i="0">
+                <a:solidFill>
+                  <a:srgbClr val="64748B"/>
+                </a:solidFill>
+                <a:latin typeface="Montserrat"/>
+              </a:rPr>
+              <a:t>IMAGEN REALISTA</a:t>
+            </a:r>
+          </a:p>
+          <a:p>
+            <a:pPr algn="ctr"/>
+            <a:r>
+              <a:rPr sz="1100" b="0" i="1">
+                <a:solidFill>
+                  <a:srgbClr val="64748B"/>
+                </a:solidFill>
+                <a:latin typeface="Montserrat"/>
+              </a:rPr>
+              <a:t>gas installation checklist clipboard</a:t>
+            </a:r>
+          </a:p>
+        </p:txBody>
+      </p:sp>
+    </p:spTree>
+  </p:cSld>
+  <p:clrMapOvr>
+    <a:masterClrMapping/>
+  </p:clrMapOvr>
+</p:sld>
+</file>
+
+<file path=ppt/slides/slide17.xml><?xml version="1.0" encoding="utf-8"?>
+<p:sld xmlns:a="http://schemas.openxmlformats.org/drawingml/2006/main" xmlns:p="http://schemas.openxmlformats.org/presentationml/2006/main" xmlns:r="http://schemas.openxmlformats.org/officeDocument/2006/relationships">
+  <p:cSld>
+    <p:spTree>
+      <p:nvGrpSpPr>
+        <p:cNvPr id="1" name=""/>
+        <p:cNvGrpSpPr/>
+        <p:nvPr/>
+      </p:nvGrpSpPr>
+      <p:grpSpPr/>
+      <p:sp>
+        <p:nvSpPr>
+          <p:cNvPr id="2" name="Rectangle 1"/>
+          <p:cNvSpPr/>
+          <p:nvPr/>
+        </p:nvSpPr>
+        <p:spPr>
+          <a:xfrm>
+            <a:off x="0" y="0"/>
+            <a:ext cx="12191695" cy="6858000"/>
+          </a:xfrm>
+          <a:prstGeom prst="rect">
+            <a:avLst/>
+          </a:prstGeom>
+          <a:solidFill>
             <a:srgbClr val="1E2761"/>
           </a:solidFill>
           <a:ln>
@@ -7608,7 +8074,7 @@
                 </a:solidFill>
                 <a:latin typeface="Montserrat"/>
               </a:rPr>
-              <a:t>002 / 016</a:t>
+              <a:t>002 / 017</a:t>
             </a:r>
           </a:p>
         </p:txBody>
@@ -7908,7 +8374,7 @@
                 </a:solidFill>
                 <a:latin typeface="Montserrat"/>
               </a:rPr>
-              <a:t>días para comunicar (titular)</a:t>
+              <a:t>días del titular para comunicar</a:t>
             </a:r>
           </a:p>
         </p:txBody>
@@ -8121,7 +8587,7 @@
                 </a:solidFill>
                 <a:latin typeface="Montserrat"/>
               </a:rPr>
-              <a:t>003 / 016</a:t>
+              <a:t>003 / 017</a:t>
             </a:r>
           </a:p>
         </p:txBody>
@@ -8511,7 +8977,7 @@
                 </a:solidFill>
                 <a:latin typeface="Montserrat"/>
               </a:rPr>
-              <a:t>004 / 016</a:t>
+              <a:t>004 / 017</a:t>
             </a:r>
           </a:p>
         </p:txBody>
@@ -8901,7 +9367,7 @@
                 </a:solidFill>
                 <a:latin typeface="Montserrat"/>
               </a:rPr>
-              <a:t>005 / 016</a:t>
+              <a:t>005 / 017</a:t>
             </a:r>
           </a:p>
         </p:txBody>
@@ -9316,7 +9782,7 @@
                 </a:solidFill>
                 <a:latin typeface="Montserrat"/>
               </a:rPr>
-              <a:t>006 / 016</a:t>
+              <a:t>006 / 017</a:t>
             </a:r>
           </a:p>
         </p:txBody>
@@ -9706,7 +10172,7 @@
                 </a:solidFill>
                 <a:latin typeface="Montserrat"/>
               </a:rPr>
-              <a:t>007 / 016</a:t>
+              <a:t>007 / 017</a:t>
             </a:r>
           </a:p>
         </p:txBody>
@@ -10096,7 +10562,7 @@
                 </a:solidFill>
                 <a:latin typeface="Montserrat"/>
               </a:rPr>
-              <a:t>008 / 016</a:t>
+              <a:t>008 / 017</a:t>
             </a:r>
           </a:p>
         </p:txBody>
@@ -10486,7 +10952,7 @@
                 </a:solidFill>
                 <a:latin typeface="Montserrat"/>
               </a:rPr>
-              <a:t>009 / 016</a:t>
+              <a:t>009 / 017</a:t>
             </a:r>
           </a:p>
         </p:txBody>
@@ -10686,7 +11152,7 @@
                 </a:solidFill>
                 <a:latin typeface="Montserrat"/>
               </a:rPr>
-              <a:t>Inspección: organismo de control, si la ITC lo pide</a:t>
+              <a:t>Inspección: organismo de control si la ITC lo pide</a:t>
             </a:r>
           </a:p>
         </p:txBody>

--- a/Curso Gas B/00 - El Reglamento de Gas - estructura, ambito y generalidades/00 - El Reglamento de Gas - Vídeo 2.pptx
+++ b/Curso Gas B/00 - El Reglamento de Gas - estructura, ambito y generalidades/00 - El Reglamento de Gas - Vídeo 2.pptx
@@ -22,6 +22,7 @@
     <p:sldId id="270" r:id="rId22"/>
     <p:sldId id="271" r:id="rId23"/>
     <p:sldId id="272" r:id="rId24"/>
+    <p:sldId id="273" r:id="rId25"/>
   </p:sldIdLst>
   <p:sldSz cx="12191695" cy="6858000" type="screen4x3"/>
   <p:notesSz cx="6858000" cy="9144000"/>
@@ -593,12 +594,12 @@
           <a:lstStyle/>
           <a:p>
             <a:r>
-              <a:t>N1: ¿Cuántos certificados salen al terminar y quién firma cada uno?</a:t>
-            </a:r>
-          </a:p>
-          <a:p>
-            <a:r>
-              <a:t>N2: Al acabar, y con las pruebas favorables, salen certificados, pero no todos aparecen siempre. El certificado de instalación es tu factura de que está bien hecho, el documento estrella: sin él no hay gas, así de claro. Lo firma quien ejecutó la instalación, o sea, tu empresa. Después, solo en instalaciones que necesitan proyecto, aparece el certificado de dirección de obra, que lo firma el director de obra. Y solo cuando la ITC obligó a que viniera el organismo de control, aparece el certificado de inspección. La idea que te salva en el examen: siempre hay certificado de instalación; los otros dos, solo a veces. En obra la traducción es literal: sin ese boletín firmado, no puedes ni pedir el gas a la compañía.</a:t>
+              <a:t>N1: ¿Quién comprueba que la instalación está bien antes de dar gas?</a:t>
+            </a:r>
+          </a:p>
+          <a:p>
+            <a:r>
+              <a:t>N2: Aquí hay dos figuras que suenan parecido pero no son lo mismo, y confundirlas es un error clásico. La prueba la hace el que monta: eres tú comprobando tu propio trabajo, por ejemplo la prueba de estanquidad, que consiste en verificar que no se escapa ni una burbuja de gas, y se hace antes de meter gas de verdad. La inspección, en cambio, la hace un tercero independiente, el organismo de control, y solo cuando la ITC lo pide. La diferencia en una frase: una es revisar lo mío, la otra es que me revise un árbitro de fuera. Y una advertencia con la estanquidad, porque va tu firma y una casa de por medio: darla por buena sin hacerla de verdad es dejar que la fuga aparezca con el gas ya dentro y el cliente en casa. Esa prueba es tu red de seguridad; no te la saltes jamás.</a:t>
             </a:r>
           </a:p>
         </p:txBody>
@@ -668,12 +669,12 @@
           <a:lstStyle/>
           <a:p>
             <a:r>
-              <a:t>N1: Una casa lleva mucho tiempo cerrada. ¿Se reengancha el gas sin más?</a:t>
-            </a:r>
-          </a:p>
-          <a:p>
-            <a:r>
-              <a:t>N2: Vamos con el paso en que ya entra el gas. Para poner en servicio, el responsable primero recibe copia de los certificados que acabamos de ver. Y para las pruebas de funcionamiento, la empresa instaladora puede pedir al distribuidor un suministro provisional de gas, siempre asumiendo ella la responsabilidad de la instalación y de las pruebas. Hasta aquí, lo normal. Pero ahora retén esta regla porque cae fijo en el examen: si una instalación lleva más de un año sin gas, una casa cerrada, una herencia parada, no se reengancha sin más; se trata como si fuera nueva, con todos sus papeles y sus pruebas. Si lleva menos de un año y conserva su certificado de control periódico en vigor, entonces sí se puede restablecer directamente. Piensa en 'el año' como una fecha de caducidad mental: pasado el año, borrón y cuenta nueva.</a:t>
+              <a:t>N1: ¿Cuántos certificados salen al terminar y quién firma cada uno?</a:t>
+            </a:r>
+          </a:p>
+          <a:p>
+            <a:r>
+              <a:t>N2: Al acabar, y con las pruebas favorables, salen certificados, pero no todos aparecen siempre. El certificado de instalación es tu factura de que está bien hecho, el documento estrella: sin él no hay gas, así de claro. Lo firma quien ejecutó la instalación, o sea, tu empresa. Después, solo en instalaciones que necesitan proyecto, aparece el certificado de dirección de obra, que lo firma el director de obra. Y solo cuando la ITC obligó a que viniera el organismo de control, aparece el certificado de inspección. La idea que te salva en el examen: siempre hay certificado de instalación; los otros dos, solo a veces. En obra la traducción es literal: sin ese boletín firmado, no puedes ni pedir el gas a la compañía.</a:t>
             </a:r>
           </a:p>
         </p:txBody>
@@ -743,12 +744,12 @@
           <a:lstStyle/>
           <a:p>
             <a:r>
-              <a:t>N1: ¿Quién avisa a la Administración y en cuánto tiempo?</a:t>
-            </a:r>
-          </a:p>
-          <a:p>
-            <a:r>
-              <a:t>N2: Aquí van dos datos que el examen pregunta siempre juntos: quién y cuándo. El quién es el titular, el dueño de la instalación, no la empresa instaladora. En la práctica lo suele tramitar la instaladora en nombre del titular, por comodidad, pero la responsabilidad legal de comunicar es del titular, que no se te olvide. Y el cuándo: antes de que pasen treinta días desde la puesta en servicio, ante el órgano competente de la Comunidad Autónoma. Cuidado con un detalle que meten como trampa: el plazo se cuenta desde la puesta en servicio, desde que entra el gas, no desde que acabaste el montaje. Junto con esa comunicación se entrega la documentación técnica y el certificado de instalación. Regla para recordarlo: es el dueño quien avisa, y tiene un mes.</a:t>
+              <a:t>N1: Una casa lleva mucho tiempo cerrada. ¿Se reengancha el gas sin más?</a:t>
+            </a:r>
+          </a:p>
+          <a:p>
+            <a:r>
+              <a:t>N2: Vamos con el paso en que ya entra el gas. Para poner en servicio, el responsable primero recibe copia de los certificados que acabamos de ver. Y para las pruebas de funcionamiento, la empresa instaladora puede pedir al distribuidor un suministro provisional de gas, siempre asumiendo ella la responsabilidad de la instalación y de las pruebas. Hasta aquí, lo normal. Pero ahora retén esta regla porque cae fijo en el examen: si una instalación lleva más de un año sin gas, una casa cerrada, una herencia parada, no se reengancha sin más; se trata como si fuera nueva, con todos sus papeles y sus pruebas. Si lleva menos de un año y conserva su certificado de control periódico en vigor, entonces sí se puede restablecer directamente. Piensa en 'el año' como una fecha de caducidad mental: pasado el año, borrón y cuenta nueva.</a:t>
             </a:r>
           </a:p>
         </p:txBody>
@@ -818,12 +819,12 @@
           <a:lstStyle/>
           <a:p>
             <a:r>
-              <a:t>N1: La puesta en marcha del aparato, ¿es encender y ya está?</a:t>
-            </a:r>
-          </a:p>
-          <a:p>
-            <a:r>
-              <a:t>N2: No, y esta distinción es importante. La puesta en marcha se hace según la ITC-ICG cero ocho, y no consiste en darle al botón y ver que enciende. Es verificar tres cosas: que la caldera o el calentador funcionan con el gas para el que fueron diseñados, con su presión correcta, y que la combustión cae dentro de los parámetros que marca el fabricante. Por qué se hace bien: hacerla mal o saltártela es la puerta directa a la mala combustión, la llama amarilla, el ennegrecido, el aparato que se apaga solo y el monóxido de carbono. Quien la realiza emite y entrega al usuario, no al titular, un certificado de puesta en marcha. Ese papel es la prueba de que el aparato arrancó bien y en condiciones seguras. Piénsalo como el 'estreno' controlado del aparato, no como un simple encendido.</a:t>
+              <a:t>N1: ¿Quién avisa a la Administración y en cuánto tiempo?</a:t>
+            </a:r>
+          </a:p>
+          <a:p>
+            <a:r>
+              <a:t>N2: Aquí van dos datos que el examen pregunta siempre juntos: quién y cuándo. El quién es el titular, el dueño de la instalación, no la empresa instaladora. En la práctica lo suele tramitar la instaladora en nombre del titular, por comodidad, pero la responsabilidad legal de comunicar es del titular, que no se te olvide. Y el cuándo: antes de que pasen treinta días desde la puesta en servicio, ante el órgano competente de la Comunidad Autónoma. Cuidado con un detalle que meten como trampa: el plazo se cuenta desde la puesta en servicio, desde que entra el gas, no desde que acabaste el montaje. Junto con esa comunicación se entrega la documentación técnica y el certificado de instalación. Regla para recordarlo: es el dueño quien avisa, y tiene un mes.</a:t>
             </a:r>
           </a:p>
         </p:txBody>
@@ -893,12 +894,12 @@
           <a:lstStyle/>
           <a:p>
             <a:r>
-              <a:t>N1: Se juntan tres certificados y me lío. ¿Cómo los separo de una vez?</a:t>
-            </a:r>
-          </a:p>
-          <a:p>
-            <a:r>
-              <a:t>N2: Paramos un momento a ordenar los tres, porque 'quién firma cada uno' es de las preguntas más repetidas de todo el examen. Míralos como tres papeles distintos, cada uno con su firmante. El certificado de instalación lo firma la empresa que ejecutó la obra, y no falta nunca. El certificado de dirección de obra lo firma el director de obra, y solo aparece si hubo proyecto, es decir, obra grande. Y el certificado de puesta en marcha lo firma el agente de puesta en marcha, va del aparato y se entrega al usuario. Truco para fijarlo: instalación va de la obra, dirección de obra va del proyecto, puesta en marcha va del aparato. Si asocias cada certificado con su 'de qué va', ya no los cruzas ni con trampa.</a:t>
+              <a:t>N1: La puesta en marcha del aparato, ¿es encender y ya está?</a:t>
+            </a:r>
+          </a:p>
+          <a:p>
+            <a:r>
+              <a:t>N2: No, y esta distinción es importante. La puesta en marcha se hace según la ITC-ICG cero ocho, y no consiste en darle al botón y ver que enciende. Es verificar tres cosas: que la caldera o el calentador funcionan con el gas para el que fueron diseñados, con su presión correcta, y que la combustión cae dentro de los parámetros que marca el fabricante. Por qué se hace bien: hacerla mal o saltártela es la puerta directa a la mala combustión, la llama amarilla, el ennegrecido, el aparato que se apaga solo y el monóxido de carbono. Quien la realiza emite y entrega al usuario, no al titular, un certificado de puesta en marcha. Ese papel es la prueba de que el aparato arrancó bien y en condiciones seguras. Piénsalo como el 'estreno' controlado del aparato, no como un simple encendido.</a:t>
             </a:r>
           </a:p>
         </p:txBody>
@@ -968,12 +969,12 @@
           <a:lstStyle/>
           <a:p>
             <a:r>
-              <a:t>N1: ¿Qué información tiene derecho a recibir el cliente?</a:t>
-            </a:r>
-          </a:p>
-          <a:p>
-            <a:r>
-              <a:t>N2: Bastante, y parte se la das tú. Como anexo al certificado de instalación que entregas al titular, la empresa instaladora confecciona unas instrucciones de uso y mantenimiento. Y en todo caso incluyen un croquis del trazado, o sea un dibujo de por dónde van los tubos, con sus materiales, uniones y válvulas. El cliente tiene derecho a saber por dónde pasa su gas, y ese plano se lo entregas tú con la instalación. Además, por su lado, el suministrador facilita a sus clientes, por escrito y con periodicidad al menos bienal, recomendaciones de seguridad. Ojo a la palabra: bienal significa cada dos años; no la confundas con bianual, que sería dos veces al año. Aquí es cada dos años como mínimo. Un recordatorio de seguridad que llega puntual y un croquis claro son detalles de un buen profesional.</a:t>
+              <a:t>N1: Se juntan tres certificados y me lío. ¿Cómo los separo de una vez?</a:t>
+            </a:r>
+          </a:p>
+          <a:p>
+            <a:r>
+              <a:t>N2: Paramos un momento a ordenar los tres, porque 'quién firma cada uno' es de las preguntas más repetidas de todo el examen. Míralos como tres papeles distintos, cada uno con su firmante. El certificado de instalación lo firma la empresa que ejecutó la obra, y no falta nunca. El certificado de dirección de obra lo firma el director de obra, y solo aparece si hubo proyecto, es decir, obra grande. Y el certificado de puesta en marcha lo firma el agente de puesta en marcha, va del aparato y se entrega al usuario. Truco para fijarlo: instalación va de la obra, dirección de obra va del proyecto, puesta en marcha va del aparato. Si asocias cada certificado con su 'de qué va', ya no los cruzas ni con trampa.</a:t>
             </a:r>
           </a:p>
         </p:txBody>
@@ -1043,12 +1044,12 @@
           <a:lstStyle/>
           <a:p>
             <a:r>
-              <a:t>N1: Repaso rápido antes de cerrar. ¿Tengo los cuatro pilares?</a:t>
-            </a:r>
-          </a:p>
-          <a:p>
-            <a:r>
-              <a:t>N2: Vamos a fijarlos en treinta segundos y en voz alta. Uno, la película de ocho pasos: diseño, autorización, ejecución, pruebas, certificados, puesta en servicio, comunicación y puesta en marcha, en ese orden exacto. Dos, de los tres certificados de arranque, el de instalación siempre; el de dirección de obra solo si hubo proyecto; y el de inspección solo si la ITC lo exige. Tres, el titular comunica a la Comunidad Autónoma antes de treinta días desde la puesta en servicio. Y cuatro, la regla del año: una instalación parada más de un año se trata como si fuera nueva. Recítalos una vez de carrerilla y, si los sueltas sin trabarte, tienes el vídeo dominado.</a:t>
+              <a:t>N1: ¿Qué información tiene derecho a recibir el cliente?</a:t>
+            </a:r>
+          </a:p>
+          <a:p>
+            <a:r>
+              <a:t>N2: Bastante, y parte se la das tú. Como anexo al certificado de instalación que entregas al titular, la empresa instaladora confecciona unas instrucciones de uso y mantenimiento. Y en todo caso incluyen un croquis del trazado, o sea un dibujo de por dónde van los tubos, con sus materiales, uniones y válvulas. El cliente tiene derecho a saber por dónde pasa su gas, y ese plano se lo entregas tú con la instalación. Además, por su lado, el suministrador facilita a sus clientes, por escrito y con periodicidad al menos bienal, recomendaciones de seguridad. Ojo a la palabra: bienal significa cada dos años; no la confundas con bianual, que sería dos veces al año. Aquí es cada dos años como mínimo. Un recordatorio de seguridad que llega puntual y un croquis claro son detalles de un buen profesional.</a:t>
             </a:r>
           </a:p>
         </p:txBody>
@@ -1118,6 +1119,81 @@
           <a:lstStyle/>
           <a:p>
             <a:r>
+              <a:t>N1: Repaso rápido antes de cerrar. ¿Tengo los cuatro pilares?</a:t>
+            </a:r>
+          </a:p>
+          <a:p>
+            <a:r>
+              <a:t>N2: Vamos a fijarlos en treinta segundos y en voz alta. Uno, la película de ocho pasos: diseño, autorización, ejecución, pruebas, certificados, puesta en servicio, comunicación y puesta en marcha, en ese orden exacto. Dos, de los tres certificados de arranque, el de instalación siempre; el de dirección de obra solo si hubo proyecto; y el de inspección solo si la ITC lo exige. Tres, el titular comunica a la Comunidad Autónoma antes de treinta días desde la puesta en servicio. Y cuatro, la regla del año: una instalación parada más de un año se trata como si fuera nueva. Recítalos una vez de carrerilla y, si los sueltas sin trabarte, tienes el vídeo dominado.</a:t>
+            </a:r>
+          </a:p>
+        </p:txBody>
+      </p:sp>
+      <p:sp>
+        <p:nvSpPr>
+          <p:cNvPr id="4" name="Slide Number Placeholder 3"/>
+          <p:cNvSpPr>
+            <a:spLocks noGrp="1"/>
+          </p:cNvSpPr>
+          <p:nvPr>
+            <p:ph type="sldNum" idx="5" sz="quarter"/>
+          </p:nvPr>
+        </p:nvSpPr>
+        <p:spPr/>
+      </p:sp>
+    </p:spTree>
+  </p:cSld>
+  <p:clrMapOvr>
+    <a:masterClrMapping/>
+  </p:clrMapOvr>
+</p:notes>
+</file>
+
+<file path=ppt/notesSlides/notesSlide18.xml><?xml version="1.0" encoding="utf-8"?>
+<p:notes xmlns:a="http://schemas.openxmlformats.org/drawingml/2006/main" xmlns:p="http://schemas.openxmlformats.org/presentationml/2006/main" xmlns:r="http://schemas.openxmlformats.org/officeDocument/2006/relationships">
+  <p:cSld>
+    <p:spTree>
+      <p:nvGrpSpPr>
+        <p:cNvPr id="1" name=""/>
+        <p:cNvGrpSpPr/>
+        <p:nvPr/>
+      </p:nvGrpSpPr>
+      <p:grpSpPr>
+        <a:xfrm>
+          <a:off x="0" y="0"/>
+          <a:ext cx="0" cy="0"/>
+          <a:chOff x="0" y="0"/>
+          <a:chExt cx="0" cy="0"/>
+        </a:xfrm>
+      </p:grpSpPr>
+      <p:sp>
+        <p:nvSpPr>
+          <p:cNvPr id="2" name="Slide Image Placeholder 1"/>
+          <p:cNvSpPr>
+            <a:spLocks noGrp="1"/>
+          </p:cNvSpPr>
+          <p:nvPr>
+            <p:ph type="sldImg" idx="2"/>
+          </p:nvPr>
+        </p:nvSpPr>
+        <p:spPr/>
+      </p:sp>
+      <p:sp>
+        <p:nvSpPr>
+          <p:cNvPr id="3" name="Notes Placeholder 2"/>
+          <p:cNvSpPr>
+            <a:spLocks noGrp="1"/>
+          </p:cNvSpPr>
+          <p:nvPr>
+            <p:ph type="body" idx="3" sz="quarter"/>
+          </p:nvPr>
+        </p:nvSpPr>
+        <p:spPr/>
+        <p:txBody>
+          <a:bodyPr/>
+          <a:lstStyle/>
+          <a:p>
+            <a:r>
               <a:t>N1: Gran final. ¿Qué soy capaz de hacer hoy que ayer no?</a:t>
             </a:r>
           </a:p>
@@ -1276,16 +1352,7 @@
         <p:txBody>
           <a:bodyPr/>
           <a:lstStyle/>
-          <a:p>
-            <a:r>
-              <a:t>N1: ¿Por qué el material tiene que llevar un marcado que no se borre?</a:t>
-            </a:r>
-          </a:p>
-          <a:p>
-            <a:r>
-              <a:t>N2: Empecemos por la palabra rara: indeleble significa que no se borra. El Reglamento lo exige por una razón muy práctica. Dentro de diez años, cuando alguien revise ese tubo o esa válvula, tiene que poder leer todavía de qué material es y quién lo fabricó. Una pegatina que se despega no sirve para eso. Por eso te propongo verlo como el documento de identidad del material: grabado, permanente y legible, con el fabricante, la marca y el modelo. Y hay un atajo de confianza: se consideran conformes los materiales amparados por certificados y marcas de conformidad a normas otorgados por las entidades de certificación. En obra la moraleja es directa: si la etiqueta ya no se lee, ese material te va a dar problemas el día que haya que reclamar, porque no sabrás ni qué es ni a quién.</a:t>
-            </a:r>
-          </a:p>
+          <a:p/>
         </p:txBody>
       </p:sp>
       <p:sp>
@@ -1353,12 +1420,12 @@
           <a:lstStyle/>
           <a:p>
             <a:r>
-              <a:t>N1: ¿En qué idioma tienen que venir las instrucciones del material?</a:t>
-            </a:r>
-          </a:p>
-          <a:p>
-            <a:r>
-              <a:t>N2: Respuesta corta y que cae tal cual en el examen: al menos en castellano. Fíjate en el 'al menos', porque es la clave. Significa que el castellano es el mínimo obligatorio, el suelo. Pueden venir además en inglés, en francés o en los idiomas que quieran, sin problema, pero en castellano siempre. ¿Cómo te lo van a intentar colar? Con una opción que diga que las instrucciones pueden venir solo en inglés: eso es falso, sáltatela. Y no olvides el fondo: esas instrucciones deben incluir lo necesario para el uso específico del equipo, para que quien lo instale y quien lo use sepan manejarlo bien. Es una de esas preguntas cortas que te regalan un punto si la tienes clara.</a:t>
+              <a:t>N1: ¿Por qué el material tiene que llevar un marcado que no se borre?</a:t>
+            </a:r>
+          </a:p>
+          <a:p>
+            <a:r>
+              <a:t>N2: Empecemos por la palabra rara: indeleble significa que no se borra. El Reglamento lo exige por una razón muy práctica. Dentro de diez años, cuando alguien revise ese tubo o esa válvula, tiene que poder leer todavía de qué material es y quién lo fabricó. Una pegatina que se despega no sirve para eso. Por eso te propongo verlo como el documento de identidad del material: grabado, permanente y legible, con el fabricante, la marca y el modelo. Y hay un atajo de confianza: se consideran conformes los materiales amparados por certificados y marcas de conformidad a normas otorgados por las entidades de certificación. En obra la moraleja es directa: si la etiqueta ya no se lee, ese material te va a dar problemas el día que haya que reclamar, porque no sabrás ni qué es ni a quién.</a:t>
             </a:r>
           </a:p>
         </p:txBody>
@@ -1428,12 +1495,12 @@
           <a:lstStyle/>
           <a:p>
             <a:r>
-              <a:t>N1: El artículo quinto tiene muchos subapartados. ¿Cómo no perderse?</a:t>
-            </a:r>
-          </a:p>
-          <a:p>
-            <a:r>
-              <a:t>N2: El secreto es no verlo como una lista suelta de normas, sino como una película con ocho capítulos que van en orden. Te la cuento entera para que la veas moverse. Capítulo uno, el diseño: los papeles. Dos, la autorización: por si hace falta pedir permiso. Tres, la ejecución: el montaje físico. Cuatro, las pruebas: a ver si aguanta. Cinco, los certificados: las firmas. Seis, la puesta en servicio: aquí ya entra el gas. Siete, la comunicación: avisar a la Administración. Y ocho, la puesta en marcha: arrancar los aparatos. Cuando te sabes la película en orden, los detalles de cada capítulo caen solos, porque cada uno tiene sentido después del anterior. Graba esta secuencia, porque es literalmente el guion de todas tus obras.</a:t>
+              <a:t>N1: ¿En qué idioma tienen que venir las instrucciones del material?</a:t>
+            </a:r>
+          </a:p>
+          <a:p>
+            <a:r>
+              <a:t>N2: Respuesta corta y que cae tal cual en el examen: al menos en castellano. Fíjate en el 'al menos', porque es la clave. Significa que el castellano es el mínimo obligatorio, el suelo. Pueden venir además en inglés, en francés o en los idiomas que quieran, sin problema, pero en castellano siempre. ¿Cómo te lo van a intentar colar? Con una opción que diga que las instrucciones pueden venir solo en inglés: eso es falso, sáltatela. Y no olvides el fondo: esas instrucciones deben incluir lo necesario para el uso específico del equipo, para que quien lo instale y quien lo use sepan manejarlo bien. Es una de esas preguntas cortas que te regalan un punto si la tienes clara.</a:t>
             </a:r>
           </a:p>
         </p:txBody>
@@ -1503,12 +1570,12 @@
           <a:lstStyle/>
           <a:p>
             <a:r>
-              <a:t>N1: Cada instalación necesita papeles, pero ¿proyecto o memoria técnica?</a:t>
-            </a:r>
-          </a:p>
-          <a:p>
-            <a:r>
-              <a:t>N2: Toda instalación necesita una documentación técnica que demuestre que cumple, y adopta una de dos formas. Regla mental sencilla: instalación grande o complicada, proyecto, que lo firma un técnico titulado, un ingeniero; instalación normal o pequeña, memoria técnica, que la puede firmar el instalador en la categoría que marque la ITC-ICG cero nueve. La comparación que lo fija: es como ir al médico. Un catarro lo ve tu médico de cabecera, esa es la memoria; una operación seria la lleva el especialista, ese es el proyecto. Y el tamaño de cada caso lo decide su ITC. Ahora la parte seria, y retenla: quien firma es directamente responsable de que todo se ajuste al Reglamento. En gas la firma no es un trámite; si firmas y algo está mal, respondes tú. Por eso hay una norma de oro que te acompañará toda la vida: no se firma nada que no hayas comprobado con tus manos.</a:t>
+              <a:t>N1: El artículo quinto tiene muchos subapartados. ¿Cómo no perderse?</a:t>
+            </a:r>
+          </a:p>
+          <a:p>
+            <a:r>
+              <a:t>N2: El secreto es no verlo como una lista suelta de normas, sino como una película con ocho capítulos que van en orden. Te la cuento entera para que la veas moverse. Capítulo uno, el diseño: los papeles. Dos, la autorización: por si hace falta pedir permiso. Tres, la ejecución: el montaje físico. Cuatro, las pruebas: a ver si aguanta. Cinco, los certificados: las firmas. Seis, la puesta en servicio: aquí ya entra el gas. Siete, la comunicación: avisar a la Administración. Y ocho, la puesta en marcha: arrancar los aparatos. Cuando te sabes la película en orden, los detalles de cada capítulo caen solos, porque cada uno tiene sentido después del anterior. Graba esta secuencia, porque es literalmente el guion de todas tus obras.</a:t>
             </a:r>
           </a:p>
         </p:txBody>
@@ -1578,12 +1645,12 @@
           <a:lstStyle/>
           <a:p>
             <a:r>
-              <a:t>N1: ¿Toda instalación necesita que la Administración dé permiso antes de empezar?</a:t>
-            </a:r>
-          </a:p>
-          <a:p>
-            <a:r>
-              <a:t>N2: No, y aquí hay una confusión muy típica que conviene deshacer ya. No mezcles autorización con comunicación, porque suenan parecido pero son momentos opuestos. La autorización es un permiso previo, pedir antes de hacer, y solo se exige cuando lo manda la Ley de hidrocarburos y así lo dice la ITC: se reserva a los casos gordos, las instalaciones grandes. La comunicación, en cambio, es avisar después de hacer, y de esa hablaremos en el paso siete. Para que lo fijes: en Gas B lo normal es hacer y comunicar, no pedir permiso y esperar. Si en el examen te preguntan, la autorización previa es la excepción, no la regla; la inmensa mayoría de instalaciones domésticas no la necesitan.</a:t>
+              <a:t>N1: Cada instalación necesita papeles, pero ¿proyecto o memoria técnica?</a:t>
+            </a:r>
+          </a:p>
+          <a:p>
+            <a:r>
+              <a:t>N2: Toda instalación necesita una documentación técnica que demuestre que cumple, y adopta una de dos formas. Regla mental sencilla: instalación grande o complicada, proyecto, que lo firma un técnico titulado, un ingeniero; instalación normal o pequeña, memoria técnica, que la puede firmar el instalador en la categoría que marque la ITC-ICG cero nueve. La comparación que lo fija: es como ir al médico. Un catarro lo ve tu médico de cabecera, esa es la memoria; una operación seria la lleva el especialista, ese es el proyecto. Y el tamaño de cada caso lo decide su ITC. Ahora la parte seria, y retenla: quien firma es directamente responsable de que todo se ajuste al Reglamento. En gas la firma no es un trámite; si firmas y algo está mal, respondes tú. Por eso hay una norma de oro que te acompañará toda la vida: no se firma nada que no hayas comprobado con tus manos.</a:t>
             </a:r>
           </a:p>
         </p:txBody>
@@ -1653,12 +1720,12 @@
           <a:lstStyle/>
           <a:p>
             <a:r>
-              <a:t>N1: Cuando mi tubo de gas se cruza con la luz o el agua, ¿qué manda?</a:t>
-            </a:r>
-          </a:p>
-          <a:p>
-            <a:r>
-              <a:t>N2: Vamos por partes. Las instalaciones las ejecutan las empresas que determine cada ITC, no cualquiera. Y cuando tu tubo de gas se encuentra con otros servicios, aparecen dos situaciones con nombre propio: el cruce, cuando lo atraviesa, y el paralelismo, cuando va al lado en la misma dirección. En ambos casos, con la electricidad, el agua o el saneamiento, hay que respetar distancias mínimas de seguridad para que no se toquen ni se afecten entre ellos, por ejemplo para que un cable no caliente tu tubo. Ese es el sentido de 'cruces y paralelismos'. Aquí el Reglamento solo lo enuncia, dice que hay que respetarlas; el cuántos centímetros exactos lo encontrarás en la norma UNE, que verás más adelante. De momento quédate con la idea firme: el gas nunca va pegado a otro servicio sin respetar su distancia.</a:t>
+              <a:t>N1: ¿Toda instalación necesita que la Administración dé permiso antes de empezar?</a:t>
+            </a:r>
+          </a:p>
+          <a:p>
+            <a:r>
+              <a:t>N2: No, y aquí hay una confusión muy típica que conviene deshacer ya. No mezcles autorización con comunicación, porque suenan parecido pero son momentos opuestos. La autorización es un permiso previo, pedir antes de hacer, y solo se exige cuando lo manda la Ley de hidrocarburos y así lo dice la ITC: se reserva a los casos gordos, las instalaciones grandes. La comunicación, en cambio, es avisar después de hacer, y de esa hablaremos en el paso siete. Para que lo fijes: en Gas B lo normal es hacer y comunicar, no pedir permiso y esperar. Si en el examen te preguntan, la autorización previa es la excepción, no la regla; la inmensa mayoría de instalaciones domésticas no la necesitan.</a:t>
             </a:r>
           </a:p>
         </p:txBody>
@@ -1728,12 +1795,12 @@
           <a:lstStyle/>
           <a:p>
             <a:r>
-              <a:t>N1: ¿Quién comprueba que la instalación está bien antes de dar gas?</a:t>
-            </a:r>
-          </a:p>
-          <a:p>
-            <a:r>
-              <a:t>N2: Aquí hay dos figuras que suenan parecido pero no son lo mismo, y confundirlas es un error clásico. La prueba la hace el que monta: eres tú comprobando tu propio trabajo, por ejemplo la prueba de estanquidad, que consiste en verificar que no se escapa ni una burbuja de gas, y se hace antes de meter gas de verdad. La inspección, en cambio, la hace un tercero independiente, el organismo de control, y solo cuando la ITC lo pide. La diferencia en una frase: una es revisar lo mío, la otra es que me revise un árbitro de fuera. Y una advertencia con la estanquidad, porque va tu firma y una casa de por medio: darla por buena sin hacerla de verdad es dejar que la fuga aparezca con el gas ya dentro y el cliente en casa. Esa prueba es tu red de seguridad; no te la saltes jamás.</a:t>
+              <a:t>N1: Cuando mi tubo de gas se cruza con la luz o el agua, ¿qué manda?</a:t>
+            </a:r>
+          </a:p>
+          <a:p>
+            <a:r>
+              <a:t>N2: Vamos por partes. Las instalaciones las ejecutan las empresas que determine cada ITC, no cualquiera. Y cuando tu tubo de gas se encuentra con otros servicios, aparecen dos situaciones con nombre propio: el cruce, cuando lo atraviesa, y el paralelismo, cuando va al lado en la misma dirección. En ambos casos, con la electricidad, el agua o el saneamiento, hay que respetar distancias mínimas de seguridad para que no se toquen ni se afecten entre ellos, por ejemplo para que un cable no caliente tu tubo. Ese es el sentido de 'cruces y paralelismos'. Aquí el Reglamento solo lo enuncia, dice que hay que respetarlas; el cuántos centímetros exactos lo encontrarás en la norma UNE, que verás más adelante. De momento quédate con la idea firme: el gas nunca va pegado a otro servicio sin respetar su distancia.</a:t>
             </a:r>
           </a:p>
         </p:txBody>
@@ -4808,7 +4875,7 @@
             <a:r>
               <a:rPr sz="1400" b="1" i="0">
                 <a:solidFill>
-                  <a:srgbClr val="CADCFC"/>
+                  <a:srgbClr val="F4A24C"/>
                 </a:solidFill>
                 <a:latin typeface="Montserrat"/>
               </a:rPr>
@@ -4819,13 +4886,57 @@
       </p:sp>
       <p:sp>
         <p:nvSpPr>
-          <p:cNvPr id="4" name="TextBox 3"/>
+          <p:cNvPr id="4" name="Rounded Rectangle 3"/>
+          <p:cNvSpPr/>
+          <p:nvPr/>
+        </p:nvSpPr>
+        <p:spPr>
+          <a:xfrm>
+            <a:off x="868680" y="2057400"/>
+            <a:ext cx="1463040" cy="82296"/>
+          </a:xfrm>
+          <a:prstGeom prst="roundRect">
+            <a:avLst/>
+          </a:prstGeom>
+          <a:solidFill>
+            <a:srgbClr val="E8801A"/>
+          </a:solidFill>
+          <a:ln>
+            <a:noFill/>
+          </a:ln>
+          <a:effectLst/>
+        </p:spPr>
+        <p:style>
+          <a:lnRef idx="1">
+            <a:schemeClr val="accent1"/>
+          </a:lnRef>
+          <a:fillRef idx="3">
+            <a:schemeClr val="accent1"/>
+          </a:fillRef>
+          <a:effectRef idx="2">
+            <a:schemeClr val="accent1"/>
+          </a:effectRef>
+          <a:fontRef idx="minor">
+            <a:schemeClr val="lt1"/>
+          </a:fontRef>
+        </p:style>
+        <p:txBody>
+          <a:bodyPr rtlCol="0" anchor="ctr"/>
+          <a:lstStyle/>
+          <a:p>
+            <a:pPr algn="ctr"/>
+          </a:p>
+        </p:txBody>
+      </p:sp>
+      <p:sp>
+        <p:nvSpPr>
+          <p:cNvPr id="5" name="TextBox 4"/>
           <p:cNvSpPr txBox="1"/>
           <p:nvPr/>
         </p:nvSpPr>
         <p:spPr>
           <a:xfrm>
-            <a:off x="822960" y="2194560"/>
+            <a:off x="822960" y="2286000"/>
             <a:ext cx="10515600" cy="2011680"/>
           </a:xfrm>
           <a:prstGeom prst="rect">
@@ -4864,7 +4975,7 @@
       </p:sp>
       <p:sp>
         <p:nvSpPr>
-          <p:cNvPr id="5" name="TextBox 4"/>
+          <p:cNvPr id="6" name="TextBox 5"/>
           <p:cNvSpPr txBox="1"/>
           <p:nvPr/>
         </p:nvSpPr>
@@ -4988,7 +5099,7 @@
                 </a:solidFill>
                 <a:latin typeface="Montserrat"/>
               </a:rPr>
-              <a:t>010 / 017</a:t>
+              <a:t>010 / 018</a:t>
             </a:r>
           </a:p>
         </p:txBody>
@@ -5036,7 +5147,7 @@
         <p:spPr>
           <a:xfrm>
             <a:off x="822960" y="457200"/>
-            <a:ext cx="8229600" cy="365760"/>
+            <a:ext cx="10058400" cy="365760"/>
           </a:xfrm>
           <a:prstGeom prst="rect">
             <a:avLst/>
@@ -5050,13 +5161,13 @@
           <a:lstStyle/>
           <a:p>
             <a:r>
-              <a:rPr sz="1200" b="1" i="0">
-                <a:solidFill>
-                  <a:srgbClr val="64748B"/>
-                </a:solidFill>
-                <a:latin typeface="Montserrat"/>
-              </a:rPr>
-              <a:t>ARTÍCULO 5.5 · CERTIFICADOS</a:t>
+              <a:rPr sz="1300" b="1" i="0">
+                <a:solidFill>
+                  <a:srgbClr val="E8801A"/>
+                </a:solidFill>
+                <a:latin typeface="Montserrat"/>
+              </a:rPr>
+              <a:t>ARTÍCULO 5.4 · PRUEBAS E INSPECCIONES</a:t>
             </a:r>
           </a:p>
         </p:txBody>
@@ -5084,26 +5195,70 @@
           <a:lstStyle/>
           <a:p>
             <a:r>
-              <a:rPr sz="2700" b="1" i="0">
+              <a:rPr sz="2800" b="1" i="0">
                 <a:solidFill>
                   <a:srgbClr val="1E2761"/>
                 </a:solidFill>
                 <a:latin typeface="Montserrat"/>
               </a:rPr>
-              <a:t>El boletín es tu documento estrella</a:t>
-            </a:r>
-          </a:p>
-        </p:txBody>
-      </p:sp>
-      <p:sp>
-        <p:nvSpPr>
-          <p:cNvPr id="7" name="TextBox 6"/>
+              <a:t>Prueba tuya, inspección de un tercero</a:t>
+            </a:r>
+          </a:p>
+        </p:txBody>
+      </p:sp>
+      <p:sp>
+        <p:nvSpPr>
+          <p:cNvPr id="7" name="Rounded Rectangle 6"/>
+          <p:cNvSpPr/>
+          <p:nvPr/>
+        </p:nvSpPr>
+        <p:spPr>
+          <a:xfrm>
+            <a:off x="868680" y="1627632"/>
+            <a:ext cx="2011680" cy="73152"/>
+          </a:xfrm>
+          <a:prstGeom prst="roundRect">
+            <a:avLst/>
+          </a:prstGeom>
+          <a:solidFill>
+            <a:srgbClr val="E8801A"/>
+          </a:solidFill>
+          <a:ln>
+            <a:noFill/>
+          </a:ln>
+          <a:effectLst/>
+        </p:spPr>
+        <p:style>
+          <a:lnRef idx="1">
+            <a:schemeClr val="accent1"/>
+          </a:lnRef>
+          <a:fillRef idx="3">
+            <a:schemeClr val="accent1"/>
+          </a:fillRef>
+          <a:effectRef idx="2">
+            <a:schemeClr val="accent1"/>
+          </a:effectRef>
+          <a:fontRef idx="minor">
+            <a:schemeClr val="lt1"/>
+          </a:fontRef>
+        </p:style>
+        <p:txBody>
+          <a:bodyPr rtlCol="0" anchor="ctr"/>
+          <a:lstStyle/>
+          <a:p>
+            <a:pPr algn="ctr"/>
+          </a:p>
+        </p:txBody>
+      </p:sp>
+      <p:sp>
+        <p:nvSpPr>
+          <p:cNvPr id="8" name="TextBox 7"/>
           <p:cNvSpPr txBox="1"/>
           <p:nvPr/>
         </p:nvSpPr>
         <p:spPr>
           <a:xfrm>
-            <a:off x="822960" y="1920240"/>
+            <a:off x="822960" y="1965960"/>
             <a:ext cx="4983480" cy="4206240"/>
           </a:xfrm>
           <a:prstGeom prst="rect">
@@ -5119,17 +5274,17 @@
           <a:p>
             <a:pPr>
               <a:spcAft>
-                <a:spcPts val="1000"/>
+                <a:spcPts val="1100"/>
               </a:spcAft>
             </a:pPr>
             <a:r>
               <a:rPr sz="1600" b="1" i="0">
                 <a:solidFill>
-                  <a:srgbClr val="2E3A80"/>
-                </a:solidFill>
-                <a:latin typeface="Montserrat"/>
-              </a:rPr>
-              <a:t>•  </a:t>
+                  <a:srgbClr val="E8801A"/>
+                </a:solidFill>
+                <a:latin typeface="Montserrat"/>
+              </a:rPr>
+              <a:t>▸  </a:t>
             </a:r>
             <a:r>
               <a:rPr sz="1600" b="0" i="0">
@@ -5138,23 +5293,23 @@
                 </a:solidFill>
                 <a:latin typeface="Montserrat"/>
               </a:rPr>
-              <a:t>Instalación: siempre, lo firma quien ejecuta</a:t>
+              <a:t>Prueba: la hace quien monta</a:t>
             </a:r>
           </a:p>
           <a:p>
             <a:pPr>
               <a:spcAft>
-                <a:spcPts val="1000"/>
+                <a:spcPts val="1100"/>
               </a:spcAft>
             </a:pPr>
             <a:r>
               <a:rPr sz="1600" b="1" i="0">
                 <a:solidFill>
-                  <a:srgbClr val="2E3A80"/>
-                </a:solidFill>
-                <a:latin typeface="Montserrat"/>
-              </a:rPr>
-              <a:t>•  </a:t>
+                  <a:srgbClr val="E8801A"/>
+                </a:solidFill>
+                <a:latin typeface="Montserrat"/>
+              </a:rPr>
+              <a:t>▸  </a:t>
             </a:r>
             <a:r>
               <a:rPr sz="1600" b="0" i="0">
@@ -5163,23 +5318,23 @@
                 </a:solidFill>
                 <a:latin typeface="Montserrat"/>
               </a:rPr>
-              <a:t>Dirección de obra: solo si hubo proyecto</a:t>
+              <a:t>Estanquidad antes de meter gas</a:t>
             </a:r>
           </a:p>
           <a:p>
             <a:pPr>
               <a:spcAft>
-                <a:spcPts val="1000"/>
+                <a:spcPts val="1100"/>
               </a:spcAft>
             </a:pPr>
             <a:r>
               <a:rPr sz="1600" b="1" i="0">
                 <a:solidFill>
-                  <a:srgbClr val="2E3A80"/>
-                </a:solidFill>
-                <a:latin typeface="Montserrat"/>
-              </a:rPr>
-              <a:t>•  </a:t>
+                  <a:srgbClr val="E8801A"/>
+                </a:solidFill>
+                <a:latin typeface="Montserrat"/>
+              </a:rPr>
+              <a:t>▸  </a:t>
             </a:r>
             <a:r>
               <a:rPr sz="1600" b="0" i="0">
@@ -5188,14 +5343,14 @@
                 </a:solidFill>
                 <a:latin typeface="Montserrat"/>
               </a:rPr>
-              <a:t>Inspección: solo si la ITC lo exige</a:t>
-            </a:r>
-          </a:p>
-        </p:txBody>
-      </p:sp>
-      <p:sp>
-        <p:nvSpPr>
-          <p:cNvPr id="8" name="imgph" descr="IMGQ:signing official certificate form"/>
+              <a:t>Inspección: organismo de control si la ITC lo pide</a:t>
+            </a:r>
+          </a:p>
+        </p:txBody>
+      </p:sp>
+      <p:sp>
+        <p:nvSpPr>
+          <p:cNvPr id="9" name="imgph" descr="IMGQ:pressure gauge gas pipe testing"/>
           <p:cNvSpPr/>
           <p:nvPr/>
         </p:nvSpPr>
@@ -5241,7 +5396,7 @@
       </p:sp>
       <p:sp>
         <p:nvSpPr>
-          <p:cNvPr id="9" name="TextBox 8"/>
+          <p:cNvPr id="10" name="TextBox 9"/>
           <p:cNvSpPr txBox="1"/>
           <p:nvPr/>
         </p:nvSpPr>
@@ -5281,7 +5436,7 @@
                 </a:solidFill>
                 <a:latin typeface="Montserrat"/>
               </a:rPr>
-              <a:t>signing official certificate form</a:t>
+              <a:t>pressure gauge gas pipe testing</a:t>
             </a:r>
           </a:p>
         </p:txBody>
@@ -5378,7 +5533,7 @@
                 </a:solidFill>
                 <a:latin typeface="Montserrat"/>
               </a:rPr>
-              <a:t>011 / 017</a:t>
+              <a:t>011 / 018</a:t>
             </a:r>
           </a:p>
         </p:txBody>
@@ -5426,7 +5581,7 @@
         <p:spPr>
           <a:xfrm>
             <a:off x="822960" y="457200"/>
-            <a:ext cx="8229600" cy="365760"/>
+            <a:ext cx="10058400" cy="365760"/>
           </a:xfrm>
           <a:prstGeom prst="rect">
             <a:avLst/>
@@ -5440,13 +5595,13 @@
           <a:lstStyle/>
           <a:p>
             <a:r>
-              <a:rPr sz="1200" b="1" i="0">
-                <a:solidFill>
-                  <a:srgbClr val="64748B"/>
-                </a:solidFill>
-                <a:latin typeface="Montserrat"/>
-              </a:rPr>
-              <a:t>ARTÍCULO 5.6 · PUESTA EN SERVICIO</a:t>
+              <a:rPr sz="1300" b="1" i="0">
+                <a:solidFill>
+                  <a:srgbClr val="E8801A"/>
+                </a:solidFill>
+                <a:latin typeface="Montserrat"/>
+              </a:rPr>
+              <a:t>ARTÍCULO 5.5 · CERTIFICADOS</a:t>
             </a:r>
           </a:p>
         </p:txBody>
@@ -5474,26 +5629,70 @@
           <a:lstStyle/>
           <a:p>
             <a:r>
-              <a:rPr sz="2700" b="1" i="0">
+              <a:rPr sz="2800" b="1" i="0">
                 <a:solidFill>
                   <a:srgbClr val="1E2761"/>
                 </a:solidFill>
                 <a:latin typeface="Montserrat"/>
               </a:rPr>
-              <a:t>La regla del año</a:t>
-            </a:r>
-          </a:p>
-        </p:txBody>
-      </p:sp>
-      <p:sp>
-        <p:nvSpPr>
-          <p:cNvPr id="7" name="TextBox 6"/>
+              <a:t>El boletín es tu documento estrella</a:t>
+            </a:r>
+          </a:p>
+        </p:txBody>
+      </p:sp>
+      <p:sp>
+        <p:nvSpPr>
+          <p:cNvPr id="7" name="Rounded Rectangle 6"/>
+          <p:cNvSpPr/>
+          <p:nvPr/>
+        </p:nvSpPr>
+        <p:spPr>
+          <a:xfrm>
+            <a:off x="868680" y="1627632"/>
+            <a:ext cx="2011680" cy="73152"/>
+          </a:xfrm>
+          <a:prstGeom prst="roundRect">
+            <a:avLst/>
+          </a:prstGeom>
+          <a:solidFill>
+            <a:srgbClr val="E8801A"/>
+          </a:solidFill>
+          <a:ln>
+            <a:noFill/>
+          </a:ln>
+          <a:effectLst/>
+        </p:spPr>
+        <p:style>
+          <a:lnRef idx="1">
+            <a:schemeClr val="accent1"/>
+          </a:lnRef>
+          <a:fillRef idx="3">
+            <a:schemeClr val="accent1"/>
+          </a:fillRef>
+          <a:effectRef idx="2">
+            <a:schemeClr val="accent1"/>
+          </a:effectRef>
+          <a:fontRef idx="minor">
+            <a:schemeClr val="lt1"/>
+          </a:fontRef>
+        </p:style>
+        <p:txBody>
+          <a:bodyPr rtlCol="0" anchor="ctr"/>
+          <a:lstStyle/>
+          <a:p>
+            <a:pPr algn="ctr"/>
+          </a:p>
+        </p:txBody>
+      </p:sp>
+      <p:sp>
+        <p:nvSpPr>
+          <p:cNvPr id="8" name="TextBox 7"/>
           <p:cNvSpPr txBox="1"/>
           <p:nvPr/>
         </p:nvSpPr>
         <p:spPr>
           <a:xfrm>
-            <a:off x="822960" y="1920240"/>
+            <a:off x="822960" y="1965960"/>
             <a:ext cx="4983480" cy="4206240"/>
           </a:xfrm>
           <a:prstGeom prst="rect">
@@ -5509,17 +5708,17 @@
           <a:p>
             <a:pPr>
               <a:spcAft>
-                <a:spcPts val="1000"/>
+                <a:spcPts val="1100"/>
               </a:spcAft>
             </a:pPr>
             <a:r>
               <a:rPr sz="1600" b="1" i="0">
                 <a:solidFill>
-                  <a:srgbClr val="2E3A80"/>
-                </a:solidFill>
-                <a:latin typeface="Montserrat"/>
-              </a:rPr>
-              <a:t>•  </a:t>
+                  <a:srgbClr val="E8801A"/>
+                </a:solidFill>
+                <a:latin typeface="Montserrat"/>
+              </a:rPr>
+              <a:t>▸  </a:t>
             </a:r>
             <a:r>
               <a:rPr sz="1600" b="0" i="0">
@@ -5528,23 +5727,23 @@
                 </a:solidFill>
                 <a:latin typeface="Montserrat"/>
               </a:rPr>
-              <a:t>Recibir copia de los certificados</a:t>
+              <a:t>Instalación: siempre, lo firma quien ejecuta</a:t>
             </a:r>
           </a:p>
           <a:p>
             <a:pPr>
               <a:spcAft>
-                <a:spcPts val="1000"/>
+                <a:spcPts val="1100"/>
               </a:spcAft>
             </a:pPr>
             <a:r>
               <a:rPr sz="1600" b="1" i="0">
                 <a:solidFill>
-                  <a:srgbClr val="2E3A80"/>
-                </a:solidFill>
-                <a:latin typeface="Montserrat"/>
-              </a:rPr>
-              <a:t>•  </a:t>
+                  <a:srgbClr val="E8801A"/>
+                </a:solidFill>
+                <a:latin typeface="Montserrat"/>
+              </a:rPr>
+              <a:t>▸  </a:t>
             </a:r>
             <a:r>
               <a:rPr sz="1600" b="0" i="0">
@@ -5553,23 +5752,23 @@
                 </a:solidFill>
                 <a:latin typeface="Montserrat"/>
               </a:rPr>
-              <a:t>Suministro provisional para pruebas</a:t>
+              <a:t>Dirección de obra: solo si hubo proyecto</a:t>
             </a:r>
           </a:p>
           <a:p>
             <a:pPr>
               <a:spcAft>
-                <a:spcPts val="1000"/>
+                <a:spcPts val="1100"/>
               </a:spcAft>
             </a:pPr>
             <a:r>
               <a:rPr sz="1600" b="1" i="0">
                 <a:solidFill>
-                  <a:srgbClr val="2E3A80"/>
-                </a:solidFill>
-                <a:latin typeface="Montserrat"/>
-              </a:rPr>
-              <a:t>•  </a:t>
+                  <a:srgbClr val="E8801A"/>
+                </a:solidFill>
+                <a:latin typeface="Montserrat"/>
+              </a:rPr>
+              <a:t>▸  </a:t>
             </a:r>
             <a:r>
               <a:rPr sz="1600" b="0" i="0">
@@ -5578,14 +5777,14 @@
                 </a:solidFill>
                 <a:latin typeface="Montserrat"/>
               </a:rPr>
-              <a:t>Parada +1 año: se trata como nueva</a:t>
-            </a:r>
-          </a:p>
-        </p:txBody>
-      </p:sp>
-      <p:sp>
-        <p:nvSpPr>
-          <p:cNvPr id="8" name="imgph" descr="IMGQ:gas meter installation apartment wall"/>
+              <a:t>Inspección: solo si la ITC lo exige</a:t>
+            </a:r>
+          </a:p>
+        </p:txBody>
+      </p:sp>
+      <p:sp>
+        <p:nvSpPr>
+          <p:cNvPr id="9" name="imgph" descr="IMGQ:signing official certificate form"/>
           <p:cNvSpPr/>
           <p:nvPr/>
         </p:nvSpPr>
@@ -5631,7 +5830,7 @@
       </p:sp>
       <p:sp>
         <p:nvSpPr>
-          <p:cNvPr id="9" name="TextBox 8"/>
+          <p:cNvPr id="10" name="TextBox 9"/>
           <p:cNvSpPr txBox="1"/>
           <p:nvPr/>
         </p:nvSpPr>
@@ -5671,7 +5870,7 @@
                 </a:solidFill>
                 <a:latin typeface="Montserrat"/>
               </a:rPr>
-              <a:t>gas meter installation apartment wall</a:t>
+              <a:t>signing official certificate form</a:t>
             </a:r>
           </a:p>
         </p:txBody>
@@ -5768,7 +5967,7 @@
                 </a:solidFill>
                 <a:latin typeface="Montserrat"/>
               </a:rPr>
-              <a:t>012 / 017</a:t>
+              <a:t>012 / 018</a:t>
             </a:r>
           </a:p>
         </p:txBody>
@@ -5816,7 +6015,7 @@
         <p:spPr>
           <a:xfrm>
             <a:off x="822960" y="457200"/>
-            <a:ext cx="8229600" cy="365760"/>
+            <a:ext cx="10058400" cy="365760"/>
           </a:xfrm>
           <a:prstGeom prst="rect">
             <a:avLst/>
@@ -5830,13 +6029,13 @@
           <a:lstStyle/>
           <a:p>
             <a:r>
-              <a:rPr sz="1200" b="1" i="0">
-                <a:solidFill>
-                  <a:srgbClr val="64748B"/>
-                </a:solidFill>
-                <a:latin typeface="Montserrat"/>
-              </a:rPr>
-              <a:t>ARTÍCULO 5.7 · COMUNICACIÓN</a:t>
+              <a:rPr sz="1300" b="1" i="0">
+                <a:solidFill>
+                  <a:srgbClr val="E8801A"/>
+                </a:solidFill>
+                <a:latin typeface="Montserrat"/>
+              </a:rPr>
+              <a:t>ARTÍCULO 5.6 · PUESTA EN SERVICIO</a:t>
             </a:r>
           </a:p>
         </p:txBody>
@@ -5864,26 +6063,70 @@
           <a:lstStyle/>
           <a:p>
             <a:r>
-              <a:rPr sz="2700" b="1" i="0">
+              <a:rPr sz="2800" b="1" i="0">
                 <a:solidFill>
                   <a:srgbClr val="1E2761"/>
                 </a:solidFill>
                 <a:latin typeface="Montserrat"/>
               </a:rPr>
-              <a:t>Treinta días y lo presenta el titular</a:t>
-            </a:r>
-          </a:p>
-        </p:txBody>
-      </p:sp>
-      <p:sp>
-        <p:nvSpPr>
-          <p:cNvPr id="7" name="TextBox 6"/>
+              <a:t>La regla del año</a:t>
+            </a:r>
+          </a:p>
+        </p:txBody>
+      </p:sp>
+      <p:sp>
+        <p:nvSpPr>
+          <p:cNvPr id="7" name="Rounded Rectangle 6"/>
+          <p:cNvSpPr/>
+          <p:nvPr/>
+        </p:nvSpPr>
+        <p:spPr>
+          <a:xfrm>
+            <a:off x="868680" y="1627632"/>
+            <a:ext cx="2011680" cy="73152"/>
+          </a:xfrm>
+          <a:prstGeom prst="roundRect">
+            <a:avLst/>
+          </a:prstGeom>
+          <a:solidFill>
+            <a:srgbClr val="E8801A"/>
+          </a:solidFill>
+          <a:ln>
+            <a:noFill/>
+          </a:ln>
+          <a:effectLst/>
+        </p:spPr>
+        <p:style>
+          <a:lnRef idx="1">
+            <a:schemeClr val="accent1"/>
+          </a:lnRef>
+          <a:fillRef idx="3">
+            <a:schemeClr val="accent1"/>
+          </a:fillRef>
+          <a:effectRef idx="2">
+            <a:schemeClr val="accent1"/>
+          </a:effectRef>
+          <a:fontRef idx="minor">
+            <a:schemeClr val="lt1"/>
+          </a:fontRef>
+        </p:style>
+        <p:txBody>
+          <a:bodyPr rtlCol="0" anchor="ctr"/>
+          <a:lstStyle/>
+          <a:p>
+            <a:pPr algn="ctr"/>
+          </a:p>
+        </p:txBody>
+      </p:sp>
+      <p:sp>
+        <p:nvSpPr>
+          <p:cNvPr id="8" name="TextBox 7"/>
           <p:cNvSpPr txBox="1"/>
           <p:nvPr/>
         </p:nvSpPr>
         <p:spPr>
           <a:xfrm>
-            <a:off x="822960" y="1920240"/>
+            <a:off x="822960" y="1965960"/>
             <a:ext cx="4983480" cy="4206240"/>
           </a:xfrm>
           <a:prstGeom prst="rect">
@@ -5899,17 +6142,17 @@
           <a:p>
             <a:pPr>
               <a:spcAft>
-                <a:spcPts val="1000"/>
+                <a:spcPts val="1100"/>
               </a:spcAft>
             </a:pPr>
             <a:r>
               <a:rPr sz="1600" b="1" i="0">
                 <a:solidFill>
-                  <a:srgbClr val="2E3A80"/>
-                </a:solidFill>
-                <a:latin typeface="Montserrat"/>
-              </a:rPr>
-              <a:t>•  </a:t>
+                  <a:srgbClr val="E8801A"/>
+                </a:solidFill>
+                <a:latin typeface="Montserrat"/>
+              </a:rPr>
+              <a:t>▸  </a:t>
             </a:r>
             <a:r>
               <a:rPr sz="1600" b="0" i="0">
@@ -5918,23 +6161,23 @@
                 </a:solidFill>
                 <a:latin typeface="Montserrat"/>
               </a:rPr>
-              <a:t>El titular comunica, no la instaladora</a:t>
+              <a:t>Recibir copia de los certificados</a:t>
             </a:r>
           </a:p>
           <a:p>
             <a:pPr>
               <a:spcAft>
-                <a:spcPts val="1000"/>
+                <a:spcPts val="1100"/>
               </a:spcAft>
             </a:pPr>
             <a:r>
               <a:rPr sz="1600" b="1" i="0">
                 <a:solidFill>
-                  <a:srgbClr val="2E3A80"/>
-                </a:solidFill>
-                <a:latin typeface="Montserrat"/>
-              </a:rPr>
-              <a:t>•  </a:t>
+                  <a:srgbClr val="E8801A"/>
+                </a:solidFill>
+                <a:latin typeface="Montserrat"/>
+              </a:rPr>
+              <a:t>▸  </a:t>
             </a:r>
             <a:r>
               <a:rPr sz="1600" b="0" i="0">
@@ -5943,23 +6186,23 @@
                 </a:solidFill>
                 <a:latin typeface="Montserrat"/>
               </a:rPr>
-              <a:t>Ante la Comunidad Autónoma</a:t>
+              <a:t>Suministro provisional para pruebas</a:t>
             </a:r>
           </a:p>
           <a:p>
             <a:pPr>
               <a:spcAft>
-                <a:spcPts val="1000"/>
+                <a:spcPts val="1100"/>
               </a:spcAft>
             </a:pPr>
             <a:r>
               <a:rPr sz="1600" b="1" i="0">
                 <a:solidFill>
-                  <a:srgbClr val="2E3A80"/>
-                </a:solidFill>
-                <a:latin typeface="Montserrat"/>
-              </a:rPr>
-              <a:t>•  </a:t>
+                  <a:srgbClr val="E8801A"/>
+                </a:solidFill>
+                <a:latin typeface="Montserrat"/>
+              </a:rPr>
+              <a:t>▸  </a:t>
             </a:r>
             <a:r>
               <a:rPr sz="1600" b="0" i="0">
@@ -5968,14 +6211,14 @@
                 </a:solidFill>
                 <a:latin typeface="Montserrat"/>
               </a:rPr>
-              <a:t>Antes de 30 días desde puesta en servicio</a:t>
-            </a:r>
-          </a:p>
-        </p:txBody>
-      </p:sp>
-      <p:sp>
-        <p:nvSpPr>
-          <p:cNvPr id="8" name="imgph" descr="IMGQ:person filling paperwork office desk"/>
+              <a:t>Parada +1 año: se trata como nueva</a:t>
+            </a:r>
+          </a:p>
+        </p:txBody>
+      </p:sp>
+      <p:sp>
+        <p:nvSpPr>
+          <p:cNvPr id="9" name="imgph" descr="IMGQ:gas meter installation apartment wall"/>
           <p:cNvSpPr/>
           <p:nvPr/>
         </p:nvSpPr>
@@ -6021,7 +6264,7 @@
       </p:sp>
       <p:sp>
         <p:nvSpPr>
-          <p:cNvPr id="9" name="TextBox 8"/>
+          <p:cNvPr id="10" name="TextBox 9"/>
           <p:cNvSpPr txBox="1"/>
           <p:nvPr/>
         </p:nvSpPr>
@@ -6061,7 +6304,7 @@
                 </a:solidFill>
                 <a:latin typeface="Montserrat"/>
               </a:rPr>
-              <a:t>person filling paperwork office desk</a:t>
+              <a:t>gas meter installation apartment wall</a:t>
             </a:r>
           </a:p>
         </p:txBody>
@@ -6158,7 +6401,7 @@
                 </a:solidFill>
                 <a:latin typeface="Montserrat"/>
               </a:rPr>
-              <a:t>013 / 017</a:t>
+              <a:t>013 / 018</a:t>
             </a:r>
           </a:p>
         </p:txBody>
@@ -6206,7 +6449,7 @@
         <p:spPr>
           <a:xfrm>
             <a:off x="822960" y="457200"/>
-            <a:ext cx="8229600" cy="365760"/>
+            <a:ext cx="10058400" cy="365760"/>
           </a:xfrm>
           <a:prstGeom prst="rect">
             <a:avLst/>
@@ -6220,13 +6463,13 @@
           <a:lstStyle/>
           <a:p>
             <a:r>
-              <a:rPr sz="1200" b="1" i="0">
-                <a:solidFill>
-                  <a:srgbClr val="64748B"/>
-                </a:solidFill>
-                <a:latin typeface="Montserrat"/>
-              </a:rPr>
-              <a:t>ARTÍCULO 5.8 · PUESTA EN MARCHA</a:t>
+              <a:rPr sz="1300" b="1" i="0">
+                <a:solidFill>
+                  <a:srgbClr val="E8801A"/>
+                </a:solidFill>
+                <a:latin typeface="Montserrat"/>
+              </a:rPr>
+              <a:t>ARTÍCULO 5.7 · COMUNICACIÓN</a:t>
             </a:r>
           </a:p>
         </p:txBody>
@@ -6254,26 +6497,70 @@
           <a:lstStyle/>
           <a:p>
             <a:r>
-              <a:rPr sz="2700" b="1" i="0">
+              <a:rPr sz="2800" b="1" i="0">
                 <a:solidFill>
                   <a:srgbClr val="1E2761"/>
                 </a:solidFill>
                 <a:latin typeface="Montserrat"/>
               </a:rPr>
-              <a:t>Arrancar el aparato, no solo encenderlo</a:t>
-            </a:r>
-          </a:p>
-        </p:txBody>
-      </p:sp>
-      <p:sp>
-        <p:nvSpPr>
-          <p:cNvPr id="7" name="TextBox 6"/>
+              <a:t>Treinta días y lo presenta el titular</a:t>
+            </a:r>
+          </a:p>
+        </p:txBody>
+      </p:sp>
+      <p:sp>
+        <p:nvSpPr>
+          <p:cNvPr id="7" name="Rounded Rectangle 6"/>
+          <p:cNvSpPr/>
+          <p:nvPr/>
+        </p:nvSpPr>
+        <p:spPr>
+          <a:xfrm>
+            <a:off x="868680" y="1627632"/>
+            <a:ext cx="2011680" cy="73152"/>
+          </a:xfrm>
+          <a:prstGeom prst="roundRect">
+            <a:avLst/>
+          </a:prstGeom>
+          <a:solidFill>
+            <a:srgbClr val="E8801A"/>
+          </a:solidFill>
+          <a:ln>
+            <a:noFill/>
+          </a:ln>
+          <a:effectLst/>
+        </p:spPr>
+        <p:style>
+          <a:lnRef idx="1">
+            <a:schemeClr val="accent1"/>
+          </a:lnRef>
+          <a:fillRef idx="3">
+            <a:schemeClr val="accent1"/>
+          </a:fillRef>
+          <a:effectRef idx="2">
+            <a:schemeClr val="accent1"/>
+          </a:effectRef>
+          <a:fontRef idx="minor">
+            <a:schemeClr val="lt1"/>
+          </a:fontRef>
+        </p:style>
+        <p:txBody>
+          <a:bodyPr rtlCol="0" anchor="ctr"/>
+          <a:lstStyle/>
+          <a:p>
+            <a:pPr algn="ctr"/>
+          </a:p>
+        </p:txBody>
+      </p:sp>
+      <p:sp>
+        <p:nvSpPr>
+          <p:cNvPr id="8" name="TextBox 7"/>
           <p:cNvSpPr txBox="1"/>
           <p:nvPr/>
         </p:nvSpPr>
         <p:spPr>
           <a:xfrm>
-            <a:off x="822960" y="1920240"/>
+            <a:off x="822960" y="1965960"/>
             <a:ext cx="4983480" cy="4206240"/>
           </a:xfrm>
           <a:prstGeom prst="rect">
@@ -6289,17 +6576,17 @@
           <a:p>
             <a:pPr>
               <a:spcAft>
-                <a:spcPts val="1000"/>
+                <a:spcPts val="1100"/>
               </a:spcAft>
             </a:pPr>
             <a:r>
               <a:rPr sz="1600" b="1" i="0">
                 <a:solidFill>
-                  <a:srgbClr val="2E3A80"/>
-                </a:solidFill>
-                <a:latin typeface="Montserrat"/>
-              </a:rPr>
-              <a:t>•  </a:t>
+                  <a:srgbClr val="E8801A"/>
+                </a:solidFill>
+                <a:latin typeface="Montserrat"/>
+              </a:rPr>
+              <a:t>▸  </a:t>
             </a:r>
             <a:r>
               <a:rPr sz="1600" b="0" i="0">
@@ -6308,23 +6595,23 @@
                 </a:solidFill>
                 <a:latin typeface="Montserrat"/>
               </a:rPr>
-              <a:t>Según la ITC-ICG 08</a:t>
+              <a:t>El titular comunica, no la instaladora</a:t>
             </a:r>
           </a:p>
           <a:p>
             <a:pPr>
               <a:spcAft>
-                <a:spcPts val="1000"/>
+                <a:spcPts val="1100"/>
               </a:spcAft>
             </a:pPr>
             <a:r>
               <a:rPr sz="1600" b="1" i="0">
                 <a:solidFill>
-                  <a:srgbClr val="2E3A80"/>
-                </a:solidFill>
-                <a:latin typeface="Montserrat"/>
-              </a:rPr>
-              <a:t>•  </a:t>
+                  <a:srgbClr val="E8801A"/>
+                </a:solidFill>
+                <a:latin typeface="Montserrat"/>
+              </a:rPr>
+              <a:t>▸  </a:t>
             </a:r>
             <a:r>
               <a:rPr sz="1600" b="0" i="0">
@@ -6333,23 +6620,23 @@
                 </a:solidFill>
                 <a:latin typeface="Montserrat"/>
               </a:rPr>
-              <a:t>Verifica gas, presión y combustión</a:t>
+              <a:t>Ante la Comunidad Autónoma</a:t>
             </a:r>
           </a:p>
           <a:p>
             <a:pPr>
               <a:spcAft>
-                <a:spcPts val="1000"/>
+                <a:spcPts val="1100"/>
               </a:spcAft>
             </a:pPr>
             <a:r>
               <a:rPr sz="1600" b="1" i="0">
                 <a:solidFill>
-                  <a:srgbClr val="2E3A80"/>
-                </a:solidFill>
-                <a:latin typeface="Montserrat"/>
-              </a:rPr>
-              <a:t>•  </a:t>
+                  <a:srgbClr val="E8801A"/>
+                </a:solidFill>
+                <a:latin typeface="Montserrat"/>
+              </a:rPr>
+              <a:t>▸  </a:t>
             </a:r>
             <a:r>
               <a:rPr sz="1600" b="0" i="0">
@@ -6358,14 +6645,14 @@
                 </a:solidFill>
                 <a:latin typeface="Montserrat"/>
               </a:rPr>
-              <a:t>Certificado que se entrega al usuario</a:t>
-            </a:r>
-          </a:p>
-        </p:txBody>
-      </p:sp>
-      <p:sp>
-        <p:nvSpPr>
-          <p:cNvPr id="8" name="imgph" descr="IMGQ:technician adjusting gas boiler"/>
+              <a:t>Antes de 30 días desde puesta en servicio</a:t>
+            </a:r>
+          </a:p>
+        </p:txBody>
+      </p:sp>
+      <p:sp>
+        <p:nvSpPr>
+          <p:cNvPr id="9" name="imgph" descr="IMGQ:person filling paperwork office desk"/>
           <p:cNvSpPr/>
           <p:nvPr/>
         </p:nvSpPr>
@@ -6411,7 +6698,7 @@
       </p:sp>
       <p:sp>
         <p:nvSpPr>
-          <p:cNvPr id="9" name="TextBox 8"/>
+          <p:cNvPr id="10" name="TextBox 9"/>
           <p:cNvSpPr txBox="1"/>
           <p:nvPr/>
         </p:nvSpPr>
@@ -6451,7 +6738,7 @@
                 </a:solidFill>
                 <a:latin typeface="Montserrat"/>
               </a:rPr>
-              <a:t>technician adjusting gas boiler</a:t>
+              <a:t>person filling paperwork office desk</a:t>
             </a:r>
           </a:p>
         </p:txBody>
@@ -6548,7 +6835,7 @@
                 </a:solidFill>
                 <a:latin typeface="Montserrat"/>
               </a:rPr>
-              <a:t>014 / 017</a:t>
+              <a:t>014 / 018</a:t>
             </a:r>
           </a:p>
         </p:txBody>
@@ -6596,7 +6883,7 @@
         <p:spPr>
           <a:xfrm>
             <a:off x="822960" y="457200"/>
-            <a:ext cx="8229600" cy="365760"/>
+            <a:ext cx="10058400" cy="365760"/>
           </a:xfrm>
           <a:prstGeom prst="rect">
             <a:avLst/>
@@ -6610,13 +6897,13 @@
           <a:lstStyle/>
           <a:p>
             <a:r>
-              <a:rPr sz="1200" b="1" i="0">
-                <a:solidFill>
-                  <a:srgbClr val="64748B"/>
-                </a:solidFill>
-                <a:latin typeface="Montserrat"/>
-              </a:rPr>
-              <a:t>ARTÍCULO 5 · LOS TRES CERTIFICADOS</a:t>
+              <a:rPr sz="1300" b="1" i="0">
+                <a:solidFill>
+                  <a:srgbClr val="E8801A"/>
+                </a:solidFill>
+                <a:latin typeface="Montserrat"/>
+              </a:rPr>
+              <a:t>ARTÍCULO 5.8 · PUESTA EN MARCHA</a:t>
             </a:r>
           </a:p>
         </p:txBody>
@@ -6644,26 +6931,70 @@
           <a:lstStyle/>
           <a:p>
             <a:r>
-              <a:rPr sz="2700" b="1" i="0">
+              <a:rPr sz="2800" b="1" i="0">
                 <a:solidFill>
                   <a:srgbClr val="1E2761"/>
                 </a:solidFill>
                 <a:latin typeface="Montserrat"/>
               </a:rPr>
-              <a:t>Quién firma cada papel</a:t>
-            </a:r>
-          </a:p>
-        </p:txBody>
-      </p:sp>
-      <p:sp>
-        <p:nvSpPr>
-          <p:cNvPr id="7" name="TextBox 6"/>
+              <a:t>Arrancar el aparato, no solo encenderlo</a:t>
+            </a:r>
+          </a:p>
+        </p:txBody>
+      </p:sp>
+      <p:sp>
+        <p:nvSpPr>
+          <p:cNvPr id="7" name="Rounded Rectangle 6"/>
+          <p:cNvSpPr/>
+          <p:nvPr/>
+        </p:nvSpPr>
+        <p:spPr>
+          <a:xfrm>
+            <a:off x="868680" y="1627632"/>
+            <a:ext cx="2011680" cy="73152"/>
+          </a:xfrm>
+          <a:prstGeom prst="roundRect">
+            <a:avLst/>
+          </a:prstGeom>
+          <a:solidFill>
+            <a:srgbClr val="E8801A"/>
+          </a:solidFill>
+          <a:ln>
+            <a:noFill/>
+          </a:ln>
+          <a:effectLst/>
+        </p:spPr>
+        <p:style>
+          <a:lnRef idx="1">
+            <a:schemeClr val="accent1"/>
+          </a:lnRef>
+          <a:fillRef idx="3">
+            <a:schemeClr val="accent1"/>
+          </a:fillRef>
+          <a:effectRef idx="2">
+            <a:schemeClr val="accent1"/>
+          </a:effectRef>
+          <a:fontRef idx="minor">
+            <a:schemeClr val="lt1"/>
+          </a:fontRef>
+        </p:style>
+        <p:txBody>
+          <a:bodyPr rtlCol="0" anchor="ctr"/>
+          <a:lstStyle/>
+          <a:p>
+            <a:pPr algn="ctr"/>
+          </a:p>
+        </p:txBody>
+      </p:sp>
+      <p:sp>
+        <p:nvSpPr>
+          <p:cNvPr id="8" name="TextBox 7"/>
           <p:cNvSpPr txBox="1"/>
           <p:nvPr/>
         </p:nvSpPr>
         <p:spPr>
           <a:xfrm>
-            <a:off x="822960" y="1920240"/>
+            <a:off x="822960" y="1965960"/>
             <a:ext cx="4983480" cy="4206240"/>
           </a:xfrm>
           <a:prstGeom prst="rect">
@@ -6679,17 +7010,17 @@
           <a:p>
             <a:pPr>
               <a:spcAft>
-                <a:spcPts val="1000"/>
+                <a:spcPts val="1100"/>
               </a:spcAft>
             </a:pPr>
             <a:r>
               <a:rPr sz="1600" b="1" i="0">
                 <a:solidFill>
-                  <a:srgbClr val="2E3A80"/>
-                </a:solidFill>
-                <a:latin typeface="Montserrat"/>
-              </a:rPr>
-              <a:t>•  </a:t>
+                  <a:srgbClr val="E8801A"/>
+                </a:solidFill>
+                <a:latin typeface="Montserrat"/>
+              </a:rPr>
+              <a:t>▸  </a:t>
             </a:r>
             <a:r>
               <a:rPr sz="1600" b="0" i="0">
@@ -6698,23 +7029,23 @@
                 </a:solidFill>
                 <a:latin typeface="Montserrat"/>
               </a:rPr>
-              <a:t>Instalación: la empresa que ejecuta</a:t>
+              <a:t>Según la ITC-ICG 08</a:t>
             </a:r>
           </a:p>
           <a:p>
             <a:pPr>
               <a:spcAft>
-                <a:spcPts val="1000"/>
+                <a:spcPts val="1100"/>
               </a:spcAft>
             </a:pPr>
             <a:r>
               <a:rPr sz="1600" b="1" i="0">
                 <a:solidFill>
-                  <a:srgbClr val="2E3A80"/>
-                </a:solidFill>
-                <a:latin typeface="Montserrat"/>
-              </a:rPr>
-              <a:t>•  </a:t>
+                  <a:srgbClr val="E8801A"/>
+                </a:solidFill>
+                <a:latin typeface="Montserrat"/>
+              </a:rPr>
+              <a:t>▸  </a:t>
             </a:r>
             <a:r>
               <a:rPr sz="1600" b="0" i="0">
@@ -6723,23 +7054,23 @@
                 </a:solidFill>
                 <a:latin typeface="Montserrat"/>
               </a:rPr>
-              <a:t>Dirección de obra: el director (si hay proyecto)</a:t>
+              <a:t>Verifica gas, presión y combustión</a:t>
             </a:r>
           </a:p>
           <a:p>
             <a:pPr>
               <a:spcAft>
-                <a:spcPts val="1000"/>
+                <a:spcPts val="1100"/>
               </a:spcAft>
             </a:pPr>
             <a:r>
               <a:rPr sz="1600" b="1" i="0">
                 <a:solidFill>
-                  <a:srgbClr val="2E3A80"/>
-                </a:solidFill>
-                <a:latin typeface="Montserrat"/>
-              </a:rPr>
-              <a:t>•  </a:t>
+                  <a:srgbClr val="E8801A"/>
+                </a:solidFill>
+                <a:latin typeface="Montserrat"/>
+              </a:rPr>
+              <a:t>▸  </a:t>
             </a:r>
             <a:r>
               <a:rPr sz="1600" b="0" i="0">
@@ -6748,14 +7079,14 @@
                 </a:solidFill>
                 <a:latin typeface="Montserrat"/>
               </a:rPr>
-              <a:t>Puesta en marcha: el agente, al usuario</a:t>
-            </a:r>
-          </a:p>
-        </p:txBody>
-      </p:sp>
-      <p:sp>
-        <p:nvSpPr>
-          <p:cNvPr id="8" name="imgph" descr="IMGQ:stack of official signed documents desk"/>
+              <a:t>Certificado que se entrega al usuario</a:t>
+            </a:r>
+          </a:p>
+        </p:txBody>
+      </p:sp>
+      <p:sp>
+        <p:nvSpPr>
+          <p:cNvPr id="9" name="imgph" descr="IMGQ:technician adjusting gas boiler"/>
           <p:cNvSpPr/>
           <p:nvPr/>
         </p:nvSpPr>
@@ -6801,7 +7132,7 @@
       </p:sp>
       <p:sp>
         <p:nvSpPr>
-          <p:cNvPr id="9" name="TextBox 8"/>
+          <p:cNvPr id="10" name="TextBox 9"/>
           <p:cNvSpPr txBox="1"/>
           <p:nvPr/>
         </p:nvSpPr>
@@ -6841,7 +7172,7 @@
                 </a:solidFill>
                 <a:latin typeface="Montserrat"/>
               </a:rPr>
-              <a:t>stack of official signed documents desk</a:t>
+              <a:t>technician adjusting gas boiler</a:t>
             </a:r>
           </a:p>
         </p:txBody>
@@ -6938,7 +7269,7 @@
                 </a:solidFill>
                 <a:latin typeface="Montserrat"/>
               </a:rPr>
-              <a:t>015 / 017</a:t>
+              <a:t>015 / 018</a:t>
             </a:r>
           </a:p>
         </p:txBody>
@@ -6986,7 +7317,7 @@
         <p:spPr>
           <a:xfrm>
             <a:off x="822960" y="457200"/>
-            <a:ext cx="8229600" cy="365760"/>
+            <a:ext cx="10058400" cy="365760"/>
           </a:xfrm>
           <a:prstGeom prst="rect">
             <a:avLst/>
@@ -7000,13 +7331,13 @@
           <a:lstStyle/>
           <a:p>
             <a:r>
-              <a:rPr sz="1200" b="1" i="0">
-                <a:solidFill>
-                  <a:srgbClr val="64748B"/>
-                </a:solidFill>
-                <a:latin typeface="Montserrat"/>
-              </a:rPr>
-              <a:t>ARTÍCULO 6 · INFORMACIÓN AL USUARIO</a:t>
+              <a:rPr sz="1300" b="1" i="0">
+                <a:solidFill>
+                  <a:srgbClr val="E8801A"/>
+                </a:solidFill>
+                <a:latin typeface="Montserrat"/>
+              </a:rPr>
+              <a:t>ARTÍCULO 5 · LOS TRES CERTIFICADOS</a:t>
             </a:r>
           </a:p>
         </p:txBody>
@@ -7034,26 +7365,70 @@
           <a:lstStyle/>
           <a:p>
             <a:r>
-              <a:rPr sz="2700" b="1" i="0">
+              <a:rPr sz="2800" b="1" i="0">
                 <a:solidFill>
                   <a:srgbClr val="1E2761"/>
                 </a:solidFill>
                 <a:latin typeface="Montserrat"/>
               </a:rPr>
-              <a:t>El croquis y el recordatorio bienal</a:t>
-            </a:r>
-          </a:p>
-        </p:txBody>
-      </p:sp>
-      <p:sp>
-        <p:nvSpPr>
-          <p:cNvPr id="7" name="TextBox 6"/>
+              <a:t>Quién firma cada papel</a:t>
+            </a:r>
+          </a:p>
+        </p:txBody>
+      </p:sp>
+      <p:sp>
+        <p:nvSpPr>
+          <p:cNvPr id="7" name="Rounded Rectangle 6"/>
+          <p:cNvSpPr/>
+          <p:nvPr/>
+        </p:nvSpPr>
+        <p:spPr>
+          <a:xfrm>
+            <a:off x="868680" y="1627632"/>
+            <a:ext cx="2011680" cy="73152"/>
+          </a:xfrm>
+          <a:prstGeom prst="roundRect">
+            <a:avLst/>
+          </a:prstGeom>
+          <a:solidFill>
+            <a:srgbClr val="E8801A"/>
+          </a:solidFill>
+          <a:ln>
+            <a:noFill/>
+          </a:ln>
+          <a:effectLst/>
+        </p:spPr>
+        <p:style>
+          <a:lnRef idx="1">
+            <a:schemeClr val="accent1"/>
+          </a:lnRef>
+          <a:fillRef idx="3">
+            <a:schemeClr val="accent1"/>
+          </a:fillRef>
+          <a:effectRef idx="2">
+            <a:schemeClr val="accent1"/>
+          </a:effectRef>
+          <a:fontRef idx="minor">
+            <a:schemeClr val="lt1"/>
+          </a:fontRef>
+        </p:style>
+        <p:txBody>
+          <a:bodyPr rtlCol="0" anchor="ctr"/>
+          <a:lstStyle/>
+          <a:p>
+            <a:pPr algn="ctr"/>
+          </a:p>
+        </p:txBody>
+      </p:sp>
+      <p:sp>
+        <p:nvSpPr>
+          <p:cNvPr id="8" name="TextBox 7"/>
           <p:cNvSpPr txBox="1"/>
           <p:nvPr/>
         </p:nvSpPr>
         <p:spPr>
           <a:xfrm>
-            <a:off x="822960" y="1920240"/>
+            <a:off x="822960" y="1965960"/>
             <a:ext cx="4983480" cy="4206240"/>
           </a:xfrm>
           <a:prstGeom prst="rect">
@@ -7069,17 +7444,17 @@
           <a:p>
             <a:pPr>
               <a:spcAft>
-                <a:spcPts val="1000"/>
+                <a:spcPts val="1100"/>
               </a:spcAft>
             </a:pPr>
             <a:r>
               <a:rPr sz="1600" b="1" i="0">
                 <a:solidFill>
-                  <a:srgbClr val="2E3A80"/>
-                </a:solidFill>
-                <a:latin typeface="Montserrat"/>
-              </a:rPr>
-              <a:t>•  </a:t>
+                  <a:srgbClr val="E8801A"/>
+                </a:solidFill>
+                <a:latin typeface="Montserrat"/>
+              </a:rPr>
+              <a:t>▸  </a:t>
             </a:r>
             <a:r>
               <a:rPr sz="1600" b="0" i="0">
@@ -7088,23 +7463,23 @@
                 </a:solidFill>
                 <a:latin typeface="Montserrat"/>
               </a:rPr>
-              <a:t>Instrucciones de uso y mantenimiento</a:t>
+              <a:t>Instalación: la empresa que ejecuta</a:t>
             </a:r>
           </a:p>
           <a:p>
             <a:pPr>
               <a:spcAft>
-                <a:spcPts val="1000"/>
+                <a:spcPts val="1100"/>
               </a:spcAft>
             </a:pPr>
             <a:r>
               <a:rPr sz="1600" b="1" i="0">
                 <a:solidFill>
-                  <a:srgbClr val="2E3A80"/>
-                </a:solidFill>
-                <a:latin typeface="Montserrat"/>
-              </a:rPr>
-              <a:t>•  </a:t>
+                  <a:srgbClr val="E8801A"/>
+                </a:solidFill>
+                <a:latin typeface="Montserrat"/>
+              </a:rPr>
+              <a:t>▸  </a:t>
             </a:r>
             <a:r>
               <a:rPr sz="1600" b="0" i="0">
@@ -7113,23 +7488,23 @@
                 </a:solidFill>
                 <a:latin typeface="Montserrat"/>
               </a:rPr>
-              <a:t>Croquis del trazado, anexo al boletín</a:t>
+              <a:t>Dirección de obra: el director (si hay proyecto)</a:t>
             </a:r>
           </a:p>
           <a:p>
             <a:pPr>
               <a:spcAft>
-                <a:spcPts val="1000"/>
+                <a:spcPts val="1100"/>
               </a:spcAft>
             </a:pPr>
             <a:r>
               <a:rPr sz="1600" b="1" i="0">
                 <a:solidFill>
-                  <a:srgbClr val="2E3A80"/>
-                </a:solidFill>
-                <a:latin typeface="Montserrat"/>
-              </a:rPr>
-              <a:t>•  </a:t>
+                  <a:srgbClr val="E8801A"/>
+                </a:solidFill>
+                <a:latin typeface="Montserrat"/>
+              </a:rPr>
+              <a:t>▸  </a:t>
             </a:r>
             <a:r>
               <a:rPr sz="1600" b="0" i="0">
@@ -7138,14 +7513,14 @@
                 </a:solidFill>
                 <a:latin typeface="Montserrat"/>
               </a:rPr>
-              <a:t>Suministrador recuerda, mínimo cada dos años</a:t>
-            </a:r>
-          </a:p>
-        </p:txBody>
-      </p:sp>
-      <p:sp>
-        <p:nvSpPr>
-          <p:cNvPr id="8" name="imgph" descr="IMGQ:hand drawn house pipe sketch plan"/>
+              <a:t>Puesta en marcha: el agente, al usuario</a:t>
+            </a:r>
+          </a:p>
+        </p:txBody>
+      </p:sp>
+      <p:sp>
+        <p:nvSpPr>
+          <p:cNvPr id="9" name="imgph" descr="IMGQ:stack of official signed documents desk"/>
           <p:cNvSpPr/>
           <p:nvPr/>
         </p:nvSpPr>
@@ -7191,7 +7566,7 @@
       </p:sp>
       <p:sp>
         <p:nvSpPr>
-          <p:cNvPr id="9" name="TextBox 8"/>
+          <p:cNvPr id="10" name="TextBox 9"/>
           <p:cNvSpPr txBox="1"/>
           <p:nvPr/>
         </p:nvSpPr>
@@ -7231,7 +7606,7 @@
                 </a:solidFill>
                 <a:latin typeface="Montserrat"/>
               </a:rPr>
-              <a:t>hand drawn house pipe sketch plan</a:t>
+              <a:t>stack of official signed documents desk</a:t>
             </a:r>
           </a:p>
         </p:txBody>
@@ -7328,7 +7703,7 @@
                 </a:solidFill>
                 <a:latin typeface="Montserrat"/>
               </a:rPr>
-              <a:t>016 / 017</a:t>
+              <a:t>016 / 018</a:t>
             </a:r>
           </a:p>
         </p:txBody>
@@ -7376,7 +7751,7 @@
         <p:spPr>
           <a:xfrm>
             <a:off x="822960" y="457200"/>
-            <a:ext cx="8229600" cy="365760"/>
+            <a:ext cx="10058400" cy="365760"/>
           </a:xfrm>
           <a:prstGeom prst="rect">
             <a:avLst/>
@@ -7390,13 +7765,13 @@
           <a:lstStyle/>
           <a:p>
             <a:r>
-              <a:rPr sz="1200" b="1" i="0">
-                <a:solidFill>
-                  <a:srgbClr val="64748B"/>
-                </a:solidFill>
-                <a:latin typeface="Montserrat"/>
-              </a:rPr>
-              <a:t>REPASO RELÁMPAGO</a:t>
+              <a:rPr sz="1300" b="1" i="0">
+                <a:solidFill>
+                  <a:srgbClr val="E8801A"/>
+                </a:solidFill>
+                <a:latin typeface="Montserrat"/>
+              </a:rPr>
+              <a:t>ARTÍCULO 6 · INFORMACIÓN AL USUARIO</a:t>
             </a:r>
           </a:p>
         </p:txBody>
@@ -7424,26 +7799,70 @@
           <a:lstStyle/>
           <a:p>
             <a:r>
-              <a:rPr sz="2700" b="1" i="0">
+              <a:rPr sz="2800" b="1" i="0">
                 <a:solidFill>
                   <a:srgbClr val="1E2761"/>
                 </a:solidFill>
                 <a:latin typeface="Montserrat"/>
               </a:rPr>
-              <a:t>Fíjalo en treinta segundos</a:t>
-            </a:r>
-          </a:p>
-        </p:txBody>
-      </p:sp>
-      <p:sp>
-        <p:nvSpPr>
-          <p:cNvPr id="7" name="TextBox 6"/>
+              <a:t>El croquis y el recordatorio bienal</a:t>
+            </a:r>
+          </a:p>
+        </p:txBody>
+      </p:sp>
+      <p:sp>
+        <p:nvSpPr>
+          <p:cNvPr id="7" name="Rounded Rectangle 6"/>
+          <p:cNvSpPr/>
+          <p:nvPr/>
+        </p:nvSpPr>
+        <p:spPr>
+          <a:xfrm>
+            <a:off x="868680" y="1627632"/>
+            <a:ext cx="2011680" cy="73152"/>
+          </a:xfrm>
+          <a:prstGeom prst="roundRect">
+            <a:avLst/>
+          </a:prstGeom>
+          <a:solidFill>
+            <a:srgbClr val="E8801A"/>
+          </a:solidFill>
+          <a:ln>
+            <a:noFill/>
+          </a:ln>
+          <a:effectLst/>
+        </p:spPr>
+        <p:style>
+          <a:lnRef idx="1">
+            <a:schemeClr val="accent1"/>
+          </a:lnRef>
+          <a:fillRef idx="3">
+            <a:schemeClr val="accent1"/>
+          </a:fillRef>
+          <a:effectRef idx="2">
+            <a:schemeClr val="accent1"/>
+          </a:effectRef>
+          <a:fontRef idx="minor">
+            <a:schemeClr val="lt1"/>
+          </a:fontRef>
+        </p:style>
+        <p:txBody>
+          <a:bodyPr rtlCol="0" anchor="ctr"/>
+          <a:lstStyle/>
+          <a:p>
+            <a:pPr algn="ctr"/>
+          </a:p>
+        </p:txBody>
+      </p:sp>
+      <p:sp>
+        <p:nvSpPr>
+          <p:cNvPr id="8" name="TextBox 7"/>
           <p:cNvSpPr txBox="1"/>
           <p:nvPr/>
         </p:nvSpPr>
         <p:spPr>
           <a:xfrm>
-            <a:off x="822960" y="1920240"/>
+            <a:off x="822960" y="1965960"/>
             <a:ext cx="4983480" cy="4206240"/>
           </a:xfrm>
           <a:prstGeom prst="rect">
@@ -7459,17 +7878,17 @@
           <a:p>
             <a:pPr>
               <a:spcAft>
-                <a:spcPts val="1000"/>
+                <a:spcPts val="1100"/>
               </a:spcAft>
             </a:pPr>
             <a:r>
               <a:rPr sz="1600" b="1" i="0">
                 <a:solidFill>
-                  <a:srgbClr val="2E3A80"/>
-                </a:solidFill>
-                <a:latin typeface="Montserrat"/>
-              </a:rPr>
-              <a:t>•  </a:t>
+                  <a:srgbClr val="E8801A"/>
+                </a:solidFill>
+                <a:latin typeface="Montserrat"/>
+              </a:rPr>
+              <a:t>▸  </a:t>
             </a:r>
             <a:r>
               <a:rPr sz="1600" b="0" i="0">
@@ -7478,23 +7897,23 @@
                 </a:solidFill>
                 <a:latin typeface="Montserrat"/>
               </a:rPr>
-              <a:t>Ocho pasos: del diseño al arranque</a:t>
+              <a:t>Instrucciones de uso y mantenimiento</a:t>
             </a:r>
           </a:p>
           <a:p>
             <a:pPr>
               <a:spcAft>
-                <a:spcPts val="1000"/>
+                <a:spcPts val="1100"/>
               </a:spcAft>
             </a:pPr>
             <a:r>
               <a:rPr sz="1600" b="1" i="0">
                 <a:solidFill>
-                  <a:srgbClr val="2E3A80"/>
-                </a:solidFill>
-                <a:latin typeface="Montserrat"/>
-              </a:rPr>
-              <a:t>•  </a:t>
+                  <a:srgbClr val="E8801A"/>
+                </a:solidFill>
+                <a:latin typeface="Montserrat"/>
+              </a:rPr>
+              <a:t>▸  </a:t>
             </a:r>
             <a:r>
               <a:rPr sz="1600" b="0" i="0">
@@ -7503,23 +7922,23 @@
                 </a:solidFill>
                 <a:latin typeface="Montserrat"/>
               </a:rPr>
-              <a:t>Boletín siempre; los otros dos, a veces</a:t>
+              <a:t>Croquis del trazado, anexo al boletín</a:t>
             </a:r>
           </a:p>
           <a:p>
             <a:pPr>
               <a:spcAft>
-                <a:spcPts val="1000"/>
+                <a:spcPts val="1100"/>
               </a:spcAft>
             </a:pPr>
             <a:r>
               <a:rPr sz="1600" b="1" i="0">
                 <a:solidFill>
-                  <a:srgbClr val="2E3A80"/>
-                </a:solidFill>
-                <a:latin typeface="Montserrat"/>
-              </a:rPr>
-              <a:t>•  </a:t>
+                  <a:srgbClr val="E8801A"/>
+                </a:solidFill>
+                <a:latin typeface="Montserrat"/>
+              </a:rPr>
+              <a:t>▸  </a:t>
             </a:r>
             <a:r>
               <a:rPr sz="1600" b="0" i="0">
@@ -7528,39 +7947,14 @@
                 </a:solidFill>
                 <a:latin typeface="Montserrat"/>
               </a:rPr>
-              <a:t>Titular comunica en 30 días</a:t>
-            </a:r>
-          </a:p>
-          <a:p>
-            <a:pPr>
-              <a:spcAft>
-                <a:spcPts val="1000"/>
-              </a:spcAft>
-            </a:pPr>
-            <a:r>
-              <a:rPr sz="1600" b="1" i="0">
-                <a:solidFill>
-                  <a:srgbClr val="2E3A80"/>
-                </a:solidFill>
-                <a:latin typeface="Montserrat"/>
-              </a:rPr>
-              <a:t>•  </a:t>
-            </a:r>
-            <a:r>
-              <a:rPr sz="1600" b="0" i="0">
-                <a:solidFill>
-                  <a:srgbClr val="1B2330"/>
-                </a:solidFill>
-                <a:latin typeface="Montserrat"/>
-              </a:rPr>
-              <a:t>Parada +1 año = como nueva</a:t>
-            </a:r>
-          </a:p>
-        </p:txBody>
-      </p:sp>
-      <p:sp>
-        <p:nvSpPr>
-          <p:cNvPr id="8" name="imgph" descr="IMGQ:gas installation checklist clipboard"/>
+              <a:t>Suministrador recuerda, mínimo cada dos años</a:t>
+            </a:r>
+          </a:p>
+        </p:txBody>
+      </p:sp>
+      <p:sp>
+        <p:nvSpPr>
+          <p:cNvPr id="9" name="imgph" descr="IMGQ:hand drawn house pipe sketch plan"/>
           <p:cNvSpPr/>
           <p:nvPr/>
         </p:nvSpPr>
@@ -7606,7 +8000,7 @@
       </p:sp>
       <p:sp>
         <p:nvSpPr>
-          <p:cNvPr id="9" name="TextBox 8"/>
+          <p:cNvPr id="10" name="TextBox 9"/>
           <p:cNvSpPr txBox="1"/>
           <p:nvPr/>
         </p:nvSpPr>
@@ -7646,7 +8040,7 @@
                 </a:solidFill>
                 <a:latin typeface="Montserrat"/>
               </a:rPr>
-              <a:t>gas installation checklist clipboard</a:t>
+              <a:t>hand drawn house pipe sketch plan</a:t>
             </a:r>
           </a:p>
         </p:txBody>
@@ -7684,6 +8078,465 @@
             <a:avLst/>
           </a:prstGeom>
           <a:solidFill>
+            <a:srgbClr val="FFFFFF"/>
+          </a:solidFill>
+          <a:ln>
+            <a:noFill/>
+          </a:ln>
+          <a:effectLst/>
+        </p:spPr>
+        <p:style>
+          <a:lnRef idx="1">
+            <a:schemeClr val="accent1"/>
+          </a:lnRef>
+          <a:fillRef idx="3">
+            <a:schemeClr val="accent1"/>
+          </a:fillRef>
+          <a:effectRef idx="2">
+            <a:schemeClr val="accent1"/>
+          </a:effectRef>
+          <a:fontRef idx="minor">
+            <a:schemeClr val="lt1"/>
+          </a:fontRef>
+        </p:style>
+        <p:txBody>
+          <a:bodyPr rtlCol="0" anchor="ctr"/>
+          <a:lstStyle/>
+          <a:p>
+            <a:pPr algn="ctr"/>
+          </a:p>
+        </p:txBody>
+      </p:sp>
+      <p:sp>
+        <p:nvSpPr>
+          <p:cNvPr id="3" name="TextBox 2"/>
+          <p:cNvSpPr txBox="1"/>
+          <p:nvPr/>
+        </p:nvSpPr>
+        <p:spPr>
+          <a:xfrm>
+            <a:off x="10607040" y="320040"/>
+            <a:ext cx="1371600" cy="365760"/>
+          </a:xfrm>
+          <a:prstGeom prst="rect">
+            <a:avLst/>
+          </a:prstGeom>
+          <a:noFill/>
+        </p:spPr>
+        <p:txBody>
+          <a:bodyPr wrap="square">
+            <a:spAutoFit/>
+          </a:bodyPr>
+          <a:lstStyle/>
+          <a:p>
+            <a:pPr algn="r"/>
+            <a:r>
+              <a:rPr sz="1000" b="1" i="0">
+                <a:solidFill>
+                  <a:srgbClr val="64748B"/>
+                </a:solidFill>
+                <a:latin typeface="Montserrat"/>
+              </a:rPr>
+              <a:t>017 / 018</a:t>
+            </a:r>
+          </a:p>
+        </p:txBody>
+      </p:sp>
+      <p:sp>
+        <p:nvSpPr>
+          <p:cNvPr id="4" name="TextBox 3"/>
+          <p:cNvSpPr txBox="1"/>
+          <p:nvPr/>
+        </p:nvSpPr>
+        <p:spPr>
+          <a:xfrm>
+            <a:off x="457200" y="6419088"/>
+            <a:ext cx="8229600" cy="365760"/>
+          </a:xfrm>
+          <a:prstGeom prst="rect">
+            <a:avLst/>
+          </a:prstGeom>
+          <a:noFill/>
+        </p:spPr>
+        <p:txBody>
+          <a:bodyPr wrap="square">
+            <a:spAutoFit/>
+          </a:bodyPr>
+          <a:lstStyle/>
+          <a:p>
+            <a:r>
+              <a:rPr sz="900" b="0" i="0">
+                <a:solidFill>
+                  <a:srgbClr val="64748B"/>
+                </a:solidFill>
+                <a:latin typeface="Montserrat"/>
+              </a:rPr>
+              <a:t>Curso Gas B · Tema 00 · El Reglamento de Gas</a:t>
+            </a:r>
+          </a:p>
+        </p:txBody>
+      </p:sp>
+      <p:sp>
+        <p:nvSpPr>
+          <p:cNvPr id="5" name="TextBox 4"/>
+          <p:cNvSpPr txBox="1"/>
+          <p:nvPr/>
+        </p:nvSpPr>
+        <p:spPr>
+          <a:xfrm>
+            <a:off x="822960" y="457200"/>
+            <a:ext cx="10058400" cy="365760"/>
+          </a:xfrm>
+          <a:prstGeom prst="rect">
+            <a:avLst/>
+          </a:prstGeom>
+          <a:noFill/>
+        </p:spPr>
+        <p:txBody>
+          <a:bodyPr wrap="square">
+            <a:spAutoFit/>
+          </a:bodyPr>
+          <a:lstStyle/>
+          <a:p>
+            <a:r>
+              <a:rPr sz="1300" b="1" i="0">
+                <a:solidFill>
+                  <a:srgbClr val="E8801A"/>
+                </a:solidFill>
+                <a:latin typeface="Montserrat"/>
+              </a:rPr>
+              <a:t>REPASO RELÁMPAGO</a:t>
+            </a:r>
+          </a:p>
+        </p:txBody>
+      </p:sp>
+      <p:sp>
+        <p:nvSpPr>
+          <p:cNvPr id="6" name="TextBox 5"/>
+          <p:cNvSpPr txBox="1"/>
+          <p:nvPr/>
+        </p:nvSpPr>
+        <p:spPr>
+          <a:xfrm>
+            <a:off x="822960" y="868680"/>
+            <a:ext cx="10515600" cy="914400"/>
+          </a:xfrm>
+          <a:prstGeom prst="rect">
+            <a:avLst/>
+          </a:prstGeom>
+          <a:noFill/>
+        </p:spPr>
+        <p:txBody>
+          <a:bodyPr wrap="square">
+            <a:spAutoFit/>
+          </a:bodyPr>
+          <a:lstStyle/>
+          <a:p>
+            <a:r>
+              <a:rPr sz="2800" b="1" i="0">
+                <a:solidFill>
+                  <a:srgbClr val="1E2761"/>
+                </a:solidFill>
+                <a:latin typeface="Montserrat"/>
+              </a:rPr>
+              <a:t>Fíjalo en treinta segundos</a:t>
+            </a:r>
+          </a:p>
+        </p:txBody>
+      </p:sp>
+      <p:sp>
+        <p:nvSpPr>
+          <p:cNvPr id="7" name="Rounded Rectangle 6"/>
+          <p:cNvSpPr/>
+          <p:nvPr/>
+        </p:nvSpPr>
+        <p:spPr>
+          <a:xfrm>
+            <a:off x="868680" y="1627632"/>
+            <a:ext cx="2011680" cy="73152"/>
+          </a:xfrm>
+          <a:prstGeom prst="roundRect">
+            <a:avLst/>
+          </a:prstGeom>
+          <a:solidFill>
+            <a:srgbClr val="E8801A"/>
+          </a:solidFill>
+          <a:ln>
+            <a:noFill/>
+          </a:ln>
+          <a:effectLst/>
+        </p:spPr>
+        <p:style>
+          <a:lnRef idx="1">
+            <a:schemeClr val="accent1"/>
+          </a:lnRef>
+          <a:fillRef idx="3">
+            <a:schemeClr val="accent1"/>
+          </a:fillRef>
+          <a:effectRef idx="2">
+            <a:schemeClr val="accent1"/>
+          </a:effectRef>
+          <a:fontRef idx="minor">
+            <a:schemeClr val="lt1"/>
+          </a:fontRef>
+        </p:style>
+        <p:txBody>
+          <a:bodyPr rtlCol="0" anchor="ctr"/>
+          <a:lstStyle/>
+          <a:p>
+            <a:pPr algn="ctr"/>
+          </a:p>
+        </p:txBody>
+      </p:sp>
+      <p:sp>
+        <p:nvSpPr>
+          <p:cNvPr id="8" name="TextBox 7"/>
+          <p:cNvSpPr txBox="1"/>
+          <p:nvPr/>
+        </p:nvSpPr>
+        <p:spPr>
+          <a:xfrm>
+            <a:off x="822960" y="1965960"/>
+            <a:ext cx="4983480" cy="4206240"/>
+          </a:xfrm>
+          <a:prstGeom prst="rect">
+            <a:avLst/>
+          </a:prstGeom>
+          <a:noFill/>
+        </p:spPr>
+        <p:txBody>
+          <a:bodyPr wrap="square">
+            <a:spAutoFit/>
+          </a:bodyPr>
+          <a:lstStyle/>
+          <a:p>
+            <a:pPr>
+              <a:spcAft>
+                <a:spcPts val="1100"/>
+              </a:spcAft>
+            </a:pPr>
+            <a:r>
+              <a:rPr sz="1600" b="1" i="0">
+                <a:solidFill>
+                  <a:srgbClr val="E8801A"/>
+                </a:solidFill>
+                <a:latin typeface="Montserrat"/>
+              </a:rPr>
+              <a:t>▸  </a:t>
+            </a:r>
+            <a:r>
+              <a:rPr sz="1600" b="0" i="0">
+                <a:solidFill>
+                  <a:srgbClr val="1B2330"/>
+                </a:solidFill>
+                <a:latin typeface="Montserrat"/>
+              </a:rPr>
+              <a:t>Ocho pasos: del diseño al arranque</a:t>
+            </a:r>
+          </a:p>
+          <a:p>
+            <a:pPr>
+              <a:spcAft>
+                <a:spcPts val="1100"/>
+              </a:spcAft>
+            </a:pPr>
+            <a:r>
+              <a:rPr sz="1600" b="1" i="0">
+                <a:solidFill>
+                  <a:srgbClr val="E8801A"/>
+                </a:solidFill>
+                <a:latin typeface="Montserrat"/>
+              </a:rPr>
+              <a:t>▸  </a:t>
+            </a:r>
+            <a:r>
+              <a:rPr sz="1600" b="0" i="0">
+                <a:solidFill>
+                  <a:srgbClr val="1B2330"/>
+                </a:solidFill>
+                <a:latin typeface="Montserrat"/>
+              </a:rPr>
+              <a:t>Boletín siempre; los otros dos, a veces</a:t>
+            </a:r>
+          </a:p>
+          <a:p>
+            <a:pPr>
+              <a:spcAft>
+                <a:spcPts val="1100"/>
+              </a:spcAft>
+            </a:pPr>
+            <a:r>
+              <a:rPr sz="1600" b="1" i="0">
+                <a:solidFill>
+                  <a:srgbClr val="E8801A"/>
+                </a:solidFill>
+                <a:latin typeface="Montserrat"/>
+              </a:rPr>
+              <a:t>▸  </a:t>
+            </a:r>
+            <a:r>
+              <a:rPr sz="1600" b="0" i="0">
+                <a:solidFill>
+                  <a:srgbClr val="1B2330"/>
+                </a:solidFill>
+                <a:latin typeface="Montserrat"/>
+              </a:rPr>
+              <a:t>Titular comunica en 30 días</a:t>
+            </a:r>
+          </a:p>
+          <a:p>
+            <a:pPr>
+              <a:spcAft>
+                <a:spcPts val="1100"/>
+              </a:spcAft>
+            </a:pPr>
+            <a:r>
+              <a:rPr sz="1600" b="1" i="0">
+                <a:solidFill>
+                  <a:srgbClr val="E8801A"/>
+                </a:solidFill>
+                <a:latin typeface="Montserrat"/>
+              </a:rPr>
+              <a:t>▸  </a:t>
+            </a:r>
+            <a:r>
+              <a:rPr sz="1600" b="0" i="0">
+                <a:solidFill>
+                  <a:srgbClr val="1B2330"/>
+                </a:solidFill>
+                <a:latin typeface="Montserrat"/>
+              </a:rPr>
+              <a:t>Parada +1 año = como nueva</a:t>
+            </a:r>
+          </a:p>
+        </p:txBody>
+      </p:sp>
+      <p:sp>
+        <p:nvSpPr>
+          <p:cNvPr id="9" name="imgph" descr="IMGQ:gas installation checklist clipboard"/>
+          <p:cNvSpPr/>
+          <p:nvPr/>
+        </p:nvSpPr>
+        <p:spPr>
+          <a:xfrm>
+            <a:off x="5806440" y="1051560"/>
+            <a:ext cx="5298947" cy="4629150"/>
+          </a:xfrm>
+          <a:prstGeom prst="roundRect">
+            <a:avLst/>
+          </a:prstGeom>
+          <a:solidFill>
+            <a:srgbClr val="F3F6FB"/>
+          </a:solidFill>
+          <a:ln w="12700">
+            <a:solidFill>
+              <a:srgbClr val="C7D2E6"/>
+            </a:solidFill>
+          </a:ln>
+          <a:effectLst/>
+        </p:spPr>
+        <p:style>
+          <a:lnRef idx="1">
+            <a:schemeClr val="accent1"/>
+          </a:lnRef>
+          <a:fillRef idx="3">
+            <a:schemeClr val="accent1"/>
+          </a:fillRef>
+          <a:effectRef idx="2">
+            <a:schemeClr val="accent1"/>
+          </a:effectRef>
+          <a:fontRef idx="minor">
+            <a:schemeClr val="lt1"/>
+          </a:fontRef>
+        </p:style>
+        <p:txBody>
+          <a:bodyPr rtlCol="0" anchor="ctr"/>
+          <a:lstStyle/>
+          <a:p>
+            <a:pPr algn="ctr"/>
+          </a:p>
+        </p:txBody>
+      </p:sp>
+      <p:sp>
+        <p:nvSpPr>
+          <p:cNvPr id="10" name="TextBox 9"/>
+          <p:cNvSpPr txBox="1"/>
+          <p:nvPr/>
+        </p:nvSpPr>
+        <p:spPr>
+          <a:xfrm>
+            <a:off x="6080760" y="2726055"/>
+            <a:ext cx="4750307" cy="1280160"/>
+          </a:xfrm>
+          <a:prstGeom prst="rect">
+            <a:avLst/>
+          </a:prstGeom>
+          <a:noFill/>
+        </p:spPr>
+        <p:txBody>
+          <a:bodyPr wrap="square">
+            <a:spAutoFit/>
+          </a:bodyPr>
+          <a:lstStyle/>
+          <a:p>
+            <a:pPr algn="ctr"/>
+            <a:r>
+              <a:rPr sz="1400" b="1" i="0">
+                <a:solidFill>
+                  <a:srgbClr val="64748B"/>
+                </a:solidFill>
+                <a:latin typeface="Montserrat"/>
+              </a:rPr>
+              <a:t>IMAGEN REALISTA</a:t>
+            </a:r>
+          </a:p>
+          <a:p>
+            <a:pPr algn="ctr"/>
+            <a:r>
+              <a:rPr sz="1100" b="0" i="1">
+                <a:solidFill>
+                  <a:srgbClr val="64748B"/>
+                </a:solidFill>
+                <a:latin typeface="Montserrat"/>
+              </a:rPr>
+              <a:t>gas installation checklist clipboard</a:t>
+            </a:r>
+          </a:p>
+        </p:txBody>
+      </p:sp>
+    </p:spTree>
+  </p:cSld>
+  <p:clrMapOvr>
+    <a:masterClrMapping/>
+  </p:clrMapOvr>
+</p:sld>
+</file>
+
+<file path=ppt/slides/slide18.xml><?xml version="1.0" encoding="utf-8"?>
+<p:sld xmlns:a="http://schemas.openxmlformats.org/drawingml/2006/main" xmlns:p="http://schemas.openxmlformats.org/presentationml/2006/main" xmlns:r="http://schemas.openxmlformats.org/officeDocument/2006/relationships">
+  <p:cSld>
+    <p:spTree>
+      <p:nvGrpSpPr>
+        <p:cNvPr id="1" name=""/>
+        <p:cNvGrpSpPr/>
+        <p:nvPr/>
+      </p:nvGrpSpPr>
+      <p:grpSpPr/>
+      <p:sp>
+        <p:nvSpPr>
+          <p:cNvPr id="2" name="Rectangle 1"/>
+          <p:cNvSpPr/>
+          <p:nvPr/>
+        </p:nvSpPr>
+        <p:spPr>
+          <a:xfrm>
+            <a:off x="0" y="0"/>
+            <a:ext cx="12191695" cy="6858000"/>
+          </a:xfrm>
+          <a:prstGeom prst="rect">
+            <a:avLst/>
+          </a:prstGeom>
+          <a:solidFill>
             <a:srgbClr val="1E2761"/>
           </a:solidFill>
           <a:ln>
@@ -7738,7 +8591,7 @@
             <a:r>
               <a:rPr sz="1400" b="1" i="0">
                 <a:solidFill>
-                  <a:srgbClr val="CADCFC"/>
+                  <a:srgbClr val="F4A24C"/>
                 </a:solidFill>
                 <a:latin typeface="Montserrat"/>
               </a:rPr>
@@ -7749,13 +8602,57 @@
       </p:sp>
       <p:sp>
         <p:nvSpPr>
-          <p:cNvPr id="4" name="TextBox 3"/>
+          <p:cNvPr id="4" name="Rounded Rectangle 3"/>
+          <p:cNvSpPr/>
+          <p:nvPr/>
+        </p:nvSpPr>
+        <p:spPr>
+          <a:xfrm>
+            <a:off x="868680" y="1051560"/>
+            <a:ext cx="1463040" cy="82296"/>
+          </a:xfrm>
+          <a:prstGeom prst="roundRect">
+            <a:avLst/>
+          </a:prstGeom>
+          <a:solidFill>
+            <a:srgbClr val="E8801A"/>
+          </a:solidFill>
+          <a:ln>
+            <a:noFill/>
+          </a:ln>
+          <a:effectLst/>
+        </p:spPr>
+        <p:style>
+          <a:lnRef idx="1">
+            <a:schemeClr val="accent1"/>
+          </a:lnRef>
+          <a:fillRef idx="3">
+            <a:schemeClr val="accent1"/>
+          </a:fillRef>
+          <a:effectRef idx="2">
+            <a:schemeClr val="accent1"/>
+          </a:effectRef>
+          <a:fontRef idx="minor">
+            <a:schemeClr val="lt1"/>
+          </a:fontRef>
+        </p:style>
+        <p:txBody>
+          <a:bodyPr rtlCol="0" anchor="ctr"/>
+          <a:lstStyle/>
+          <a:p>
+            <a:pPr algn="ctr"/>
+          </a:p>
+        </p:txBody>
+      </p:sp>
+      <p:sp>
+        <p:nvSpPr>
+          <p:cNvPr id="5" name="TextBox 4"/>
           <p:cNvSpPr txBox="1"/>
           <p:nvPr/>
         </p:nvSpPr>
         <p:spPr>
           <a:xfrm>
-            <a:off x="822960" y="1143000"/>
+            <a:off x="822960" y="1234440"/>
             <a:ext cx="10515600" cy="1097280"/>
           </a:xfrm>
           <a:prstGeom prst="rect">
@@ -7783,14 +8680,14 @@
       </p:sp>
       <p:sp>
         <p:nvSpPr>
-          <p:cNvPr id="5" name="TextBox 4"/>
+          <p:cNvPr id="6" name="TextBox 5"/>
           <p:cNvSpPr txBox="1"/>
           <p:nvPr/>
         </p:nvSpPr>
         <p:spPr>
           <a:xfrm>
-            <a:off x="822960" y="2514600"/>
-            <a:ext cx="10515600" cy="2834640"/>
+            <a:off x="822960" y="2606040"/>
+            <a:ext cx="10515600" cy="2743200"/>
           </a:xfrm>
           <a:prstGeom prst="rect">
             <a:avLst/>
@@ -7811,7 +8708,7 @@
             <a:r>
               <a:rPr sz="2000" b="1" i="0">
                 <a:solidFill>
-                  <a:srgbClr val="CADCFC"/>
+                  <a:srgbClr val="F4A24C"/>
                 </a:solidFill>
                 <a:latin typeface="Montserrat"/>
               </a:rPr>
@@ -7836,7 +8733,7 @@
             <a:r>
               <a:rPr sz="2000" b="1" i="0">
                 <a:solidFill>
-                  <a:srgbClr val="CADCFC"/>
+                  <a:srgbClr val="F4A24C"/>
                 </a:solidFill>
                 <a:latin typeface="Montserrat"/>
               </a:rPr>
@@ -7861,7 +8758,7 @@
             <a:r>
               <a:rPr sz="2000" b="1" i="0">
                 <a:solidFill>
-                  <a:srgbClr val="CADCFC"/>
+                  <a:srgbClr val="F4A24C"/>
                 </a:solidFill>
                 <a:latin typeface="Montserrat"/>
               </a:rPr>
@@ -7886,7 +8783,7 @@
             <a:r>
               <a:rPr sz="2000" b="1" i="0">
                 <a:solidFill>
-                  <a:srgbClr val="CADCFC"/>
+                  <a:srgbClr val="F4A24C"/>
                 </a:solidFill>
                 <a:latin typeface="Montserrat"/>
               </a:rPr>
@@ -7906,20 +8803,20 @@
       </p:sp>
       <p:sp>
         <p:nvSpPr>
-          <p:cNvPr id="6" name="Rounded Rectangle 5"/>
+          <p:cNvPr id="7" name="Rounded Rectangle 6"/>
           <p:cNvSpPr/>
           <p:nvPr/>
         </p:nvSpPr>
         <p:spPr>
           <a:xfrm>
             <a:off x="822960" y="5532120"/>
-            <a:ext cx="10515600" cy="777240"/>
+            <a:ext cx="10515600" cy="822960"/>
           </a:xfrm>
           <a:prstGeom prst="roundRect">
             <a:avLst/>
           </a:prstGeom>
           <a:solidFill>
-            <a:srgbClr val="2E3A80"/>
+            <a:srgbClr val="E8801A"/>
           </a:solidFill>
           <a:ln>
             <a:noFill/>
@@ -7950,13 +8847,13 @@
       </p:sp>
       <p:sp>
         <p:nvSpPr>
-          <p:cNvPr id="7" name="TextBox 6"/>
+          <p:cNvPr id="8" name="TextBox 7"/>
           <p:cNvSpPr txBox="1"/>
           <p:nvPr/>
         </p:nvSpPr>
         <p:spPr>
           <a:xfrm>
-            <a:off x="1051560" y="5605272"/>
+            <a:off x="1051560" y="5623560"/>
             <a:ext cx="10058400" cy="640080"/>
           </a:xfrm>
           <a:prstGeom prst="rect">
@@ -7973,7 +8870,7 @@
             <a:r>
               <a:rPr sz="1500" b="1" i="1">
                 <a:solidFill>
-                  <a:srgbClr val="CADCFC"/>
+                  <a:srgbClr val="1E2761"/>
                 </a:solidFill>
                 <a:latin typeface="Montserrat"/>
               </a:rPr>
@@ -8074,7 +8971,7 @@
                 </a:solidFill>
                 <a:latin typeface="Montserrat"/>
               </a:rPr>
-              <a:t>002 / 017</a:t>
+              <a:t>002 / 018</a:t>
             </a:r>
           </a:p>
         </p:txBody>
@@ -8138,7 +9035,7 @@
             <a:r>
               <a:rPr sz="2700" b="1" i="0">
                 <a:solidFill>
-                  <a:srgbClr val="1E2761"/>
+                  <a:srgbClr val="E8801A"/>
                 </a:solidFill>
                 <a:latin typeface="Montserrat"/>
               </a:rPr>
@@ -8150,6 +9047,50 @@
       <p:sp>
         <p:nvSpPr>
           <p:cNvPr id="6" name="Rounded Rectangle 5"/>
+          <p:cNvSpPr/>
+          <p:nvPr/>
+        </p:nvSpPr>
+        <p:spPr>
+          <a:xfrm>
+            <a:off x="868680" y="1234440"/>
+            <a:ext cx="1463040" cy="73152"/>
+          </a:xfrm>
+          <a:prstGeom prst="roundRect">
+            <a:avLst/>
+          </a:prstGeom>
+          <a:solidFill>
+            <a:srgbClr val="1E2761"/>
+          </a:solidFill>
+          <a:ln>
+            <a:noFill/>
+          </a:ln>
+          <a:effectLst/>
+        </p:spPr>
+        <p:style>
+          <a:lnRef idx="1">
+            <a:schemeClr val="accent1"/>
+          </a:lnRef>
+          <a:fillRef idx="3">
+            <a:schemeClr val="accent1"/>
+          </a:fillRef>
+          <a:effectRef idx="2">
+            <a:schemeClr val="accent1"/>
+          </a:effectRef>
+          <a:fontRef idx="minor">
+            <a:schemeClr val="lt1"/>
+          </a:fontRef>
+        </p:style>
+        <p:txBody>
+          <a:bodyPr rtlCol="0" anchor="ctr"/>
+          <a:lstStyle/>
+          <a:p>
+            <a:pPr algn="ctr"/>
+          </a:p>
+        </p:txBody>
+      </p:sp>
+      <p:sp>
+        <p:nvSpPr>
+          <p:cNvPr id="7" name="Rounded Rectangle 6"/>
           <p:cNvSpPr/>
           <p:nvPr/>
         </p:nvSpPr>
@@ -8195,7 +9136,7 @@
       </p:sp>
       <p:sp>
         <p:nvSpPr>
-          <p:cNvPr id="7" name="TextBox 6"/>
+          <p:cNvPr id="8" name="TextBox 7"/>
           <p:cNvSpPr txBox="1"/>
           <p:nvPr/>
         </p:nvSpPr>
@@ -8230,7 +9171,7 @@
       </p:sp>
       <p:sp>
         <p:nvSpPr>
-          <p:cNvPr id="8" name="TextBox 7"/>
+          <p:cNvPr id="9" name="TextBox 8"/>
           <p:cNvSpPr txBox="1"/>
           <p:nvPr/>
         </p:nvSpPr>
@@ -8265,7 +9206,7 @@
       </p:sp>
       <p:sp>
         <p:nvSpPr>
-          <p:cNvPr id="9" name="Rounded Rectangle 8"/>
+          <p:cNvPr id="10" name="Rounded Rectangle 9"/>
           <p:cNvSpPr/>
           <p:nvPr/>
         </p:nvSpPr>
@@ -8311,7 +9252,7 @@
       </p:sp>
       <p:sp>
         <p:nvSpPr>
-          <p:cNvPr id="10" name="TextBox 9"/>
+          <p:cNvPr id="11" name="TextBox 10"/>
           <p:cNvSpPr txBox="1"/>
           <p:nvPr/>
         </p:nvSpPr>
@@ -8346,7 +9287,7 @@
       </p:sp>
       <p:sp>
         <p:nvSpPr>
-          <p:cNvPr id="11" name="TextBox 10"/>
+          <p:cNvPr id="12" name="TextBox 11"/>
           <p:cNvSpPr txBox="1"/>
           <p:nvPr/>
         </p:nvSpPr>
@@ -8381,7 +9322,7 @@
       </p:sp>
       <p:sp>
         <p:nvSpPr>
-          <p:cNvPr id="12" name="Rounded Rectangle 11"/>
+          <p:cNvPr id="13" name="Rounded Rectangle 12"/>
           <p:cNvSpPr/>
           <p:nvPr/>
         </p:nvSpPr>
@@ -8427,7 +9368,7 @@
       </p:sp>
       <p:sp>
         <p:nvSpPr>
-          <p:cNvPr id="13" name="TextBox 12"/>
+          <p:cNvPr id="14" name="TextBox 13"/>
           <p:cNvSpPr txBox="1"/>
           <p:nvPr/>
         </p:nvSpPr>
@@ -8462,7 +9403,7 @@
       </p:sp>
       <p:sp>
         <p:nvSpPr>
-          <p:cNvPr id="14" name="TextBox 13"/>
+          <p:cNvPr id="15" name="TextBox 14"/>
           <p:cNvSpPr txBox="1"/>
           <p:nvPr/>
         </p:nvSpPr>
@@ -8587,7 +9528,7 @@
                 </a:solidFill>
                 <a:latin typeface="Montserrat"/>
               </a:rPr>
-              <a:t>003 / 017</a:t>
+              <a:t>003 / 018</a:t>
             </a:r>
           </a:p>
         </p:txBody>
@@ -8634,7 +9575,7 @@
         </p:nvSpPr>
         <p:spPr>
           <a:xfrm>
-            <a:off x="822960" y="457200"/>
+            <a:off x="822960" y="502920"/>
             <a:ext cx="8229600" cy="365760"/>
           </a:xfrm>
           <a:prstGeom prst="rect">
@@ -8649,13 +9590,13 @@
           <a:lstStyle/>
           <a:p>
             <a:r>
-              <a:rPr sz="1200" b="1" i="0">
-                <a:solidFill>
-                  <a:srgbClr val="64748B"/>
-                </a:solidFill>
-                <a:latin typeface="Montserrat"/>
-              </a:rPr>
-              <a:t>ARTÍCULO 4 · MATERIALES</a:t>
+              <a:rPr sz="1300" b="1" i="0">
+                <a:solidFill>
+                  <a:srgbClr val="E8801A"/>
+                </a:solidFill>
+                <a:latin typeface="Montserrat"/>
+              </a:rPr>
+              <a:t>PARTES DE ESTE VÍDEO</a:t>
             </a:r>
           </a:p>
         </p:txBody>
@@ -8668,7 +9609,7 @@
         </p:nvSpPr>
         <p:spPr>
           <a:xfrm>
-            <a:off x="822960" y="868680"/>
+            <a:off x="822960" y="914400"/>
             <a:ext cx="10515600" cy="914400"/>
           </a:xfrm>
           <a:prstGeom prst="rect">
@@ -8689,130 +9630,30 @@
                 </a:solidFill>
                 <a:latin typeface="Montserrat"/>
               </a:rPr>
-              <a:t>El DNI del material</a:t>
-            </a:r>
-          </a:p>
-        </p:txBody>
-      </p:sp>
-      <p:sp>
-        <p:nvSpPr>
-          <p:cNvPr id="7" name="TextBox 6"/>
-          <p:cNvSpPr txBox="1"/>
-          <p:nvPr/>
-        </p:nvSpPr>
-        <p:spPr>
-          <a:xfrm>
-            <a:off x="822960" y="1920240"/>
-            <a:ext cx="4983480" cy="4206240"/>
-          </a:xfrm>
-          <a:prstGeom prst="rect">
-            <a:avLst/>
-          </a:prstGeom>
-          <a:noFill/>
-        </p:spPr>
-        <p:txBody>
-          <a:bodyPr wrap="square">
-            <a:spAutoFit/>
-          </a:bodyPr>
-          <a:lstStyle/>
-          <a:p>
-            <a:pPr>
-              <a:spcAft>
-                <a:spcPts val="1000"/>
-              </a:spcAft>
-            </a:pPr>
-            <a:r>
-              <a:rPr sz="1600" b="1" i="0">
-                <a:solidFill>
-                  <a:srgbClr val="2E3A80"/>
-                </a:solidFill>
-                <a:latin typeface="Montserrat"/>
-              </a:rPr>
-              <a:t>•  </a:t>
-            </a:r>
-            <a:r>
-              <a:rPr sz="1600" b="0" i="0">
-                <a:solidFill>
-                  <a:srgbClr val="1B2330"/>
-                </a:solidFill>
-                <a:latin typeface="Montserrat"/>
-              </a:rPr>
-              <a:t>Marcado visible e indeleble</a:t>
-            </a:r>
-          </a:p>
-          <a:p>
-            <a:pPr>
-              <a:spcAft>
-                <a:spcPts val="1000"/>
-              </a:spcAft>
-            </a:pPr>
-            <a:r>
-              <a:rPr sz="1600" b="1" i="0">
-                <a:solidFill>
-                  <a:srgbClr val="2E3A80"/>
-                </a:solidFill>
-                <a:latin typeface="Montserrat"/>
-              </a:rPr>
-              <a:t>•  </a:t>
-            </a:r>
-            <a:r>
-              <a:rPr sz="1600" b="0" i="0">
-                <a:solidFill>
-                  <a:srgbClr val="1B2330"/>
-                </a:solidFill>
-                <a:latin typeface="Montserrat"/>
-              </a:rPr>
-              <a:t>Fabricante, marca y modelo</a:t>
-            </a:r>
-          </a:p>
-          <a:p>
-            <a:pPr>
-              <a:spcAft>
-                <a:spcPts val="1000"/>
-              </a:spcAft>
-            </a:pPr>
-            <a:r>
-              <a:rPr sz="1600" b="1" i="0">
-                <a:solidFill>
-                  <a:srgbClr val="2E3A80"/>
-                </a:solidFill>
-                <a:latin typeface="Montserrat"/>
-              </a:rPr>
-              <a:t>•  </a:t>
-            </a:r>
-            <a:r>
-              <a:rPr sz="1600" b="0" i="0">
-                <a:solidFill>
-                  <a:srgbClr val="1B2330"/>
-                </a:solidFill>
-                <a:latin typeface="Montserrat"/>
-              </a:rPr>
-              <a:t>Certificados y marcas de conformidad</a:t>
-            </a:r>
-          </a:p>
-        </p:txBody>
-      </p:sp>
-      <p:sp>
-        <p:nvSpPr>
-          <p:cNvPr id="8" name="imgph" descr="IMGQ:gas valve stamped marking metal"/>
+              <a:t>En este vídeo</a:t>
+            </a:r>
+          </a:p>
+        </p:txBody>
+      </p:sp>
+      <p:sp>
+        <p:nvSpPr>
+          <p:cNvPr id="7" name="Rounded Rectangle 6"/>
           <p:cNvSpPr/>
           <p:nvPr/>
         </p:nvSpPr>
         <p:spPr>
           <a:xfrm>
-            <a:off x="5806440" y="1051560"/>
-            <a:ext cx="5298947" cy="4629150"/>
+            <a:off x="868680" y="1673352"/>
+            <a:ext cx="2011680" cy="73152"/>
           </a:xfrm>
           <a:prstGeom prst="roundRect">
             <a:avLst/>
           </a:prstGeom>
           <a:solidFill>
-            <a:srgbClr val="F3F6FB"/>
+            <a:srgbClr val="E8801A"/>
           </a:solidFill>
-          <a:ln w="12700">
-            <a:solidFill>
-              <a:srgbClr val="C7D2E6"/>
-            </a:solidFill>
+          <a:ln>
+            <a:noFill/>
           </a:ln>
           <a:effectLst/>
         </p:spPr>
@@ -8840,14 +9681,14 @@
       </p:sp>
       <p:sp>
         <p:nvSpPr>
-          <p:cNvPr id="9" name="TextBox 8"/>
+          <p:cNvPr id="8" name="TextBox 7"/>
           <p:cNvSpPr txBox="1"/>
           <p:nvPr/>
         </p:nvSpPr>
         <p:spPr>
           <a:xfrm>
-            <a:off x="6080760" y="2726055"/>
-            <a:ext cx="4750307" cy="1280160"/>
+            <a:off x="822960" y="2103120"/>
+            <a:ext cx="10515600" cy="4023360"/>
           </a:xfrm>
           <a:prstGeom prst="rect">
             <a:avLst/>
@@ -8860,27 +9701,228 @@
           </a:bodyPr>
           <a:lstStyle/>
           <a:p>
-            <a:pPr algn="ctr"/>
-            <a:r>
-              <a:rPr sz="1400" b="1" i="0">
-                <a:solidFill>
-                  <a:srgbClr val="64748B"/>
-                </a:solidFill>
-                <a:latin typeface="Montserrat"/>
-              </a:rPr>
-              <a:t>IMAGEN REALISTA</a:t>
-            </a:r>
-          </a:p>
-          <a:p>
-            <a:pPr algn="ctr"/>
-            <a:r>
-              <a:rPr sz="1100" b="0" i="1">
-                <a:solidFill>
-                  <a:srgbClr val="64748B"/>
-                </a:solidFill>
-                <a:latin typeface="Montserrat"/>
-              </a:rPr>
-              <a:t>gas valve stamped marking metal</a:t>
+            <a:pPr>
+              <a:spcAft>
+                <a:spcPts val="900"/>
+              </a:spcAft>
+            </a:pPr>
+            <a:r>
+              <a:rPr sz="1800" b="1" i="0">
+                <a:solidFill>
+                  <a:srgbClr val="E8801A"/>
+                </a:solidFill>
+                <a:latin typeface="Montserrat"/>
+              </a:rPr>
+              <a:t>01   </a:t>
+            </a:r>
+            <a:r>
+              <a:rPr sz="1700" b="0" i="0">
+                <a:solidFill>
+                  <a:srgbClr val="1B2330"/>
+                </a:solidFill>
+                <a:latin typeface="Montserrat"/>
+              </a:rPr>
+              <a:t>Artículo 4</a:t>
+            </a:r>
+          </a:p>
+          <a:p>
+            <a:pPr>
+              <a:spcAft>
+                <a:spcPts val="900"/>
+              </a:spcAft>
+            </a:pPr>
+            <a:r>
+              <a:rPr sz="1800" b="1" i="0">
+                <a:solidFill>
+                  <a:srgbClr val="E8801A"/>
+                </a:solidFill>
+                <a:latin typeface="Montserrat"/>
+              </a:rPr>
+              <a:t>02   </a:t>
+            </a:r>
+            <a:r>
+              <a:rPr sz="1700" b="0" i="0">
+                <a:solidFill>
+                  <a:srgbClr val="1B2330"/>
+                </a:solidFill>
+                <a:latin typeface="Montserrat"/>
+              </a:rPr>
+              <a:t>Artículo 5</a:t>
+            </a:r>
+          </a:p>
+          <a:p>
+            <a:pPr>
+              <a:spcAft>
+                <a:spcPts val="900"/>
+              </a:spcAft>
+            </a:pPr>
+            <a:r>
+              <a:rPr sz="1800" b="1" i="0">
+                <a:solidFill>
+                  <a:srgbClr val="E8801A"/>
+                </a:solidFill>
+                <a:latin typeface="Montserrat"/>
+              </a:rPr>
+              <a:t>03   </a:t>
+            </a:r>
+            <a:r>
+              <a:rPr sz="1700" b="0" i="0">
+                <a:solidFill>
+                  <a:srgbClr val="1B2330"/>
+                </a:solidFill>
+                <a:latin typeface="Montserrat"/>
+              </a:rPr>
+              <a:t>Artículo 5.1</a:t>
+            </a:r>
+          </a:p>
+          <a:p>
+            <a:pPr>
+              <a:spcAft>
+                <a:spcPts val="900"/>
+              </a:spcAft>
+            </a:pPr>
+            <a:r>
+              <a:rPr sz="1800" b="1" i="0">
+                <a:solidFill>
+                  <a:srgbClr val="E8801A"/>
+                </a:solidFill>
+                <a:latin typeface="Montserrat"/>
+              </a:rPr>
+              <a:t>04   </a:t>
+            </a:r>
+            <a:r>
+              <a:rPr sz="1700" b="0" i="0">
+                <a:solidFill>
+                  <a:srgbClr val="1B2330"/>
+                </a:solidFill>
+                <a:latin typeface="Montserrat"/>
+              </a:rPr>
+              <a:t>Artículo 5.2</a:t>
+            </a:r>
+          </a:p>
+          <a:p>
+            <a:pPr>
+              <a:spcAft>
+                <a:spcPts val="900"/>
+              </a:spcAft>
+            </a:pPr>
+            <a:r>
+              <a:rPr sz="1800" b="1" i="0">
+                <a:solidFill>
+                  <a:srgbClr val="E8801A"/>
+                </a:solidFill>
+                <a:latin typeface="Montserrat"/>
+              </a:rPr>
+              <a:t>05   </a:t>
+            </a:r>
+            <a:r>
+              <a:rPr sz="1700" b="0" i="0">
+                <a:solidFill>
+                  <a:srgbClr val="1B2330"/>
+                </a:solidFill>
+                <a:latin typeface="Montserrat"/>
+              </a:rPr>
+              <a:t>Artículo 5.3</a:t>
+            </a:r>
+          </a:p>
+          <a:p>
+            <a:pPr>
+              <a:spcAft>
+                <a:spcPts val="900"/>
+              </a:spcAft>
+            </a:pPr>
+            <a:r>
+              <a:rPr sz="1800" b="1" i="0">
+                <a:solidFill>
+                  <a:srgbClr val="E8801A"/>
+                </a:solidFill>
+                <a:latin typeface="Montserrat"/>
+              </a:rPr>
+              <a:t>06   </a:t>
+            </a:r>
+            <a:r>
+              <a:rPr sz="1700" b="0" i="0">
+                <a:solidFill>
+                  <a:srgbClr val="1B2330"/>
+                </a:solidFill>
+                <a:latin typeface="Montserrat"/>
+              </a:rPr>
+              <a:t>Artículo 5.4</a:t>
+            </a:r>
+          </a:p>
+          <a:p>
+            <a:pPr>
+              <a:spcAft>
+                <a:spcPts val="900"/>
+              </a:spcAft>
+            </a:pPr>
+            <a:r>
+              <a:rPr sz="1800" b="1" i="0">
+                <a:solidFill>
+                  <a:srgbClr val="E8801A"/>
+                </a:solidFill>
+                <a:latin typeface="Montserrat"/>
+              </a:rPr>
+              <a:t>07   </a:t>
+            </a:r>
+            <a:r>
+              <a:rPr sz="1700" b="0" i="0">
+                <a:solidFill>
+                  <a:srgbClr val="1B2330"/>
+                </a:solidFill>
+                <a:latin typeface="Montserrat"/>
+              </a:rPr>
+              <a:t>Artículo 5.5</a:t>
+            </a:r>
+          </a:p>
+          <a:p>
+            <a:pPr>
+              <a:spcAft>
+                <a:spcPts val="900"/>
+              </a:spcAft>
+            </a:pPr>
+            <a:r>
+              <a:rPr sz="1800" b="1" i="0">
+                <a:solidFill>
+                  <a:srgbClr val="E8801A"/>
+                </a:solidFill>
+                <a:latin typeface="Montserrat"/>
+              </a:rPr>
+              <a:t>08   </a:t>
+            </a:r>
+            <a:r>
+              <a:rPr sz="1700" b="0" i="0">
+                <a:solidFill>
+                  <a:srgbClr val="1B2330"/>
+                </a:solidFill>
+                <a:latin typeface="Montserrat"/>
+              </a:rPr>
+              <a:t>Artículo 5.6</a:t>
+            </a:r>
+          </a:p>
+          <a:p>
+            <a:pPr>
+              <a:spcAft>
+                <a:spcPts val="900"/>
+              </a:spcAft>
+            </a:pPr>
+            <a:r>
+              <a:rPr sz="1800" b="1" i="0">
+                <a:solidFill>
+                  <a:srgbClr val="E8801A"/>
+                </a:solidFill>
+                <a:latin typeface="Montserrat"/>
+              </a:rPr>
+              <a:t>09   </a:t>
+            </a:r>
+            <a:r>
+              <a:rPr sz="1700" b="0" i="0">
+                <a:solidFill>
+                  <a:srgbClr val="1B2330"/>
+                </a:solidFill>
+                <a:latin typeface="Montserrat"/>
+              </a:rPr>
+              <a:t>Artículo 5.7</a:t>
             </a:r>
           </a:p>
         </p:txBody>
@@ -8977,7 +10019,7 @@
                 </a:solidFill>
                 <a:latin typeface="Montserrat"/>
               </a:rPr>
-              <a:t>004 / 017</a:t>
+              <a:t>004 / 018</a:t>
             </a:r>
           </a:p>
         </p:txBody>
@@ -9025,7 +10067,7 @@
         <p:spPr>
           <a:xfrm>
             <a:off x="822960" y="457200"/>
-            <a:ext cx="8229600" cy="365760"/>
+            <a:ext cx="10058400" cy="365760"/>
           </a:xfrm>
           <a:prstGeom prst="rect">
             <a:avLst/>
@@ -9039,13 +10081,13 @@
           <a:lstStyle/>
           <a:p>
             <a:r>
-              <a:rPr sz="1200" b="1" i="0">
-                <a:solidFill>
-                  <a:srgbClr val="64748B"/>
-                </a:solidFill>
-                <a:latin typeface="Montserrat"/>
-              </a:rPr>
-              <a:t>ARTÍCULO 4 · INSTRUCCIONES</a:t>
+              <a:rPr sz="1300" b="1" i="0">
+                <a:solidFill>
+                  <a:srgbClr val="E8801A"/>
+                </a:solidFill>
+                <a:latin typeface="Montserrat"/>
+              </a:rPr>
+              <a:t>ARTÍCULO 4 · MATERIALES</a:t>
             </a:r>
           </a:p>
         </p:txBody>
@@ -9073,26 +10115,70 @@
           <a:lstStyle/>
           <a:p>
             <a:r>
-              <a:rPr sz="2700" b="1" i="0">
+              <a:rPr sz="2800" b="1" i="0">
                 <a:solidFill>
                   <a:srgbClr val="1E2761"/>
                 </a:solidFill>
                 <a:latin typeface="Montserrat"/>
               </a:rPr>
-              <a:t>Al menos en castellano</a:t>
-            </a:r>
-          </a:p>
-        </p:txBody>
-      </p:sp>
-      <p:sp>
-        <p:nvSpPr>
-          <p:cNvPr id="7" name="TextBox 6"/>
+              <a:t>El DNI del material</a:t>
+            </a:r>
+          </a:p>
+        </p:txBody>
+      </p:sp>
+      <p:sp>
+        <p:nvSpPr>
+          <p:cNvPr id="7" name="Rounded Rectangle 6"/>
+          <p:cNvSpPr/>
+          <p:nvPr/>
+        </p:nvSpPr>
+        <p:spPr>
+          <a:xfrm>
+            <a:off x="868680" y="1627632"/>
+            <a:ext cx="2011680" cy="73152"/>
+          </a:xfrm>
+          <a:prstGeom prst="roundRect">
+            <a:avLst/>
+          </a:prstGeom>
+          <a:solidFill>
+            <a:srgbClr val="E8801A"/>
+          </a:solidFill>
+          <a:ln>
+            <a:noFill/>
+          </a:ln>
+          <a:effectLst/>
+        </p:spPr>
+        <p:style>
+          <a:lnRef idx="1">
+            <a:schemeClr val="accent1"/>
+          </a:lnRef>
+          <a:fillRef idx="3">
+            <a:schemeClr val="accent1"/>
+          </a:fillRef>
+          <a:effectRef idx="2">
+            <a:schemeClr val="accent1"/>
+          </a:effectRef>
+          <a:fontRef idx="minor">
+            <a:schemeClr val="lt1"/>
+          </a:fontRef>
+        </p:style>
+        <p:txBody>
+          <a:bodyPr rtlCol="0" anchor="ctr"/>
+          <a:lstStyle/>
+          <a:p>
+            <a:pPr algn="ctr"/>
+          </a:p>
+        </p:txBody>
+      </p:sp>
+      <p:sp>
+        <p:nvSpPr>
+          <p:cNvPr id="8" name="TextBox 7"/>
           <p:cNvSpPr txBox="1"/>
           <p:nvPr/>
         </p:nvSpPr>
         <p:spPr>
           <a:xfrm>
-            <a:off x="822960" y="1920240"/>
+            <a:off x="822960" y="1965960"/>
             <a:ext cx="4983480" cy="4206240"/>
           </a:xfrm>
           <a:prstGeom prst="rect">
@@ -9108,17 +10194,17 @@
           <a:p>
             <a:pPr>
               <a:spcAft>
-                <a:spcPts val="1000"/>
+                <a:spcPts val="1100"/>
               </a:spcAft>
             </a:pPr>
             <a:r>
               <a:rPr sz="1600" b="1" i="0">
                 <a:solidFill>
-                  <a:srgbClr val="2E3A80"/>
-                </a:solidFill>
-                <a:latin typeface="Montserrat"/>
-              </a:rPr>
-              <a:t>•  </a:t>
+                  <a:srgbClr val="E8801A"/>
+                </a:solidFill>
+                <a:latin typeface="Montserrat"/>
+              </a:rPr>
+              <a:t>▸  </a:t>
             </a:r>
             <a:r>
               <a:rPr sz="1600" b="0" i="0">
@@ -9127,23 +10213,23 @@
                 </a:solidFill>
                 <a:latin typeface="Montserrat"/>
               </a:rPr>
-              <a:t>Instrucciones mínimo en castellano</a:t>
+              <a:t>Marcado visible e indeleble</a:t>
             </a:r>
           </a:p>
           <a:p>
             <a:pPr>
               <a:spcAft>
-                <a:spcPts val="1000"/>
+                <a:spcPts val="1100"/>
               </a:spcAft>
             </a:pPr>
             <a:r>
               <a:rPr sz="1600" b="1" i="0">
                 <a:solidFill>
-                  <a:srgbClr val="2E3A80"/>
-                </a:solidFill>
-                <a:latin typeface="Montserrat"/>
-              </a:rPr>
-              <a:t>•  </a:t>
+                  <a:srgbClr val="E8801A"/>
+                </a:solidFill>
+                <a:latin typeface="Montserrat"/>
+              </a:rPr>
+              <a:t>▸  </a:t>
             </a:r>
             <a:r>
               <a:rPr sz="1600" b="0" i="0">
@@ -9152,23 +10238,23 @@
                 </a:solidFill>
                 <a:latin typeface="Montserrat"/>
               </a:rPr>
-              <a:t>Otros idiomas: permitidos como extra</a:t>
+              <a:t>Fabricante, marca y modelo</a:t>
             </a:r>
           </a:p>
           <a:p>
             <a:pPr>
               <a:spcAft>
-                <a:spcPts val="1000"/>
+                <a:spcPts val="1100"/>
               </a:spcAft>
             </a:pPr>
             <a:r>
               <a:rPr sz="1600" b="1" i="0">
                 <a:solidFill>
-                  <a:srgbClr val="2E3A80"/>
-                </a:solidFill>
-                <a:latin typeface="Montserrat"/>
-              </a:rPr>
-              <a:t>•  </a:t>
+                  <a:srgbClr val="E8801A"/>
+                </a:solidFill>
+                <a:latin typeface="Montserrat"/>
+              </a:rPr>
+              <a:t>▸  </a:t>
             </a:r>
             <a:r>
               <a:rPr sz="1600" b="0" i="0">
@@ -9177,14 +10263,14 @@
                 </a:solidFill>
                 <a:latin typeface="Montserrat"/>
               </a:rPr>
-              <a:t>Indicaciones para el uso específico</a:t>
-            </a:r>
-          </a:p>
-        </p:txBody>
-      </p:sp>
-      <p:sp>
-        <p:nvSpPr>
-          <p:cNvPr id="8" name="imgph" descr="IMGQ:appliance instruction manual booklet"/>
+              <a:t>Certificados y marcas de conformidad</a:t>
+            </a:r>
+          </a:p>
+        </p:txBody>
+      </p:sp>
+      <p:sp>
+        <p:nvSpPr>
+          <p:cNvPr id="9" name="imgph" descr="IMGQ:gas valve stamped marking metal"/>
           <p:cNvSpPr/>
           <p:nvPr/>
         </p:nvSpPr>
@@ -9230,7 +10316,7 @@
       </p:sp>
       <p:sp>
         <p:nvSpPr>
-          <p:cNvPr id="9" name="TextBox 8"/>
+          <p:cNvPr id="10" name="TextBox 9"/>
           <p:cNvSpPr txBox="1"/>
           <p:nvPr/>
         </p:nvSpPr>
@@ -9270,7 +10356,7 @@
                 </a:solidFill>
                 <a:latin typeface="Montserrat"/>
               </a:rPr>
-              <a:t>appliance instruction manual booklet</a:t>
+              <a:t>gas valve stamped marking metal</a:t>
             </a:r>
           </a:p>
         </p:txBody>
@@ -9367,7 +10453,7 @@
                 </a:solidFill>
                 <a:latin typeface="Montserrat"/>
               </a:rPr>
-              <a:t>005 / 017</a:t>
+              <a:t>005 / 018</a:t>
             </a:r>
           </a:p>
         </p:txBody>
@@ -9415,7 +10501,7 @@
         <p:spPr>
           <a:xfrm>
             <a:off x="822960" y="457200"/>
-            <a:ext cx="8229600" cy="365760"/>
+            <a:ext cx="10058400" cy="365760"/>
           </a:xfrm>
           <a:prstGeom prst="rect">
             <a:avLst/>
@@ -9429,13 +10515,13 @@
           <a:lstStyle/>
           <a:p>
             <a:r>
-              <a:rPr sz="1200" b="1" i="0">
-                <a:solidFill>
-                  <a:srgbClr val="64748B"/>
-                </a:solidFill>
-                <a:latin typeface="Montserrat"/>
-              </a:rPr>
-              <a:t>ARTÍCULO 5 · PUESTA EN SERVICIO</a:t>
+              <a:rPr sz="1300" b="1" i="0">
+                <a:solidFill>
+                  <a:srgbClr val="E8801A"/>
+                </a:solidFill>
+                <a:latin typeface="Montserrat"/>
+              </a:rPr>
+              <a:t>ARTÍCULO 4 · INSTRUCCIONES</a:t>
             </a:r>
           </a:p>
         </p:txBody>
@@ -9463,26 +10549,70 @@
           <a:lstStyle/>
           <a:p>
             <a:r>
-              <a:rPr sz="2700" b="1" i="0">
+              <a:rPr sz="2800" b="1" i="0">
                 <a:solidFill>
                   <a:srgbClr val="1E2761"/>
                 </a:solidFill>
                 <a:latin typeface="Montserrat"/>
               </a:rPr>
-              <a:t>La película en ocho capítulos</a:t>
-            </a:r>
-          </a:p>
-        </p:txBody>
-      </p:sp>
-      <p:sp>
-        <p:nvSpPr>
-          <p:cNvPr id="7" name="TextBox 6"/>
+              <a:t>Al menos en castellano</a:t>
+            </a:r>
+          </a:p>
+        </p:txBody>
+      </p:sp>
+      <p:sp>
+        <p:nvSpPr>
+          <p:cNvPr id="7" name="Rounded Rectangle 6"/>
+          <p:cNvSpPr/>
+          <p:nvPr/>
+        </p:nvSpPr>
+        <p:spPr>
+          <a:xfrm>
+            <a:off x="868680" y="1627632"/>
+            <a:ext cx="2011680" cy="73152"/>
+          </a:xfrm>
+          <a:prstGeom prst="roundRect">
+            <a:avLst/>
+          </a:prstGeom>
+          <a:solidFill>
+            <a:srgbClr val="E8801A"/>
+          </a:solidFill>
+          <a:ln>
+            <a:noFill/>
+          </a:ln>
+          <a:effectLst/>
+        </p:spPr>
+        <p:style>
+          <a:lnRef idx="1">
+            <a:schemeClr val="accent1"/>
+          </a:lnRef>
+          <a:fillRef idx="3">
+            <a:schemeClr val="accent1"/>
+          </a:fillRef>
+          <a:effectRef idx="2">
+            <a:schemeClr val="accent1"/>
+          </a:effectRef>
+          <a:fontRef idx="minor">
+            <a:schemeClr val="lt1"/>
+          </a:fontRef>
+        </p:style>
+        <p:txBody>
+          <a:bodyPr rtlCol="0" anchor="ctr"/>
+          <a:lstStyle/>
+          <a:p>
+            <a:pPr algn="ctr"/>
+          </a:p>
+        </p:txBody>
+      </p:sp>
+      <p:sp>
+        <p:nvSpPr>
+          <p:cNvPr id="8" name="TextBox 7"/>
           <p:cNvSpPr txBox="1"/>
           <p:nvPr/>
         </p:nvSpPr>
         <p:spPr>
           <a:xfrm>
-            <a:off x="822960" y="1920240"/>
+            <a:off x="822960" y="1965960"/>
             <a:ext cx="4983480" cy="4206240"/>
           </a:xfrm>
           <a:prstGeom prst="rect">
@@ -9498,17 +10628,17 @@
           <a:p>
             <a:pPr>
               <a:spcAft>
-                <a:spcPts val="1000"/>
+                <a:spcPts val="1100"/>
               </a:spcAft>
             </a:pPr>
             <a:r>
               <a:rPr sz="1600" b="1" i="0">
                 <a:solidFill>
-                  <a:srgbClr val="2E3A80"/>
-                </a:solidFill>
-                <a:latin typeface="Montserrat"/>
-              </a:rPr>
-              <a:t>•  </a:t>
+                  <a:srgbClr val="E8801A"/>
+                </a:solidFill>
+                <a:latin typeface="Montserrat"/>
+              </a:rPr>
+              <a:t>▸  </a:t>
             </a:r>
             <a:r>
               <a:rPr sz="1600" b="0" i="0">
@@ -9517,23 +10647,23 @@
                 </a:solidFill>
                 <a:latin typeface="Montserrat"/>
               </a:rPr>
-              <a:t>Diseño → autorización → ejecución</a:t>
+              <a:t>Instrucciones mínimo en castellano</a:t>
             </a:r>
           </a:p>
           <a:p>
             <a:pPr>
               <a:spcAft>
-                <a:spcPts val="1000"/>
+                <a:spcPts val="1100"/>
               </a:spcAft>
             </a:pPr>
             <a:r>
               <a:rPr sz="1600" b="1" i="0">
                 <a:solidFill>
-                  <a:srgbClr val="2E3A80"/>
-                </a:solidFill>
-                <a:latin typeface="Montserrat"/>
-              </a:rPr>
-              <a:t>•  </a:t>
+                  <a:srgbClr val="E8801A"/>
+                </a:solidFill>
+                <a:latin typeface="Montserrat"/>
+              </a:rPr>
+              <a:t>▸  </a:t>
             </a:r>
             <a:r>
               <a:rPr sz="1600" b="0" i="0">
@@ -9542,23 +10672,23 @@
                 </a:solidFill>
                 <a:latin typeface="Montserrat"/>
               </a:rPr>
-              <a:t>Pruebas → certificados → puesta en servicio</a:t>
+              <a:t>Otros idiomas: permitidos como extra</a:t>
             </a:r>
           </a:p>
           <a:p>
             <a:pPr>
               <a:spcAft>
-                <a:spcPts val="1000"/>
+                <a:spcPts val="1100"/>
               </a:spcAft>
             </a:pPr>
             <a:r>
               <a:rPr sz="1600" b="1" i="0">
                 <a:solidFill>
-                  <a:srgbClr val="2E3A80"/>
-                </a:solidFill>
-                <a:latin typeface="Montserrat"/>
-              </a:rPr>
-              <a:t>•  </a:t>
+                  <a:srgbClr val="E8801A"/>
+                </a:solidFill>
+                <a:latin typeface="Montserrat"/>
+              </a:rPr>
+              <a:t>▸  </a:t>
             </a:r>
             <a:r>
               <a:rPr sz="1600" b="0" i="0">
@@ -9567,39 +10697,14 @@
                 </a:solidFill>
                 <a:latin typeface="Montserrat"/>
               </a:rPr>
-              <a:t>Comunicación → puesta en marcha</a:t>
-            </a:r>
-          </a:p>
-          <a:p>
-            <a:pPr>
-              <a:spcAft>
-                <a:spcPts val="1000"/>
-              </a:spcAft>
-            </a:pPr>
-            <a:r>
-              <a:rPr sz="1600" b="1" i="0">
-                <a:solidFill>
-                  <a:srgbClr val="2E3A80"/>
-                </a:solidFill>
-                <a:latin typeface="Montserrat"/>
-              </a:rPr>
-              <a:t>•  </a:t>
-            </a:r>
-            <a:r>
-              <a:rPr sz="1600" b="0" i="0">
-                <a:solidFill>
-                  <a:srgbClr val="1B2330"/>
-                </a:solidFill>
-                <a:latin typeface="Montserrat"/>
-              </a:rPr>
-              <a:t>En orden, sin saltarse pasos</a:t>
-            </a:r>
-          </a:p>
-        </p:txBody>
-      </p:sp>
-      <p:sp>
-        <p:nvSpPr>
-          <p:cNvPr id="8" name="imgph" descr="IMGQ:gas installation pipework new building"/>
+              <a:t>Indicaciones para el uso específico</a:t>
+            </a:r>
+          </a:p>
+        </p:txBody>
+      </p:sp>
+      <p:sp>
+        <p:nvSpPr>
+          <p:cNvPr id="9" name="imgph" descr="IMGQ:appliance instruction manual booklet"/>
           <p:cNvSpPr/>
           <p:nvPr/>
         </p:nvSpPr>
@@ -9645,7 +10750,7 @@
       </p:sp>
       <p:sp>
         <p:nvSpPr>
-          <p:cNvPr id="9" name="TextBox 8"/>
+          <p:cNvPr id="10" name="TextBox 9"/>
           <p:cNvSpPr txBox="1"/>
           <p:nvPr/>
         </p:nvSpPr>
@@ -9685,7 +10790,7 @@
                 </a:solidFill>
                 <a:latin typeface="Montserrat"/>
               </a:rPr>
-              <a:t>gas installation pipework new building</a:t>
+              <a:t>appliance instruction manual booklet</a:t>
             </a:r>
           </a:p>
         </p:txBody>
@@ -9782,7 +10887,7 @@
                 </a:solidFill>
                 <a:latin typeface="Montserrat"/>
               </a:rPr>
-              <a:t>006 / 017</a:t>
+              <a:t>006 / 018</a:t>
             </a:r>
           </a:p>
         </p:txBody>
@@ -9830,7 +10935,7 @@
         <p:spPr>
           <a:xfrm>
             <a:off x="822960" y="457200"/>
-            <a:ext cx="8229600" cy="365760"/>
+            <a:ext cx="10058400" cy="365760"/>
           </a:xfrm>
           <a:prstGeom prst="rect">
             <a:avLst/>
@@ -9844,13 +10949,13 @@
           <a:lstStyle/>
           <a:p>
             <a:r>
-              <a:rPr sz="1200" b="1" i="0">
-                <a:solidFill>
-                  <a:srgbClr val="64748B"/>
-                </a:solidFill>
-                <a:latin typeface="Montserrat"/>
-              </a:rPr>
-              <a:t>ARTÍCULO 5.1 · DISEÑO</a:t>
+              <a:rPr sz="1300" b="1" i="0">
+                <a:solidFill>
+                  <a:srgbClr val="E8801A"/>
+                </a:solidFill>
+                <a:latin typeface="Montserrat"/>
+              </a:rPr>
+              <a:t>ARTÍCULO 5 · PUESTA EN SERVICIO</a:t>
             </a:r>
           </a:p>
         </p:txBody>
@@ -9878,26 +10983,70 @@
           <a:lstStyle/>
           <a:p>
             <a:r>
-              <a:rPr sz="2700" b="1" i="0">
+              <a:rPr sz="2800" b="1" i="0">
                 <a:solidFill>
                   <a:srgbClr val="1E2761"/>
                 </a:solidFill>
                 <a:latin typeface="Montserrat"/>
               </a:rPr>
-              <a:t>¿Proyecto o memoria técnica?</a:t>
-            </a:r>
-          </a:p>
-        </p:txBody>
-      </p:sp>
-      <p:sp>
-        <p:nvSpPr>
-          <p:cNvPr id="7" name="TextBox 6"/>
+              <a:t>La película en ocho capítulos</a:t>
+            </a:r>
+          </a:p>
+        </p:txBody>
+      </p:sp>
+      <p:sp>
+        <p:nvSpPr>
+          <p:cNvPr id="7" name="Rounded Rectangle 6"/>
+          <p:cNvSpPr/>
+          <p:nvPr/>
+        </p:nvSpPr>
+        <p:spPr>
+          <a:xfrm>
+            <a:off x="868680" y="1627632"/>
+            <a:ext cx="2011680" cy="73152"/>
+          </a:xfrm>
+          <a:prstGeom prst="roundRect">
+            <a:avLst/>
+          </a:prstGeom>
+          <a:solidFill>
+            <a:srgbClr val="E8801A"/>
+          </a:solidFill>
+          <a:ln>
+            <a:noFill/>
+          </a:ln>
+          <a:effectLst/>
+        </p:spPr>
+        <p:style>
+          <a:lnRef idx="1">
+            <a:schemeClr val="accent1"/>
+          </a:lnRef>
+          <a:fillRef idx="3">
+            <a:schemeClr val="accent1"/>
+          </a:fillRef>
+          <a:effectRef idx="2">
+            <a:schemeClr val="accent1"/>
+          </a:effectRef>
+          <a:fontRef idx="minor">
+            <a:schemeClr val="lt1"/>
+          </a:fontRef>
+        </p:style>
+        <p:txBody>
+          <a:bodyPr rtlCol="0" anchor="ctr"/>
+          <a:lstStyle/>
+          <a:p>
+            <a:pPr algn="ctr"/>
+          </a:p>
+        </p:txBody>
+      </p:sp>
+      <p:sp>
+        <p:nvSpPr>
+          <p:cNvPr id="8" name="TextBox 7"/>
           <p:cNvSpPr txBox="1"/>
           <p:nvPr/>
         </p:nvSpPr>
         <p:spPr>
           <a:xfrm>
-            <a:off x="822960" y="1920240"/>
+            <a:off x="822960" y="1965960"/>
             <a:ext cx="4983480" cy="4206240"/>
           </a:xfrm>
           <a:prstGeom prst="rect">
@@ -9913,17 +11062,17 @@
           <a:p>
             <a:pPr>
               <a:spcAft>
-                <a:spcPts val="1000"/>
+                <a:spcPts val="1100"/>
               </a:spcAft>
             </a:pPr>
             <a:r>
               <a:rPr sz="1600" b="1" i="0">
                 <a:solidFill>
-                  <a:srgbClr val="2E3A80"/>
-                </a:solidFill>
-                <a:latin typeface="Montserrat"/>
-              </a:rPr>
-              <a:t>•  </a:t>
+                  <a:srgbClr val="E8801A"/>
+                </a:solidFill>
+                <a:latin typeface="Montserrat"/>
+              </a:rPr>
+              <a:t>▸  </a:t>
             </a:r>
             <a:r>
               <a:rPr sz="1600" b="0" i="0">
@@ -9932,23 +11081,23 @@
                 </a:solidFill>
                 <a:latin typeface="Montserrat"/>
               </a:rPr>
-              <a:t>Proyecto: técnico facultativo competente</a:t>
+              <a:t>Diseño → autorización → ejecución</a:t>
             </a:r>
           </a:p>
           <a:p>
             <a:pPr>
               <a:spcAft>
-                <a:spcPts val="1000"/>
+                <a:spcPts val="1100"/>
               </a:spcAft>
             </a:pPr>
             <a:r>
               <a:rPr sz="1600" b="1" i="0">
                 <a:solidFill>
-                  <a:srgbClr val="2E3A80"/>
-                </a:solidFill>
-                <a:latin typeface="Montserrat"/>
-              </a:rPr>
-              <a:t>•  </a:t>
+                  <a:srgbClr val="E8801A"/>
+                </a:solidFill>
+                <a:latin typeface="Montserrat"/>
+              </a:rPr>
+              <a:t>▸  </a:t>
             </a:r>
             <a:r>
               <a:rPr sz="1600" b="0" i="0">
@@ -9957,23 +11106,23 @@
                 </a:solidFill>
                 <a:latin typeface="Montserrat"/>
               </a:rPr>
-              <a:t>Memoria técnica: puede firmarla el instalador</a:t>
+              <a:t>Pruebas → certificados → puesta en servicio</a:t>
             </a:r>
           </a:p>
           <a:p>
             <a:pPr>
               <a:spcAft>
-                <a:spcPts val="1000"/>
+                <a:spcPts val="1100"/>
               </a:spcAft>
             </a:pPr>
             <a:r>
               <a:rPr sz="1600" b="1" i="0">
                 <a:solidFill>
-                  <a:srgbClr val="2E3A80"/>
-                </a:solidFill>
-                <a:latin typeface="Montserrat"/>
-              </a:rPr>
-              <a:t>•  </a:t>
+                  <a:srgbClr val="E8801A"/>
+                </a:solidFill>
+                <a:latin typeface="Montserrat"/>
+              </a:rPr>
+              <a:t>▸  </a:t>
             </a:r>
             <a:r>
               <a:rPr sz="1600" b="0" i="0">
@@ -9982,14 +11131,39 @@
                 </a:solidFill>
                 <a:latin typeface="Montserrat"/>
               </a:rPr>
-              <a:t>Quien firma es directamente responsable</a:t>
-            </a:r>
-          </a:p>
-        </p:txBody>
-      </p:sp>
-      <p:sp>
-        <p:nvSpPr>
-          <p:cNvPr id="8" name="imgph" descr="IMGQ:engineer reviewing technical drawings"/>
+              <a:t>Comunicación → puesta en marcha</a:t>
+            </a:r>
+          </a:p>
+          <a:p>
+            <a:pPr>
+              <a:spcAft>
+                <a:spcPts val="1100"/>
+              </a:spcAft>
+            </a:pPr>
+            <a:r>
+              <a:rPr sz="1600" b="1" i="0">
+                <a:solidFill>
+                  <a:srgbClr val="E8801A"/>
+                </a:solidFill>
+                <a:latin typeface="Montserrat"/>
+              </a:rPr>
+              <a:t>▸  </a:t>
+            </a:r>
+            <a:r>
+              <a:rPr sz="1600" b="0" i="0">
+                <a:solidFill>
+                  <a:srgbClr val="1B2330"/>
+                </a:solidFill>
+                <a:latin typeface="Montserrat"/>
+              </a:rPr>
+              <a:t>En orden, sin saltarse pasos</a:t>
+            </a:r>
+          </a:p>
+        </p:txBody>
+      </p:sp>
+      <p:sp>
+        <p:nvSpPr>
+          <p:cNvPr id="9" name="imgph" descr="IMGQ:gas installation pipework new building"/>
           <p:cNvSpPr/>
           <p:nvPr/>
         </p:nvSpPr>
@@ -10035,7 +11209,7 @@
       </p:sp>
       <p:sp>
         <p:nvSpPr>
-          <p:cNvPr id="9" name="TextBox 8"/>
+          <p:cNvPr id="10" name="TextBox 9"/>
           <p:cNvSpPr txBox="1"/>
           <p:nvPr/>
         </p:nvSpPr>
@@ -10075,7 +11249,7 @@
                 </a:solidFill>
                 <a:latin typeface="Montserrat"/>
               </a:rPr>
-              <a:t>engineer reviewing technical drawings</a:t>
+              <a:t>gas installation pipework new building</a:t>
             </a:r>
           </a:p>
         </p:txBody>
@@ -10172,7 +11346,7 @@
                 </a:solidFill>
                 <a:latin typeface="Montserrat"/>
               </a:rPr>
-              <a:t>007 / 017</a:t>
+              <a:t>007 / 018</a:t>
             </a:r>
           </a:p>
         </p:txBody>
@@ -10220,7 +11394,7 @@
         <p:spPr>
           <a:xfrm>
             <a:off x="822960" y="457200"/>
-            <a:ext cx="8229600" cy="365760"/>
+            <a:ext cx="10058400" cy="365760"/>
           </a:xfrm>
           <a:prstGeom prst="rect">
             <a:avLst/>
@@ -10234,13 +11408,13 @@
           <a:lstStyle/>
           <a:p>
             <a:r>
-              <a:rPr sz="1200" b="1" i="0">
-                <a:solidFill>
-                  <a:srgbClr val="64748B"/>
-                </a:solidFill>
-                <a:latin typeface="Montserrat"/>
-              </a:rPr>
-              <a:t>ARTÍCULO 5.2 · AUTORIZACIÓN</a:t>
+              <a:rPr sz="1300" b="1" i="0">
+                <a:solidFill>
+                  <a:srgbClr val="E8801A"/>
+                </a:solidFill>
+                <a:latin typeface="Montserrat"/>
+              </a:rPr>
+              <a:t>ARTÍCULO 5.1 · DISEÑO</a:t>
             </a:r>
           </a:p>
         </p:txBody>
@@ -10268,26 +11442,70 @@
           <a:lstStyle/>
           <a:p>
             <a:r>
-              <a:rPr sz="2700" b="1" i="0">
+              <a:rPr sz="2800" b="1" i="0">
                 <a:solidFill>
                   <a:srgbClr val="1E2761"/>
                 </a:solidFill>
                 <a:latin typeface="Montserrat"/>
               </a:rPr>
-              <a:t>Autorización no es comunicación</a:t>
-            </a:r>
-          </a:p>
-        </p:txBody>
-      </p:sp>
-      <p:sp>
-        <p:nvSpPr>
-          <p:cNvPr id="7" name="TextBox 6"/>
+              <a:t>¿Proyecto o memoria técnica?</a:t>
+            </a:r>
+          </a:p>
+        </p:txBody>
+      </p:sp>
+      <p:sp>
+        <p:nvSpPr>
+          <p:cNvPr id="7" name="Rounded Rectangle 6"/>
+          <p:cNvSpPr/>
+          <p:nvPr/>
+        </p:nvSpPr>
+        <p:spPr>
+          <a:xfrm>
+            <a:off x="868680" y="1627632"/>
+            <a:ext cx="2011680" cy="73152"/>
+          </a:xfrm>
+          <a:prstGeom prst="roundRect">
+            <a:avLst/>
+          </a:prstGeom>
+          <a:solidFill>
+            <a:srgbClr val="E8801A"/>
+          </a:solidFill>
+          <a:ln>
+            <a:noFill/>
+          </a:ln>
+          <a:effectLst/>
+        </p:spPr>
+        <p:style>
+          <a:lnRef idx="1">
+            <a:schemeClr val="accent1"/>
+          </a:lnRef>
+          <a:fillRef idx="3">
+            <a:schemeClr val="accent1"/>
+          </a:fillRef>
+          <a:effectRef idx="2">
+            <a:schemeClr val="accent1"/>
+          </a:effectRef>
+          <a:fontRef idx="minor">
+            <a:schemeClr val="lt1"/>
+          </a:fontRef>
+        </p:style>
+        <p:txBody>
+          <a:bodyPr rtlCol="0" anchor="ctr"/>
+          <a:lstStyle/>
+          <a:p>
+            <a:pPr algn="ctr"/>
+          </a:p>
+        </p:txBody>
+      </p:sp>
+      <p:sp>
+        <p:nvSpPr>
+          <p:cNvPr id="8" name="TextBox 7"/>
           <p:cNvSpPr txBox="1"/>
           <p:nvPr/>
         </p:nvSpPr>
         <p:spPr>
           <a:xfrm>
-            <a:off x="822960" y="1920240"/>
+            <a:off x="822960" y="1965960"/>
             <a:ext cx="4983480" cy="4206240"/>
           </a:xfrm>
           <a:prstGeom prst="rect">
@@ -10303,17 +11521,17 @@
           <a:p>
             <a:pPr>
               <a:spcAft>
-                <a:spcPts val="1000"/>
+                <a:spcPts val="1100"/>
               </a:spcAft>
             </a:pPr>
             <a:r>
               <a:rPr sz="1600" b="1" i="0">
                 <a:solidFill>
-                  <a:srgbClr val="2E3A80"/>
-                </a:solidFill>
-                <a:latin typeface="Montserrat"/>
-              </a:rPr>
-              <a:t>•  </a:t>
+                  <a:srgbClr val="E8801A"/>
+                </a:solidFill>
+                <a:latin typeface="Montserrat"/>
+              </a:rPr>
+              <a:t>▸  </a:t>
             </a:r>
             <a:r>
               <a:rPr sz="1600" b="0" i="0">
@@ -10322,23 +11540,23 @@
                 </a:solidFill>
                 <a:latin typeface="Montserrat"/>
               </a:rPr>
-              <a:t>Autorización: permiso previo, casos gordos</a:t>
+              <a:t>Proyecto: técnico facultativo competente</a:t>
             </a:r>
           </a:p>
           <a:p>
             <a:pPr>
               <a:spcAft>
-                <a:spcPts val="1000"/>
+                <a:spcPts val="1100"/>
               </a:spcAft>
             </a:pPr>
             <a:r>
               <a:rPr sz="1600" b="1" i="0">
                 <a:solidFill>
-                  <a:srgbClr val="2E3A80"/>
-                </a:solidFill>
-                <a:latin typeface="Montserrat"/>
-              </a:rPr>
-              <a:t>•  </a:t>
+                  <a:srgbClr val="E8801A"/>
+                </a:solidFill>
+                <a:latin typeface="Montserrat"/>
+              </a:rPr>
+              <a:t>▸  </a:t>
             </a:r>
             <a:r>
               <a:rPr sz="1600" b="0" i="0">
@@ -10347,23 +11565,23 @@
                 </a:solidFill>
                 <a:latin typeface="Montserrat"/>
               </a:rPr>
-              <a:t>Solo si lo exige la ley</a:t>
+              <a:t>Memoria técnica: puede firmarla el instalador</a:t>
             </a:r>
           </a:p>
           <a:p>
             <a:pPr>
               <a:spcAft>
-                <a:spcPts val="1000"/>
+                <a:spcPts val="1100"/>
               </a:spcAft>
             </a:pPr>
             <a:r>
               <a:rPr sz="1600" b="1" i="0">
                 <a:solidFill>
-                  <a:srgbClr val="2E3A80"/>
-                </a:solidFill>
-                <a:latin typeface="Montserrat"/>
-              </a:rPr>
-              <a:t>•  </a:t>
+                  <a:srgbClr val="E8801A"/>
+                </a:solidFill>
+                <a:latin typeface="Montserrat"/>
+              </a:rPr>
+              <a:t>▸  </a:t>
             </a:r>
             <a:r>
               <a:rPr sz="1600" b="0" i="0">
@@ -10372,14 +11590,14 @@
                 </a:solidFill>
                 <a:latin typeface="Montserrat"/>
               </a:rPr>
-              <a:t>En Gas B lo normal: hacer y comunicar</a:t>
-            </a:r>
-          </a:p>
-        </p:txBody>
-      </p:sp>
-      <p:sp>
-        <p:nvSpPr>
-          <p:cNvPr id="8" name="imgph" descr="IMGQ:official government stamp document"/>
+              <a:t>Quien firma es directamente responsable</a:t>
+            </a:r>
+          </a:p>
+        </p:txBody>
+      </p:sp>
+      <p:sp>
+        <p:nvSpPr>
+          <p:cNvPr id="9" name="imgph" descr="IMGQ:engineer reviewing technical drawings"/>
           <p:cNvSpPr/>
           <p:nvPr/>
         </p:nvSpPr>
@@ -10425,7 +11643,7 @@
       </p:sp>
       <p:sp>
         <p:nvSpPr>
-          <p:cNvPr id="9" name="TextBox 8"/>
+          <p:cNvPr id="10" name="TextBox 9"/>
           <p:cNvSpPr txBox="1"/>
           <p:nvPr/>
         </p:nvSpPr>
@@ -10465,7 +11683,7 @@
                 </a:solidFill>
                 <a:latin typeface="Montserrat"/>
               </a:rPr>
-              <a:t>official government stamp document</a:t>
+              <a:t>engineer reviewing technical drawings</a:t>
             </a:r>
           </a:p>
         </p:txBody>
@@ -10562,7 +11780,7 @@
                 </a:solidFill>
                 <a:latin typeface="Montserrat"/>
               </a:rPr>
-              <a:t>008 / 017</a:t>
+              <a:t>008 / 018</a:t>
             </a:r>
           </a:p>
         </p:txBody>
@@ -10610,7 +11828,7 @@
         <p:spPr>
           <a:xfrm>
             <a:off x="822960" y="457200"/>
-            <a:ext cx="8229600" cy="365760"/>
+            <a:ext cx="10058400" cy="365760"/>
           </a:xfrm>
           <a:prstGeom prst="rect">
             <a:avLst/>
@@ -10624,13 +11842,13 @@
           <a:lstStyle/>
           <a:p>
             <a:r>
-              <a:rPr sz="1200" b="1" i="0">
-                <a:solidFill>
-                  <a:srgbClr val="64748B"/>
-                </a:solidFill>
-                <a:latin typeface="Montserrat"/>
-              </a:rPr>
-              <a:t>ARTÍCULO 5.3 · EJECUCIÓN</a:t>
+              <a:rPr sz="1300" b="1" i="0">
+                <a:solidFill>
+                  <a:srgbClr val="E8801A"/>
+                </a:solidFill>
+                <a:latin typeface="Montserrat"/>
+              </a:rPr>
+              <a:t>ARTÍCULO 5.2 · AUTORIZACIÓN</a:t>
             </a:r>
           </a:p>
         </p:txBody>
@@ -10658,26 +11876,70 @@
           <a:lstStyle/>
           <a:p>
             <a:r>
-              <a:rPr sz="2700" b="1" i="0">
+              <a:rPr sz="2800" b="1" i="0">
                 <a:solidFill>
                   <a:srgbClr val="1E2761"/>
                 </a:solidFill>
                 <a:latin typeface="Montserrat"/>
               </a:rPr>
-              <a:t>Cruces y paralelismos</a:t>
-            </a:r>
-          </a:p>
-        </p:txBody>
-      </p:sp>
-      <p:sp>
-        <p:nvSpPr>
-          <p:cNvPr id="7" name="TextBox 6"/>
+              <a:t>Autorización no es comunicación</a:t>
+            </a:r>
+          </a:p>
+        </p:txBody>
+      </p:sp>
+      <p:sp>
+        <p:nvSpPr>
+          <p:cNvPr id="7" name="Rounded Rectangle 6"/>
+          <p:cNvSpPr/>
+          <p:nvPr/>
+        </p:nvSpPr>
+        <p:spPr>
+          <a:xfrm>
+            <a:off x="868680" y="1627632"/>
+            <a:ext cx="2011680" cy="73152"/>
+          </a:xfrm>
+          <a:prstGeom prst="roundRect">
+            <a:avLst/>
+          </a:prstGeom>
+          <a:solidFill>
+            <a:srgbClr val="E8801A"/>
+          </a:solidFill>
+          <a:ln>
+            <a:noFill/>
+          </a:ln>
+          <a:effectLst/>
+        </p:spPr>
+        <p:style>
+          <a:lnRef idx="1">
+            <a:schemeClr val="accent1"/>
+          </a:lnRef>
+          <a:fillRef idx="3">
+            <a:schemeClr val="accent1"/>
+          </a:fillRef>
+          <a:effectRef idx="2">
+            <a:schemeClr val="accent1"/>
+          </a:effectRef>
+          <a:fontRef idx="minor">
+            <a:schemeClr val="lt1"/>
+          </a:fontRef>
+        </p:style>
+        <p:txBody>
+          <a:bodyPr rtlCol="0" anchor="ctr"/>
+          <a:lstStyle/>
+          <a:p>
+            <a:pPr algn="ctr"/>
+          </a:p>
+        </p:txBody>
+      </p:sp>
+      <p:sp>
+        <p:nvSpPr>
+          <p:cNvPr id="8" name="TextBox 7"/>
           <p:cNvSpPr txBox="1"/>
           <p:nvPr/>
         </p:nvSpPr>
         <p:spPr>
           <a:xfrm>
-            <a:off x="822960" y="1920240"/>
+            <a:off x="822960" y="1965960"/>
             <a:ext cx="4983480" cy="4206240"/>
           </a:xfrm>
           <a:prstGeom prst="rect">
@@ -10693,17 +11955,17 @@
           <a:p>
             <a:pPr>
               <a:spcAft>
-                <a:spcPts val="1000"/>
+                <a:spcPts val="1100"/>
               </a:spcAft>
             </a:pPr>
             <a:r>
               <a:rPr sz="1600" b="1" i="0">
                 <a:solidFill>
-                  <a:srgbClr val="2E3A80"/>
-                </a:solidFill>
-                <a:latin typeface="Montserrat"/>
-              </a:rPr>
-              <a:t>•  </a:t>
+                  <a:srgbClr val="E8801A"/>
+                </a:solidFill>
+                <a:latin typeface="Montserrat"/>
+              </a:rPr>
+              <a:t>▸  </a:t>
             </a:r>
             <a:r>
               <a:rPr sz="1600" b="0" i="0">
@@ -10712,23 +11974,23 @@
                 </a:solidFill>
                 <a:latin typeface="Montserrat"/>
               </a:rPr>
-              <a:t>Ejecutan las empresas que marque la ITC</a:t>
+              <a:t>Autorización: permiso previo, casos gordos</a:t>
             </a:r>
           </a:p>
           <a:p>
             <a:pPr>
               <a:spcAft>
-                <a:spcPts val="1000"/>
+                <a:spcPts val="1100"/>
               </a:spcAft>
             </a:pPr>
             <a:r>
               <a:rPr sz="1600" b="1" i="0">
                 <a:solidFill>
-                  <a:srgbClr val="2E3A80"/>
-                </a:solidFill>
-                <a:latin typeface="Montserrat"/>
-              </a:rPr>
-              <a:t>•  </a:t>
+                  <a:srgbClr val="E8801A"/>
+                </a:solidFill>
+                <a:latin typeface="Montserrat"/>
+              </a:rPr>
+              <a:t>▸  </a:t>
             </a:r>
             <a:r>
               <a:rPr sz="1600" b="0" i="0">
@@ -10737,23 +11999,23 @@
                 </a:solidFill>
                 <a:latin typeface="Montserrat"/>
               </a:rPr>
-              <a:t>Distancias con luz, agua y saneamiento</a:t>
+              <a:t>Solo si lo exige la ley</a:t>
             </a:r>
           </a:p>
           <a:p>
             <a:pPr>
               <a:spcAft>
-                <a:spcPts val="1000"/>
+                <a:spcPts val="1100"/>
               </a:spcAft>
             </a:pPr>
             <a:r>
               <a:rPr sz="1600" b="1" i="0">
                 <a:solidFill>
-                  <a:srgbClr val="2E3A80"/>
-                </a:solidFill>
-                <a:latin typeface="Montserrat"/>
-              </a:rPr>
-              <a:t>•  </a:t>
+                  <a:srgbClr val="E8801A"/>
+                </a:solidFill>
+                <a:latin typeface="Montserrat"/>
+              </a:rPr>
+              <a:t>▸  </a:t>
             </a:r>
             <a:r>
               <a:rPr sz="1600" b="0" i="0">
@@ -10762,14 +12024,14 @@
                 </a:solidFill>
                 <a:latin typeface="Montserrat"/>
               </a:rPr>
-              <a:t>El Reglamento lo enuncia; la UNE da los cm</a:t>
-            </a:r>
-          </a:p>
-        </p:txBody>
-      </p:sp>
-      <p:sp>
-        <p:nvSpPr>
-          <p:cNvPr id="8" name="imgph" descr="IMGQ:underground utility pipes trench"/>
+              <a:t>En Gas B lo normal: hacer y comunicar</a:t>
+            </a:r>
+          </a:p>
+        </p:txBody>
+      </p:sp>
+      <p:sp>
+        <p:nvSpPr>
+          <p:cNvPr id="9" name="imgph" descr="IMGQ:official government stamp document"/>
           <p:cNvSpPr/>
           <p:nvPr/>
         </p:nvSpPr>
@@ -10815,7 +12077,7 @@
       </p:sp>
       <p:sp>
         <p:nvSpPr>
-          <p:cNvPr id="9" name="TextBox 8"/>
+          <p:cNvPr id="10" name="TextBox 9"/>
           <p:cNvSpPr txBox="1"/>
           <p:nvPr/>
         </p:nvSpPr>
@@ -10855,7 +12117,7 @@
                 </a:solidFill>
                 <a:latin typeface="Montserrat"/>
               </a:rPr>
-              <a:t>underground utility pipes trench</a:t>
+              <a:t>official government stamp document</a:t>
             </a:r>
           </a:p>
         </p:txBody>
@@ -10952,7 +12214,7 @@
                 </a:solidFill>
                 <a:latin typeface="Montserrat"/>
               </a:rPr>
-              <a:t>009 / 017</a:t>
+              <a:t>009 / 018</a:t>
             </a:r>
           </a:p>
         </p:txBody>
@@ -11000,7 +12262,7 @@
         <p:spPr>
           <a:xfrm>
             <a:off x="822960" y="457200"/>
-            <a:ext cx="8229600" cy="365760"/>
+            <a:ext cx="10058400" cy="365760"/>
           </a:xfrm>
           <a:prstGeom prst="rect">
             <a:avLst/>
@@ -11014,13 +12276,13 @@
           <a:lstStyle/>
           <a:p>
             <a:r>
-              <a:rPr sz="1200" b="1" i="0">
-                <a:solidFill>
-                  <a:srgbClr val="64748B"/>
-                </a:solidFill>
-                <a:latin typeface="Montserrat"/>
-              </a:rPr>
-              <a:t>ARTÍCULO 5.4 · PRUEBAS E INSPECCIONES</a:t>
+              <a:rPr sz="1300" b="1" i="0">
+                <a:solidFill>
+                  <a:srgbClr val="E8801A"/>
+                </a:solidFill>
+                <a:latin typeface="Montserrat"/>
+              </a:rPr>
+              <a:t>ARTÍCULO 5.3 · EJECUCIÓN</a:t>
             </a:r>
           </a:p>
         </p:txBody>
@@ -11048,26 +12310,70 @@
           <a:lstStyle/>
           <a:p>
             <a:r>
-              <a:rPr sz="2700" b="1" i="0">
+              <a:rPr sz="2800" b="1" i="0">
                 <a:solidFill>
                   <a:srgbClr val="1E2761"/>
                 </a:solidFill>
                 <a:latin typeface="Montserrat"/>
               </a:rPr>
-              <a:t>Prueba tuya, inspección de un tercero</a:t>
-            </a:r>
-          </a:p>
-        </p:txBody>
-      </p:sp>
-      <p:sp>
-        <p:nvSpPr>
-          <p:cNvPr id="7" name="TextBox 6"/>
+              <a:t>Cruces y paralelismos</a:t>
+            </a:r>
+          </a:p>
+        </p:txBody>
+      </p:sp>
+      <p:sp>
+        <p:nvSpPr>
+          <p:cNvPr id="7" name="Rounded Rectangle 6"/>
+          <p:cNvSpPr/>
+          <p:nvPr/>
+        </p:nvSpPr>
+        <p:spPr>
+          <a:xfrm>
+            <a:off x="868680" y="1627632"/>
+            <a:ext cx="2011680" cy="73152"/>
+          </a:xfrm>
+          <a:prstGeom prst="roundRect">
+            <a:avLst/>
+          </a:prstGeom>
+          <a:solidFill>
+            <a:srgbClr val="E8801A"/>
+          </a:solidFill>
+          <a:ln>
+            <a:noFill/>
+          </a:ln>
+          <a:effectLst/>
+        </p:spPr>
+        <p:style>
+          <a:lnRef idx="1">
+            <a:schemeClr val="accent1"/>
+          </a:lnRef>
+          <a:fillRef idx="3">
+            <a:schemeClr val="accent1"/>
+          </a:fillRef>
+          <a:effectRef idx="2">
+            <a:schemeClr val="accent1"/>
+          </a:effectRef>
+          <a:fontRef idx="minor">
+            <a:schemeClr val="lt1"/>
+          </a:fontRef>
+        </p:style>
+        <p:txBody>
+          <a:bodyPr rtlCol="0" anchor="ctr"/>
+          <a:lstStyle/>
+          <a:p>
+            <a:pPr algn="ctr"/>
+          </a:p>
+        </p:txBody>
+      </p:sp>
+      <p:sp>
+        <p:nvSpPr>
+          <p:cNvPr id="8" name="TextBox 7"/>
           <p:cNvSpPr txBox="1"/>
           <p:nvPr/>
         </p:nvSpPr>
         <p:spPr>
           <a:xfrm>
-            <a:off x="822960" y="1920240"/>
+            <a:off x="822960" y="1965960"/>
             <a:ext cx="4983480" cy="4206240"/>
           </a:xfrm>
           <a:prstGeom prst="rect">
@@ -11083,17 +12389,17 @@
           <a:p>
             <a:pPr>
               <a:spcAft>
-                <a:spcPts val="1000"/>
+                <a:spcPts val="1100"/>
               </a:spcAft>
             </a:pPr>
             <a:r>
               <a:rPr sz="1600" b="1" i="0">
                 <a:solidFill>
-                  <a:srgbClr val="2E3A80"/>
-                </a:solidFill>
-                <a:latin typeface="Montserrat"/>
-              </a:rPr>
-              <a:t>•  </a:t>
+                  <a:srgbClr val="E8801A"/>
+                </a:solidFill>
+                <a:latin typeface="Montserrat"/>
+              </a:rPr>
+              <a:t>▸  </a:t>
             </a:r>
             <a:r>
               <a:rPr sz="1600" b="0" i="0">
@@ -11102,23 +12408,23 @@
                 </a:solidFill>
                 <a:latin typeface="Montserrat"/>
               </a:rPr>
-              <a:t>Prueba: la hace quien monta</a:t>
+              <a:t>Ejecutan las empresas que marque la ITC</a:t>
             </a:r>
           </a:p>
           <a:p>
             <a:pPr>
               <a:spcAft>
-                <a:spcPts val="1000"/>
+                <a:spcPts val="1100"/>
               </a:spcAft>
             </a:pPr>
             <a:r>
               <a:rPr sz="1600" b="1" i="0">
                 <a:solidFill>
-                  <a:srgbClr val="2E3A80"/>
-                </a:solidFill>
-                <a:latin typeface="Montserrat"/>
-              </a:rPr>
-              <a:t>•  </a:t>
+                  <a:srgbClr val="E8801A"/>
+                </a:solidFill>
+                <a:latin typeface="Montserrat"/>
+              </a:rPr>
+              <a:t>▸  </a:t>
             </a:r>
             <a:r>
               <a:rPr sz="1600" b="0" i="0">
@@ -11127,23 +12433,23 @@
                 </a:solidFill>
                 <a:latin typeface="Montserrat"/>
               </a:rPr>
-              <a:t>Estanquidad antes de meter gas</a:t>
+              <a:t>Distancias con luz, agua y saneamiento</a:t>
             </a:r>
           </a:p>
           <a:p>
             <a:pPr>
               <a:spcAft>
-                <a:spcPts val="1000"/>
+                <a:spcPts val="1100"/>
               </a:spcAft>
             </a:pPr>
             <a:r>
               <a:rPr sz="1600" b="1" i="0">
                 <a:solidFill>
-                  <a:srgbClr val="2E3A80"/>
-                </a:solidFill>
-                <a:latin typeface="Montserrat"/>
-              </a:rPr>
-              <a:t>•  </a:t>
+                  <a:srgbClr val="E8801A"/>
+                </a:solidFill>
+                <a:latin typeface="Montserrat"/>
+              </a:rPr>
+              <a:t>▸  </a:t>
             </a:r>
             <a:r>
               <a:rPr sz="1600" b="0" i="0">
@@ -11152,14 +12458,14 @@
                 </a:solidFill>
                 <a:latin typeface="Montserrat"/>
               </a:rPr>
-              <a:t>Inspección: organismo de control si la ITC lo pide</a:t>
-            </a:r>
-          </a:p>
-        </p:txBody>
-      </p:sp>
-      <p:sp>
-        <p:nvSpPr>
-          <p:cNvPr id="8" name="imgph" descr="IMGQ:pressure gauge gas pipe testing"/>
+              <a:t>El Reglamento lo enuncia; la UNE da los cm</a:t>
+            </a:r>
+          </a:p>
+        </p:txBody>
+      </p:sp>
+      <p:sp>
+        <p:nvSpPr>
+          <p:cNvPr id="9" name="imgph" descr="IMGQ:underground utility pipes trench"/>
           <p:cNvSpPr/>
           <p:nvPr/>
         </p:nvSpPr>
@@ -11205,7 +12511,7 @@
       </p:sp>
       <p:sp>
         <p:nvSpPr>
-          <p:cNvPr id="9" name="TextBox 8"/>
+          <p:cNvPr id="10" name="TextBox 9"/>
           <p:cNvSpPr txBox="1"/>
           <p:nvPr/>
         </p:nvSpPr>
@@ -11245,7 +12551,7 @@
                 </a:solidFill>
                 <a:latin typeface="Montserrat"/>
               </a:rPr>
-              <a:t>pressure gauge gas pipe testing</a:t>
+              <a:t>underground utility pipes trench</a:t>
             </a:r>
           </a:p>
         </p:txBody>

--- a/Curso Gas B/00 - El Reglamento de Gas - estructura, ambito y generalidades/00 - El Reglamento de Gas - Vídeo 2.pptx
+++ b/Curso Gas B/00 - El Reglamento de Gas - estructura, ambito y generalidades/00 - El Reglamento de Gas - Vídeo 2.pptx
@@ -23,6 +23,12 @@
     <p:sldId id="271" r:id="rId23"/>
     <p:sldId id="272" r:id="rId24"/>
     <p:sldId id="273" r:id="rId25"/>
+    <p:sldId id="274" r:id="rId26"/>
+    <p:sldId id="275" r:id="rId27"/>
+    <p:sldId id="276" r:id="rId28"/>
+    <p:sldId id="277" r:id="rId29"/>
+    <p:sldId id="278" r:id="rId30"/>
+    <p:sldId id="279" r:id="rId31"/>
   </p:sldIdLst>
   <p:sldSz cx="12191695" cy="6858000" type="screen4x3"/>
   <p:notesSz cx="6858000" cy="9144000"/>
@@ -744,12 +750,12 @@
           <a:lstStyle/>
           <a:p>
             <a:r>
-              <a:t>N1: Una casa lleva mucho tiempo cerrada. ¿Se reengancha el gas sin más?</a:t>
-            </a:r>
-          </a:p>
-          <a:p>
-            <a:r>
-              <a:t>N2: Vamos con el paso en que ya entra el gas. Para poner en servicio, el responsable primero recibe copia de los certificados que acabamos de ver. Y para las pruebas de funcionamiento, la empresa instaladora puede pedir al distribuidor un suministro provisional de gas, siempre asumiendo ella la responsabilidad de la instalación y de las pruebas. Hasta aquí, lo normal. Pero ahora retén esta regla porque cae fijo en el examen: si una instalación lleva más de un año sin gas, una casa cerrada, una herencia parada, no se reengancha sin más; se trata como si fuera nueva, con todos sus papeles y sus pruebas. Si lleva menos de un año y conserva su certificado de control periódico en vigor, entonces sí se puede restablecer directamente. Piensa en 'el año' como una fecha de caducidad mental: pasado el año, borrón y cuenta nueva.</a:t>
+              <a:t>N1: Tres certificados, pero solo uno no falta jamás. ¿Cuál es?</a:t>
+            </a:r>
+          </a:p>
+          <a:p>
+            <a:r>
+              <a:t>N2: Piensa en el que se pide siempre para poder dar gas, con proyecto o sin él.</a:t>
             </a:r>
           </a:p>
         </p:txBody>
@@ -819,12 +825,12 @@
           <a:lstStyle/>
           <a:p>
             <a:r>
-              <a:t>N1: ¿Quién avisa a la Administración y en cuánto tiempo?</a:t>
-            </a:r>
-          </a:p>
-          <a:p>
-            <a:r>
-              <a:t>N2: Aquí van dos datos que el examen pregunta siempre juntos: quién y cuándo. El quién es el titular, el dueño de la instalación, no la empresa instaladora. En la práctica lo suele tramitar la instaladora en nombre del titular, por comodidad, pero la responsabilidad legal de comunicar es del titular, que no se te olvide. Y el cuándo: antes de que pasen treinta días desde la puesta en servicio, ante el órgano competente de la Comunidad Autónoma. Cuidado con un detalle que meten como trampa: el plazo se cuenta desde la puesta en servicio, desde que entra el gas, no desde que acabaste el montaje. Junto con esa comunicación se entrega la documentación técnica y el certificado de instalación. Regla para recordarlo: es el dueño quien avisa, y tiene un mes.</a:t>
+              <a:t>N1: ¿Por qué el de instalación?</a:t>
+            </a:r>
+          </a:p>
+          <a:p>
+            <a:r>
+              <a:t>N2: Porque es tu factura de que está bien hecho: sin él no hay gas, y lo firma quien ejecutó. El de dirección de obra solo aparece si hubo proyecto y el de inspección solo si la ITC obligó al organismo de control; por eso esos dos son 'a veces'.</a:t>
             </a:r>
           </a:p>
         </p:txBody>
@@ -894,12 +900,12 @@
           <a:lstStyle/>
           <a:p>
             <a:r>
-              <a:t>N1: La puesta en marcha del aparato, ¿es encender y ya está?</a:t>
-            </a:r>
-          </a:p>
-          <a:p>
-            <a:r>
-              <a:t>N2: No, y esta distinción es importante. La puesta en marcha se hace según la ITC-ICG cero ocho, y no consiste en darle al botón y ver que enciende. Es verificar tres cosas: que la caldera o el calentador funcionan con el gas para el que fueron diseñados, con su presión correcta, y que la combustión cae dentro de los parámetros que marca el fabricante. Por qué se hace bien: hacerla mal o saltártela es la puerta directa a la mala combustión, la llama amarilla, el ennegrecido, el aparato que se apaga solo y el monóxido de carbono. Quien la realiza emite y entrega al usuario, no al titular, un certificado de puesta en marcha. Ese papel es la prueba de que el aparato arrancó bien y en condiciones seguras. Piénsalo como el 'estreno' controlado del aparato, no como un simple encendido.</a:t>
+              <a:t>N1: Una casa lleva mucho tiempo cerrada. ¿Se reengancha el gas sin más?</a:t>
+            </a:r>
+          </a:p>
+          <a:p>
+            <a:r>
+              <a:t>N2: Vamos con el paso en que ya entra el gas. Para poner en servicio, el responsable primero recibe copia de los certificados que acabamos de ver. Y para las pruebas de funcionamiento, la empresa instaladora puede pedir al distribuidor un suministro provisional de gas, siempre asumiendo ella la responsabilidad de la instalación y de las pruebas. Hasta aquí, lo normal. Pero ahora retén esta regla porque cae fijo en el examen: si una instalación lleva más de un año sin gas, una casa cerrada, una herencia parada, no se reengancha sin más; se trata como si fuera nueva, con todos sus papeles y sus pruebas. Si lleva menos de un año y conserva su certificado de control periódico en vigor, entonces sí se puede restablecer directamente. Piensa en 'el año' como una fecha de caducidad mental: pasado el año, borrón y cuenta nueva.</a:t>
             </a:r>
           </a:p>
         </p:txBody>
@@ -969,12 +975,12 @@
           <a:lstStyle/>
           <a:p>
             <a:r>
-              <a:t>N1: Se juntan tres certificados y me lío. ¿Cómo los separo de una vez?</a:t>
-            </a:r>
-          </a:p>
-          <a:p>
-            <a:r>
-              <a:t>N2: Paramos un momento a ordenar los tres, porque 'quién firma cada uno' es de las preguntas más repetidas de todo el examen. Míralos como tres papeles distintos, cada uno con su firmante. El certificado de instalación lo firma la empresa que ejecutó la obra, y no falta nunca. El certificado de dirección de obra lo firma el director de obra, y solo aparece si hubo proyecto, es decir, obra grande. Y el certificado de puesta en marcha lo firma el agente de puesta en marcha, va del aparato y se entrega al usuario. Truco para fijarlo: instalación va de la obra, dirección de obra va del proyecto, puesta en marcha va del aparato. Si asocias cada certificado con su 'de qué va', ya no los cruzas ni con trampa.</a:t>
+              <a:t>N1: Una casa cerrada mucho tiempo, ¿se reengancha sin más?</a:t>
+            </a:r>
+          </a:p>
+          <a:p>
+            <a:r>
+              <a:t>N2: Piensa en el año como una fecha de caducidad mental.</a:t>
             </a:r>
           </a:p>
         </p:txBody>
@@ -1044,12 +1050,12 @@
           <a:lstStyle/>
           <a:p>
             <a:r>
-              <a:t>N1: ¿Qué información tiene derecho a recibir el cliente?</a:t>
-            </a:r>
-          </a:p>
-          <a:p>
-            <a:r>
-              <a:t>N2: Bastante, y parte se la das tú. Como anexo al certificado de instalación que entregas al titular, la empresa instaladora confecciona unas instrucciones de uso y mantenimiento. Y en todo caso incluyen un croquis del trazado, o sea un dibujo de por dónde van los tubos, con sus materiales, uniones y válvulas. El cliente tiene derecho a saber por dónde pasa su gas, y ese plano se lo entregas tú con la instalación. Además, por su lado, el suministrador facilita a sus clientes, por escrito y con periodicidad al menos bienal, recomendaciones de seguridad. Ojo a la palabra: bienal significa cada dos años; no la confundas con bianual, que sería dos veces al año. Aquí es cada dos años como mínimo. Un recordatorio de seguridad que llega puntual y un croquis claro son detalles de un buen profesional.</a:t>
+              <a:t>N1: ¿Por qué como nueva?</a:t>
+            </a:r>
+          </a:p>
+          <a:p>
+            <a:r>
+              <a:t>N2: Porque pasado el año no hay garantía de que la instalación siga segura, así que borrón y cuenta nueva: papeles y pruebas como si se estrenara. Por debajo del año y con su certificado de control en vigor, sí se puede restablecer directamente.</a:t>
             </a:r>
           </a:p>
         </p:txBody>
@@ -1119,12 +1125,12 @@
           <a:lstStyle/>
           <a:p>
             <a:r>
-              <a:t>N1: Repaso rápido antes de cerrar. ¿Tengo los cuatro pilares?</a:t>
-            </a:r>
-          </a:p>
-          <a:p>
-            <a:r>
-              <a:t>N2: Vamos a fijarlos en treinta segundos y en voz alta. Uno, la película de ocho pasos: diseño, autorización, ejecución, pruebas, certificados, puesta en servicio, comunicación y puesta en marcha, en ese orden exacto. Dos, de los tres certificados de arranque, el de instalación siempre; el de dirección de obra solo si hubo proyecto; y el de inspección solo si la ITC lo exige. Tres, el titular comunica a la Comunidad Autónoma antes de treinta días desde la puesta en servicio. Y cuatro, la regla del año: una instalación parada más de un año se trata como si fuera nueva. Recítalos una vez de carrerilla y, si los sueltas sin trabarte, tienes el vídeo dominado.</a:t>
+              <a:t>N1: ¿Quién avisa a la Administración y en cuánto tiempo?</a:t>
+            </a:r>
+          </a:p>
+          <a:p>
+            <a:r>
+              <a:t>N2: Aquí van dos datos que el examen pregunta siempre juntos: quién y cuándo. El quién es el titular, el dueño de la instalación, no la empresa instaladora. En la práctica lo suele tramitar la instaladora en nombre del titular, por comodidad, pero la responsabilidad legal de comunicar es del titular, que no se te olvide. Y el cuándo: antes de que pasen treinta días desde la puesta en servicio, ante el órgano competente de la Comunidad Autónoma. Cuidado con un detalle que meten como trampa: el plazo se cuenta desde la puesta en servicio, desde que entra el gas, no desde que acabaste el montaje. Junto con esa comunicación se entrega la documentación técnica y el certificado de instalación. Regla para recordarlo: es el dueño quien avisa, y tiene un mes.</a:t>
             </a:r>
           </a:p>
         </p:txBody>
@@ -1194,22 +1200,87 @@
           <a:lstStyle/>
           <a:p>
             <a:r>
-              <a:t>N1: Gran final. ¿Qué soy capaz de hacer hoy que ayer no?</a:t>
-            </a:r>
-          </a:p>
-          <a:p>
-            <a:r>
-              <a:t>N2: Reconstruyamos lo aprendido, que cada pieza se apoya en la anterior. Empezaste por los materiales: con su DNI grabado e indeleble y sus instrucciones al menos en castellano, porque dentro de años alguien tiene que saber qué montaste. De ahí pasaste a la joya del vídeo: la película de ocho pasos del artículo quinto, del diseño a la puesta en marcha, y ahora sabes que saltarte uno deja la obra sin gas. Con eso llegaron tus logros: recorres esos ocho pasos en orden; no confundes los tres certificados de arranque, porque el de instalación lo firma quien ejecuta y no falta nunca, el de dirección de obra solo si hubo proyecto, y el de puesta en marcha va del aparato y se entrega al usuario; y distingues la prueba, que haces tú, de la inspección, que hace un árbitro independiente.</a:t>
-            </a:r>
-          </a:p>
-          <a:p>
-            <a:r>
-              <a:t>N1: ¿Y dónde se nota todo esto de verdad?</a:t>
-            </a:r>
-          </a:p>
-          <a:p>
-            <a:r>
-              <a:t>N2: En el examen se nota enseguida: te preguntan quién firma cada certificado y en cuántos días comunica el titular, y ahora respondes sin pestañear, treinta días y el titular. Pero en la obra vale todavía más. Se nota cuando entregas un boletín limpio con su croquis del trazado, y se nota cuando te llega una casa cerrada más de un año y, en lugar de reenganchar el gas sin más, la tratas como nueva y te ahorras un disgusto y una posible fuga. Recuerda la frase que resume el vídeo: firmar es responsabilizarse, y hoy ya sabes exactamente de qué respondes. Eso te hace más gasista que ayer. En el último vídeo del tema cerramos el articulado: el mantenimiento, la diferencia estrella entre inspección y revisión, y las reglas finales del Reglamento. Te espero para el gran cierre.</a:t>
+              <a:t>N1: Quién y cuándo, las dos juntas. ¿Quién avisa y en qué plazo?</a:t>
+            </a:r>
+          </a:p>
+          <a:p>
+            <a:r>
+              <a:t>N2: Ojo, aunque lo tramite la instaladora, la responsabilidad legal es de otra persona.</a:t>
+            </a:r>
+          </a:p>
+        </p:txBody>
+      </p:sp>
+      <p:sp>
+        <p:nvSpPr>
+          <p:cNvPr id="4" name="Slide Number Placeholder 3"/>
+          <p:cNvSpPr>
+            <a:spLocks noGrp="1"/>
+          </p:cNvSpPr>
+          <p:nvPr>
+            <p:ph type="sldNum" idx="5" sz="quarter"/>
+          </p:nvPr>
+        </p:nvSpPr>
+        <p:spPr/>
+      </p:sp>
+    </p:spTree>
+  </p:cSld>
+  <p:clrMapOvr>
+    <a:masterClrMapping/>
+  </p:clrMapOvr>
+</p:notes>
+</file>
+
+<file path=ppt/notesSlides/notesSlide19.xml><?xml version="1.0" encoding="utf-8"?>
+<p:notes xmlns:a="http://schemas.openxmlformats.org/drawingml/2006/main" xmlns:p="http://schemas.openxmlformats.org/presentationml/2006/main" xmlns:r="http://schemas.openxmlformats.org/officeDocument/2006/relationships">
+  <p:cSld>
+    <p:spTree>
+      <p:nvGrpSpPr>
+        <p:cNvPr id="1" name=""/>
+        <p:cNvGrpSpPr/>
+        <p:nvPr/>
+      </p:nvGrpSpPr>
+      <p:grpSpPr>
+        <a:xfrm>
+          <a:off x="0" y="0"/>
+          <a:ext cx="0" cy="0"/>
+          <a:chOff x="0" y="0"/>
+          <a:chExt cx="0" cy="0"/>
+        </a:xfrm>
+      </p:grpSpPr>
+      <p:sp>
+        <p:nvSpPr>
+          <p:cNvPr id="2" name="Slide Image Placeholder 1"/>
+          <p:cNvSpPr>
+            <a:spLocks noGrp="1"/>
+          </p:cNvSpPr>
+          <p:nvPr>
+            <p:ph type="sldImg" idx="2"/>
+          </p:nvPr>
+        </p:nvSpPr>
+        <p:spPr/>
+      </p:sp>
+      <p:sp>
+        <p:nvSpPr>
+          <p:cNvPr id="3" name="Notes Placeholder 2"/>
+          <p:cNvSpPr>
+            <a:spLocks noGrp="1"/>
+          </p:cNvSpPr>
+          <p:nvPr>
+            <p:ph type="body" idx="3" sz="quarter"/>
+          </p:nvPr>
+        </p:nvSpPr>
+        <p:spPr/>
+        <p:txBody>
+          <a:bodyPr/>
+          <a:lstStyle/>
+          <a:p>
+            <a:r>
+              <a:t>N1: ¿Por qué el titular y treinta días?</a:t>
+            </a:r>
+          </a:p>
+          <a:p>
+            <a:r>
+              <a:t>N2: Porque comunicar es obligación del dueño, no de la instaladora, aunque esta lo tramite en su nombre. Y el plazo se cuenta desde la puesta en servicio, desde que entra el gas, no desde que acabaste el montaje: ahí está la trampa.</a:t>
             </a:r>
           </a:p>
         </p:txBody>
@@ -1285,6 +1356,391 @@
           <a:p>
             <a:r>
               <a:t>N2: Estos tres números son el mapa. Ocho pasos ordenados en el artículo quinto, desde el diseño hasta el arranque de los aparatos: esa es la película de toda obra. Treinta días es el plazo que tiene el titular, el dueño, para comunicar la instalación a la Comunidad Autónoma después de la puesta en servicio. Y tres certificados de arranque que no debes confundir jamás, porque el examen los cruza: el de instalación, el de dirección de obra y el de puesta en marcha del aparato. Si sujetas estos tres números, tienes dónde colgar todo lo demás del vídeo.</a:t>
+            </a:r>
+          </a:p>
+        </p:txBody>
+      </p:sp>
+      <p:sp>
+        <p:nvSpPr>
+          <p:cNvPr id="4" name="Slide Number Placeholder 3"/>
+          <p:cNvSpPr>
+            <a:spLocks noGrp="1"/>
+          </p:cNvSpPr>
+          <p:nvPr>
+            <p:ph type="sldNum" idx="5" sz="quarter"/>
+          </p:nvPr>
+        </p:nvSpPr>
+        <p:spPr/>
+      </p:sp>
+    </p:spTree>
+  </p:cSld>
+  <p:clrMapOvr>
+    <a:masterClrMapping/>
+  </p:clrMapOvr>
+</p:notes>
+</file>
+
+<file path=ppt/notesSlides/notesSlide20.xml><?xml version="1.0" encoding="utf-8"?>
+<p:notes xmlns:a="http://schemas.openxmlformats.org/drawingml/2006/main" xmlns:p="http://schemas.openxmlformats.org/presentationml/2006/main" xmlns:r="http://schemas.openxmlformats.org/officeDocument/2006/relationships">
+  <p:cSld>
+    <p:spTree>
+      <p:nvGrpSpPr>
+        <p:cNvPr id="1" name=""/>
+        <p:cNvGrpSpPr/>
+        <p:nvPr/>
+      </p:nvGrpSpPr>
+      <p:grpSpPr>
+        <a:xfrm>
+          <a:off x="0" y="0"/>
+          <a:ext cx="0" cy="0"/>
+          <a:chOff x="0" y="0"/>
+          <a:chExt cx="0" cy="0"/>
+        </a:xfrm>
+      </p:grpSpPr>
+      <p:sp>
+        <p:nvSpPr>
+          <p:cNvPr id="2" name="Slide Image Placeholder 1"/>
+          <p:cNvSpPr>
+            <a:spLocks noGrp="1"/>
+          </p:cNvSpPr>
+          <p:nvPr>
+            <p:ph type="sldImg" idx="2"/>
+          </p:nvPr>
+        </p:nvSpPr>
+        <p:spPr/>
+      </p:sp>
+      <p:sp>
+        <p:nvSpPr>
+          <p:cNvPr id="3" name="Notes Placeholder 2"/>
+          <p:cNvSpPr>
+            <a:spLocks noGrp="1"/>
+          </p:cNvSpPr>
+          <p:nvPr>
+            <p:ph type="body" idx="3" sz="quarter"/>
+          </p:nvPr>
+        </p:nvSpPr>
+        <p:spPr/>
+        <p:txBody>
+          <a:bodyPr/>
+          <a:lstStyle/>
+          <a:p>
+            <a:r>
+              <a:t>N1: La puesta en marcha del aparato, ¿es encender y ya está?</a:t>
+            </a:r>
+          </a:p>
+          <a:p>
+            <a:r>
+              <a:t>N2: No, y esta distinción es importante. La puesta en marcha se hace según la ITC-ICG cero ocho, y no consiste en darle al botón y ver que enciende. Es verificar tres cosas: que la caldera o el calentador funcionan con el gas para el que fueron diseñados, con su presión correcta, y que la combustión cae dentro de los parámetros que marca el fabricante. Por qué se hace bien: hacerla mal o saltártela es la puerta directa a la mala combustión, la llama amarilla, el ennegrecido, el aparato que se apaga solo y el monóxido de carbono. Quien la realiza emite y entrega al usuario, no al titular, un certificado de puesta en marcha. Ese papel es la prueba de que el aparato arrancó bien y en condiciones seguras. Piénsalo como el 'estreno' controlado del aparato, no como un simple encendido.</a:t>
+            </a:r>
+          </a:p>
+        </p:txBody>
+      </p:sp>
+      <p:sp>
+        <p:nvSpPr>
+          <p:cNvPr id="4" name="Slide Number Placeholder 3"/>
+          <p:cNvSpPr>
+            <a:spLocks noGrp="1"/>
+          </p:cNvSpPr>
+          <p:nvPr>
+            <p:ph type="sldNum" idx="5" sz="quarter"/>
+          </p:nvPr>
+        </p:nvSpPr>
+        <p:spPr/>
+      </p:sp>
+    </p:spTree>
+  </p:cSld>
+  <p:clrMapOvr>
+    <a:masterClrMapping/>
+  </p:clrMapOvr>
+</p:notes>
+</file>
+
+<file path=ppt/notesSlides/notesSlide21.xml><?xml version="1.0" encoding="utf-8"?>
+<p:notes xmlns:a="http://schemas.openxmlformats.org/drawingml/2006/main" xmlns:p="http://schemas.openxmlformats.org/presentationml/2006/main" xmlns:r="http://schemas.openxmlformats.org/officeDocument/2006/relationships">
+  <p:cSld>
+    <p:spTree>
+      <p:nvGrpSpPr>
+        <p:cNvPr id="1" name=""/>
+        <p:cNvGrpSpPr/>
+        <p:nvPr/>
+      </p:nvGrpSpPr>
+      <p:grpSpPr>
+        <a:xfrm>
+          <a:off x="0" y="0"/>
+          <a:ext cx="0" cy="0"/>
+          <a:chOff x="0" y="0"/>
+          <a:chExt cx="0" cy="0"/>
+        </a:xfrm>
+      </p:grpSpPr>
+      <p:sp>
+        <p:nvSpPr>
+          <p:cNvPr id="2" name="Slide Image Placeholder 1"/>
+          <p:cNvSpPr>
+            <a:spLocks noGrp="1"/>
+          </p:cNvSpPr>
+          <p:nvPr>
+            <p:ph type="sldImg" idx="2"/>
+          </p:nvPr>
+        </p:nvSpPr>
+        <p:spPr/>
+      </p:sp>
+      <p:sp>
+        <p:nvSpPr>
+          <p:cNvPr id="3" name="Notes Placeholder 2"/>
+          <p:cNvSpPr>
+            <a:spLocks noGrp="1"/>
+          </p:cNvSpPr>
+          <p:nvPr>
+            <p:ph type="body" idx="3" sz="quarter"/>
+          </p:nvPr>
+        </p:nvSpPr>
+        <p:spPr/>
+        <p:txBody>
+          <a:bodyPr/>
+          <a:lstStyle/>
+          <a:p>
+            <a:r>
+              <a:t>N1: Se juntan tres certificados y me lío. ¿Cómo los separo de una vez?</a:t>
+            </a:r>
+          </a:p>
+          <a:p>
+            <a:r>
+              <a:t>N2: Paramos un momento a ordenar los tres, porque 'quién firma cada uno' es de las preguntas más repetidas de todo el examen. Míralos como tres papeles distintos, cada uno con su firmante. El certificado de instalación lo firma la empresa que ejecutó la obra, y no falta nunca. El certificado de dirección de obra lo firma el director de obra, y solo aparece si hubo proyecto, es decir, obra grande. Y el certificado de puesta en marcha lo firma el agente de puesta en marcha, va del aparato y se entrega al usuario. Truco para fijarlo: instalación va de la obra, dirección de obra va del proyecto, puesta en marcha va del aparato. Si asocias cada certificado con su 'de qué va', ya no los cruzas ni con trampa.</a:t>
+            </a:r>
+          </a:p>
+        </p:txBody>
+      </p:sp>
+      <p:sp>
+        <p:nvSpPr>
+          <p:cNvPr id="4" name="Slide Number Placeholder 3"/>
+          <p:cNvSpPr>
+            <a:spLocks noGrp="1"/>
+          </p:cNvSpPr>
+          <p:nvPr>
+            <p:ph type="sldNum" idx="5" sz="quarter"/>
+          </p:nvPr>
+        </p:nvSpPr>
+        <p:spPr/>
+      </p:sp>
+    </p:spTree>
+  </p:cSld>
+  <p:clrMapOvr>
+    <a:masterClrMapping/>
+  </p:clrMapOvr>
+</p:notes>
+</file>
+
+<file path=ppt/notesSlides/notesSlide22.xml><?xml version="1.0" encoding="utf-8"?>
+<p:notes xmlns:a="http://schemas.openxmlformats.org/drawingml/2006/main" xmlns:p="http://schemas.openxmlformats.org/presentationml/2006/main" xmlns:r="http://schemas.openxmlformats.org/officeDocument/2006/relationships">
+  <p:cSld>
+    <p:spTree>
+      <p:nvGrpSpPr>
+        <p:cNvPr id="1" name=""/>
+        <p:cNvGrpSpPr/>
+        <p:nvPr/>
+      </p:nvGrpSpPr>
+      <p:grpSpPr>
+        <a:xfrm>
+          <a:off x="0" y="0"/>
+          <a:ext cx="0" cy="0"/>
+          <a:chOff x="0" y="0"/>
+          <a:chExt cx="0" cy="0"/>
+        </a:xfrm>
+      </p:grpSpPr>
+      <p:sp>
+        <p:nvSpPr>
+          <p:cNvPr id="2" name="Slide Image Placeholder 1"/>
+          <p:cNvSpPr>
+            <a:spLocks noGrp="1"/>
+          </p:cNvSpPr>
+          <p:nvPr>
+            <p:ph type="sldImg" idx="2"/>
+          </p:nvPr>
+        </p:nvSpPr>
+        <p:spPr/>
+      </p:sp>
+      <p:sp>
+        <p:nvSpPr>
+          <p:cNvPr id="3" name="Notes Placeholder 2"/>
+          <p:cNvSpPr>
+            <a:spLocks noGrp="1"/>
+          </p:cNvSpPr>
+          <p:nvPr>
+            <p:ph type="body" idx="3" sz="quarter"/>
+          </p:nvPr>
+        </p:nvSpPr>
+        <p:spPr/>
+        <p:txBody>
+          <a:bodyPr/>
+          <a:lstStyle/>
+          <a:p>
+            <a:r>
+              <a:t>N1: ¿Qué información tiene derecho a recibir el cliente?</a:t>
+            </a:r>
+          </a:p>
+          <a:p>
+            <a:r>
+              <a:t>N2: Bastante, y parte se la das tú. Como anexo al certificado de instalación que entregas al titular, la empresa instaladora confecciona unas instrucciones de uso y mantenimiento. Y en todo caso incluyen un croquis del trazado, o sea un dibujo de por dónde van los tubos, con sus materiales, uniones y válvulas. El cliente tiene derecho a saber por dónde pasa su gas, y ese plano se lo entregas tú con la instalación. Además, por su lado, el suministrador facilita a sus clientes, por escrito y con periodicidad al menos bienal, recomendaciones de seguridad. Ojo a la palabra: bienal significa cada dos años; no la confundas con bianual, que sería dos veces al año. Aquí es cada dos años como mínimo. Un recordatorio de seguridad que llega puntual y un croquis claro son detalles de un buen profesional.</a:t>
+            </a:r>
+          </a:p>
+        </p:txBody>
+      </p:sp>
+      <p:sp>
+        <p:nvSpPr>
+          <p:cNvPr id="4" name="Slide Number Placeholder 3"/>
+          <p:cNvSpPr>
+            <a:spLocks noGrp="1"/>
+          </p:cNvSpPr>
+          <p:nvPr>
+            <p:ph type="sldNum" idx="5" sz="quarter"/>
+          </p:nvPr>
+        </p:nvSpPr>
+        <p:spPr/>
+      </p:sp>
+    </p:spTree>
+  </p:cSld>
+  <p:clrMapOvr>
+    <a:masterClrMapping/>
+  </p:clrMapOvr>
+</p:notes>
+</file>
+
+<file path=ppt/notesSlides/notesSlide23.xml><?xml version="1.0" encoding="utf-8"?>
+<p:notes xmlns:a="http://schemas.openxmlformats.org/drawingml/2006/main" xmlns:p="http://schemas.openxmlformats.org/presentationml/2006/main" xmlns:r="http://schemas.openxmlformats.org/officeDocument/2006/relationships">
+  <p:cSld>
+    <p:spTree>
+      <p:nvGrpSpPr>
+        <p:cNvPr id="1" name=""/>
+        <p:cNvGrpSpPr/>
+        <p:nvPr/>
+      </p:nvGrpSpPr>
+      <p:grpSpPr>
+        <a:xfrm>
+          <a:off x="0" y="0"/>
+          <a:ext cx="0" cy="0"/>
+          <a:chOff x="0" y="0"/>
+          <a:chExt cx="0" cy="0"/>
+        </a:xfrm>
+      </p:grpSpPr>
+      <p:sp>
+        <p:nvSpPr>
+          <p:cNvPr id="2" name="Slide Image Placeholder 1"/>
+          <p:cNvSpPr>
+            <a:spLocks noGrp="1"/>
+          </p:cNvSpPr>
+          <p:nvPr>
+            <p:ph type="sldImg" idx="2"/>
+          </p:nvPr>
+        </p:nvSpPr>
+        <p:spPr/>
+      </p:sp>
+      <p:sp>
+        <p:nvSpPr>
+          <p:cNvPr id="3" name="Notes Placeholder 2"/>
+          <p:cNvSpPr>
+            <a:spLocks noGrp="1"/>
+          </p:cNvSpPr>
+          <p:nvPr>
+            <p:ph type="body" idx="3" sz="quarter"/>
+          </p:nvPr>
+        </p:nvSpPr>
+        <p:spPr/>
+        <p:txBody>
+          <a:bodyPr/>
+          <a:lstStyle/>
+          <a:p>
+            <a:r>
+              <a:t>N1: Repaso rápido antes de cerrar. ¿Tengo los cuatro pilares?</a:t>
+            </a:r>
+          </a:p>
+          <a:p>
+            <a:r>
+              <a:t>N2: Vamos a fijarlos en treinta segundos y en voz alta. Uno, la película de ocho pasos: diseño, autorización, ejecución, pruebas, certificados, puesta en servicio, comunicación y puesta en marcha, en ese orden exacto. Dos, de los tres certificados de arranque, el de instalación siempre; el de dirección de obra solo si hubo proyecto; y el de inspección solo si la ITC lo exige. Tres, el titular comunica a la Comunidad Autónoma antes de treinta días desde la puesta en servicio. Y cuatro, la regla del año: una instalación parada más de un año se trata como si fuera nueva. Recítalos una vez de carrerilla y, si los sueltas sin trabarte, tienes el vídeo dominado.</a:t>
+            </a:r>
+          </a:p>
+        </p:txBody>
+      </p:sp>
+      <p:sp>
+        <p:nvSpPr>
+          <p:cNvPr id="4" name="Slide Number Placeholder 3"/>
+          <p:cNvSpPr>
+            <a:spLocks noGrp="1"/>
+          </p:cNvSpPr>
+          <p:nvPr>
+            <p:ph type="sldNum" idx="5" sz="quarter"/>
+          </p:nvPr>
+        </p:nvSpPr>
+        <p:spPr/>
+      </p:sp>
+    </p:spTree>
+  </p:cSld>
+  <p:clrMapOvr>
+    <a:masterClrMapping/>
+  </p:clrMapOvr>
+</p:notes>
+</file>
+
+<file path=ppt/notesSlides/notesSlide24.xml><?xml version="1.0" encoding="utf-8"?>
+<p:notes xmlns:a="http://schemas.openxmlformats.org/drawingml/2006/main" xmlns:p="http://schemas.openxmlformats.org/presentationml/2006/main" xmlns:r="http://schemas.openxmlformats.org/officeDocument/2006/relationships">
+  <p:cSld>
+    <p:spTree>
+      <p:nvGrpSpPr>
+        <p:cNvPr id="1" name=""/>
+        <p:cNvGrpSpPr/>
+        <p:nvPr/>
+      </p:nvGrpSpPr>
+      <p:grpSpPr>
+        <a:xfrm>
+          <a:off x="0" y="0"/>
+          <a:ext cx="0" cy="0"/>
+          <a:chOff x="0" y="0"/>
+          <a:chExt cx="0" cy="0"/>
+        </a:xfrm>
+      </p:grpSpPr>
+      <p:sp>
+        <p:nvSpPr>
+          <p:cNvPr id="2" name="Slide Image Placeholder 1"/>
+          <p:cNvSpPr>
+            <a:spLocks noGrp="1"/>
+          </p:cNvSpPr>
+          <p:nvPr>
+            <p:ph type="sldImg" idx="2"/>
+          </p:nvPr>
+        </p:nvSpPr>
+        <p:spPr/>
+      </p:sp>
+      <p:sp>
+        <p:nvSpPr>
+          <p:cNvPr id="3" name="Notes Placeholder 2"/>
+          <p:cNvSpPr>
+            <a:spLocks noGrp="1"/>
+          </p:cNvSpPr>
+          <p:nvPr>
+            <p:ph type="body" idx="3" sz="quarter"/>
+          </p:nvPr>
+        </p:nvSpPr>
+        <p:spPr/>
+        <p:txBody>
+          <a:bodyPr/>
+          <a:lstStyle/>
+          <a:p>
+            <a:r>
+              <a:t>N1: Gran final. ¿Qué soy capaz de hacer hoy que ayer no?</a:t>
+            </a:r>
+          </a:p>
+          <a:p>
+            <a:r>
+              <a:t>N2: Reconstruyamos lo aprendido, que cada pieza se apoya en la anterior. Empezaste por los materiales: con su DNI grabado e indeleble y sus instrucciones al menos en castellano, porque dentro de años alguien tiene que saber qué montaste. De ahí pasaste a la joya del vídeo: la película de ocho pasos del artículo quinto, del diseño a la puesta en marcha, y ahora sabes que saltarte uno deja la obra sin gas. Con eso llegaron tus logros: recorres esos ocho pasos en orden; no confundes los tres certificados de arranque, porque el de instalación lo firma quien ejecuta y no falta nunca, el de dirección de obra solo si hubo proyecto, y el de puesta en marcha va del aparato y se entrega al usuario; y distingues la prueba, que haces tú, de la inspección, que hace un árbitro independiente.</a:t>
+            </a:r>
+          </a:p>
+          <a:p>
+            <a:r>
+              <a:t>N1: ¿Y dónde se nota todo esto de verdad?</a:t>
+            </a:r>
+          </a:p>
+          <a:p>
+            <a:r>
+              <a:t>N2: En el examen se nota enseguida: te preguntan quién firma cada certificado y en cuántos días comunica el titular, y ahora respondes sin pestañear, treinta días y el titular. Pero en la obra vale todavía más. Se nota cuando entregas un boletín limpio con su croquis del trazado, y se nota cuando te llega una casa cerrada más de un año y, en lugar de reenganchar el gas sin más, la tratas como nueva y te ahorras un disgusto y una posible fuga. Recuerda la frase que resume el vídeo: firmar es responsabilizarse, y hoy ya sabes exactamente de qué respondes. Eso te hace más gasista que ayer. En el último vídeo del tema cerramos el articulado: el mantenimiento, la diferencia estrella entre inspección y revisión, y las reglas finales del Reglamento. Te espero para el gran cierre.</a:t>
             </a:r>
           </a:p>
         </p:txBody>
@@ -4886,7 +5342,7 @@
       </p:sp>
       <p:sp>
         <p:nvSpPr>
-          <p:cNvPr id="4" name="Rounded Rectangle 3"/>
+          <p:cNvPr id="4" name="Rectangle 3"/>
           <p:cNvSpPr/>
           <p:nvPr/>
         </p:nvSpPr>
@@ -4895,7 +5351,7 @@
             <a:off x="868680" y="2057400"/>
             <a:ext cx="1463040" cy="82296"/>
           </a:xfrm>
-          <a:prstGeom prst="roundRect">
+          <a:prstGeom prst="rect">
             <a:avLst/>
           </a:prstGeom>
           <a:solidFill>
@@ -5012,6 +5468,18 @@
   <p:clrMapOvr>
     <a:masterClrMapping/>
   </p:clrMapOvr>
+  <mc:AlternateContent xmlns:mc="http://schemas.openxmlformats.org/markup-compatibility/2006">
+    <mc:Choice xmlns:p14="http://schemas.microsoft.com/office/powerpoint/2010/main" Requires="p14">
+      <p:transition spd="med" p14:dur="700">
+        <p14:cube dir="l"/>
+      </p:transition>
+    </mc:Choice>
+    <mc:Fallback>
+      <p:transition spd="med">
+        <p:push dir="l"/>
+      </p:transition>
+    </mc:Fallback>
+  </mc:AlternateContent>
 </p:sld>
 </file>
 
@@ -5099,7 +5567,7 @@
                 </a:solidFill>
                 <a:latin typeface="Montserrat"/>
               </a:rPr>
-              <a:t>010 / 018</a:t>
+              <a:t>010 / 024</a:t>
             </a:r>
           </a:p>
         </p:txBody>
@@ -5208,7 +5676,7 @@
       </p:sp>
       <p:sp>
         <p:nvSpPr>
-          <p:cNvPr id="7" name="Rounded Rectangle 6"/>
+          <p:cNvPr id="7" name="Rectangle 6"/>
           <p:cNvSpPr/>
           <p:nvPr/>
         </p:nvSpPr>
@@ -5217,7 +5685,7 @@
             <a:off x="868680" y="1627632"/>
             <a:ext cx="2011680" cy="73152"/>
           </a:xfrm>
-          <a:prstGeom prst="roundRect">
+          <a:prstGeom prst="rect">
             <a:avLst/>
           </a:prstGeom>
           <a:solidFill>
@@ -5259,7 +5727,7 @@
         <p:spPr>
           <a:xfrm>
             <a:off x="822960" y="1965960"/>
-            <a:ext cx="4983480" cy="4206240"/>
+            <a:ext cx="5029200" cy="4206240"/>
           </a:xfrm>
           <a:prstGeom prst="rect">
             <a:avLst/>
@@ -5356,8 +5824,8 @@
         </p:nvSpPr>
         <p:spPr>
           <a:xfrm>
-            <a:off x="5806440" y="1051560"/>
-            <a:ext cx="5298947" cy="4629150"/>
+            <a:off x="6080760" y="1965960"/>
+            <a:ext cx="5303520" cy="4572000"/>
           </a:xfrm>
           <a:prstGeom prst="roundRect">
             <a:avLst/>
@@ -5402,8 +5870,8 @@
         </p:nvSpPr>
         <p:spPr>
           <a:xfrm>
-            <a:off x="6080760" y="2726055"/>
-            <a:ext cx="4750307" cy="1280160"/>
+            <a:off x="6355080" y="3611880"/>
+            <a:ext cx="4754880" cy="1280160"/>
           </a:xfrm>
           <a:prstGeom prst="rect">
             <a:avLst/>
@@ -5424,7 +5892,7 @@
                 </a:solidFill>
                 <a:latin typeface="Montserrat"/>
               </a:rPr>
-              <a:t>IMAGEN REALISTA</a:t>
+              <a:t>IMAGEN</a:t>
             </a:r>
           </a:p>
           <a:p>
@@ -5446,6 +5914,18 @@
   <p:clrMapOvr>
     <a:masterClrMapping/>
   </p:clrMapOvr>
+  <mc:AlternateContent xmlns:mc="http://schemas.openxmlformats.org/markup-compatibility/2006">
+    <mc:Choice xmlns:p14="http://schemas.microsoft.com/office/powerpoint/2010/main" Requires="p14">
+      <p:transition spd="med" p14:dur="700">
+        <p14:cube dir="r"/>
+      </p:transition>
+    </mc:Choice>
+    <mc:Fallback>
+      <p:transition spd="med">
+        <p:push dir="r"/>
+      </p:transition>
+    </mc:Fallback>
+  </mc:AlternateContent>
 </p:sld>
 </file>
 
@@ -5533,7 +6013,7 @@
                 </a:solidFill>
                 <a:latin typeface="Montserrat"/>
               </a:rPr>
-              <a:t>011 / 018</a:t>
+              <a:t>011 / 024</a:t>
             </a:r>
           </a:p>
         </p:txBody>
@@ -5642,7 +6122,7 @@
       </p:sp>
       <p:sp>
         <p:nvSpPr>
-          <p:cNvPr id="7" name="Rounded Rectangle 6"/>
+          <p:cNvPr id="7" name="Rectangle 6"/>
           <p:cNvSpPr/>
           <p:nvPr/>
         </p:nvSpPr>
@@ -5651,7 +6131,7 @@
             <a:off x="868680" y="1627632"/>
             <a:ext cx="2011680" cy="73152"/>
           </a:xfrm>
-          <a:prstGeom prst="roundRect">
+          <a:prstGeom prst="rect">
             <a:avLst/>
           </a:prstGeom>
           <a:solidFill>
@@ -5692,8 +6172,8 @@
         </p:nvSpPr>
         <p:spPr>
           <a:xfrm>
-            <a:off x="822960" y="1965960"/>
-            <a:ext cx="4983480" cy="4206240"/>
+            <a:off x="6355080" y="1965960"/>
+            <a:ext cx="5029200" cy="4206240"/>
           </a:xfrm>
           <a:prstGeom prst="rect">
             <a:avLst/>
@@ -5790,8 +6270,8 @@
         </p:nvSpPr>
         <p:spPr>
           <a:xfrm>
-            <a:off x="5806440" y="1051560"/>
-            <a:ext cx="5298947" cy="4629150"/>
+            <a:off x="822960" y="1965960"/>
+            <a:ext cx="5303520" cy="4572000"/>
           </a:xfrm>
           <a:prstGeom prst="roundRect">
             <a:avLst/>
@@ -5836,8 +6316,8 @@
         </p:nvSpPr>
         <p:spPr>
           <a:xfrm>
-            <a:off x="6080760" y="2726055"/>
-            <a:ext cx="4750307" cy="1280160"/>
+            <a:off x="1097280" y="3611880"/>
+            <a:ext cx="4754880" cy="1280160"/>
           </a:xfrm>
           <a:prstGeom prst="rect">
             <a:avLst/>
@@ -5858,7 +6338,7 @@
                 </a:solidFill>
                 <a:latin typeface="Montserrat"/>
               </a:rPr>
-              <a:t>IMAGEN REALISTA</a:t>
+              <a:t>IMAGEN</a:t>
             </a:r>
           </a:p>
           <a:p>
@@ -5880,6 +6360,18 @@
   <p:clrMapOvr>
     <a:masterClrMapping/>
   </p:clrMapOvr>
+  <mc:AlternateContent xmlns:mc="http://schemas.openxmlformats.org/markup-compatibility/2006">
+    <mc:Choice xmlns:p14="http://schemas.microsoft.com/office/powerpoint/2010/main" Requires="p14">
+      <p:transition spd="med" p14:dur="700">
+        <p14:cube dir="l"/>
+      </p:transition>
+    </mc:Choice>
+    <mc:Fallback>
+      <p:transition spd="med">
+        <p:push dir="l"/>
+      </p:transition>
+    </mc:Fallback>
+  </mc:AlternateContent>
 </p:sld>
 </file>
 
@@ -5967,7 +6459,7 @@
                 </a:solidFill>
                 <a:latin typeface="Montserrat"/>
               </a:rPr>
-              <a:t>012 / 018</a:t>
+              <a:t>012 / 024</a:t>
             </a:r>
           </a:p>
         </p:txBody>
@@ -6008,84 +6500,16 @@
       </p:sp>
       <p:sp>
         <p:nvSpPr>
-          <p:cNvPr id="5" name="TextBox 4"/>
-          <p:cNvSpPr txBox="1"/>
-          <p:nvPr/>
-        </p:nvSpPr>
-        <p:spPr>
-          <a:xfrm>
-            <a:off x="822960" y="457200"/>
-            <a:ext cx="10058400" cy="365760"/>
-          </a:xfrm>
-          <a:prstGeom prst="rect">
-            <a:avLst/>
-          </a:prstGeom>
-          <a:noFill/>
-        </p:spPr>
-        <p:txBody>
-          <a:bodyPr wrap="square">
-            <a:spAutoFit/>
-          </a:bodyPr>
-          <a:lstStyle/>
-          <a:p>
-            <a:r>
-              <a:rPr sz="1300" b="1" i="0">
-                <a:solidFill>
-                  <a:srgbClr val="E8801A"/>
-                </a:solidFill>
-                <a:latin typeface="Montserrat"/>
-              </a:rPr>
-              <a:t>ARTÍCULO 5.6 · PUESTA EN SERVICIO</a:t>
-            </a:r>
-          </a:p>
-        </p:txBody>
-      </p:sp>
-      <p:sp>
-        <p:nvSpPr>
-          <p:cNvPr id="6" name="TextBox 5"/>
-          <p:cNvSpPr txBox="1"/>
-          <p:nvPr/>
-        </p:nvSpPr>
-        <p:spPr>
-          <a:xfrm>
-            <a:off x="822960" y="868680"/>
-            <a:ext cx="10515600" cy="914400"/>
-          </a:xfrm>
-          <a:prstGeom prst="rect">
-            <a:avLst/>
-          </a:prstGeom>
-          <a:noFill/>
-        </p:spPr>
-        <p:txBody>
-          <a:bodyPr wrap="square">
-            <a:spAutoFit/>
-          </a:bodyPr>
-          <a:lstStyle/>
-          <a:p>
-            <a:r>
-              <a:rPr sz="2800" b="1" i="0">
-                <a:solidFill>
-                  <a:srgbClr val="1E2761"/>
-                </a:solidFill>
-                <a:latin typeface="Montserrat"/>
-              </a:rPr>
-              <a:t>La regla del año</a:t>
-            </a:r>
-          </a:p>
-        </p:txBody>
-      </p:sp>
-      <p:sp>
-        <p:nvSpPr>
-          <p:cNvPr id="7" name="Rounded Rectangle 6"/>
+          <p:cNvPr id="5" name="Rectangle 4"/>
           <p:cNvSpPr/>
           <p:nvPr/>
         </p:nvSpPr>
         <p:spPr>
           <a:xfrm>
-            <a:off x="868680" y="1627632"/>
-            <a:ext cx="2011680" cy="73152"/>
-          </a:xfrm>
-          <a:prstGeom prst="roundRect">
+            <a:off x="0" y="0"/>
+            <a:ext cx="12191695" cy="1143000"/>
+          </a:xfrm>
+          <a:prstGeom prst="rect">
             <a:avLst/>
           </a:prstGeom>
           <a:solidFill>
@@ -6120,14 +6544,14 @@
       </p:sp>
       <p:sp>
         <p:nvSpPr>
-          <p:cNvPr id="8" name="TextBox 7"/>
+          <p:cNvPr id="6" name="TextBox 5"/>
           <p:cNvSpPr txBox="1"/>
           <p:nvPr/>
         </p:nvSpPr>
         <p:spPr>
           <a:xfrm>
-            <a:off x="822960" y="1965960"/>
-            <a:ext cx="4983480" cy="4206240"/>
+            <a:off x="822960" y="274320"/>
+            <a:ext cx="10515600" cy="640080"/>
           </a:xfrm>
           <a:prstGeom prst="rect">
             <a:avLst/>
@@ -6140,92 +6564,62 @@
           </a:bodyPr>
           <a:lstStyle/>
           <a:p>
-            <a:pPr>
-              <a:spcAft>
-                <a:spcPts val="1100"/>
-              </a:spcAft>
-            </a:pPr>
-            <a:r>
-              <a:rPr sz="1600" b="1" i="0">
-                <a:solidFill>
-                  <a:srgbClr val="E8801A"/>
-                </a:solidFill>
-                <a:latin typeface="Montserrat"/>
-              </a:rPr>
-              <a:t>▸  </a:t>
-            </a:r>
-            <a:r>
-              <a:rPr sz="1600" b="0" i="0">
-                <a:solidFill>
-                  <a:srgbClr val="1B2330"/>
-                </a:solidFill>
-                <a:latin typeface="Montserrat"/>
-              </a:rPr>
-              <a:t>Recibir copia de los certificados</a:t>
-            </a:r>
-          </a:p>
-          <a:p>
-            <a:pPr>
-              <a:spcAft>
-                <a:spcPts val="1100"/>
-              </a:spcAft>
-            </a:pPr>
-            <a:r>
-              <a:rPr sz="1600" b="1" i="0">
-                <a:solidFill>
-                  <a:srgbClr val="E8801A"/>
-                </a:solidFill>
-                <a:latin typeface="Montserrat"/>
-              </a:rPr>
-              <a:t>▸  </a:t>
-            </a:r>
-            <a:r>
-              <a:rPr sz="1600" b="0" i="0">
-                <a:solidFill>
-                  <a:srgbClr val="1B2330"/>
-                </a:solidFill>
-                <a:latin typeface="Montserrat"/>
-              </a:rPr>
-              <a:t>Suministro provisional para pruebas</a:t>
-            </a:r>
-          </a:p>
-          <a:p>
-            <a:pPr>
-              <a:spcAft>
-                <a:spcPts val="1100"/>
-              </a:spcAft>
-            </a:pPr>
-            <a:r>
-              <a:rPr sz="1600" b="1" i="0">
-                <a:solidFill>
-                  <a:srgbClr val="E8801A"/>
-                </a:solidFill>
-                <a:latin typeface="Montserrat"/>
-              </a:rPr>
-              <a:t>▸  </a:t>
-            </a:r>
-            <a:r>
-              <a:rPr sz="1600" b="0" i="0">
-                <a:solidFill>
-                  <a:srgbClr val="1B2330"/>
-                </a:solidFill>
-                <a:latin typeface="Montserrat"/>
-              </a:rPr>
-              <a:t>Parada +1 año: se trata como nueva</a:t>
-            </a:r>
-          </a:p>
-        </p:txBody>
-      </p:sp>
-      <p:sp>
-        <p:nvSpPr>
-          <p:cNvPr id="9" name="imgph" descr="IMGQ:gas meter installation apartment wall"/>
+            <a:r>
+              <a:rPr sz="2400" b="1" i="0">
+                <a:solidFill>
+                  <a:srgbClr val="FFFFFF"/>
+                </a:solidFill>
+                <a:latin typeface="Montserrat"/>
+              </a:rPr>
+              <a:t>⚡  PREGUNTA RÁPIDA</a:t>
+            </a:r>
+          </a:p>
+        </p:txBody>
+      </p:sp>
+      <p:sp>
+        <p:nvSpPr>
+          <p:cNvPr id="7" name="TextBox 6"/>
+          <p:cNvSpPr txBox="1"/>
+          <p:nvPr/>
+        </p:nvSpPr>
+        <p:spPr>
+          <a:xfrm>
+            <a:off x="822960" y="1508760"/>
+            <a:ext cx="10515600" cy="1371600"/>
+          </a:xfrm>
+          <a:prstGeom prst="rect">
+            <a:avLst/>
+          </a:prstGeom>
+          <a:noFill/>
+        </p:spPr>
+        <p:txBody>
+          <a:bodyPr wrap="square">
+            <a:spAutoFit/>
+          </a:bodyPr>
+          <a:lstStyle/>
+          <a:p>
+            <a:r>
+              <a:rPr sz="2400" b="1" i="0">
+                <a:solidFill>
+                  <a:srgbClr val="1E2761"/>
+                </a:solidFill>
+                <a:latin typeface="Montserrat"/>
+              </a:rPr>
+              <a:t>De los certificados de arranque, ¿cuál existe siempre en toda instalación?</a:t>
+            </a:r>
+          </a:p>
+        </p:txBody>
+      </p:sp>
+      <p:sp>
+        <p:nvSpPr>
+          <p:cNvPr id="8" name="Rounded Rectangle 7"/>
           <p:cNvSpPr/>
           <p:nvPr/>
         </p:nvSpPr>
         <p:spPr>
           <a:xfrm>
-            <a:off x="5806440" y="1051560"/>
-            <a:ext cx="5298947" cy="4629150"/>
+            <a:off x="822960" y="3291840"/>
+            <a:ext cx="4983480" cy="1143000"/>
           </a:xfrm>
           <a:prstGeom prst="roundRect">
             <a:avLst/>
@@ -6264,14 +6658,58 @@
       </p:sp>
       <p:sp>
         <p:nvSpPr>
+          <p:cNvPr id="9" name="Rectangle 8"/>
+          <p:cNvSpPr/>
+          <p:nvPr/>
+        </p:nvSpPr>
+        <p:spPr>
+          <a:xfrm>
+            <a:off x="822960" y="3291840"/>
+            <a:ext cx="640080" cy="1143000"/>
+          </a:xfrm>
+          <a:prstGeom prst="rect">
+            <a:avLst/>
+          </a:prstGeom>
+          <a:solidFill>
+            <a:srgbClr val="1E2761"/>
+          </a:solidFill>
+          <a:ln>
+            <a:noFill/>
+          </a:ln>
+          <a:effectLst/>
+        </p:spPr>
+        <p:style>
+          <a:lnRef idx="1">
+            <a:schemeClr val="accent1"/>
+          </a:lnRef>
+          <a:fillRef idx="3">
+            <a:schemeClr val="accent1"/>
+          </a:fillRef>
+          <a:effectRef idx="2">
+            <a:schemeClr val="accent1"/>
+          </a:effectRef>
+          <a:fontRef idx="minor">
+            <a:schemeClr val="lt1"/>
+          </a:fontRef>
+        </p:style>
+        <p:txBody>
+          <a:bodyPr rtlCol="0" anchor="ctr"/>
+          <a:lstStyle/>
+          <a:p>
+            <a:pPr algn="ctr"/>
+          </a:p>
+        </p:txBody>
+      </p:sp>
+      <p:sp>
+        <p:nvSpPr>
           <p:cNvPr id="10" name="TextBox 9"/>
           <p:cNvSpPr txBox="1"/>
           <p:nvPr/>
         </p:nvSpPr>
         <p:spPr>
           <a:xfrm>
-            <a:off x="6080760" y="2726055"/>
-            <a:ext cx="4750307" cy="1280160"/>
+            <a:off x="822960" y="3611880"/>
+            <a:ext cx="640080" cy="548640"/>
           </a:xfrm>
           <a:prstGeom prst="rect">
             <a:avLst/>
@@ -6286,25 +6724,524 @@
           <a:p>
             <a:pPr algn="ctr"/>
             <a:r>
-              <a:rPr sz="1400" b="1" i="0">
-                <a:solidFill>
-                  <a:srgbClr val="64748B"/>
-                </a:solidFill>
-                <a:latin typeface="Montserrat"/>
-              </a:rPr>
-              <a:t>IMAGEN REALISTA</a:t>
-            </a:r>
-          </a:p>
+              <a:rPr sz="2200" b="1" i="0">
+                <a:solidFill>
+                  <a:srgbClr val="FFFFFF"/>
+                </a:solidFill>
+                <a:latin typeface="Montserrat"/>
+              </a:rPr>
+              <a:t>A</a:t>
+            </a:r>
+          </a:p>
+        </p:txBody>
+      </p:sp>
+      <p:sp>
+        <p:nvSpPr>
+          <p:cNvPr id="11" name="TextBox 10"/>
+          <p:cNvSpPr txBox="1"/>
+          <p:nvPr/>
+        </p:nvSpPr>
+        <p:spPr>
+          <a:xfrm>
+            <a:off x="1600200" y="3474720"/>
+            <a:ext cx="4114800" cy="868680"/>
+          </a:xfrm>
+          <a:prstGeom prst="rect">
+            <a:avLst/>
+          </a:prstGeom>
+          <a:noFill/>
+        </p:spPr>
+        <p:txBody>
+          <a:bodyPr wrap="square">
+            <a:spAutoFit/>
+          </a:bodyPr>
+          <a:lstStyle/>
+          <a:p>
+            <a:r>
+              <a:rPr sz="1400" b="0" i="0">
+                <a:solidFill>
+                  <a:srgbClr val="1B2330"/>
+                </a:solidFill>
+                <a:latin typeface="Montserrat"/>
+              </a:rPr>
+              <a:t>El certificado de dirección de obra</a:t>
+            </a:r>
+          </a:p>
+        </p:txBody>
+      </p:sp>
+      <p:sp>
+        <p:nvSpPr>
+          <p:cNvPr id="12" name="Rounded Rectangle 11"/>
+          <p:cNvSpPr/>
+          <p:nvPr/>
+        </p:nvSpPr>
+        <p:spPr>
+          <a:xfrm>
+            <a:off x="6355080" y="3291840"/>
+            <a:ext cx="4983480" cy="1143000"/>
+          </a:xfrm>
+          <a:prstGeom prst="roundRect">
+            <a:avLst/>
+          </a:prstGeom>
+          <a:solidFill>
+            <a:srgbClr val="F3F6FB"/>
+          </a:solidFill>
+          <a:ln w="12700">
+            <a:solidFill>
+              <a:srgbClr val="C7D2E6"/>
+            </a:solidFill>
+          </a:ln>
+          <a:effectLst/>
+        </p:spPr>
+        <p:style>
+          <a:lnRef idx="1">
+            <a:schemeClr val="accent1"/>
+          </a:lnRef>
+          <a:fillRef idx="3">
+            <a:schemeClr val="accent1"/>
+          </a:fillRef>
+          <a:effectRef idx="2">
+            <a:schemeClr val="accent1"/>
+          </a:effectRef>
+          <a:fontRef idx="minor">
+            <a:schemeClr val="lt1"/>
+          </a:fontRef>
+        </p:style>
+        <p:txBody>
+          <a:bodyPr rtlCol="0" anchor="ctr"/>
+          <a:lstStyle/>
           <a:p>
             <a:pPr algn="ctr"/>
-            <a:r>
-              <a:rPr sz="1100" b="0" i="1">
-                <a:solidFill>
-                  <a:srgbClr val="64748B"/>
-                </a:solidFill>
-                <a:latin typeface="Montserrat"/>
-              </a:rPr>
-              <a:t>gas meter installation apartment wall</a:t>
+          </a:p>
+        </p:txBody>
+      </p:sp>
+      <p:sp>
+        <p:nvSpPr>
+          <p:cNvPr id="13" name="Rectangle 12"/>
+          <p:cNvSpPr/>
+          <p:nvPr/>
+        </p:nvSpPr>
+        <p:spPr>
+          <a:xfrm>
+            <a:off x="6355080" y="3291840"/>
+            <a:ext cx="640080" cy="1143000"/>
+          </a:xfrm>
+          <a:prstGeom prst="rect">
+            <a:avLst/>
+          </a:prstGeom>
+          <a:solidFill>
+            <a:srgbClr val="1E2761"/>
+          </a:solidFill>
+          <a:ln>
+            <a:noFill/>
+          </a:ln>
+          <a:effectLst/>
+        </p:spPr>
+        <p:style>
+          <a:lnRef idx="1">
+            <a:schemeClr val="accent1"/>
+          </a:lnRef>
+          <a:fillRef idx="3">
+            <a:schemeClr val="accent1"/>
+          </a:fillRef>
+          <a:effectRef idx="2">
+            <a:schemeClr val="accent1"/>
+          </a:effectRef>
+          <a:fontRef idx="minor">
+            <a:schemeClr val="lt1"/>
+          </a:fontRef>
+        </p:style>
+        <p:txBody>
+          <a:bodyPr rtlCol="0" anchor="ctr"/>
+          <a:lstStyle/>
+          <a:p>
+            <a:pPr algn="ctr"/>
+          </a:p>
+        </p:txBody>
+      </p:sp>
+      <p:sp>
+        <p:nvSpPr>
+          <p:cNvPr id="14" name="TextBox 13"/>
+          <p:cNvSpPr txBox="1"/>
+          <p:nvPr/>
+        </p:nvSpPr>
+        <p:spPr>
+          <a:xfrm>
+            <a:off x="6355080" y="3611880"/>
+            <a:ext cx="640080" cy="548640"/>
+          </a:xfrm>
+          <a:prstGeom prst="rect">
+            <a:avLst/>
+          </a:prstGeom>
+          <a:noFill/>
+        </p:spPr>
+        <p:txBody>
+          <a:bodyPr wrap="square">
+            <a:spAutoFit/>
+          </a:bodyPr>
+          <a:lstStyle/>
+          <a:p>
+            <a:pPr algn="ctr"/>
+            <a:r>
+              <a:rPr sz="2200" b="1" i="0">
+                <a:solidFill>
+                  <a:srgbClr val="FFFFFF"/>
+                </a:solidFill>
+                <a:latin typeface="Montserrat"/>
+              </a:rPr>
+              <a:t>B</a:t>
+            </a:r>
+          </a:p>
+        </p:txBody>
+      </p:sp>
+      <p:sp>
+        <p:nvSpPr>
+          <p:cNvPr id="15" name="TextBox 14"/>
+          <p:cNvSpPr txBox="1"/>
+          <p:nvPr/>
+        </p:nvSpPr>
+        <p:spPr>
+          <a:xfrm>
+            <a:off x="7132320" y="3474720"/>
+            <a:ext cx="4114800" cy="868680"/>
+          </a:xfrm>
+          <a:prstGeom prst="rect">
+            <a:avLst/>
+          </a:prstGeom>
+          <a:noFill/>
+        </p:spPr>
+        <p:txBody>
+          <a:bodyPr wrap="square">
+            <a:spAutoFit/>
+          </a:bodyPr>
+          <a:lstStyle/>
+          <a:p>
+            <a:r>
+              <a:rPr sz="1400" b="0" i="0">
+                <a:solidFill>
+                  <a:srgbClr val="1B2330"/>
+                </a:solidFill>
+                <a:latin typeface="Montserrat"/>
+              </a:rPr>
+              <a:t>El certificado de instalación</a:t>
+            </a:r>
+          </a:p>
+        </p:txBody>
+      </p:sp>
+      <p:sp>
+        <p:nvSpPr>
+          <p:cNvPr id="16" name="Rounded Rectangle 15"/>
+          <p:cNvSpPr/>
+          <p:nvPr/>
+        </p:nvSpPr>
+        <p:spPr>
+          <a:xfrm>
+            <a:off x="822960" y="4617720"/>
+            <a:ext cx="4983480" cy="1143000"/>
+          </a:xfrm>
+          <a:prstGeom prst="roundRect">
+            <a:avLst/>
+          </a:prstGeom>
+          <a:solidFill>
+            <a:srgbClr val="F3F6FB"/>
+          </a:solidFill>
+          <a:ln w="12700">
+            <a:solidFill>
+              <a:srgbClr val="C7D2E6"/>
+            </a:solidFill>
+          </a:ln>
+          <a:effectLst/>
+        </p:spPr>
+        <p:style>
+          <a:lnRef idx="1">
+            <a:schemeClr val="accent1"/>
+          </a:lnRef>
+          <a:fillRef idx="3">
+            <a:schemeClr val="accent1"/>
+          </a:fillRef>
+          <a:effectRef idx="2">
+            <a:schemeClr val="accent1"/>
+          </a:effectRef>
+          <a:fontRef idx="minor">
+            <a:schemeClr val="lt1"/>
+          </a:fontRef>
+        </p:style>
+        <p:txBody>
+          <a:bodyPr rtlCol="0" anchor="ctr"/>
+          <a:lstStyle/>
+          <a:p>
+            <a:pPr algn="ctr"/>
+          </a:p>
+        </p:txBody>
+      </p:sp>
+      <p:sp>
+        <p:nvSpPr>
+          <p:cNvPr id="17" name="Rectangle 16"/>
+          <p:cNvSpPr/>
+          <p:nvPr/>
+        </p:nvSpPr>
+        <p:spPr>
+          <a:xfrm>
+            <a:off x="822960" y="4617720"/>
+            <a:ext cx="640080" cy="1143000"/>
+          </a:xfrm>
+          <a:prstGeom prst="rect">
+            <a:avLst/>
+          </a:prstGeom>
+          <a:solidFill>
+            <a:srgbClr val="1E2761"/>
+          </a:solidFill>
+          <a:ln>
+            <a:noFill/>
+          </a:ln>
+          <a:effectLst/>
+        </p:spPr>
+        <p:style>
+          <a:lnRef idx="1">
+            <a:schemeClr val="accent1"/>
+          </a:lnRef>
+          <a:fillRef idx="3">
+            <a:schemeClr val="accent1"/>
+          </a:fillRef>
+          <a:effectRef idx="2">
+            <a:schemeClr val="accent1"/>
+          </a:effectRef>
+          <a:fontRef idx="minor">
+            <a:schemeClr val="lt1"/>
+          </a:fontRef>
+        </p:style>
+        <p:txBody>
+          <a:bodyPr rtlCol="0" anchor="ctr"/>
+          <a:lstStyle/>
+          <a:p>
+            <a:pPr algn="ctr"/>
+          </a:p>
+        </p:txBody>
+      </p:sp>
+      <p:sp>
+        <p:nvSpPr>
+          <p:cNvPr id="18" name="TextBox 17"/>
+          <p:cNvSpPr txBox="1"/>
+          <p:nvPr/>
+        </p:nvSpPr>
+        <p:spPr>
+          <a:xfrm>
+            <a:off x="822960" y="4937760"/>
+            <a:ext cx="640080" cy="548640"/>
+          </a:xfrm>
+          <a:prstGeom prst="rect">
+            <a:avLst/>
+          </a:prstGeom>
+          <a:noFill/>
+        </p:spPr>
+        <p:txBody>
+          <a:bodyPr wrap="square">
+            <a:spAutoFit/>
+          </a:bodyPr>
+          <a:lstStyle/>
+          <a:p>
+            <a:pPr algn="ctr"/>
+            <a:r>
+              <a:rPr sz="2200" b="1" i="0">
+                <a:solidFill>
+                  <a:srgbClr val="FFFFFF"/>
+                </a:solidFill>
+                <a:latin typeface="Montserrat"/>
+              </a:rPr>
+              <a:t>C</a:t>
+            </a:r>
+          </a:p>
+        </p:txBody>
+      </p:sp>
+      <p:sp>
+        <p:nvSpPr>
+          <p:cNvPr id="19" name="TextBox 18"/>
+          <p:cNvSpPr txBox="1"/>
+          <p:nvPr/>
+        </p:nvSpPr>
+        <p:spPr>
+          <a:xfrm>
+            <a:off x="1600200" y="4800600"/>
+            <a:ext cx="4114800" cy="868680"/>
+          </a:xfrm>
+          <a:prstGeom prst="rect">
+            <a:avLst/>
+          </a:prstGeom>
+          <a:noFill/>
+        </p:spPr>
+        <p:txBody>
+          <a:bodyPr wrap="square">
+            <a:spAutoFit/>
+          </a:bodyPr>
+          <a:lstStyle/>
+          <a:p>
+            <a:r>
+              <a:rPr sz="1400" b="0" i="0">
+                <a:solidFill>
+                  <a:srgbClr val="1B2330"/>
+                </a:solidFill>
+                <a:latin typeface="Montserrat"/>
+              </a:rPr>
+              <a:t>El certificado de inspección del organismo de control</a:t>
+            </a:r>
+          </a:p>
+        </p:txBody>
+      </p:sp>
+      <p:sp>
+        <p:nvSpPr>
+          <p:cNvPr id="20" name="Rounded Rectangle 19"/>
+          <p:cNvSpPr/>
+          <p:nvPr/>
+        </p:nvSpPr>
+        <p:spPr>
+          <a:xfrm>
+            <a:off x="6355080" y="4617720"/>
+            <a:ext cx="4983480" cy="1143000"/>
+          </a:xfrm>
+          <a:prstGeom prst="roundRect">
+            <a:avLst/>
+          </a:prstGeom>
+          <a:solidFill>
+            <a:srgbClr val="F3F6FB"/>
+          </a:solidFill>
+          <a:ln w="12700">
+            <a:solidFill>
+              <a:srgbClr val="C7D2E6"/>
+            </a:solidFill>
+          </a:ln>
+          <a:effectLst/>
+        </p:spPr>
+        <p:style>
+          <a:lnRef idx="1">
+            <a:schemeClr val="accent1"/>
+          </a:lnRef>
+          <a:fillRef idx="3">
+            <a:schemeClr val="accent1"/>
+          </a:fillRef>
+          <a:effectRef idx="2">
+            <a:schemeClr val="accent1"/>
+          </a:effectRef>
+          <a:fontRef idx="minor">
+            <a:schemeClr val="lt1"/>
+          </a:fontRef>
+        </p:style>
+        <p:txBody>
+          <a:bodyPr rtlCol="0" anchor="ctr"/>
+          <a:lstStyle/>
+          <a:p>
+            <a:pPr algn="ctr"/>
+          </a:p>
+        </p:txBody>
+      </p:sp>
+      <p:sp>
+        <p:nvSpPr>
+          <p:cNvPr id="21" name="Rectangle 20"/>
+          <p:cNvSpPr/>
+          <p:nvPr/>
+        </p:nvSpPr>
+        <p:spPr>
+          <a:xfrm>
+            <a:off x="6355080" y="4617720"/>
+            <a:ext cx="640080" cy="1143000"/>
+          </a:xfrm>
+          <a:prstGeom prst="rect">
+            <a:avLst/>
+          </a:prstGeom>
+          <a:solidFill>
+            <a:srgbClr val="1E2761"/>
+          </a:solidFill>
+          <a:ln>
+            <a:noFill/>
+          </a:ln>
+          <a:effectLst/>
+        </p:spPr>
+        <p:style>
+          <a:lnRef idx="1">
+            <a:schemeClr val="accent1"/>
+          </a:lnRef>
+          <a:fillRef idx="3">
+            <a:schemeClr val="accent1"/>
+          </a:fillRef>
+          <a:effectRef idx="2">
+            <a:schemeClr val="accent1"/>
+          </a:effectRef>
+          <a:fontRef idx="minor">
+            <a:schemeClr val="lt1"/>
+          </a:fontRef>
+        </p:style>
+        <p:txBody>
+          <a:bodyPr rtlCol="0" anchor="ctr"/>
+          <a:lstStyle/>
+          <a:p>
+            <a:pPr algn="ctr"/>
+          </a:p>
+        </p:txBody>
+      </p:sp>
+      <p:sp>
+        <p:nvSpPr>
+          <p:cNvPr id="22" name="TextBox 21"/>
+          <p:cNvSpPr txBox="1"/>
+          <p:nvPr/>
+        </p:nvSpPr>
+        <p:spPr>
+          <a:xfrm>
+            <a:off x="6355080" y="4937760"/>
+            <a:ext cx="640080" cy="548640"/>
+          </a:xfrm>
+          <a:prstGeom prst="rect">
+            <a:avLst/>
+          </a:prstGeom>
+          <a:noFill/>
+        </p:spPr>
+        <p:txBody>
+          <a:bodyPr wrap="square">
+            <a:spAutoFit/>
+          </a:bodyPr>
+          <a:lstStyle/>
+          <a:p>
+            <a:pPr algn="ctr"/>
+            <a:r>
+              <a:rPr sz="2200" b="1" i="0">
+                <a:solidFill>
+                  <a:srgbClr val="FFFFFF"/>
+                </a:solidFill>
+                <a:latin typeface="Montserrat"/>
+              </a:rPr>
+              <a:t>D</a:t>
+            </a:r>
+          </a:p>
+        </p:txBody>
+      </p:sp>
+      <p:sp>
+        <p:nvSpPr>
+          <p:cNvPr id="23" name="TextBox 22"/>
+          <p:cNvSpPr txBox="1"/>
+          <p:nvPr/>
+        </p:nvSpPr>
+        <p:spPr>
+          <a:xfrm>
+            <a:off x="7132320" y="4800600"/>
+            <a:ext cx="4114800" cy="868680"/>
+          </a:xfrm>
+          <a:prstGeom prst="rect">
+            <a:avLst/>
+          </a:prstGeom>
+          <a:noFill/>
+        </p:spPr>
+        <p:txBody>
+          <a:bodyPr wrap="square">
+            <a:spAutoFit/>
+          </a:bodyPr>
+          <a:lstStyle/>
+          <a:p>
+            <a:r>
+              <a:rPr sz="1400" b="0" i="0">
+                <a:solidFill>
+                  <a:srgbClr val="1B2330"/>
+                </a:solidFill>
+                <a:latin typeface="Montserrat"/>
+              </a:rPr>
+              <a:t>El certificado de puesta en marcha del aparato</a:t>
             </a:r>
           </a:p>
         </p:txBody>
@@ -6314,6 +7251,18 @@
   <p:clrMapOvr>
     <a:masterClrMapping/>
   </p:clrMapOvr>
+  <mc:AlternateContent xmlns:mc="http://schemas.openxmlformats.org/markup-compatibility/2006">
+    <mc:Choice xmlns:p14="http://schemas.microsoft.com/office/powerpoint/2010/main" Requires="p14">
+      <p:transition spd="med" p14:dur="700">
+        <p14:cube dir="r"/>
+      </p:transition>
+    </mc:Choice>
+    <mc:Fallback>
+      <p:transition spd="med">
+        <p:push dir="r"/>
+      </p:transition>
+    </mc:Fallback>
+  </mc:AlternateContent>
 </p:sld>
 </file>
 
@@ -6401,7 +7350,7 @@
                 </a:solidFill>
                 <a:latin typeface="Montserrat"/>
               </a:rPr>
-              <a:t>013 / 018</a:t>
+              <a:t>013 / 024</a:t>
             </a:r>
           </a:p>
         </p:txBody>
@@ -6442,88 +7391,20 @@
       </p:sp>
       <p:sp>
         <p:nvSpPr>
-          <p:cNvPr id="5" name="TextBox 4"/>
-          <p:cNvSpPr txBox="1"/>
-          <p:nvPr/>
-        </p:nvSpPr>
-        <p:spPr>
-          <a:xfrm>
-            <a:off x="822960" y="457200"/>
-            <a:ext cx="10058400" cy="365760"/>
-          </a:xfrm>
-          <a:prstGeom prst="rect">
-            <a:avLst/>
-          </a:prstGeom>
-          <a:noFill/>
-        </p:spPr>
-        <p:txBody>
-          <a:bodyPr wrap="square">
-            <a:spAutoFit/>
-          </a:bodyPr>
-          <a:lstStyle/>
-          <a:p>
-            <a:r>
-              <a:rPr sz="1300" b="1" i="0">
-                <a:solidFill>
-                  <a:srgbClr val="E8801A"/>
-                </a:solidFill>
-                <a:latin typeface="Montserrat"/>
-              </a:rPr>
-              <a:t>ARTÍCULO 5.7 · COMUNICACIÓN</a:t>
-            </a:r>
-          </a:p>
-        </p:txBody>
-      </p:sp>
-      <p:sp>
-        <p:nvSpPr>
-          <p:cNvPr id="6" name="TextBox 5"/>
-          <p:cNvSpPr txBox="1"/>
-          <p:nvPr/>
-        </p:nvSpPr>
-        <p:spPr>
-          <a:xfrm>
-            <a:off x="822960" y="868680"/>
-            <a:ext cx="10515600" cy="914400"/>
-          </a:xfrm>
-          <a:prstGeom prst="rect">
-            <a:avLst/>
-          </a:prstGeom>
-          <a:noFill/>
-        </p:spPr>
-        <p:txBody>
-          <a:bodyPr wrap="square">
-            <a:spAutoFit/>
-          </a:bodyPr>
-          <a:lstStyle/>
-          <a:p>
-            <a:r>
-              <a:rPr sz="2800" b="1" i="0">
-                <a:solidFill>
-                  <a:srgbClr val="1E2761"/>
-                </a:solidFill>
-                <a:latin typeface="Montserrat"/>
-              </a:rPr>
-              <a:t>Treinta días y lo presenta el titular</a:t>
-            </a:r>
-          </a:p>
-        </p:txBody>
-      </p:sp>
-      <p:sp>
-        <p:nvSpPr>
-          <p:cNvPr id="7" name="Rounded Rectangle 6"/>
+          <p:cNvPr id="5" name="Rectangle 4"/>
           <p:cNvSpPr/>
           <p:nvPr/>
         </p:nvSpPr>
         <p:spPr>
           <a:xfrm>
-            <a:off x="868680" y="1627632"/>
-            <a:ext cx="2011680" cy="73152"/>
-          </a:xfrm>
-          <a:prstGeom prst="roundRect">
+            <a:off x="0" y="0"/>
+            <a:ext cx="12191695" cy="1143000"/>
+          </a:xfrm>
+          <a:prstGeom prst="rect">
             <a:avLst/>
           </a:prstGeom>
           <a:solidFill>
-            <a:srgbClr val="E8801A"/>
+            <a:srgbClr val="1E8E4B"/>
           </a:solidFill>
           <a:ln>
             <a:noFill/>
@@ -6554,14 +7435,14 @@
       </p:sp>
       <p:sp>
         <p:nvSpPr>
-          <p:cNvPr id="8" name="TextBox 7"/>
+          <p:cNvPr id="6" name="TextBox 5"/>
           <p:cNvSpPr txBox="1"/>
           <p:nvPr/>
         </p:nvSpPr>
         <p:spPr>
           <a:xfrm>
-            <a:off x="822960" y="1965960"/>
-            <a:ext cx="4983480" cy="4206240"/>
+            <a:off x="822960" y="274320"/>
+            <a:ext cx="10515600" cy="640080"/>
           </a:xfrm>
           <a:prstGeom prst="rect">
             <a:avLst/>
@@ -6574,102 +7455,72 @@
           </a:bodyPr>
           <a:lstStyle/>
           <a:p>
-            <a:pPr>
-              <a:spcAft>
-                <a:spcPts val="1100"/>
-              </a:spcAft>
-            </a:pPr>
-            <a:r>
-              <a:rPr sz="1600" b="1" i="0">
-                <a:solidFill>
-                  <a:srgbClr val="E8801A"/>
-                </a:solidFill>
-                <a:latin typeface="Montserrat"/>
-              </a:rPr>
-              <a:t>▸  </a:t>
-            </a:r>
-            <a:r>
-              <a:rPr sz="1600" b="0" i="0">
-                <a:solidFill>
-                  <a:srgbClr val="1B2330"/>
-                </a:solidFill>
-                <a:latin typeface="Montserrat"/>
-              </a:rPr>
-              <a:t>El titular comunica, no la instaladora</a:t>
-            </a:r>
-          </a:p>
-          <a:p>
-            <a:pPr>
-              <a:spcAft>
-                <a:spcPts val="1100"/>
-              </a:spcAft>
-            </a:pPr>
-            <a:r>
-              <a:rPr sz="1600" b="1" i="0">
-                <a:solidFill>
-                  <a:srgbClr val="E8801A"/>
-                </a:solidFill>
-                <a:latin typeface="Montserrat"/>
-              </a:rPr>
-              <a:t>▸  </a:t>
-            </a:r>
-            <a:r>
-              <a:rPr sz="1600" b="0" i="0">
-                <a:solidFill>
-                  <a:srgbClr val="1B2330"/>
-                </a:solidFill>
-                <a:latin typeface="Montserrat"/>
-              </a:rPr>
-              <a:t>Ante la Comunidad Autónoma</a:t>
-            </a:r>
-          </a:p>
-          <a:p>
-            <a:pPr>
-              <a:spcAft>
-                <a:spcPts val="1100"/>
-              </a:spcAft>
-            </a:pPr>
-            <a:r>
-              <a:rPr sz="1600" b="1" i="0">
-                <a:solidFill>
-                  <a:srgbClr val="E8801A"/>
-                </a:solidFill>
-                <a:latin typeface="Montserrat"/>
-              </a:rPr>
-              <a:t>▸  </a:t>
-            </a:r>
-            <a:r>
-              <a:rPr sz="1600" b="0" i="0">
-                <a:solidFill>
-                  <a:srgbClr val="1B2330"/>
-                </a:solidFill>
-                <a:latin typeface="Montserrat"/>
-              </a:rPr>
-              <a:t>Antes de 30 días desde puesta en servicio</a:t>
-            </a:r>
-          </a:p>
-        </p:txBody>
-      </p:sp>
-      <p:sp>
-        <p:nvSpPr>
-          <p:cNvPr id="9" name="imgph" descr="IMGQ:person filling paperwork office desk"/>
+            <a:r>
+              <a:rPr sz="2400" b="1" i="0">
+                <a:solidFill>
+                  <a:srgbClr val="FFFFFF"/>
+                </a:solidFill>
+                <a:latin typeface="Montserrat"/>
+              </a:rPr>
+              <a:t>✔  RESPUESTA:  B</a:t>
+            </a:r>
+          </a:p>
+        </p:txBody>
+      </p:sp>
+      <p:sp>
+        <p:nvSpPr>
+          <p:cNvPr id="7" name="TextBox 6"/>
+          <p:cNvSpPr txBox="1"/>
+          <p:nvPr/>
+        </p:nvSpPr>
+        <p:spPr>
+          <a:xfrm>
+            <a:off x="822960" y="1417320"/>
+            <a:ext cx="10515600" cy="914400"/>
+          </a:xfrm>
+          <a:prstGeom prst="rect">
+            <a:avLst/>
+          </a:prstGeom>
+          <a:noFill/>
+        </p:spPr>
+        <p:txBody>
+          <a:bodyPr wrap="square">
+            <a:spAutoFit/>
+          </a:bodyPr>
+          <a:lstStyle/>
+          <a:p>
+            <a:r>
+              <a:rPr sz="1800" b="1" i="0">
+                <a:solidFill>
+                  <a:srgbClr val="64748B"/>
+                </a:solidFill>
+                <a:latin typeface="Montserrat"/>
+              </a:rPr>
+              <a:t>De los certificados de arranque, ¿cuál existe siempre en toda instalación?</a:t>
+            </a:r>
+          </a:p>
+        </p:txBody>
+      </p:sp>
+      <p:sp>
+        <p:nvSpPr>
+          <p:cNvPr id="8" name="Rounded Rectangle 7"/>
           <p:cNvSpPr/>
           <p:nvPr/>
         </p:nvSpPr>
         <p:spPr>
           <a:xfrm>
-            <a:off x="5806440" y="1051560"/>
-            <a:ext cx="5298947" cy="4629150"/>
+            <a:off x="822960" y="2514600"/>
+            <a:ext cx="10515600" cy="914400"/>
           </a:xfrm>
           <a:prstGeom prst="roundRect">
             <a:avLst/>
           </a:prstGeom>
           <a:solidFill>
-            <a:srgbClr val="F3F6FB"/>
+            <a:srgbClr val="E9F6EE"/>
           </a:solidFill>
           <a:ln w="12700">
             <a:solidFill>
-              <a:srgbClr val="C7D2E6"/>
+              <a:srgbClr val="1E8E4B"/>
             </a:solidFill>
           </a:ln>
           <a:effectLst/>
@@ -6698,14 +7549,14 @@
       </p:sp>
       <p:sp>
         <p:nvSpPr>
-          <p:cNvPr id="10" name="TextBox 9"/>
+          <p:cNvPr id="9" name="TextBox 8"/>
           <p:cNvSpPr txBox="1"/>
           <p:nvPr/>
         </p:nvSpPr>
         <p:spPr>
           <a:xfrm>
-            <a:off x="6080760" y="2726055"/>
-            <a:ext cx="4750307" cy="1280160"/>
+            <a:off x="1097280" y="2697480"/>
+            <a:ext cx="10058400" cy="640080"/>
           </a:xfrm>
           <a:prstGeom prst="rect">
             <a:avLst/>
@@ -6718,27 +7569,66 @@
           </a:bodyPr>
           <a:lstStyle/>
           <a:p>
-            <a:pPr algn="ctr"/>
-            <a:r>
-              <a:rPr sz="1400" b="1" i="0">
-                <a:solidFill>
-                  <a:srgbClr val="64748B"/>
-                </a:solidFill>
-                <a:latin typeface="Montserrat"/>
-              </a:rPr>
-              <a:t>IMAGEN REALISTA</a:t>
-            </a:r>
-          </a:p>
-          <a:p>
-            <a:pPr algn="ctr"/>
-            <a:r>
-              <a:rPr sz="1100" b="0" i="1">
-                <a:solidFill>
-                  <a:srgbClr val="64748B"/>
-                </a:solidFill>
-                <a:latin typeface="Montserrat"/>
-              </a:rPr>
-              <a:t>person filling paperwork office desk</a:t>
+            <a:r>
+              <a:rPr sz="1800" b="1" i="0">
+                <a:solidFill>
+                  <a:srgbClr val="1E8E4B"/>
+                </a:solidFill>
+                <a:latin typeface="Montserrat"/>
+              </a:rPr>
+              <a:t>B.  </a:t>
+            </a:r>
+            <a:r>
+              <a:rPr sz="1800" b="1" i="0">
+                <a:solidFill>
+                  <a:srgbClr val="1E2761"/>
+                </a:solidFill>
+                <a:latin typeface="Montserrat"/>
+              </a:rPr>
+              <a:t>El certificado de instalación</a:t>
+            </a:r>
+          </a:p>
+        </p:txBody>
+      </p:sp>
+      <p:sp>
+        <p:nvSpPr>
+          <p:cNvPr id="10" name="TextBox 9"/>
+          <p:cNvSpPr txBox="1"/>
+          <p:nvPr/>
+        </p:nvSpPr>
+        <p:spPr>
+          <a:xfrm>
+            <a:off x="822960" y="3749039"/>
+            <a:ext cx="10515600" cy="2194560"/>
+          </a:xfrm>
+          <a:prstGeom prst="rect">
+            <a:avLst/>
+          </a:prstGeom>
+          <a:noFill/>
+        </p:spPr>
+        <p:txBody>
+          <a:bodyPr wrap="square">
+            <a:spAutoFit/>
+          </a:bodyPr>
+          <a:lstStyle/>
+          <a:p>
+            <a:r>
+              <a:rPr sz="1500" b="1" i="0">
+                <a:solidFill>
+                  <a:srgbClr val="E8801A"/>
+                </a:solidFill>
+                <a:latin typeface="Montserrat"/>
+              </a:rPr>
+              <a:t>Por qué:  </a:t>
+            </a:r>
+            <a:r>
+              <a:rPr sz="1500" b="0" i="0">
+                <a:solidFill>
+                  <a:srgbClr val="1B2330"/>
+                </a:solidFill>
+                <a:latin typeface="Montserrat"/>
+              </a:rPr>
+              <a:t>El certificado de instalación lo firma quien ejecuta y no falta nunca; los otros aparecen solo si hay proyecto o si la ITC lo exige.</a:t>
             </a:r>
           </a:p>
         </p:txBody>
@@ -6748,6 +7638,18 @@
   <p:clrMapOvr>
     <a:masterClrMapping/>
   </p:clrMapOvr>
+  <mc:AlternateContent xmlns:mc="http://schemas.openxmlformats.org/markup-compatibility/2006">
+    <mc:Choice xmlns:p14="http://schemas.microsoft.com/office/powerpoint/2010/main" Requires="p14">
+      <p:transition spd="med" p14:dur="700">
+        <p14:cube dir="l"/>
+      </p:transition>
+    </mc:Choice>
+    <mc:Fallback>
+      <p:transition spd="med">
+        <p:push dir="l"/>
+      </p:transition>
+    </mc:Fallback>
+  </mc:AlternateContent>
 </p:sld>
 </file>
 
@@ -6835,7 +7737,7 @@
                 </a:solidFill>
                 <a:latin typeface="Montserrat"/>
               </a:rPr>
-              <a:t>014 / 018</a:t>
+              <a:t>014 / 024</a:t>
             </a:r>
           </a:p>
         </p:txBody>
@@ -6903,7 +7805,7 @@
                 </a:solidFill>
                 <a:latin typeface="Montserrat"/>
               </a:rPr>
-              <a:t>ARTÍCULO 5.8 · PUESTA EN MARCHA</a:t>
+              <a:t>ARTÍCULO 5.6 · PUESTA EN SERVICIO</a:t>
             </a:r>
           </a:p>
         </p:txBody>
@@ -6937,14 +7839,14 @@
                 </a:solidFill>
                 <a:latin typeface="Montserrat"/>
               </a:rPr>
-              <a:t>Arrancar el aparato, no solo encenderlo</a:t>
-            </a:r>
-          </a:p>
-        </p:txBody>
-      </p:sp>
-      <p:sp>
-        <p:nvSpPr>
-          <p:cNvPr id="7" name="Rounded Rectangle 6"/>
+              <a:t>La regla del año</a:t>
+            </a:r>
+          </a:p>
+        </p:txBody>
+      </p:sp>
+      <p:sp>
+        <p:nvSpPr>
+          <p:cNvPr id="7" name="Rectangle 6"/>
           <p:cNvSpPr/>
           <p:nvPr/>
         </p:nvSpPr>
@@ -6953,7 +7855,7 @@
             <a:off x="868680" y="1627632"/>
             <a:ext cx="2011680" cy="73152"/>
           </a:xfrm>
-          <a:prstGeom prst="roundRect">
+          <a:prstGeom prst="rect">
             <a:avLst/>
           </a:prstGeom>
           <a:solidFill>
@@ -6995,7 +7897,7 @@
         <p:spPr>
           <a:xfrm>
             <a:off x="822960" y="1965960"/>
-            <a:ext cx="4983480" cy="4206240"/>
+            <a:ext cx="5029200" cy="4206240"/>
           </a:xfrm>
           <a:prstGeom prst="rect">
             <a:avLst/>
@@ -7029,7 +7931,7 @@
                 </a:solidFill>
                 <a:latin typeface="Montserrat"/>
               </a:rPr>
-              <a:t>Según la ITC-ICG 08</a:t>
+              <a:t>Recibir copia de los certificados</a:t>
             </a:r>
           </a:p>
           <a:p>
@@ -7054,7 +7956,7 @@
                 </a:solidFill>
                 <a:latin typeface="Montserrat"/>
               </a:rPr>
-              <a:t>Verifica gas, presión y combustión</a:t>
+              <a:t>Suministro provisional para pruebas</a:t>
             </a:r>
           </a:p>
           <a:p>
@@ -7079,21 +7981,21 @@
                 </a:solidFill>
                 <a:latin typeface="Montserrat"/>
               </a:rPr>
-              <a:t>Certificado que se entrega al usuario</a:t>
-            </a:r>
-          </a:p>
-        </p:txBody>
-      </p:sp>
-      <p:sp>
-        <p:nvSpPr>
-          <p:cNvPr id="9" name="imgph" descr="IMGQ:technician adjusting gas boiler"/>
+              <a:t>Parada +1 año: se trata como nueva</a:t>
+            </a:r>
+          </a:p>
+        </p:txBody>
+      </p:sp>
+      <p:sp>
+        <p:nvSpPr>
+          <p:cNvPr id="9" name="imgph" descr="IMGQ:gas meter installation apartment wall"/>
           <p:cNvSpPr/>
           <p:nvPr/>
         </p:nvSpPr>
         <p:spPr>
           <a:xfrm>
-            <a:off x="5806440" y="1051560"/>
-            <a:ext cx="5298947" cy="4629150"/>
+            <a:off x="6080760" y="1965960"/>
+            <a:ext cx="5303520" cy="4572000"/>
           </a:xfrm>
           <a:prstGeom prst="roundRect">
             <a:avLst/>
@@ -7138,8 +8040,8 @@
         </p:nvSpPr>
         <p:spPr>
           <a:xfrm>
-            <a:off x="6080760" y="2726055"/>
-            <a:ext cx="4750307" cy="1280160"/>
+            <a:off x="6355080" y="3611880"/>
+            <a:ext cx="4754880" cy="1280160"/>
           </a:xfrm>
           <a:prstGeom prst="rect">
             <a:avLst/>
@@ -7160,7 +8062,7 @@
                 </a:solidFill>
                 <a:latin typeface="Montserrat"/>
               </a:rPr>
-              <a:t>IMAGEN REALISTA</a:t>
+              <a:t>IMAGEN</a:t>
             </a:r>
           </a:p>
           <a:p>
@@ -7172,7 +8074,7 @@
                 </a:solidFill>
                 <a:latin typeface="Montserrat"/>
               </a:rPr>
-              <a:t>technician adjusting gas boiler</a:t>
+              <a:t>gas meter installation apartment wall</a:t>
             </a:r>
           </a:p>
         </p:txBody>
@@ -7182,6 +8084,18 @@
   <p:clrMapOvr>
     <a:masterClrMapping/>
   </p:clrMapOvr>
+  <mc:AlternateContent xmlns:mc="http://schemas.openxmlformats.org/markup-compatibility/2006">
+    <mc:Choice xmlns:p14="http://schemas.microsoft.com/office/powerpoint/2010/main" Requires="p14">
+      <p:transition spd="med" p14:dur="700">
+        <p14:cube dir="r"/>
+      </p:transition>
+    </mc:Choice>
+    <mc:Fallback>
+      <p:transition spd="med">
+        <p:push dir="r"/>
+      </p:transition>
+    </mc:Fallback>
+  </mc:AlternateContent>
 </p:sld>
 </file>
 
@@ -7269,7 +8183,7 @@
                 </a:solidFill>
                 <a:latin typeface="Montserrat"/>
               </a:rPr>
-              <a:t>015 / 018</a:t>
+              <a:t>015 / 024</a:t>
             </a:r>
           </a:p>
         </p:txBody>
@@ -7310,84 +8224,16 @@
       </p:sp>
       <p:sp>
         <p:nvSpPr>
-          <p:cNvPr id="5" name="TextBox 4"/>
-          <p:cNvSpPr txBox="1"/>
-          <p:nvPr/>
-        </p:nvSpPr>
-        <p:spPr>
-          <a:xfrm>
-            <a:off x="822960" y="457200"/>
-            <a:ext cx="10058400" cy="365760"/>
-          </a:xfrm>
-          <a:prstGeom prst="rect">
-            <a:avLst/>
-          </a:prstGeom>
-          <a:noFill/>
-        </p:spPr>
-        <p:txBody>
-          <a:bodyPr wrap="square">
-            <a:spAutoFit/>
-          </a:bodyPr>
-          <a:lstStyle/>
-          <a:p>
-            <a:r>
-              <a:rPr sz="1300" b="1" i="0">
-                <a:solidFill>
-                  <a:srgbClr val="E8801A"/>
-                </a:solidFill>
-                <a:latin typeface="Montserrat"/>
-              </a:rPr>
-              <a:t>ARTÍCULO 5 · LOS TRES CERTIFICADOS</a:t>
-            </a:r>
-          </a:p>
-        </p:txBody>
-      </p:sp>
-      <p:sp>
-        <p:nvSpPr>
-          <p:cNvPr id="6" name="TextBox 5"/>
-          <p:cNvSpPr txBox="1"/>
-          <p:nvPr/>
-        </p:nvSpPr>
-        <p:spPr>
-          <a:xfrm>
-            <a:off x="822960" y="868680"/>
-            <a:ext cx="10515600" cy="914400"/>
-          </a:xfrm>
-          <a:prstGeom prst="rect">
-            <a:avLst/>
-          </a:prstGeom>
-          <a:noFill/>
-        </p:spPr>
-        <p:txBody>
-          <a:bodyPr wrap="square">
-            <a:spAutoFit/>
-          </a:bodyPr>
-          <a:lstStyle/>
-          <a:p>
-            <a:r>
-              <a:rPr sz="2800" b="1" i="0">
-                <a:solidFill>
-                  <a:srgbClr val="1E2761"/>
-                </a:solidFill>
-                <a:latin typeface="Montserrat"/>
-              </a:rPr>
-              <a:t>Quién firma cada papel</a:t>
-            </a:r>
-          </a:p>
-        </p:txBody>
-      </p:sp>
-      <p:sp>
-        <p:nvSpPr>
-          <p:cNvPr id="7" name="Rounded Rectangle 6"/>
+          <p:cNvPr id="5" name="Rectangle 4"/>
           <p:cNvSpPr/>
           <p:nvPr/>
         </p:nvSpPr>
         <p:spPr>
           <a:xfrm>
-            <a:off x="868680" y="1627632"/>
-            <a:ext cx="2011680" cy="73152"/>
-          </a:xfrm>
-          <a:prstGeom prst="roundRect">
+            <a:off x="0" y="0"/>
+            <a:ext cx="12191695" cy="1143000"/>
+          </a:xfrm>
+          <a:prstGeom prst="rect">
             <a:avLst/>
           </a:prstGeom>
           <a:solidFill>
@@ -7422,14 +8268,14 @@
       </p:sp>
       <p:sp>
         <p:nvSpPr>
-          <p:cNvPr id="8" name="TextBox 7"/>
+          <p:cNvPr id="6" name="TextBox 5"/>
           <p:cNvSpPr txBox="1"/>
           <p:nvPr/>
         </p:nvSpPr>
         <p:spPr>
           <a:xfrm>
-            <a:off x="822960" y="1965960"/>
-            <a:ext cx="4983480" cy="4206240"/>
+            <a:off x="822960" y="274320"/>
+            <a:ext cx="10515600" cy="640080"/>
           </a:xfrm>
           <a:prstGeom prst="rect">
             <a:avLst/>
@@ -7442,92 +8288,62 @@
           </a:bodyPr>
           <a:lstStyle/>
           <a:p>
-            <a:pPr>
-              <a:spcAft>
-                <a:spcPts val="1100"/>
-              </a:spcAft>
-            </a:pPr>
-            <a:r>
-              <a:rPr sz="1600" b="1" i="0">
-                <a:solidFill>
-                  <a:srgbClr val="E8801A"/>
-                </a:solidFill>
-                <a:latin typeface="Montserrat"/>
-              </a:rPr>
-              <a:t>▸  </a:t>
-            </a:r>
-            <a:r>
-              <a:rPr sz="1600" b="0" i="0">
-                <a:solidFill>
-                  <a:srgbClr val="1B2330"/>
-                </a:solidFill>
-                <a:latin typeface="Montserrat"/>
-              </a:rPr>
-              <a:t>Instalación: la empresa que ejecuta</a:t>
-            </a:r>
-          </a:p>
-          <a:p>
-            <a:pPr>
-              <a:spcAft>
-                <a:spcPts val="1100"/>
-              </a:spcAft>
-            </a:pPr>
-            <a:r>
-              <a:rPr sz="1600" b="1" i="0">
-                <a:solidFill>
-                  <a:srgbClr val="E8801A"/>
-                </a:solidFill>
-                <a:latin typeface="Montserrat"/>
-              </a:rPr>
-              <a:t>▸  </a:t>
-            </a:r>
-            <a:r>
-              <a:rPr sz="1600" b="0" i="0">
-                <a:solidFill>
-                  <a:srgbClr val="1B2330"/>
-                </a:solidFill>
-                <a:latin typeface="Montserrat"/>
-              </a:rPr>
-              <a:t>Dirección de obra: el director (si hay proyecto)</a:t>
-            </a:r>
-          </a:p>
-          <a:p>
-            <a:pPr>
-              <a:spcAft>
-                <a:spcPts val="1100"/>
-              </a:spcAft>
-            </a:pPr>
-            <a:r>
-              <a:rPr sz="1600" b="1" i="0">
-                <a:solidFill>
-                  <a:srgbClr val="E8801A"/>
-                </a:solidFill>
-                <a:latin typeface="Montserrat"/>
-              </a:rPr>
-              <a:t>▸  </a:t>
-            </a:r>
-            <a:r>
-              <a:rPr sz="1600" b="0" i="0">
-                <a:solidFill>
-                  <a:srgbClr val="1B2330"/>
-                </a:solidFill>
-                <a:latin typeface="Montserrat"/>
-              </a:rPr>
-              <a:t>Puesta en marcha: el agente, al usuario</a:t>
-            </a:r>
-          </a:p>
-        </p:txBody>
-      </p:sp>
-      <p:sp>
-        <p:nvSpPr>
-          <p:cNvPr id="9" name="imgph" descr="IMGQ:stack of official signed documents desk"/>
+            <a:r>
+              <a:rPr sz="2400" b="1" i="0">
+                <a:solidFill>
+                  <a:srgbClr val="FFFFFF"/>
+                </a:solidFill>
+                <a:latin typeface="Montserrat"/>
+              </a:rPr>
+              <a:t>⚡  PREGUNTA RÁPIDA</a:t>
+            </a:r>
+          </a:p>
+        </p:txBody>
+      </p:sp>
+      <p:sp>
+        <p:nvSpPr>
+          <p:cNvPr id="7" name="TextBox 6"/>
+          <p:cNvSpPr txBox="1"/>
+          <p:nvPr/>
+        </p:nvSpPr>
+        <p:spPr>
+          <a:xfrm>
+            <a:off x="822960" y="1508760"/>
+            <a:ext cx="10515600" cy="1371600"/>
+          </a:xfrm>
+          <a:prstGeom prst="rect">
+            <a:avLst/>
+          </a:prstGeom>
+          <a:noFill/>
+        </p:spPr>
+        <p:txBody>
+          <a:bodyPr wrap="square">
+            <a:spAutoFit/>
+          </a:bodyPr>
+          <a:lstStyle/>
+          <a:p>
+            <a:r>
+              <a:rPr sz="2400" b="1" i="0">
+                <a:solidFill>
+                  <a:srgbClr val="1E2761"/>
+                </a:solidFill>
+                <a:latin typeface="Montserrat"/>
+              </a:rPr>
+              <a:t>Una instalación lleva más de un año sin gas. ¿Cómo se procede para darle suministro?</a:t>
+            </a:r>
+          </a:p>
+        </p:txBody>
+      </p:sp>
+      <p:sp>
+        <p:nvSpPr>
+          <p:cNvPr id="8" name="Rounded Rectangle 7"/>
           <p:cNvSpPr/>
           <p:nvPr/>
         </p:nvSpPr>
         <p:spPr>
           <a:xfrm>
-            <a:off x="5806440" y="1051560"/>
-            <a:ext cx="5298947" cy="4629150"/>
+            <a:off x="822960" y="3291840"/>
+            <a:ext cx="4983480" cy="1143000"/>
           </a:xfrm>
           <a:prstGeom prst="roundRect">
             <a:avLst/>
@@ -7566,14 +8382,58 @@
       </p:sp>
       <p:sp>
         <p:nvSpPr>
+          <p:cNvPr id="9" name="Rectangle 8"/>
+          <p:cNvSpPr/>
+          <p:nvPr/>
+        </p:nvSpPr>
+        <p:spPr>
+          <a:xfrm>
+            <a:off x="822960" y="3291840"/>
+            <a:ext cx="640080" cy="1143000"/>
+          </a:xfrm>
+          <a:prstGeom prst="rect">
+            <a:avLst/>
+          </a:prstGeom>
+          <a:solidFill>
+            <a:srgbClr val="1E2761"/>
+          </a:solidFill>
+          <a:ln>
+            <a:noFill/>
+          </a:ln>
+          <a:effectLst/>
+        </p:spPr>
+        <p:style>
+          <a:lnRef idx="1">
+            <a:schemeClr val="accent1"/>
+          </a:lnRef>
+          <a:fillRef idx="3">
+            <a:schemeClr val="accent1"/>
+          </a:fillRef>
+          <a:effectRef idx="2">
+            <a:schemeClr val="accent1"/>
+          </a:effectRef>
+          <a:fontRef idx="minor">
+            <a:schemeClr val="lt1"/>
+          </a:fontRef>
+        </p:style>
+        <p:txBody>
+          <a:bodyPr rtlCol="0" anchor="ctr"/>
+          <a:lstStyle/>
+          <a:p>
+            <a:pPr algn="ctr"/>
+          </a:p>
+        </p:txBody>
+      </p:sp>
+      <p:sp>
+        <p:nvSpPr>
           <p:cNvPr id="10" name="TextBox 9"/>
           <p:cNvSpPr txBox="1"/>
           <p:nvPr/>
         </p:nvSpPr>
         <p:spPr>
           <a:xfrm>
-            <a:off x="6080760" y="2726055"/>
-            <a:ext cx="4750307" cy="1280160"/>
+            <a:off x="822960" y="3611880"/>
+            <a:ext cx="640080" cy="548640"/>
           </a:xfrm>
           <a:prstGeom prst="rect">
             <a:avLst/>
@@ -7588,25 +8448,524 @@
           <a:p>
             <a:pPr algn="ctr"/>
             <a:r>
-              <a:rPr sz="1400" b="1" i="0">
-                <a:solidFill>
-                  <a:srgbClr val="64748B"/>
-                </a:solidFill>
-                <a:latin typeface="Montserrat"/>
-              </a:rPr>
-              <a:t>IMAGEN REALISTA</a:t>
-            </a:r>
-          </a:p>
+              <a:rPr sz="2200" b="1" i="0">
+                <a:solidFill>
+                  <a:srgbClr val="FFFFFF"/>
+                </a:solidFill>
+                <a:latin typeface="Montserrat"/>
+              </a:rPr>
+              <a:t>A</a:t>
+            </a:r>
+          </a:p>
+        </p:txBody>
+      </p:sp>
+      <p:sp>
+        <p:nvSpPr>
+          <p:cNvPr id="11" name="TextBox 10"/>
+          <p:cNvSpPr txBox="1"/>
+          <p:nvPr/>
+        </p:nvSpPr>
+        <p:spPr>
+          <a:xfrm>
+            <a:off x="1600200" y="3474720"/>
+            <a:ext cx="4114800" cy="868680"/>
+          </a:xfrm>
+          <a:prstGeom prst="rect">
+            <a:avLst/>
+          </a:prstGeom>
+          <a:noFill/>
+        </p:spPr>
+        <p:txBody>
+          <a:bodyPr wrap="square">
+            <a:spAutoFit/>
+          </a:bodyPr>
+          <a:lstStyle/>
+          <a:p>
+            <a:r>
+              <a:rPr sz="1400" b="0" i="0">
+                <a:solidFill>
+                  <a:srgbClr val="1B2330"/>
+                </a:solidFill>
+                <a:latin typeface="Montserrat"/>
+              </a:rPr>
+              <a:t>Se reengancha directamente, sin ningún trámite</a:t>
+            </a:r>
+          </a:p>
+        </p:txBody>
+      </p:sp>
+      <p:sp>
+        <p:nvSpPr>
+          <p:cNvPr id="12" name="Rounded Rectangle 11"/>
+          <p:cNvSpPr/>
+          <p:nvPr/>
+        </p:nvSpPr>
+        <p:spPr>
+          <a:xfrm>
+            <a:off x="6355080" y="3291840"/>
+            <a:ext cx="4983480" cy="1143000"/>
+          </a:xfrm>
+          <a:prstGeom prst="roundRect">
+            <a:avLst/>
+          </a:prstGeom>
+          <a:solidFill>
+            <a:srgbClr val="F3F6FB"/>
+          </a:solidFill>
+          <a:ln w="12700">
+            <a:solidFill>
+              <a:srgbClr val="C7D2E6"/>
+            </a:solidFill>
+          </a:ln>
+          <a:effectLst/>
+        </p:spPr>
+        <p:style>
+          <a:lnRef idx="1">
+            <a:schemeClr val="accent1"/>
+          </a:lnRef>
+          <a:fillRef idx="3">
+            <a:schemeClr val="accent1"/>
+          </a:fillRef>
+          <a:effectRef idx="2">
+            <a:schemeClr val="accent1"/>
+          </a:effectRef>
+          <a:fontRef idx="minor">
+            <a:schemeClr val="lt1"/>
+          </a:fontRef>
+        </p:style>
+        <p:txBody>
+          <a:bodyPr rtlCol="0" anchor="ctr"/>
+          <a:lstStyle/>
           <a:p>
             <a:pPr algn="ctr"/>
-            <a:r>
-              <a:rPr sz="1100" b="0" i="1">
-                <a:solidFill>
-                  <a:srgbClr val="64748B"/>
-                </a:solidFill>
-                <a:latin typeface="Montserrat"/>
-              </a:rPr>
-              <a:t>stack of official signed documents desk</a:t>
+          </a:p>
+        </p:txBody>
+      </p:sp>
+      <p:sp>
+        <p:nvSpPr>
+          <p:cNvPr id="13" name="Rectangle 12"/>
+          <p:cNvSpPr/>
+          <p:nvPr/>
+        </p:nvSpPr>
+        <p:spPr>
+          <a:xfrm>
+            <a:off x="6355080" y="3291840"/>
+            <a:ext cx="640080" cy="1143000"/>
+          </a:xfrm>
+          <a:prstGeom prst="rect">
+            <a:avLst/>
+          </a:prstGeom>
+          <a:solidFill>
+            <a:srgbClr val="1E2761"/>
+          </a:solidFill>
+          <a:ln>
+            <a:noFill/>
+          </a:ln>
+          <a:effectLst/>
+        </p:spPr>
+        <p:style>
+          <a:lnRef idx="1">
+            <a:schemeClr val="accent1"/>
+          </a:lnRef>
+          <a:fillRef idx="3">
+            <a:schemeClr val="accent1"/>
+          </a:fillRef>
+          <a:effectRef idx="2">
+            <a:schemeClr val="accent1"/>
+          </a:effectRef>
+          <a:fontRef idx="minor">
+            <a:schemeClr val="lt1"/>
+          </a:fontRef>
+        </p:style>
+        <p:txBody>
+          <a:bodyPr rtlCol="0" anchor="ctr"/>
+          <a:lstStyle/>
+          <a:p>
+            <a:pPr algn="ctr"/>
+          </a:p>
+        </p:txBody>
+      </p:sp>
+      <p:sp>
+        <p:nvSpPr>
+          <p:cNvPr id="14" name="TextBox 13"/>
+          <p:cNvSpPr txBox="1"/>
+          <p:nvPr/>
+        </p:nvSpPr>
+        <p:spPr>
+          <a:xfrm>
+            <a:off x="6355080" y="3611880"/>
+            <a:ext cx="640080" cy="548640"/>
+          </a:xfrm>
+          <a:prstGeom prst="rect">
+            <a:avLst/>
+          </a:prstGeom>
+          <a:noFill/>
+        </p:spPr>
+        <p:txBody>
+          <a:bodyPr wrap="square">
+            <a:spAutoFit/>
+          </a:bodyPr>
+          <a:lstStyle/>
+          <a:p>
+            <a:pPr algn="ctr"/>
+            <a:r>
+              <a:rPr sz="2200" b="1" i="0">
+                <a:solidFill>
+                  <a:srgbClr val="FFFFFF"/>
+                </a:solidFill>
+                <a:latin typeface="Montserrat"/>
+              </a:rPr>
+              <a:t>B</a:t>
+            </a:r>
+          </a:p>
+        </p:txBody>
+      </p:sp>
+      <p:sp>
+        <p:nvSpPr>
+          <p:cNvPr id="15" name="TextBox 14"/>
+          <p:cNvSpPr txBox="1"/>
+          <p:nvPr/>
+        </p:nvSpPr>
+        <p:spPr>
+          <a:xfrm>
+            <a:off x="7132320" y="3474720"/>
+            <a:ext cx="4114800" cy="868680"/>
+          </a:xfrm>
+          <a:prstGeom prst="rect">
+            <a:avLst/>
+          </a:prstGeom>
+          <a:noFill/>
+        </p:spPr>
+        <p:txBody>
+          <a:bodyPr wrap="square">
+            <a:spAutoFit/>
+          </a:bodyPr>
+          <a:lstStyle/>
+          <a:p>
+            <a:r>
+              <a:rPr sz="1400" b="0" i="0">
+                <a:solidFill>
+                  <a:srgbClr val="1B2330"/>
+                </a:solidFill>
+                <a:latin typeface="Montserrat"/>
+              </a:rPr>
+              <a:t>Basta con una prueba de estanquidad rápida</a:t>
+            </a:r>
+          </a:p>
+        </p:txBody>
+      </p:sp>
+      <p:sp>
+        <p:nvSpPr>
+          <p:cNvPr id="16" name="Rounded Rectangle 15"/>
+          <p:cNvSpPr/>
+          <p:nvPr/>
+        </p:nvSpPr>
+        <p:spPr>
+          <a:xfrm>
+            <a:off x="822960" y="4617720"/>
+            <a:ext cx="4983480" cy="1143000"/>
+          </a:xfrm>
+          <a:prstGeom prst="roundRect">
+            <a:avLst/>
+          </a:prstGeom>
+          <a:solidFill>
+            <a:srgbClr val="F3F6FB"/>
+          </a:solidFill>
+          <a:ln w="12700">
+            <a:solidFill>
+              <a:srgbClr val="C7D2E6"/>
+            </a:solidFill>
+          </a:ln>
+          <a:effectLst/>
+        </p:spPr>
+        <p:style>
+          <a:lnRef idx="1">
+            <a:schemeClr val="accent1"/>
+          </a:lnRef>
+          <a:fillRef idx="3">
+            <a:schemeClr val="accent1"/>
+          </a:fillRef>
+          <a:effectRef idx="2">
+            <a:schemeClr val="accent1"/>
+          </a:effectRef>
+          <a:fontRef idx="minor">
+            <a:schemeClr val="lt1"/>
+          </a:fontRef>
+        </p:style>
+        <p:txBody>
+          <a:bodyPr rtlCol="0" anchor="ctr"/>
+          <a:lstStyle/>
+          <a:p>
+            <a:pPr algn="ctr"/>
+          </a:p>
+        </p:txBody>
+      </p:sp>
+      <p:sp>
+        <p:nvSpPr>
+          <p:cNvPr id="17" name="Rectangle 16"/>
+          <p:cNvSpPr/>
+          <p:nvPr/>
+        </p:nvSpPr>
+        <p:spPr>
+          <a:xfrm>
+            <a:off x="822960" y="4617720"/>
+            <a:ext cx="640080" cy="1143000"/>
+          </a:xfrm>
+          <a:prstGeom prst="rect">
+            <a:avLst/>
+          </a:prstGeom>
+          <a:solidFill>
+            <a:srgbClr val="1E2761"/>
+          </a:solidFill>
+          <a:ln>
+            <a:noFill/>
+          </a:ln>
+          <a:effectLst/>
+        </p:spPr>
+        <p:style>
+          <a:lnRef idx="1">
+            <a:schemeClr val="accent1"/>
+          </a:lnRef>
+          <a:fillRef idx="3">
+            <a:schemeClr val="accent1"/>
+          </a:fillRef>
+          <a:effectRef idx="2">
+            <a:schemeClr val="accent1"/>
+          </a:effectRef>
+          <a:fontRef idx="minor">
+            <a:schemeClr val="lt1"/>
+          </a:fontRef>
+        </p:style>
+        <p:txBody>
+          <a:bodyPr rtlCol="0" anchor="ctr"/>
+          <a:lstStyle/>
+          <a:p>
+            <a:pPr algn="ctr"/>
+          </a:p>
+        </p:txBody>
+      </p:sp>
+      <p:sp>
+        <p:nvSpPr>
+          <p:cNvPr id="18" name="TextBox 17"/>
+          <p:cNvSpPr txBox="1"/>
+          <p:nvPr/>
+        </p:nvSpPr>
+        <p:spPr>
+          <a:xfrm>
+            <a:off x="822960" y="4937760"/>
+            <a:ext cx="640080" cy="548640"/>
+          </a:xfrm>
+          <a:prstGeom prst="rect">
+            <a:avLst/>
+          </a:prstGeom>
+          <a:noFill/>
+        </p:spPr>
+        <p:txBody>
+          <a:bodyPr wrap="square">
+            <a:spAutoFit/>
+          </a:bodyPr>
+          <a:lstStyle/>
+          <a:p>
+            <a:pPr algn="ctr"/>
+            <a:r>
+              <a:rPr sz="2200" b="1" i="0">
+                <a:solidFill>
+                  <a:srgbClr val="FFFFFF"/>
+                </a:solidFill>
+                <a:latin typeface="Montserrat"/>
+              </a:rPr>
+              <a:t>C</a:t>
+            </a:r>
+          </a:p>
+        </p:txBody>
+      </p:sp>
+      <p:sp>
+        <p:nvSpPr>
+          <p:cNvPr id="19" name="TextBox 18"/>
+          <p:cNvSpPr txBox="1"/>
+          <p:nvPr/>
+        </p:nvSpPr>
+        <p:spPr>
+          <a:xfrm>
+            <a:off x="1600200" y="4800600"/>
+            <a:ext cx="4114800" cy="868680"/>
+          </a:xfrm>
+          <a:prstGeom prst="rect">
+            <a:avLst/>
+          </a:prstGeom>
+          <a:noFill/>
+        </p:spPr>
+        <p:txBody>
+          <a:bodyPr wrap="square">
+            <a:spAutoFit/>
+          </a:bodyPr>
+          <a:lstStyle/>
+          <a:p>
+            <a:r>
+              <a:rPr sz="1400" b="0" i="0">
+                <a:solidFill>
+                  <a:srgbClr val="1B2330"/>
+                </a:solidFill>
+                <a:latin typeface="Montserrat"/>
+              </a:rPr>
+              <a:t>Se trata como una instalación nueva, con papeles y pruebas</a:t>
+            </a:r>
+          </a:p>
+        </p:txBody>
+      </p:sp>
+      <p:sp>
+        <p:nvSpPr>
+          <p:cNvPr id="20" name="Rounded Rectangle 19"/>
+          <p:cNvSpPr/>
+          <p:nvPr/>
+        </p:nvSpPr>
+        <p:spPr>
+          <a:xfrm>
+            <a:off x="6355080" y="4617720"/>
+            <a:ext cx="4983480" cy="1143000"/>
+          </a:xfrm>
+          <a:prstGeom prst="roundRect">
+            <a:avLst/>
+          </a:prstGeom>
+          <a:solidFill>
+            <a:srgbClr val="F3F6FB"/>
+          </a:solidFill>
+          <a:ln w="12700">
+            <a:solidFill>
+              <a:srgbClr val="C7D2E6"/>
+            </a:solidFill>
+          </a:ln>
+          <a:effectLst/>
+        </p:spPr>
+        <p:style>
+          <a:lnRef idx="1">
+            <a:schemeClr val="accent1"/>
+          </a:lnRef>
+          <a:fillRef idx="3">
+            <a:schemeClr val="accent1"/>
+          </a:fillRef>
+          <a:effectRef idx="2">
+            <a:schemeClr val="accent1"/>
+          </a:effectRef>
+          <a:fontRef idx="minor">
+            <a:schemeClr val="lt1"/>
+          </a:fontRef>
+        </p:style>
+        <p:txBody>
+          <a:bodyPr rtlCol="0" anchor="ctr"/>
+          <a:lstStyle/>
+          <a:p>
+            <a:pPr algn="ctr"/>
+          </a:p>
+        </p:txBody>
+      </p:sp>
+      <p:sp>
+        <p:nvSpPr>
+          <p:cNvPr id="21" name="Rectangle 20"/>
+          <p:cNvSpPr/>
+          <p:nvPr/>
+        </p:nvSpPr>
+        <p:spPr>
+          <a:xfrm>
+            <a:off x="6355080" y="4617720"/>
+            <a:ext cx="640080" cy="1143000"/>
+          </a:xfrm>
+          <a:prstGeom prst="rect">
+            <a:avLst/>
+          </a:prstGeom>
+          <a:solidFill>
+            <a:srgbClr val="1E2761"/>
+          </a:solidFill>
+          <a:ln>
+            <a:noFill/>
+          </a:ln>
+          <a:effectLst/>
+        </p:spPr>
+        <p:style>
+          <a:lnRef idx="1">
+            <a:schemeClr val="accent1"/>
+          </a:lnRef>
+          <a:fillRef idx="3">
+            <a:schemeClr val="accent1"/>
+          </a:fillRef>
+          <a:effectRef idx="2">
+            <a:schemeClr val="accent1"/>
+          </a:effectRef>
+          <a:fontRef idx="minor">
+            <a:schemeClr val="lt1"/>
+          </a:fontRef>
+        </p:style>
+        <p:txBody>
+          <a:bodyPr rtlCol="0" anchor="ctr"/>
+          <a:lstStyle/>
+          <a:p>
+            <a:pPr algn="ctr"/>
+          </a:p>
+        </p:txBody>
+      </p:sp>
+      <p:sp>
+        <p:nvSpPr>
+          <p:cNvPr id="22" name="TextBox 21"/>
+          <p:cNvSpPr txBox="1"/>
+          <p:nvPr/>
+        </p:nvSpPr>
+        <p:spPr>
+          <a:xfrm>
+            <a:off x="6355080" y="4937760"/>
+            <a:ext cx="640080" cy="548640"/>
+          </a:xfrm>
+          <a:prstGeom prst="rect">
+            <a:avLst/>
+          </a:prstGeom>
+          <a:noFill/>
+        </p:spPr>
+        <p:txBody>
+          <a:bodyPr wrap="square">
+            <a:spAutoFit/>
+          </a:bodyPr>
+          <a:lstStyle/>
+          <a:p>
+            <a:pPr algn="ctr"/>
+            <a:r>
+              <a:rPr sz="2200" b="1" i="0">
+                <a:solidFill>
+                  <a:srgbClr val="FFFFFF"/>
+                </a:solidFill>
+                <a:latin typeface="Montserrat"/>
+              </a:rPr>
+              <a:t>D</a:t>
+            </a:r>
+          </a:p>
+        </p:txBody>
+      </p:sp>
+      <p:sp>
+        <p:nvSpPr>
+          <p:cNvPr id="23" name="TextBox 22"/>
+          <p:cNvSpPr txBox="1"/>
+          <p:nvPr/>
+        </p:nvSpPr>
+        <p:spPr>
+          <a:xfrm>
+            <a:off x="7132320" y="4800600"/>
+            <a:ext cx="4114800" cy="868680"/>
+          </a:xfrm>
+          <a:prstGeom prst="rect">
+            <a:avLst/>
+          </a:prstGeom>
+          <a:noFill/>
+        </p:spPr>
+        <p:txBody>
+          <a:bodyPr wrap="square">
+            <a:spAutoFit/>
+          </a:bodyPr>
+          <a:lstStyle/>
+          <a:p>
+            <a:r>
+              <a:rPr sz="1400" b="0" i="0">
+                <a:solidFill>
+                  <a:srgbClr val="1B2330"/>
+                </a:solidFill>
+                <a:latin typeface="Montserrat"/>
+              </a:rPr>
+              <a:t>Solo hace falta un aviso del suministrador</a:t>
             </a:r>
           </a:p>
         </p:txBody>
@@ -7616,6 +8975,18 @@
   <p:clrMapOvr>
     <a:masterClrMapping/>
   </p:clrMapOvr>
+  <mc:AlternateContent xmlns:mc="http://schemas.openxmlformats.org/markup-compatibility/2006">
+    <mc:Choice xmlns:p14="http://schemas.microsoft.com/office/powerpoint/2010/main" Requires="p14">
+      <p:transition spd="med" p14:dur="700">
+        <p14:cube dir="l"/>
+      </p:transition>
+    </mc:Choice>
+    <mc:Fallback>
+      <p:transition spd="med">
+        <p:push dir="l"/>
+      </p:transition>
+    </mc:Fallback>
+  </mc:AlternateContent>
 </p:sld>
 </file>
 
@@ -7703,7 +9074,7 @@
                 </a:solidFill>
                 <a:latin typeface="Montserrat"/>
               </a:rPr>
-              <a:t>016 / 018</a:t>
+              <a:t>016 / 024</a:t>
             </a:r>
           </a:p>
         </p:txBody>
@@ -7744,88 +9115,20 @@
       </p:sp>
       <p:sp>
         <p:nvSpPr>
-          <p:cNvPr id="5" name="TextBox 4"/>
-          <p:cNvSpPr txBox="1"/>
-          <p:nvPr/>
-        </p:nvSpPr>
-        <p:spPr>
-          <a:xfrm>
-            <a:off x="822960" y="457200"/>
-            <a:ext cx="10058400" cy="365760"/>
-          </a:xfrm>
-          <a:prstGeom prst="rect">
-            <a:avLst/>
-          </a:prstGeom>
-          <a:noFill/>
-        </p:spPr>
-        <p:txBody>
-          <a:bodyPr wrap="square">
-            <a:spAutoFit/>
-          </a:bodyPr>
-          <a:lstStyle/>
-          <a:p>
-            <a:r>
-              <a:rPr sz="1300" b="1" i="0">
-                <a:solidFill>
-                  <a:srgbClr val="E8801A"/>
-                </a:solidFill>
-                <a:latin typeface="Montserrat"/>
-              </a:rPr>
-              <a:t>ARTÍCULO 6 · INFORMACIÓN AL USUARIO</a:t>
-            </a:r>
-          </a:p>
-        </p:txBody>
-      </p:sp>
-      <p:sp>
-        <p:nvSpPr>
-          <p:cNvPr id="6" name="TextBox 5"/>
-          <p:cNvSpPr txBox="1"/>
-          <p:nvPr/>
-        </p:nvSpPr>
-        <p:spPr>
-          <a:xfrm>
-            <a:off x="822960" y="868680"/>
-            <a:ext cx="10515600" cy="914400"/>
-          </a:xfrm>
-          <a:prstGeom prst="rect">
-            <a:avLst/>
-          </a:prstGeom>
-          <a:noFill/>
-        </p:spPr>
-        <p:txBody>
-          <a:bodyPr wrap="square">
-            <a:spAutoFit/>
-          </a:bodyPr>
-          <a:lstStyle/>
-          <a:p>
-            <a:r>
-              <a:rPr sz="2800" b="1" i="0">
-                <a:solidFill>
-                  <a:srgbClr val="1E2761"/>
-                </a:solidFill>
-                <a:latin typeface="Montserrat"/>
-              </a:rPr>
-              <a:t>El croquis y el recordatorio bienal</a:t>
-            </a:r>
-          </a:p>
-        </p:txBody>
-      </p:sp>
-      <p:sp>
-        <p:nvSpPr>
-          <p:cNvPr id="7" name="Rounded Rectangle 6"/>
+          <p:cNvPr id="5" name="Rectangle 4"/>
           <p:cNvSpPr/>
           <p:nvPr/>
         </p:nvSpPr>
         <p:spPr>
           <a:xfrm>
-            <a:off x="868680" y="1627632"/>
-            <a:ext cx="2011680" cy="73152"/>
-          </a:xfrm>
-          <a:prstGeom prst="roundRect">
+            <a:off x="0" y="0"/>
+            <a:ext cx="12191695" cy="1143000"/>
+          </a:xfrm>
+          <a:prstGeom prst="rect">
             <a:avLst/>
           </a:prstGeom>
           <a:solidFill>
-            <a:srgbClr val="E8801A"/>
+            <a:srgbClr val="1E8E4B"/>
           </a:solidFill>
           <a:ln>
             <a:noFill/>
@@ -7856,14 +9159,14 @@
       </p:sp>
       <p:sp>
         <p:nvSpPr>
-          <p:cNvPr id="8" name="TextBox 7"/>
+          <p:cNvPr id="6" name="TextBox 5"/>
           <p:cNvSpPr txBox="1"/>
           <p:nvPr/>
         </p:nvSpPr>
         <p:spPr>
           <a:xfrm>
-            <a:off x="822960" y="1965960"/>
-            <a:ext cx="4983480" cy="4206240"/>
+            <a:off x="822960" y="274320"/>
+            <a:ext cx="10515600" cy="640080"/>
           </a:xfrm>
           <a:prstGeom prst="rect">
             <a:avLst/>
@@ -7876,102 +9179,72 @@
           </a:bodyPr>
           <a:lstStyle/>
           <a:p>
-            <a:pPr>
-              <a:spcAft>
-                <a:spcPts val="1100"/>
-              </a:spcAft>
-            </a:pPr>
-            <a:r>
-              <a:rPr sz="1600" b="1" i="0">
-                <a:solidFill>
-                  <a:srgbClr val="E8801A"/>
-                </a:solidFill>
-                <a:latin typeface="Montserrat"/>
-              </a:rPr>
-              <a:t>▸  </a:t>
-            </a:r>
-            <a:r>
-              <a:rPr sz="1600" b="0" i="0">
-                <a:solidFill>
-                  <a:srgbClr val="1B2330"/>
-                </a:solidFill>
-                <a:latin typeface="Montserrat"/>
-              </a:rPr>
-              <a:t>Instrucciones de uso y mantenimiento</a:t>
-            </a:r>
-          </a:p>
-          <a:p>
-            <a:pPr>
-              <a:spcAft>
-                <a:spcPts val="1100"/>
-              </a:spcAft>
-            </a:pPr>
-            <a:r>
-              <a:rPr sz="1600" b="1" i="0">
-                <a:solidFill>
-                  <a:srgbClr val="E8801A"/>
-                </a:solidFill>
-                <a:latin typeface="Montserrat"/>
-              </a:rPr>
-              <a:t>▸  </a:t>
-            </a:r>
-            <a:r>
-              <a:rPr sz="1600" b="0" i="0">
-                <a:solidFill>
-                  <a:srgbClr val="1B2330"/>
-                </a:solidFill>
-                <a:latin typeface="Montserrat"/>
-              </a:rPr>
-              <a:t>Croquis del trazado, anexo al boletín</a:t>
-            </a:r>
-          </a:p>
-          <a:p>
-            <a:pPr>
-              <a:spcAft>
-                <a:spcPts val="1100"/>
-              </a:spcAft>
-            </a:pPr>
-            <a:r>
-              <a:rPr sz="1600" b="1" i="0">
-                <a:solidFill>
-                  <a:srgbClr val="E8801A"/>
-                </a:solidFill>
-                <a:latin typeface="Montserrat"/>
-              </a:rPr>
-              <a:t>▸  </a:t>
-            </a:r>
-            <a:r>
-              <a:rPr sz="1600" b="0" i="0">
-                <a:solidFill>
-                  <a:srgbClr val="1B2330"/>
-                </a:solidFill>
-                <a:latin typeface="Montserrat"/>
-              </a:rPr>
-              <a:t>Suministrador recuerda, mínimo cada dos años</a:t>
-            </a:r>
-          </a:p>
-        </p:txBody>
-      </p:sp>
-      <p:sp>
-        <p:nvSpPr>
-          <p:cNvPr id="9" name="imgph" descr="IMGQ:hand drawn house pipe sketch plan"/>
+            <a:r>
+              <a:rPr sz="2400" b="1" i="0">
+                <a:solidFill>
+                  <a:srgbClr val="FFFFFF"/>
+                </a:solidFill>
+                <a:latin typeface="Montserrat"/>
+              </a:rPr>
+              <a:t>✔  RESPUESTA:  C</a:t>
+            </a:r>
+          </a:p>
+        </p:txBody>
+      </p:sp>
+      <p:sp>
+        <p:nvSpPr>
+          <p:cNvPr id="7" name="TextBox 6"/>
+          <p:cNvSpPr txBox="1"/>
+          <p:nvPr/>
+        </p:nvSpPr>
+        <p:spPr>
+          <a:xfrm>
+            <a:off x="822960" y="1417320"/>
+            <a:ext cx="10515600" cy="914400"/>
+          </a:xfrm>
+          <a:prstGeom prst="rect">
+            <a:avLst/>
+          </a:prstGeom>
+          <a:noFill/>
+        </p:spPr>
+        <p:txBody>
+          <a:bodyPr wrap="square">
+            <a:spAutoFit/>
+          </a:bodyPr>
+          <a:lstStyle/>
+          <a:p>
+            <a:r>
+              <a:rPr sz="1800" b="1" i="0">
+                <a:solidFill>
+                  <a:srgbClr val="64748B"/>
+                </a:solidFill>
+                <a:latin typeface="Montserrat"/>
+              </a:rPr>
+              <a:t>Una instalación lleva más de un año sin gas. ¿Cómo se procede para darle suministro?</a:t>
+            </a:r>
+          </a:p>
+        </p:txBody>
+      </p:sp>
+      <p:sp>
+        <p:nvSpPr>
+          <p:cNvPr id="8" name="Rounded Rectangle 7"/>
           <p:cNvSpPr/>
           <p:nvPr/>
         </p:nvSpPr>
         <p:spPr>
           <a:xfrm>
-            <a:off x="5806440" y="1051560"/>
-            <a:ext cx="5298947" cy="4629150"/>
+            <a:off x="822960" y="2514600"/>
+            <a:ext cx="10515600" cy="914400"/>
           </a:xfrm>
           <a:prstGeom prst="roundRect">
             <a:avLst/>
           </a:prstGeom>
           <a:solidFill>
-            <a:srgbClr val="F3F6FB"/>
+            <a:srgbClr val="E9F6EE"/>
           </a:solidFill>
           <a:ln w="12700">
             <a:solidFill>
-              <a:srgbClr val="C7D2E6"/>
+              <a:srgbClr val="1E8E4B"/>
             </a:solidFill>
           </a:ln>
           <a:effectLst/>
@@ -8000,14 +9273,14 @@
       </p:sp>
       <p:sp>
         <p:nvSpPr>
-          <p:cNvPr id="10" name="TextBox 9"/>
+          <p:cNvPr id="9" name="TextBox 8"/>
           <p:cNvSpPr txBox="1"/>
           <p:nvPr/>
         </p:nvSpPr>
         <p:spPr>
           <a:xfrm>
-            <a:off x="6080760" y="2726055"/>
-            <a:ext cx="4750307" cy="1280160"/>
+            <a:off x="1097280" y="2697480"/>
+            <a:ext cx="10058400" cy="640080"/>
           </a:xfrm>
           <a:prstGeom prst="rect">
             <a:avLst/>
@@ -8020,27 +9293,66 @@
           </a:bodyPr>
           <a:lstStyle/>
           <a:p>
-            <a:pPr algn="ctr"/>
-            <a:r>
-              <a:rPr sz="1400" b="1" i="0">
-                <a:solidFill>
-                  <a:srgbClr val="64748B"/>
-                </a:solidFill>
-                <a:latin typeface="Montserrat"/>
-              </a:rPr>
-              <a:t>IMAGEN REALISTA</a:t>
-            </a:r>
-          </a:p>
-          <a:p>
-            <a:pPr algn="ctr"/>
-            <a:r>
-              <a:rPr sz="1100" b="0" i="1">
-                <a:solidFill>
-                  <a:srgbClr val="64748B"/>
-                </a:solidFill>
-                <a:latin typeface="Montserrat"/>
-              </a:rPr>
-              <a:t>hand drawn house pipe sketch plan</a:t>
+            <a:r>
+              <a:rPr sz="1800" b="1" i="0">
+                <a:solidFill>
+                  <a:srgbClr val="1E8E4B"/>
+                </a:solidFill>
+                <a:latin typeface="Montserrat"/>
+              </a:rPr>
+              <a:t>C.  </a:t>
+            </a:r>
+            <a:r>
+              <a:rPr sz="1800" b="1" i="0">
+                <a:solidFill>
+                  <a:srgbClr val="1E2761"/>
+                </a:solidFill>
+                <a:latin typeface="Montserrat"/>
+              </a:rPr>
+              <a:t>Se trata como una instalación nueva, con papeles y pruebas</a:t>
+            </a:r>
+          </a:p>
+        </p:txBody>
+      </p:sp>
+      <p:sp>
+        <p:nvSpPr>
+          <p:cNvPr id="10" name="TextBox 9"/>
+          <p:cNvSpPr txBox="1"/>
+          <p:nvPr/>
+        </p:nvSpPr>
+        <p:spPr>
+          <a:xfrm>
+            <a:off x="822960" y="3749039"/>
+            <a:ext cx="10515600" cy="2194560"/>
+          </a:xfrm>
+          <a:prstGeom prst="rect">
+            <a:avLst/>
+          </a:prstGeom>
+          <a:noFill/>
+        </p:spPr>
+        <p:txBody>
+          <a:bodyPr wrap="square">
+            <a:spAutoFit/>
+          </a:bodyPr>
+          <a:lstStyle/>
+          <a:p>
+            <a:r>
+              <a:rPr sz="1500" b="1" i="0">
+                <a:solidFill>
+                  <a:srgbClr val="E8801A"/>
+                </a:solidFill>
+                <a:latin typeface="Montserrat"/>
+              </a:rPr>
+              <a:t>Por qué:  </a:t>
+            </a:r>
+            <a:r>
+              <a:rPr sz="1500" b="0" i="0">
+                <a:solidFill>
+                  <a:srgbClr val="1B2330"/>
+                </a:solidFill>
+                <a:latin typeface="Montserrat"/>
+              </a:rPr>
+              <a:t>Parada más de un año, la instalación se trata como nueva: documentación y pruebas incluidas.</a:t>
             </a:r>
           </a:p>
         </p:txBody>
@@ -8050,6 +9362,18 @@
   <p:clrMapOvr>
     <a:masterClrMapping/>
   </p:clrMapOvr>
+  <mc:AlternateContent xmlns:mc="http://schemas.openxmlformats.org/markup-compatibility/2006">
+    <mc:Choice xmlns:p14="http://schemas.microsoft.com/office/powerpoint/2010/main" Requires="p14">
+      <p:transition spd="med" p14:dur="700">
+        <p14:cube dir="r"/>
+      </p:transition>
+    </mc:Choice>
+    <mc:Fallback>
+      <p:transition spd="med">
+        <p:push dir="r"/>
+      </p:transition>
+    </mc:Fallback>
+  </mc:AlternateContent>
 </p:sld>
 </file>
 
@@ -8137,7 +9461,7 @@
                 </a:solidFill>
                 <a:latin typeface="Montserrat"/>
               </a:rPr>
-              <a:t>017 / 018</a:t>
+              <a:t>017 / 024</a:t>
             </a:r>
           </a:p>
         </p:txBody>
@@ -8205,7 +9529,7 @@
                 </a:solidFill>
                 <a:latin typeface="Montserrat"/>
               </a:rPr>
-              <a:t>REPASO RELÁMPAGO</a:t>
+              <a:t>ARTÍCULO 5.7 · COMUNICACIÓN</a:t>
             </a:r>
           </a:p>
         </p:txBody>
@@ -8239,14 +9563,14 @@
                 </a:solidFill>
                 <a:latin typeface="Montserrat"/>
               </a:rPr>
-              <a:t>Fíjalo en treinta segundos</a:t>
-            </a:r>
-          </a:p>
-        </p:txBody>
-      </p:sp>
-      <p:sp>
-        <p:nvSpPr>
-          <p:cNvPr id="7" name="Rounded Rectangle 6"/>
+              <a:t>Treinta días y lo presenta el titular</a:t>
+            </a:r>
+          </a:p>
+        </p:txBody>
+      </p:sp>
+      <p:sp>
+        <p:nvSpPr>
+          <p:cNvPr id="7" name="Rectangle 6"/>
           <p:cNvSpPr/>
           <p:nvPr/>
         </p:nvSpPr>
@@ -8255,7 +9579,7 @@
             <a:off x="868680" y="1627632"/>
             <a:ext cx="2011680" cy="73152"/>
           </a:xfrm>
-          <a:prstGeom prst="roundRect">
+          <a:prstGeom prst="rect">
             <a:avLst/>
           </a:prstGeom>
           <a:solidFill>
@@ -8296,8 +9620,8 @@
         </p:nvSpPr>
         <p:spPr>
           <a:xfrm>
-            <a:off x="822960" y="1965960"/>
-            <a:ext cx="4983480" cy="4206240"/>
+            <a:off x="6355080" y="1965960"/>
+            <a:ext cx="5029200" cy="4206240"/>
           </a:xfrm>
           <a:prstGeom prst="rect">
             <a:avLst/>
@@ -8331,7 +9655,7 @@
                 </a:solidFill>
                 <a:latin typeface="Montserrat"/>
               </a:rPr>
-              <a:t>Ocho pasos: del diseño al arranque</a:t>
+              <a:t>El titular comunica, no la instaladora</a:t>
             </a:r>
           </a:p>
           <a:p>
@@ -8356,7 +9680,7 @@
                 </a:solidFill>
                 <a:latin typeface="Montserrat"/>
               </a:rPr>
-              <a:t>Boletín siempre; los otros dos, a veces</a:t>
+              <a:t>Ante la Comunidad Autónoma</a:t>
             </a:r>
           </a:p>
           <a:p>
@@ -8381,46 +9705,21 @@
                 </a:solidFill>
                 <a:latin typeface="Montserrat"/>
               </a:rPr>
-              <a:t>Titular comunica en 30 días</a:t>
-            </a:r>
-          </a:p>
-          <a:p>
-            <a:pPr>
-              <a:spcAft>
-                <a:spcPts val="1100"/>
-              </a:spcAft>
-            </a:pPr>
-            <a:r>
-              <a:rPr sz="1600" b="1" i="0">
-                <a:solidFill>
-                  <a:srgbClr val="E8801A"/>
-                </a:solidFill>
-                <a:latin typeface="Montserrat"/>
-              </a:rPr>
-              <a:t>▸  </a:t>
-            </a:r>
-            <a:r>
-              <a:rPr sz="1600" b="0" i="0">
-                <a:solidFill>
-                  <a:srgbClr val="1B2330"/>
-                </a:solidFill>
-                <a:latin typeface="Montserrat"/>
-              </a:rPr>
-              <a:t>Parada +1 año = como nueva</a:t>
-            </a:r>
-          </a:p>
-        </p:txBody>
-      </p:sp>
-      <p:sp>
-        <p:nvSpPr>
-          <p:cNvPr id="9" name="imgph" descr="IMGQ:gas installation checklist clipboard"/>
+              <a:t>Antes de 30 días desde puesta en servicio</a:t>
+            </a:r>
+          </a:p>
+        </p:txBody>
+      </p:sp>
+      <p:sp>
+        <p:nvSpPr>
+          <p:cNvPr id="9" name="imgph" descr="IMGQ:person filling paperwork office desk"/>
           <p:cNvSpPr/>
           <p:nvPr/>
         </p:nvSpPr>
         <p:spPr>
           <a:xfrm>
-            <a:off x="5806440" y="1051560"/>
-            <a:ext cx="5298947" cy="4629150"/>
+            <a:off x="822960" y="1965960"/>
+            <a:ext cx="5303520" cy="4572000"/>
           </a:xfrm>
           <a:prstGeom prst="roundRect">
             <a:avLst/>
@@ -8465,8 +9764,8 @@
         </p:nvSpPr>
         <p:spPr>
           <a:xfrm>
-            <a:off x="6080760" y="2726055"/>
-            <a:ext cx="4750307" cy="1280160"/>
+            <a:off x="1097280" y="3611880"/>
+            <a:ext cx="4754880" cy="1280160"/>
           </a:xfrm>
           <a:prstGeom prst="rect">
             <a:avLst/>
@@ -8487,7 +9786,7 @@
                 </a:solidFill>
                 <a:latin typeface="Montserrat"/>
               </a:rPr>
-              <a:t>IMAGEN REALISTA</a:t>
+              <a:t>IMAGEN</a:t>
             </a:r>
           </a:p>
           <a:p>
@@ -8499,7 +9798,7 @@
                 </a:solidFill>
                 <a:latin typeface="Montserrat"/>
               </a:rPr>
-              <a:t>gas installation checklist clipboard</a:t>
+              <a:t>person filling paperwork office desk</a:t>
             </a:r>
           </a:p>
         </p:txBody>
@@ -8509,6 +9808,18 @@
   <p:clrMapOvr>
     <a:masterClrMapping/>
   </p:clrMapOvr>
+  <mc:AlternateContent xmlns:mc="http://schemas.openxmlformats.org/markup-compatibility/2006">
+    <mc:Choice xmlns:p14="http://schemas.microsoft.com/office/powerpoint/2010/main" Requires="p14">
+      <p:transition spd="med" p14:dur="700">
+        <p14:cube dir="l"/>
+      </p:transition>
+    </mc:Choice>
+    <mc:Fallback>
+      <p:transition spd="med">
+        <p:push dir="l"/>
+      </p:transition>
+    </mc:Fallback>
+  </mc:AlternateContent>
 </p:sld>
 </file>
 
@@ -8537,7 +9848,7 @@
             <a:avLst/>
           </a:prstGeom>
           <a:solidFill>
-            <a:srgbClr val="1E2761"/>
+            <a:srgbClr val="FFFFFF"/>
           </a:solidFill>
           <a:ln>
             <a:noFill/>
@@ -8574,8 +9885,8 @@
         </p:nvSpPr>
         <p:spPr>
           <a:xfrm>
-            <a:off x="822960" y="640080"/>
-            <a:ext cx="10515600" cy="457200"/>
+            <a:off x="10607040" y="320040"/>
+            <a:ext cx="1371600" cy="365760"/>
           </a:xfrm>
           <a:prstGeom prst="rect">
             <a:avLst/>
@@ -8588,30 +9899,65 @@
           </a:bodyPr>
           <a:lstStyle/>
           <a:p>
-            <a:r>
-              <a:rPr sz="1400" b="1" i="0">
-                <a:solidFill>
-                  <a:srgbClr val="F4A24C"/>
-                </a:solidFill>
-                <a:latin typeface="Montserrat"/>
-              </a:rPr>
-              <a:t>LO QUE YA DOMINAS</a:t>
-            </a:r>
-          </a:p>
-        </p:txBody>
-      </p:sp>
-      <p:sp>
-        <p:nvSpPr>
-          <p:cNvPr id="4" name="Rounded Rectangle 3"/>
+            <a:pPr algn="r"/>
+            <a:r>
+              <a:rPr sz="1000" b="1" i="0">
+                <a:solidFill>
+                  <a:srgbClr val="64748B"/>
+                </a:solidFill>
+                <a:latin typeface="Montserrat"/>
+              </a:rPr>
+              <a:t>018 / 024</a:t>
+            </a:r>
+          </a:p>
+        </p:txBody>
+      </p:sp>
+      <p:sp>
+        <p:nvSpPr>
+          <p:cNvPr id="4" name="TextBox 3"/>
+          <p:cNvSpPr txBox="1"/>
+          <p:nvPr/>
+        </p:nvSpPr>
+        <p:spPr>
+          <a:xfrm>
+            <a:off x="457200" y="6419088"/>
+            <a:ext cx="8229600" cy="365760"/>
+          </a:xfrm>
+          <a:prstGeom prst="rect">
+            <a:avLst/>
+          </a:prstGeom>
+          <a:noFill/>
+        </p:spPr>
+        <p:txBody>
+          <a:bodyPr wrap="square">
+            <a:spAutoFit/>
+          </a:bodyPr>
+          <a:lstStyle/>
+          <a:p>
+            <a:r>
+              <a:rPr sz="900" b="0" i="0">
+                <a:solidFill>
+                  <a:srgbClr val="64748B"/>
+                </a:solidFill>
+                <a:latin typeface="Montserrat"/>
+              </a:rPr>
+              <a:t>Curso Gas B · Tema 00 · El Reglamento de Gas</a:t>
+            </a:r>
+          </a:p>
+        </p:txBody>
+      </p:sp>
+      <p:sp>
+        <p:nvSpPr>
+          <p:cNvPr id="5" name="Rectangle 4"/>
           <p:cNvSpPr/>
           <p:nvPr/>
         </p:nvSpPr>
         <p:spPr>
           <a:xfrm>
-            <a:off x="868680" y="1051560"/>
-            <a:ext cx="1463040" cy="82296"/>
-          </a:xfrm>
-          <a:prstGeom prst="roundRect">
+            <a:off x="0" y="0"/>
+            <a:ext cx="12191695" cy="1143000"/>
+          </a:xfrm>
+          <a:prstGeom prst="rect">
             <a:avLst/>
           </a:prstGeom>
           <a:solidFill>
@@ -8646,14 +9992,14 @@
       </p:sp>
       <p:sp>
         <p:nvSpPr>
-          <p:cNvPr id="5" name="TextBox 4"/>
+          <p:cNvPr id="6" name="TextBox 5"/>
           <p:cNvSpPr txBox="1"/>
           <p:nvPr/>
         </p:nvSpPr>
         <p:spPr>
           <a:xfrm>
-            <a:off x="822960" y="1234440"/>
-            <a:ext cx="10515600" cy="1097280"/>
+            <a:off x="822960" y="274320"/>
+            <a:ext cx="10515600" cy="640080"/>
           </a:xfrm>
           <a:prstGeom prst="rect">
             <a:avLst/>
@@ -8667,27 +10013,27 @@
           <a:lstStyle/>
           <a:p>
             <a:r>
-              <a:rPr sz="3400" b="1" i="0">
+              <a:rPr sz="2400" b="1" i="0">
                 <a:solidFill>
                   <a:srgbClr val="FFFFFF"/>
                 </a:solidFill>
                 <a:latin typeface="Montserrat"/>
               </a:rPr>
-              <a:t>Ya llevas una instalación de cero a gas</a:t>
-            </a:r>
-          </a:p>
-        </p:txBody>
-      </p:sp>
-      <p:sp>
-        <p:nvSpPr>
-          <p:cNvPr id="6" name="TextBox 5"/>
+              <a:t>⚡  PREGUNTA RÁPIDA</a:t>
+            </a:r>
+          </a:p>
+        </p:txBody>
+      </p:sp>
+      <p:sp>
+        <p:nvSpPr>
+          <p:cNvPr id="7" name="TextBox 6"/>
           <p:cNvSpPr txBox="1"/>
           <p:nvPr/>
         </p:nvSpPr>
         <p:spPr>
           <a:xfrm>
-            <a:off x="822960" y="2606040"/>
-            <a:ext cx="10515600" cy="2743200"/>
+            <a:off x="822960" y="1508760"/>
+            <a:ext cx="10515600" cy="1371600"/>
           </a:xfrm>
           <a:prstGeom prst="rect">
             <a:avLst/>
@@ -8700,123 +10046,80 @@
           </a:bodyPr>
           <a:lstStyle/>
           <a:p>
-            <a:pPr>
-              <a:spcAft>
-                <a:spcPts val="1200"/>
-              </a:spcAft>
-            </a:pPr>
-            <a:r>
-              <a:rPr sz="2000" b="1" i="0">
-                <a:solidFill>
-                  <a:srgbClr val="F4A24C"/>
-                </a:solidFill>
-                <a:latin typeface="Montserrat"/>
-              </a:rPr>
-              <a:t>✓  </a:t>
-            </a:r>
-            <a:r>
-              <a:rPr sz="1900" b="0" i="0">
-                <a:solidFill>
-                  <a:srgbClr val="FFFFFF"/>
-                </a:solidFill>
-                <a:latin typeface="Montserrat"/>
-              </a:rPr>
-              <a:t>Recorres los ocho pasos sin saltarte ninguno</a:t>
-            </a:r>
-          </a:p>
-          <a:p>
-            <a:pPr>
-              <a:spcAft>
-                <a:spcPts val="1200"/>
-              </a:spcAft>
-            </a:pPr>
-            <a:r>
-              <a:rPr sz="2000" b="1" i="0">
-                <a:solidFill>
-                  <a:srgbClr val="F4A24C"/>
-                </a:solidFill>
-                <a:latin typeface="Montserrat"/>
-              </a:rPr>
-              <a:t>✓  </a:t>
-            </a:r>
-            <a:r>
-              <a:rPr sz="1900" b="0" i="0">
-                <a:solidFill>
-                  <a:srgbClr val="FFFFFF"/>
-                </a:solidFill>
-                <a:latin typeface="Montserrat"/>
-              </a:rPr>
-              <a:t>Sabes qué certificado firma cada quién</a:t>
-            </a:r>
-          </a:p>
-          <a:p>
-            <a:pPr>
-              <a:spcAft>
-                <a:spcPts val="1200"/>
-              </a:spcAft>
-            </a:pPr>
-            <a:r>
-              <a:rPr sz="2000" b="1" i="0">
-                <a:solidFill>
-                  <a:srgbClr val="F4A24C"/>
-                </a:solidFill>
-                <a:latin typeface="Montserrat"/>
-              </a:rPr>
-              <a:t>✓  </a:t>
-            </a:r>
-            <a:r>
-              <a:rPr sz="1900" b="0" i="0">
-                <a:solidFill>
-                  <a:srgbClr val="FFFFFF"/>
-                </a:solidFill>
-                <a:latin typeface="Montserrat"/>
-              </a:rPr>
-              <a:t>Distingues prueba de inspección al vuelo</a:t>
-            </a:r>
-          </a:p>
-          <a:p>
-            <a:pPr>
-              <a:spcAft>
-                <a:spcPts val="1200"/>
-              </a:spcAft>
-            </a:pPr>
-            <a:r>
-              <a:rPr sz="2000" b="1" i="0">
-                <a:solidFill>
-                  <a:srgbClr val="F4A24C"/>
-                </a:solidFill>
-                <a:latin typeface="Montserrat"/>
-              </a:rPr>
-              <a:t>✓  </a:t>
-            </a:r>
-            <a:r>
-              <a:rPr sz="1900" b="0" i="0">
-                <a:solidFill>
-                  <a:srgbClr val="FFFFFF"/>
-                </a:solidFill>
-                <a:latin typeface="Montserrat"/>
-              </a:rPr>
-              <a:t>La regla del año ya no se te escapa</a:t>
-            </a:r>
-          </a:p>
-        </p:txBody>
-      </p:sp>
-      <p:sp>
-        <p:nvSpPr>
-          <p:cNvPr id="7" name="Rounded Rectangle 6"/>
+            <a:r>
+              <a:rPr sz="2400" b="1" i="0">
+                <a:solidFill>
+                  <a:srgbClr val="1E2761"/>
+                </a:solidFill>
+                <a:latin typeface="Montserrat"/>
+              </a:rPr>
+              <a:t>¿Quién comunica la instalación a la Administración y en qué plazo?</a:t>
+            </a:r>
+          </a:p>
+        </p:txBody>
+      </p:sp>
+      <p:sp>
+        <p:nvSpPr>
+          <p:cNvPr id="8" name="Rounded Rectangle 7"/>
           <p:cNvSpPr/>
           <p:nvPr/>
         </p:nvSpPr>
         <p:spPr>
           <a:xfrm>
-            <a:off x="822960" y="5532120"/>
-            <a:ext cx="10515600" cy="822960"/>
+            <a:off x="822960" y="3291840"/>
+            <a:ext cx="4983480" cy="1143000"/>
           </a:xfrm>
           <a:prstGeom prst="roundRect">
             <a:avLst/>
           </a:prstGeom>
           <a:solidFill>
-            <a:srgbClr val="E8801A"/>
+            <a:srgbClr val="F3F6FB"/>
+          </a:solidFill>
+          <a:ln w="12700">
+            <a:solidFill>
+              <a:srgbClr val="C7D2E6"/>
+            </a:solidFill>
+          </a:ln>
+          <a:effectLst/>
+        </p:spPr>
+        <p:style>
+          <a:lnRef idx="1">
+            <a:schemeClr val="accent1"/>
+          </a:lnRef>
+          <a:fillRef idx="3">
+            <a:schemeClr val="accent1"/>
+          </a:fillRef>
+          <a:effectRef idx="2">
+            <a:schemeClr val="accent1"/>
+          </a:effectRef>
+          <a:fontRef idx="minor">
+            <a:schemeClr val="lt1"/>
+          </a:fontRef>
+        </p:style>
+        <p:txBody>
+          <a:bodyPr rtlCol="0" anchor="ctr"/>
+          <a:lstStyle/>
+          <a:p>
+            <a:pPr algn="ctr"/>
+          </a:p>
+        </p:txBody>
+      </p:sp>
+      <p:sp>
+        <p:nvSpPr>
+          <p:cNvPr id="9" name="Rectangle 8"/>
+          <p:cNvSpPr/>
+          <p:nvPr/>
+        </p:nvSpPr>
+        <p:spPr>
+          <a:xfrm>
+            <a:off x="822960" y="3291840"/>
+            <a:ext cx="640080" cy="1143000"/>
+          </a:xfrm>
+          <a:prstGeom prst="rect">
+            <a:avLst/>
+          </a:prstGeom>
+          <a:solidFill>
+            <a:srgbClr val="1E2761"/>
           </a:solidFill>
           <a:ln>
             <a:noFill/>
@@ -8847,14 +10150,14 @@
       </p:sp>
       <p:sp>
         <p:nvSpPr>
-          <p:cNvPr id="8" name="TextBox 7"/>
+          <p:cNvPr id="10" name="TextBox 9"/>
           <p:cNvSpPr txBox="1"/>
           <p:nvPr/>
         </p:nvSpPr>
         <p:spPr>
           <a:xfrm>
-            <a:off x="1051560" y="5623560"/>
-            <a:ext cx="10058400" cy="640080"/>
+            <a:off x="822960" y="3611880"/>
+            <a:ext cx="640080" cy="548640"/>
           </a:xfrm>
           <a:prstGeom prst="rect">
             <a:avLst/>
@@ -8867,14 +10170,526 @@
           </a:bodyPr>
           <a:lstStyle/>
           <a:p>
-            <a:r>
-              <a:rPr sz="1500" b="1" i="1">
-                <a:solidFill>
-                  <a:srgbClr val="1E2761"/>
-                </a:solidFill>
-                <a:latin typeface="Montserrat"/>
-              </a:rPr>
-              <a:t>Firmar es responsabilizarse, y hoy ya sabes de qué respondes. Nos vemos en el cierre del tema.</a:t>
+            <a:pPr algn="ctr"/>
+            <a:r>
+              <a:rPr sz="2200" b="1" i="0">
+                <a:solidFill>
+                  <a:srgbClr val="FFFFFF"/>
+                </a:solidFill>
+                <a:latin typeface="Montserrat"/>
+              </a:rPr>
+              <a:t>A</a:t>
+            </a:r>
+          </a:p>
+        </p:txBody>
+      </p:sp>
+      <p:sp>
+        <p:nvSpPr>
+          <p:cNvPr id="11" name="TextBox 10"/>
+          <p:cNvSpPr txBox="1"/>
+          <p:nvPr/>
+        </p:nvSpPr>
+        <p:spPr>
+          <a:xfrm>
+            <a:off x="1600200" y="3474720"/>
+            <a:ext cx="4114800" cy="868680"/>
+          </a:xfrm>
+          <a:prstGeom prst="rect">
+            <a:avLst/>
+          </a:prstGeom>
+          <a:noFill/>
+        </p:spPr>
+        <p:txBody>
+          <a:bodyPr wrap="square">
+            <a:spAutoFit/>
+          </a:bodyPr>
+          <a:lstStyle/>
+          <a:p>
+            <a:r>
+              <a:rPr sz="1400" b="0" i="0">
+                <a:solidFill>
+                  <a:srgbClr val="1B2330"/>
+                </a:solidFill>
+                <a:latin typeface="Montserrat"/>
+              </a:rPr>
+              <a:t>La empresa instaladora, antes de quince días</a:t>
+            </a:r>
+          </a:p>
+        </p:txBody>
+      </p:sp>
+      <p:sp>
+        <p:nvSpPr>
+          <p:cNvPr id="12" name="Rounded Rectangle 11"/>
+          <p:cNvSpPr/>
+          <p:nvPr/>
+        </p:nvSpPr>
+        <p:spPr>
+          <a:xfrm>
+            <a:off x="6355080" y="3291840"/>
+            <a:ext cx="4983480" cy="1143000"/>
+          </a:xfrm>
+          <a:prstGeom prst="roundRect">
+            <a:avLst/>
+          </a:prstGeom>
+          <a:solidFill>
+            <a:srgbClr val="F3F6FB"/>
+          </a:solidFill>
+          <a:ln w="12700">
+            <a:solidFill>
+              <a:srgbClr val="C7D2E6"/>
+            </a:solidFill>
+          </a:ln>
+          <a:effectLst/>
+        </p:spPr>
+        <p:style>
+          <a:lnRef idx="1">
+            <a:schemeClr val="accent1"/>
+          </a:lnRef>
+          <a:fillRef idx="3">
+            <a:schemeClr val="accent1"/>
+          </a:fillRef>
+          <a:effectRef idx="2">
+            <a:schemeClr val="accent1"/>
+          </a:effectRef>
+          <a:fontRef idx="minor">
+            <a:schemeClr val="lt1"/>
+          </a:fontRef>
+        </p:style>
+        <p:txBody>
+          <a:bodyPr rtlCol="0" anchor="ctr"/>
+          <a:lstStyle/>
+          <a:p>
+            <a:pPr algn="ctr"/>
+          </a:p>
+        </p:txBody>
+      </p:sp>
+      <p:sp>
+        <p:nvSpPr>
+          <p:cNvPr id="13" name="Rectangle 12"/>
+          <p:cNvSpPr/>
+          <p:nvPr/>
+        </p:nvSpPr>
+        <p:spPr>
+          <a:xfrm>
+            <a:off x="6355080" y="3291840"/>
+            <a:ext cx="640080" cy="1143000"/>
+          </a:xfrm>
+          <a:prstGeom prst="rect">
+            <a:avLst/>
+          </a:prstGeom>
+          <a:solidFill>
+            <a:srgbClr val="1E2761"/>
+          </a:solidFill>
+          <a:ln>
+            <a:noFill/>
+          </a:ln>
+          <a:effectLst/>
+        </p:spPr>
+        <p:style>
+          <a:lnRef idx="1">
+            <a:schemeClr val="accent1"/>
+          </a:lnRef>
+          <a:fillRef idx="3">
+            <a:schemeClr val="accent1"/>
+          </a:fillRef>
+          <a:effectRef idx="2">
+            <a:schemeClr val="accent1"/>
+          </a:effectRef>
+          <a:fontRef idx="minor">
+            <a:schemeClr val="lt1"/>
+          </a:fontRef>
+        </p:style>
+        <p:txBody>
+          <a:bodyPr rtlCol="0" anchor="ctr"/>
+          <a:lstStyle/>
+          <a:p>
+            <a:pPr algn="ctr"/>
+          </a:p>
+        </p:txBody>
+      </p:sp>
+      <p:sp>
+        <p:nvSpPr>
+          <p:cNvPr id="14" name="TextBox 13"/>
+          <p:cNvSpPr txBox="1"/>
+          <p:nvPr/>
+        </p:nvSpPr>
+        <p:spPr>
+          <a:xfrm>
+            <a:off x="6355080" y="3611880"/>
+            <a:ext cx="640080" cy="548640"/>
+          </a:xfrm>
+          <a:prstGeom prst="rect">
+            <a:avLst/>
+          </a:prstGeom>
+          <a:noFill/>
+        </p:spPr>
+        <p:txBody>
+          <a:bodyPr wrap="square">
+            <a:spAutoFit/>
+          </a:bodyPr>
+          <a:lstStyle/>
+          <a:p>
+            <a:pPr algn="ctr"/>
+            <a:r>
+              <a:rPr sz="2200" b="1" i="0">
+                <a:solidFill>
+                  <a:srgbClr val="FFFFFF"/>
+                </a:solidFill>
+                <a:latin typeface="Montserrat"/>
+              </a:rPr>
+              <a:t>B</a:t>
+            </a:r>
+          </a:p>
+        </p:txBody>
+      </p:sp>
+      <p:sp>
+        <p:nvSpPr>
+          <p:cNvPr id="15" name="TextBox 14"/>
+          <p:cNvSpPr txBox="1"/>
+          <p:nvPr/>
+        </p:nvSpPr>
+        <p:spPr>
+          <a:xfrm>
+            <a:off x="7132320" y="3474720"/>
+            <a:ext cx="4114800" cy="868680"/>
+          </a:xfrm>
+          <a:prstGeom prst="rect">
+            <a:avLst/>
+          </a:prstGeom>
+          <a:noFill/>
+        </p:spPr>
+        <p:txBody>
+          <a:bodyPr wrap="square">
+            <a:spAutoFit/>
+          </a:bodyPr>
+          <a:lstStyle/>
+          <a:p>
+            <a:r>
+              <a:rPr sz="1400" b="0" i="0">
+                <a:solidFill>
+                  <a:srgbClr val="1B2330"/>
+                </a:solidFill>
+                <a:latin typeface="Montserrat"/>
+              </a:rPr>
+              <a:t>El titular, antes de treinta días desde la puesta en servicio</a:t>
+            </a:r>
+          </a:p>
+        </p:txBody>
+      </p:sp>
+      <p:sp>
+        <p:nvSpPr>
+          <p:cNvPr id="16" name="Rounded Rectangle 15"/>
+          <p:cNvSpPr/>
+          <p:nvPr/>
+        </p:nvSpPr>
+        <p:spPr>
+          <a:xfrm>
+            <a:off x="822960" y="4617720"/>
+            <a:ext cx="4983480" cy="1143000"/>
+          </a:xfrm>
+          <a:prstGeom prst="roundRect">
+            <a:avLst/>
+          </a:prstGeom>
+          <a:solidFill>
+            <a:srgbClr val="F3F6FB"/>
+          </a:solidFill>
+          <a:ln w="12700">
+            <a:solidFill>
+              <a:srgbClr val="C7D2E6"/>
+            </a:solidFill>
+          </a:ln>
+          <a:effectLst/>
+        </p:spPr>
+        <p:style>
+          <a:lnRef idx="1">
+            <a:schemeClr val="accent1"/>
+          </a:lnRef>
+          <a:fillRef idx="3">
+            <a:schemeClr val="accent1"/>
+          </a:fillRef>
+          <a:effectRef idx="2">
+            <a:schemeClr val="accent1"/>
+          </a:effectRef>
+          <a:fontRef idx="minor">
+            <a:schemeClr val="lt1"/>
+          </a:fontRef>
+        </p:style>
+        <p:txBody>
+          <a:bodyPr rtlCol="0" anchor="ctr"/>
+          <a:lstStyle/>
+          <a:p>
+            <a:pPr algn="ctr"/>
+          </a:p>
+        </p:txBody>
+      </p:sp>
+      <p:sp>
+        <p:nvSpPr>
+          <p:cNvPr id="17" name="Rectangle 16"/>
+          <p:cNvSpPr/>
+          <p:nvPr/>
+        </p:nvSpPr>
+        <p:spPr>
+          <a:xfrm>
+            <a:off x="822960" y="4617720"/>
+            <a:ext cx="640080" cy="1143000"/>
+          </a:xfrm>
+          <a:prstGeom prst="rect">
+            <a:avLst/>
+          </a:prstGeom>
+          <a:solidFill>
+            <a:srgbClr val="1E2761"/>
+          </a:solidFill>
+          <a:ln>
+            <a:noFill/>
+          </a:ln>
+          <a:effectLst/>
+        </p:spPr>
+        <p:style>
+          <a:lnRef idx="1">
+            <a:schemeClr val="accent1"/>
+          </a:lnRef>
+          <a:fillRef idx="3">
+            <a:schemeClr val="accent1"/>
+          </a:fillRef>
+          <a:effectRef idx="2">
+            <a:schemeClr val="accent1"/>
+          </a:effectRef>
+          <a:fontRef idx="minor">
+            <a:schemeClr val="lt1"/>
+          </a:fontRef>
+        </p:style>
+        <p:txBody>
+          <a:bodyPr rtlCol="0" anchor="ctr"/>
+          <a:lstStyle/>
+          <a:p>
+            <a:pPr algn="ctr"/>
+          </a:p>
+        </p:txBody>
+      </p:sp>
+      <p:sp>
+        <p:nvSpPr>
+          <p:cNvPr id="18" name="TextBox 17"/>
+          <p:cNvSpPr txBox="1"/>
+          <p:nvPr/>
+        </p:nvSpPr>
+        <p:spPr>
+          <a:xfrm>
+            <a:off x="822960" y="4937760"/>
+            <a:ext cx="640080" cy="548640"/>
+          </a:xfrm>
+          <a:prstGeom prst="rect">
+            <a:avLst/>
+          </a:prstGeom>
+          <a:noFill/>
+        </p:spPr>
+        <p:txBody>
+          <a:bodyPr wrap="square">
+            <a:spAutoFit/>
+          </a:bodyPr>
+          <a:lstStyle/>
+          <a:p>
+            <a:pPr algn="ctr"/>
+            <a:r>
+              <a:rPr sz="2200" b="1" i="0">
+                <a:solidFill>
+                  <a:srgbClr val="FFFFFF"/>
+                </a:solidFill>
+                <a:latin typeface="Montserrat"/>
+              </a:rPr>
+              <a:t>C</a:t>
+            </a:r>
+          </a:p>
+        </p:txBody>
+      </p:sp>
+      <p:sp>
+        <p:nvSpPr>
+          <p:cNvPr id="19" name="TextBox 18"/>
+          <p:cNvSpPr txBox="1"/>
+          <p:nvPr/>
+        </p:nvSpPr>
+        <p:spPr>
+          <a:xfrm>
+            <a:off x="1600200" y="4800600"/>
+            <a:ext cx="4114800" cy="868680"/>
+          </a:xfrm>
+          <a:prstGeom prst="rect">
+            <a:avLst/>
+          </a:prstGeom>
+          <a:noFill/>
+        </p:spPr>
+        <p:txBody>
+          <a:bodyPr wrap="square">
+            <a:spAutoFit/>
+          </a:bodyPr>
+          <a:lstStyle/>
+          <a:p>
+            <a:r>
+              <a:rPr sz="1400" b="0" i="0">
+                <a:solidFill>
+                  <a:srgbClr val="1B2330"/>
+                </a:solidFill>
+                <a:latin typeface="Montserrat"/>
+              </a:rPr>
+              <a:t>El distribuidor, antes de treinta días desde el montaje</a:t>
+            </a:r>
+          </a:p>
+        </p:txBody>
+      </p:sp>
+      <p:sp>
+        <p:nvSpPr>
+          <p:cNvPr id="20" name="Rounded Rectangle 19"/>
+          <p:cNvSpPr/>
+          <p:nvPr/>
+        </p:nvSpPr>
+        <p:spPr>
+          <a:xfrm>
+            <a:off x="6355080" y="4617720"/>
+            <a:ext cx="4983480" cy="1143000"/>
+          </a:xfrm>
+          <a:prstGeom prst="roundRect">
+            <a:avLst/>
+          </a:prstGeom>
+          <a:solidFill>
+            <a:srgbClr val="F3F6FB"/>
+          </a:solidFill>
+          <a:ln w="12700">
+            <a:solidFill>
+              <a:srgbClr val="C7D2E6"/>
+            </a:solidFill>
+          </a:ln>
+          <a:effectLst/>
+        </p:spPr>
+        <p:style>
+          <a:lnRef idx="1">
+            <a:schemeClr val="accent1"/>
+          </a:lnRef>
+          <a:fillRef idx="3">
+            <a:schemeClr val="accent1"/>
+          </a:fillRef>
+          <a:effectRef idx="2">
+            <a:schemeClr val="accent1"/>
+          </a:effectRef>
+          <a:fontRef idx="minor">
+            <a:schemeClr val="lt1"/>
+          </a:fontRef>
+        </p:style>
+        <p:txBody>
+          <a:bodyPr rtlCol="0" anchor="ctr"/>
+          <a:lstStyle/>
+          <a:p>
+            <a:pPr algn="ctr"/>
+          </a:p>
+        </p:txBody>
+      </p:sp>
+      <p:sp>
+        <p:nvSpPr>
+          <p:cNvPr id="21" name="Rectangle 20"/>
+          <p:cNvSpPr/>
+          <p:nvPr/>
+        </p:nvSpPr>
+        <p:spPr>
+          <a:xfrm>
+            <a:off x="6355080" y="4617720"/>
+            <a:ext cx="640080" cy="1143000"/>
+          </a:xfrm>
+          <a:prstGeom prst="rect">
+            <a:avLst/>
+          </a:prstGeom>
+          <a:solidFill>
+            <a:srgbClr val="1E2761"/>
+          </a:solidFill>
+          <a:ln>
+            <a:noFill/>
+          </a:ln>
+          <a:effectLst/>
+        </p:spPr>
+        <p:style>
+          <a:lnRef idx="1">
+            <a:schemeClr val="accent1"/>
+          </a:lnRef>
+          <a:fillRef idx="3">
+            <a:schemeClr val="accent1"/>
+          </a:fillRef>
+          <a:effectRef idx="2">
+            <a:schemeClr val="accent1"/>
+          </a:effectRef>
+          <a:fontRef idx="minor">
+            <a:schemeClr val="lt1"/>
+          </a:fontRef>
+        </p:style>
+        <p:txBody>
+          <a:bodyPr rtlCol="0" anchor="ctr"/>
+          <a:lstStyle/>
+          <a:p>
+            <a:pPr algn="ctr"/>
+          </a:p>
+        </p:txBody>
+      </p:sp>
+      <p:sp>
+        <p:nvSpPr>
+          <p:cNvPr id="22" name="TextBox 21"/>
+          <p:cNvSpPr txBox="1"/>
+          <p:nvPr/>
+        </p:nvSpPr>
+        <p:spPr>
+          <a:xfrm>
+            <a:off x="6355080" y="4937760"/>
+            <a:ext cx="640080" cy="548640"/>
+          </a:xfrm>
+          <a:prstGeom prst="rect">
+            <a:avLst/>
+          </a:prstGeom>
+          <a:noFill/>
+        </p:spPr>
+        <p:txBody>
+          <a:bodyPr wrap="square">
+            <a:spAutoFit/>
+          </a:bodyPr>
+          <a:lstStyle/>
+          <a:p>
+            <a:pPr algn="ctr"/>
+            <a:r>
+              <a:rPr sz="2200" b="1" i="0">
+                <a:solidFill>
+                  <a:srgbClr val="FFFFFF"/>
+                </a:solidFill>
+                <a:latin typeface="Montserrat"/>
+              </a:rPr>
+              <a:t>D</a:t>
+            </a:r>
+          </a:p>
+        </p:txBody>
+      </p:sp>
+      <p:sp>
+        <p:nvSpPr>
+          <p:cNvPr id="23" name="TextBox 22"/>
+          <p:cNvSpPr txBox="1"/>
+          <p:nvPr/>
+        </p:nvSpPr>
+        <p:spPr>
+          <a:xfrm>
+            <a:off x="7132320" y="4800600"/>
+            <a:ext cx="4114800" cy="868680"/>
+          </a:xfrm>
+          <a:prstGeom prst="rect">
+            <a:avLst/>
+          </a:prstGeom>
+          <a:noFill/>
+        </p:spPr>
+        <p:txBody>
+          <a:bodyPr wrap="square">
+            <a:spAutoFit/>
+          </a:bodyPr>
+          <a:lstStyle/>
+          <a:p>
+            <a:r>
+              <a:rPr sz="1400" b="0" i="0">
+                <a:solidFill>
+                  <a:srgbClr val="1B2330"/>
+                </a:solidFill>
+                <a:latin typeface="Montserrat"/>
+              </a:rPr>
+              <a:t>El instalador, antes de siete días desde las pruebas</a:t>
             </a:r>
           </a:p>
         </p:txBody>
@@ -8884,6 +10699,405 @@
   <p:clrMapOvr>
     <a:masterClrMapping/>
   </p:clrMapOvr>
+  <mc:AlternateContent xmlns:mc="http://schemas.openxmlformats.org/markup-compatibility/2006">
+    <mc:Choice xmlns:p14="http://schemas.microsoft.com/office/powerpoint/2010/main" Requires="p14">
+      <p:transition spd="med" p14:dur="700">
+        <p14:cube dir="r"/>
+      </p:transition>
+    </mc:Choice>
+    <mc:Fallback>
+      <p:transition spd="med">
+        <p:push dir="r"/>
+      </p:transition>
+    </mc:Fallback>
+  </mc:AlternateContent>
+</p:sld>
+</file>
+
+<file path=ppt/slides/slide19.xml><?xml version="1.0" encoding="utf-8"?>
+<p:sld xmlns:a="http://schemas.openxmlformats.org/drawingml/2006/main" xmlns:p="http://schemas.openxmlformats.org/presentationml/2006/main" xmlns:r="http://schemas.openxmlformats.org/officeDocument/2006/relationships">
+  <p:cSld>
+    <p:spTree>
+      <p:nvGrpSpPr>
+        <p:cNvPr id="1" name=""/>
+        <p:cNvGrpSpPr/>
+        <p:nvPr/>
+      </p:nvGrpSpPr>
+      <p:grpSpPr/>
+      <p:sp>
+        <p:nvSpPr>
+          <p:cNvPr id="2" name="Rectangle 1"/>
+          <p:cNvSpPr/>
+          <p:nvPr/>
+        </p:nvSpPr>
+        <p:spPr>
+          <a:xfrm>
+            <a:off x="0" y="0"/>
+            <a:ext cx="12191695" cy="6858000"/>
+          </a:xfrm>
+          <a:prstGeom prst="rect">
+            <a:avLst/>
+          </a:prstGeom>
+          <a:solidFill>
+            <a:srgbClr val="FFFFFF"/>
+          </a:solidFill>
+          <a:ln>
+            <a:noFill/>
+          </a:ln>
+          <a:effectLst/>
+        </p:spPr>
+        <p:style>
+          <a:lnRef idx="1">
+            <a:schemeClr val="accent1"/>
+          </a:lnRef>
+          <a:fillRef idx="3">
+            <a:schemeClr val="accent1"/>
+          </a:fillRef>
+          <a:effectRef idx="2">
+            <a:schemeClr val="accent1"/>
+          </a:effectRef>
+          <a:fontRef idx="minor">
+            <a:schemeClr val="lt1"/>
+          </a:fontRef>
+        </p:style>
+        <p:txBody>
+          <a:bodyPr rtlCol="0" anchor="ctr"/>
+          <a:lstStyle/>
+          <a:p>
+            <a:pPr algn="ctr"/>
+          </a:p>
+        </p:txBody>
+      </p:sp>
+      <p:sp>
+        <p:nvSpPr>
+          <p:cNvPr id="3" name="TextBox 2"/>
+          <p:cNvSpPr txBox="1"/>
+          <p:nvPr/>
+        </p:nvSpPr>
+        <p:spPr>
+          <a:xfrm>
+            <a:off x="10607040" y="320040"/>
+            <a:ext cx="1371600" cy="365760"/>
+          </a:xfrm>
+          <a:prstGeom prst="rect">
+            <a:avLst/>
+          </a:prstGeom>
+          <a:noFill/>
+        </p:spPr>
+        <p:txBody>
+          <a:bodyPr wrap="square">
+            <a:spAutoFit/>
+          </a:bodyPr>
+          <a:lstStyle/>
+          <a:p>
+            <a:pPr algn="r"/>
+            <a:r>
+              <a:rPr sz="1000" b="1" i="0">
+                <a:solidFill>
+                  <a:srgbClr val="64748B"/>
+                </a:solidFill>
+                <a:latin typeface="Montserrat"/>
+              </a:rPr>
+              <a:t>019 / 024</a:t>
+            </a:r>
+          </a:p>
+        </p:txBody>
+      </p:sp>
+      <p:sp>
+        <p:nvSpPr>
+          <p:cNvPr id="4" name="TextBox 3"/>
+          <p:cNvSpPr txBox="1"/>
+          <p:nvPr/>
+        </p:nvSpPr>
+        <p:spPr>
+          <a:xfrm>
+            <a:off x="457200" y="6419088"/>
+            <a:ext cx="8229600" cy="365760"/>
+          </a:xfrm>
+          <a:prstGeom prst="rect">
+            <a:avLst/>
+          </a:prstGeom>
+          <a:noFill/>
+        </p:spPr>
+        <p:txBody>
+          <a:bodyPr wrap="square">
+            <a:spAutoFit/>
+          </a:bodyPr>
+          <a:lstStyle/>
+          <a:p>
+            <a:r>
+              <a:rPr sz="900" b="0" i="0">
+                <a:solidFill>
+                  <a:srgbClr val="64748B"/>
+                </a:solidFill>
+                <a:latin typeface="Montserrat"/>
+              </a:rPr>
+              <a:t>Curso Gas B · Tema 00 · El Reglamento de Gas</a:t>
+            </a:r>
+          </a:p>
+        </p:txBody>
+      </p:sp>
+      <p:sp>
+        <p:nvSpPr>
+          <p:cNvPr id="5" name="Rectangle 4"/>
+          <p:cNvSpPr/>
+          <p:nvPr/>
+        </p:nvSpPr>
+        <p:spPr>
+          <a:xfrm>
+            <a:off x="0" y="0"/>
+            <a:ext cx="12191695" cy="1143000"/>
+          </a:xfrm>
+          <a:prstGeom prst="rect">
+            <a:avLst/>
+          </a:prstGeom>
+          <a:solidFill>
+            <a:srgbClr val="1E8E4B"/>
+          </a:solidFill>
+          <a:ln>
+            <a:noFill/>
+          </a:ln>
+          <a:effectLst/>
+        </p:spPr>
+        <p:style>
+          <a:lnRef idx="1">
+            <a:schemeClr val="accent1"/>
+          </a:lnRef>
+          <a:fillRef idx="3">
+            <a:schemeClr val="accent1"/>
+          </a:fillRef>
+          <a:effectRef idx="2">
+            <a:schemeClr val="accent1"/>
+          </a:effectRef>
+          <a:fontRef idx="minor">
+            <a:schemeClr val="lt1"/>
+          </a:fontRef>
+        </p:style>
+        <p:txBody>
+          <a:bodyPr rtlCol="0" anchor="ctr"/>
+          <a:lstStyle/>
+          <a:p>
+            <a:pPr algn="ctr"/>
+          </a:p>
+        </p:txBody>
+      </p:sp>
+      <p:sp>
+        <p:nvSpPr>
+          <p:cNvPr id="6" name="TextBox 5"/>
+          <p:cNvSpPr txBox="1"/>
+          <p:nvPr/>
+        </p:nvSpPr>
+        <p:spPr>
+          <a:xfrm>
+            <a:off x="822960" y="274320"/>
+            <a:ext cx="10515600" cy="640080"/>
+          </a:xfrm>
+          <a:prstGeom prst="rect">
+            <a:avLst/>
+          </a:prstGeom>
+          <a:noFill/>
+        </p:spPr>
+        <p:txBody>
+          <a:bodyPr wrap="square">
+            <a:spAutoFit/>
+          </a:bodyPr>
+          <a:lstStyle/>
+          <a:p>
+            <a:r>
+              <a:rPr sz="2400" b="1" i="0">
+                <a:solidFill>
+                  <a:srgbClr val="FFFFFF"/>
+                </a:solidFill>
+                <a:latin typeface="Montserrat"/>
+              </a:rPr>
+              <a:t>✔  RESPUESTA:  B</a:t>
+            </a:r>
+          </a:p>
+        </p:txBody>
+      </p:sp>
+      <p:sp>
+        <p:nvSpPr>
+          <p:cNvPr id="7" name="TextBox 6"/>
+          <p:cNvSpPr txBox="1"/>
+          <p:nvPr/>
+        </p:nvSpPr>
+        <p:spPr>
+          <a:xfrm>
+            <a:off x="822960" y="1417320"/>
+            <a:ext cx="10515600" cy="914400"/>
+          </a:xfrm>
+          <a:prstGeom prst="rect">
+            <a:avLst/>
+          </a:prstGeom>
+          <a:noFill/>
+        </p:spPr>
+        <p:txBody>
+          <a:bodyPr wrap="square">
+            <a:spAutoFit/>
+          </a:bodyPr>
+          <a:lstStyle/>
+          <a:p>
+            <a:r>
+              <a:rPr sz="1800" b="1" i="0">
+                <a:solidFill>
+                  <a:srgbClr val="64748B"/>
+                </a:solidFill>
+                <a:latin typeface="Montserrat"/>
+              </a:rPr>
+              <a:t>¿Quién comunica la instalación a la Administración y en qué plazo?</a:t>
+            </a:r>
+          </a:p>
+        </p:txBody>
+      </p:sp>
+      <p:sp>
+        <p:nvSpPr>
+          <p:cNvPr id="8" name="Rounded Rectangle 7"/>
+          <p:cNvSpPr/>
+          <p:nvPr/>
+        </p:nvSpPr>
+        <p:spPr>
+          <a:xfrm>
+            <a:off x="822960" y="2514600"/>
+            <a:ext cx="10515600" cy="914400"/>
+          </a:xfrm>
+          <a:prstGeom prst="roundRect">
+            <a:avLst/>
+          </a:prstGeom>
+          <a:solidFill>
+            <a:srgbClr val="E9F6EE"/>
+          </a:solidFill>
+          <a:ln w="12700">
+            <a:solidFill>
+              <a:srgbClr val="1E8E4B"/>
+            </a:solidFill>
+          </a:ln>
+          <a:effectLst/>
+        </p:spPr>
+        <p:style>
+          <a:lnRef idx="1">
+            <a:schemeClr val="accent1"/>
+          </a:lnRef>
+          <a:fillRef idx="3">
+            <a:schemeClr val="accent1"/>
+          </a:fillRef>
+          <a:effectRef idx="2">
+            <a:schemeClr val="accent1"/>
+          </a:effectRef>
+          <a:fontRef idx="minor">
+            <a:schemeClr val="lt1"/>
+          </a:fontRef>
+        </p:style>
+        <p:txBody>
+          <a:bodyPr rtlCol="0" anchor="ctr"/>
+          <a:lstStyle/>
+          <a:p>
+            <a:pPr algn="ctr"/>
+          </a:p>
+        </p:txBody>
+      </p:sp>
+      <p:sp>
+        <p:nvSpPr>
+          <p:cNvPr id="9" name="TextBox 8"/>
+          <p:cNvSpPr txBox="1"/>
+          <p:nvPr/>
+        </p:nvSpPr>
+        <p:spPr>
+          <a:xfrm>
+            <a:off x="1097280" y="2697480"/>
+            <a:ext cx="10058400" cy="640080"/>
+          </a:xfrm>
+          <a:prstGeom prst="rect">
+            <a:avLst/>
+          </a:prstGeom>
+          <a:noFill/>
+        </p:spPr>
+        <p:txBody>
+          <a:bodyPr wrap="square">
+            <a:spAutoFit/>
+          </a:bodyPr>
+          <a:lstStyle/>
+          <a:p>
+            <a:r>
+              <a:rPr sz="1800" b="1" i="0">
+                <a:solidFill>
+                  <a:srgbClr val="1E8E4B"/>
+                </a:solidFill>
+                <a:latin typeface="Montserrat"/>
+              </a:rPr>
+              <a:t>B.  </a:t>
+            </a:r>
+            <a:r>
+              <a:rPr sz="1800" b="1" i="0">
+                <a:solidFill>
+                  <a:srgbClr val="1E2761"/>
+                </a:solidFill>
+                <a:latin typeface="Montserrat"/>
+              </a:rPr>
+              <a:t>El titular, antes de treinta días desde la puesta en servicio</a:t>
+            </a:r>
+          </a:p>
+        </p:txBody>
+      </p:sp>
+      <p:sp>
+        <p:nvSpPr>
+          <p:cNvPr id="10" name="TextBox 9"/>
+          <p:cNvSpPr txBox="1"/>
+          <p:nvPr/>
+        </p:nvSpPr>
+        <p:spPr>
+          <a:xfrm>
+            <a:off x="822960" y="3749039"/>
+            <a:ext cx="10515600" cy="2194560"/>
+          </a:xfrm>
+          <a:prstGeom prst="rect">
+            <a:avLst/>
+          </a:prstGeom>
+          <a:noFill/>
+        </p:spPr>
+        <p:txBody>
+          <a:bodyPr wrap="square">
+            <a:spAutoFit/>
+          </a:bodyPr>
+          <a:lstStyle/>
+          <a:p>
+            <a:r>
+              <a:rPr sz="1500" b="1" i="0">
+                <a:solidFill>
+                  <a:srgbClr val="E8801A"/>
+                </a:solidFill>
+                <a:latin typeface="Montserrat"/>
+              </a:rPr>
+              <a:t>Por qué:  </a:t>
+            </a:r>
+            <a:r>
+              <a:rPr sz="1500" b="0" i="0">
+                <a:solidFill>
+                  <a:srgbClr val="1B2330"/>
+                </a:solidFill>
+                <a:latin typeface="Montserrat"/>
+              </a:rPr>
+              <a:t>La responsabilidad de comunicar es del titular, ante la Comunidad Autónoma, antes de treinta días desde la puesta en servicio.</a:t>
+            </a:r>
+          </a:p>
+        </p:txBody>
+      </p:sp>
+    </p:spTree>
+  </p:cSld>
+  <p:clrMapOvr>
+    <a:masterClrMapping/>
+  </p:clrMapOvr>
+  <mc:AlternateContent xmlns:mc="http://schemas.openxmlformats.org/markup-compatibility/2006">
+    <mc:Choice xmlns:p14="http://schemas.microsoft.com/office/powerpoint/2010/main" Requires="p14">
+      <p:transition spd="med" p14:dur="700">
+        <p14:cube dir="l"/>
+      </p:transition>
+    </mc:Choice>
+    <mc:Fallback>
+      <p:transition spd="med">
+        <p:push dir="l"/>
+      </p:transition>
+    </mc:Fallback>
+  </mc:AlternateContent>
 </p:sld>
 </file>
 
@@ -8971,7 +11185,7 @@
                 </a:solidFill>
                 <a:latin typeface="Montserrat"/>
               </a:rPr>
-              <a:t>002 / 018</a:t>
+              <a:t>002 / 024</a:t>
             </a:r>
           </a:p>
         </p:txBody>
@@ -9046,7 +11260,7 @@
       </p:sp>
       <p:sp>
         <p:nvSpPr>
-          <p:cNvPr id="6" name="Rounded Rectangle 5"/>
+          <p:cNvPr id="6" name="Rectangle 5"/>
           <p:cNvSpPr/>
           <p:nvPr/>
         </p:nvSpPr>
@@ -9055,7 +11269,7 @@
             <a:off x="868680" y="1234440"/>
             <a:ext cx="1463040" cy="73152"/>
           </a:xfrm>
-          <a:prstGeom prst="roundRect">
+          <a:prstGeom prst="rect">
             <a:avLst/>
           </a:prstGeom>
           <a:solidFill>
@@ -9136,14 +11350,58 @@
       </p:sp>
       <p:sp>
         <p:nvSpPr>
-          <p:cNvPr id="8" name="TextBox 7"/>
+          <p:cNvPr id="8" name="Rectangle 7"/>
+          <p:cNvSpPr/>
+          <p:nvPr/>
+        </p:nvSpPr>
+        <p:spPr>
+          <a:xfrm>
+            <a:off x="822960" y="2011680"/>
+            <a:ext cx="3017520" cy="128016"/>
+          </a:xfrm>
+          <a:prstGeom prst="rect">
+            <a:avLst/>
+          </a:prstGeom>
+          <a:solidFill>
+            <a:srgbClr val="E8801A"/>
+          </a:solidFill>
+          <a:ln>
+            <a:noFill/>
+          </a:ln>
+          <a:effectLst/>
+        </p:spPr>
+        <p:style>
+          <a:lnRef idx="1">
+            <a:schemeClr val="accent1"/>
+          </a:lnRef>
+          <a:fillRef idx="3">
+            <a:schemeClr val="accent1"/>
+          </a:fillRef>
+          <a:effectRef idx="2">
+            <a:schemeClr val="accent1"/>
+          </a:effectRef>
+          <a:fontRef idx="minor">
+            <a:schemeClr val="lt1"/>
+          </a:fontRef>
+        </p:style>
+        <p:txBody>
+          <a:bodyPr rtlCol="0" anchor="ctr"/>
+          <a:lstStyle/>
+          <a:p>
+            <a:pPr algn="ctr"/>
+          </a:p>
+        </p:txBody>
+      </p:sp>
+      <p:sp>
+        <p:nvSpPr>
+          <p:cNvPr id="9" name="TextBox 8"/>
           <p:cNvSpPr txBox="1"/>
           <p:nvPr/>
         </p:nvSpPr>
         <p:spPr>
           <a:xfrm>
-            <a:off x="822960" y="2331720"/>
-            <a:ext cx="3017520" cy="1463040"/>
+            <a:off x="822960" y="2377440"/>
+            <a:ext cx="3017520" cy="1371600"/>
           </a:xfrm>
           <a:prstGeom prst="rect">
             <a:avLst/>
@@ -9158,7 +11416,7 @@
           <a:p>
             <a:pPr algn="ctr"/>
             <a:r>
-              <a:rPr sz="6000" b="1" i="0">
+              <a:rPr sz="5800" b="1" i="0">
                 <a:solidFill>
                   <a:srgbClr val="1E2761"/>
                 </a:solidFill>
@@ -9171,13 +11429,13 @@
       </p:sp>
       <p:sp>
         <p:nvSpPr>
-          <p:cNvPr id="9" name="TextBox 8"/>
+          <p:cNvPr id="10" name="TextBox 9"/>
           <p:cNvSpPr txBox="1"/>
           <p:nvPr/>
         </p:nvSpPr>
         <p:spPr>
           <a:xfrm>
-            <a:off x="1051560" y="3611880"/>
+            <a:off x="1051560" y="3657600"/>
             <a:ext cx="2560320" cy="1005840"/>
           </a:xfrm>
           <a:prstGeom prst="rect">
@@ -9206,7 +11464,7 @@
       </p:sp>
       <p:sp>
         <p:nvSpPr>
-          <p:cNvPr id="10" name="Rounded Rectangle 9"/>
+          <p:cNvPr id="11" name="Rounded Rectangle 10"/>
           <p:cNvSpPr/>
           <p:nvPr/>
         </p:nvSpPr>
@@ -9252,14 +11510,58 @@
       </p:sp>
       <p:sp>
         <p:nvSpPr>
-          <p:cNvPr id="11" name="TextBox 10"/>
+          <p:cNvPr id="12" name="Rectangle 11"/>
+          <p:cNvSpPr/>
+          <p:nvPr/>
+        </p:nvSpPr>
+        <p:spPr>
+          <a:xfrm>
+            <a:off x="4617720" y="2011680"/>
+            <a:ext cx="3017520" cy="128016"/>
+          </a:xfrm>
+          <a:prstGeom prst="rect">
+            <a:avLst/>
+          </a:prstGeom>
+          <a:solidFill>
+            <a:srgbClr val="E8801A"/>
+          </a:solidFill>
+          <a:ln>
+            <a:noFill/>
+          </a:ln>
+          <a:effectLst/>
+        </p:spPr>
+        <p:style>
+          <a:lnRef idx="1">
+            <a:schemeClr val="accent1"/>
+          </a:lnRef>
+          <a:fillRef idx="3">
+            <a:schemeClr val="accent1"/>
+          </a:fillRef>
+          <a:effectRef idx="2">
+            <a:schemeClr val="accent1"/>
+          </a:effectRef>
+          <a:fontRef idx="minor">
+            <a:schemeClr val="lt1"/>
+          </a:fontRef>
+        </p:style>
+        <p:txBody>
+          <a:bodyPr rtlCol="0" anchor="ctr"/>
+          <a:lstStyle/>
+          <a:p>
+            <a:pPr algn="ctr"/>
+          </a:p>
+        </p:txBody>
+      </p:sp>
+      <p:sp>
+        <p:nvSpPr>
+          <p:cNvPr id="13" name="TextBox 12"/>
           <p:cNvSpPr txBox="1"/>
           <p:nvPr/>
         </p:nvSpPr>
         <p:spPr>
           <a:xfrm>
-            <a:off x="4617720" y="2331720"/>
-            <a:ext cx="3017520" cy="1463040"/>
+            <a:off x="4617720" y="2377440"/>
+            <a:ext cx="3017520" cy="1371600"/>
           </a:xfrm>
           <a:prstGeom prst="rect">
             <a:avLst/>
@@ -9274,7 +11576,7 @@
           <a:p>
             <a:pPr algn="ctr"/>
             <a:r>
-              <a:rPr sz="6000" b="1" i="0">
+              <a:rPr sz="5800" b="1" i="0">
                 <a:solidFill>
                   <a:srgbClr val="1E2761"/>
                 </a:solidFill>
@@ -9287,13 +11589,13 @@
       </p:sp>
       <p:sp>
         <p:nvSpPr>
-          <p:cNvPr id="12" name="TextBox 11"/>
+          <p:cNvPr id="14" name="TextBox 13"/>
           <p:cNvSpPr txBox="1"/>
           <p:nvPr/>
         </p:nvSpPr>
         <p:spPr>
           <a:xfrm>
-            <a:off x="4846320" y="3611880"/>
+            <a:off x="4846320" y="3657600"/>
             <a:ext cx="2560320" cy="1005840"/>
           </a:xfrm>
           <a:prstGeom prst="rect">
@@ -9322,7 +11624,7 @@
       </p:sp>
       <p:sp>
         <p:nvSpPr>
-          <p:cNvPr id="13" name="Rounded Rectangle 12"/>
+          <p:cNvPr id="15" name="Rounded Rectangle 14"/>
           <p:cNvSpPr/>
           <p:nvPr/>
         </p:nvSpPr>
@@ -9368,14 +11670,58 @@
       </p:sp>
       <p:sp>
         <p:nvSpPr>
-          <p:cNvPr id="14" name="TextBox 13"/>
+          <p:cNvPr id="16" name="Rectangle 15"/>
+          <p:cNvSpPr/>
+          <p:nvPr/>
+        </p:nvSpPr>
+        <p:spPr>
+          <a:xfrm>
+            <a:off x="8412480" y="2011680"/>
+            <a:ext cx="3017520" cy="128016"/>
+          </a:xfrm>
+          <a:prstGeom prst="rect">
+            <a:avLst/>
+          </a:prstGeom>
+          <a:solidFill>
+            <a:srgbClr val="E8801A"/>
+          </a:solidFill>
+          <a:ln>
+            <a:noFill/>
+          </a:ln>
+          <a:effectLst/>
+        </p:spPr>
+        <p:style>
+          <a:lnRef idx="1">
+            <a:schemeClr val="accent1"/>
+          </a:lnRef>
+          <a:fillRef idx="3">
+            <a:schemeClr val="accent1"/>
+          </a:fillRef>
+          <a:effectRef idx="2">
+            <a:schemeClr val="accent1"/>
+          </a:effectRef>
+          <a:fontRef idx="minor">
+            <a:schemeClr val="lt1"/>
+          </a:fontRef>
+        </p:style>
+        <p:txBody>
+          <a:bodyPr rtlCol="0" anchor="ctr"/>
+          <a:lstStyle/>
+          <a:p>
+            <a:pPr algn="ctr"/>
+          </a:p>
+        </p:txBody>
+      </p:sp>
+      <p:sp>
+        <p:nvSpPr>
+          <p:cNvPr id="17" name="TextBox 16"/>
           <p:cNvSpPr txBox="1"/>
           <p:nvPr/>
         </p:nvSpPr>
         <p:spPr>
           <a:xfrm>
-            <a:off x="8412480" y="2331720"/>
-            <a:ext cx="3017520" cy="1463040"/>
+            <a:off x="8412480" y="2377440"/>
+            <a:ext cx="3017520" cy="1371600"/>
           </a:xfrm>
           <a:prstGeom prst="rect">
             <a:avLst/>
@@ -9390,7 +11736,7 @@
           <a:p>
             <a:pPr algn="ctr"/>
             <a:r>
-              <a:rPr sz="6000" b="1" i="0">
+              <a:rPr sz="5800" b="1" i="0">
                 <a:solidFill>
                   <a:srgbClr val="1E2761"/>
                 </a:solidFill>
@@ -9403,13 +11749,13 @@
       </p:sp>
       <p:sp>
         <p:nvSpPr>
-          <p:cNvPr id="15" name="TextBox 14"/>
+          <p:cNvPr id="18" name="TextBox 17"/>
           <p:cNvSpPr txBox="1"/>
           <p:nvPr/>
         </p:nvSpPr>
         <p:spPr>
           <a:xfrm>
-            <a:off x="8641080" y="3611880"/>
+            <a:off x="8641080" y="3657600"/>
             <a:ext cx="2560320" cy="1005840"/>
           </a:xfrm>
           <a:prstGeom prst="rect">
@@ -9441,6 +11787,2214 @@
   <p:clrMapOvr>
     <a:masterClrMapping/>
   </p:clrMapOvr>
+  <mc:AlternateContent xmlns:mc="http://schemas.openxmlformats.org/markup-compatibility/2006">
+    <mc:Choice xmlns:p14="http://schemas.microsoft.com/office/powerpoint/2010/main" Requires="p14">
+      <p:transition spd="med" p14:dur="700">
+        <p14:cube dir="r"/>
+      </p:transition>
+    </mc:Choice>
+    <mc:Fallback>
+      <p:transition spd="med">
+        <p:push dir="r"/>
+      </p:transition>
+    </mc:Fallback>
+  </mc:AlternateContent>
+</p:sld>
+</file>
+
+<file path=ppt/slides/slide20.xml><?xml version="1.0" encoding="utf-8"?>
+<p:sld xmlns:a="http://schemas.openxmlformats.org/drawingml/2006/main" xmlns:p="http://schemas.openxmlformats.org/presentationml/2006/main" xmlns:r="http://schemas.openxmlformats.org/officeDocument/2006/relationships">
+  <p:cSld>
+    <p:spTree>
+      <p:nvGrpSpPr>
+        <p:cNvPr id="1" name=""/>
+        <p:cNvGrpSpPr/>
+        <p:nvPr/>
+      </p:nvGrpSpPr>
+      <p:grpSpPr/>
+      <p:sp>
+        <p:nvSpPr>
+          <p:cNvPr id="2" name="Rectangle 1"/>
+          <p:cNvSpPr/>
+          <p:nvPr/>
+        </p:nvSpPr>
+        <p:spPr>
+          <a:xfrm>
+            <a:off x="0" y="0"/>
+            <a:ext cx="12191695" cy="6858000"/>
+          </a:xfrm>
+          <a:prstGeom prst="rect">
+            <a:avLst/>
+          </a:prstGeom>
+          <a:solidFill>
+            <a:srgbClr val="FFFFFF"/>
+          </a:solidFill>
+          <a:ln>
+            <a:noFill/>
+          </a:ln>
+          <a:effectLst/>
+        </p:spPr>
+        <p:style>
+          <a:lnRef idx="1">
+            <a:schemeClr val="accent1"/>
+          </a:lnRef>
+          <a:fillRef idx="3">
+            <a:schemeClr val="accent1"/>
+          </a:fillRef>
+          <a:effectRef idx="2">
+            <a:schemeClr val="accent1"/>
+          </a:effectRef>
+          <a:fontRef idx="minor">
+            <a:schemeClr val="lt1"/>
+          </a:fontRef>
+        </p:style>
+        <p:txBody>
+          <a:bodyPr rtlCol="0" anchor="ctr"/>
+          <a:lstStyle/>
+          <a:p>
+            <a:pPr algn="ctr"/>
+          </a:p>
+        </p:txBody>
+      </p:sp>
+      <p:sp>
+        <p:nvSpPr>
+          <p:cNvPr id="3" name="TextBox 2"/>
+          <p:cNvSpPr txBox="1"/>
+          <p:nvPr/>
+        </p:nvSpPr>
+        <p:spPr>
+          <a:xfrm>
+            <a:off x="10607040" y="320040"/>
+            <a:ext cx="1371600" cy="365760"/>
+          </a:xfrm>
+          <a:prstGeom prst="rect">
+            <a:avLst/>
+          </a:prstGeom>
+          <a:noFill/>
+        </p:spPr>
+        <p:txBody>
+          <a:bodyPr wrap="square">
+            <a:spAutoFit/>
+          </a:bodyPr>
+          <a:lstStyle/>
+          <a:p>
+            <a:pPr algn="r"/>
+            <a:r>
+              <a:rPr sz="1000" b="1" i="0">
+                <a:solidFill>
+                  <a:srgbClr val="64748B"/>
+                </a:solidFill>
+                <a:latin typeface="Montserrat"/>
+              </a:rPr>
+              <a:t>020 / 024</a:t>
+            </a:r>
+          </a:p>
+        </p:txBody>
+      </p:sp>
+      <p:sp>
+        <p:nvSpPr>
+          <p:cNvPr id="4" name="TextBox 3"/>
+          <p:cNvSpPr txBox="1"/>
+          <p:nvPr/>
+        </p:nvSpPr>
+        <p:spPr>
+          <a:xfrm>
+            <a:off x="457200" y="6419088"/>
+            <a:ext cx="8229600" cy="365760"/>
+          </a:xfrm>
+          <a:prstGeom prst="rect">
+            <a:avLst/>
+          </a:prstGeom>
+          <a:noFill/>
+        </p:spPr>
+        <p:txBody>
+          <a:bodyPr wrap="square">
+            <a:spAutoFit/>
+          </a:bodyPr>
+          <a:lstStyle/>
+          <a:p>
+            <a:r>
+              <a:rPr sz="900" b="0" i="0">
+                <a:solidFill>
+                  <a:srgbClr val="64748B"/>
+                </a:solidFill>
+                <a:latin typeface="Montserrat"/>
+              </a:rPr>
+              <a:t>Curso Gas B · Tema 00 · El Reglamento de Gas</a:t>
+            </a:r>
+          </a:p>
+        </p:txBody>
+      </p:sp>
+      <p:sp>
+        <p:nvSpPr>
+          <p:cNvPr id="5" name="TextBox 4"/>
+          <p:cNvSpPr txBox="1"/>
+          <p:nvPr/>
+        </p:nvSpPr>
+        <p:spPr>
+          <a:xfrm>
+            <a:off x="822960" y="457200"/>
+            <a:ext cx="10058400" cy="365760"/>
+          </a:xfrm>
+          <a:prstGeom prst="rect">
+            <a:avLst/>
+          </a:prstGeom>
+          <a:noFill/>
+        </p:spPr>
+        <p:txBody>
+          <a:bodyPr wrap="square">
+            <a:spAutoFit/>
+          </a:bodyPr>
+          <a:lstStyle/>
+          <a:p>
+            <a:r>
+              <a:rPr sz="1300" b="1" i="0">
+                <a:solidFill>
+                  <a:srgbClr val="E8801A"/>
+                </a:solidFill>
+                <a:latin typeface="Montserrat"/>
+              </a:rPr>
+              <a:t>ARTÍCULO 5.8 · PUESTA EN MARCHA</a:t>
+            </a:r>
+          </a:p>
+        </p:txBody>
+      </p:sp>
+      <p:sp>
+        <p:nvSpPr>
+          <p:cNvPr id="6" name="TextBox 5"/>
+          <p:cNvSpPr txBox="1"/>
+          <p:nvPr/>
+        </p:nvSpPr>
+        <p:spPr>
+          <a:xfrm>
+            <a:off x="822960" y="868680"/>
+            <a:ext cx="10515600" cy="914400"/>
+          </a:xfrm>
+          <a:prstGeom prst="rect">
+            <a:avLst/>
+          </a:prstGeom>
+          <a:noFill/>
+        </p:spPr>
+        <p:txBody>
+          <a:bodyPr wrap="square">
+            <a:spAutoFit/>
+          </a:bodyPr>
+          <a:lstStyle/>
+          <a:p>
+            <a:r>
+              <a:rPr sz="2800" b="1" i="0">
+                <a:solidFill>
+                  <a:srgbClr val="1E2761"/>
+                </a:solidFill>
+                <a:latin typeface="Montserrat"/>
+              </a:rPr>
+              <a:t>Arrancar el aparato, no solo encenderlo</a:t>
+            </a:r>
+          </a:p>
+        </p:txBody>
+      </p:sp>
+      <p:sp>
+        <p:nvSpPr>
+          <p:cNvPr id="7" name="Rectangle 6"/>
+          <p:cNvSpPr/>
+          <p:nvPr/>
+        </p:nvSpPr>
+        <p:spPr>
+          <a:xfrm>
+            <a:off x="868680" y="1627632"/>
+            <a:ext cx="2011680" cy="73152"/>
+          </a:xfrm>
+          <a:prstGeom prst="rect">
+            <a:avLst/>
+          </a:prstGeom>
+          <a:solidFill>
+            <a:srgbClr val="E8801A"/>
+          </a:solidFill>
+          <a:ln>
+            <a:noFill/>
+          </a:ln>
+          <a:effectLst/>
+        </p:spPr>
+        <p:style>
+          <a:lnRef idx="1">
+            <a:schemeClr val="accent1"/>
+          </a:lnRef>
+          <a:fillRef idx="3">
+            <a:schemeClr val="accent1"/>
+          </a:fillRef>
+          <a:effectRef idx="2">
+            <a:schemeClr val="accent1"/>
+          </a:effectRef>
+          <a:fontRef idx="minor">
+            <a:schemeClr val="lt1"/>
+          </a:fontRef>
+        </p:style>
+        <p:txBody>
+          <a:bodyPr rtlCol="0" anchor="ctr"/>
+          <a:lstStyle/>
+          <a:p>
+            <a:pPr algn="ctr"/>
+          </a:p>
+        </p:txBody>
+      </p:sp>
+      <p:sp>
+        <p:nvSpPr>
+          <p:cNvPr id="8" name="TextBox 7"/>
+          <p:cNvSpPr txBox="1"/>
+          <p:nvPr/>
+        </p:nvSpPr>
+        <p:spPr>
+          <a:xfrm>
+            <a:off x="822960" y="1965960"/>
+            <a:ext cx="5029200" cy="4206240"/>
+          </a:xfrm>
+          <a:prstGeom prst="rect">
+            <a:avLst/>
+          </a:prstGeom>
+          <a:noFill/>
+        </p:spPr>
+        <p:txBody>
+          <a:bodyPr wrap="square">
+            <a:spAutoFit/>
+          </a:bodyPr>
+          <a:lstStyle/>
+          <a:p>
+            <a:pPr>
+              <a:spcAft>
+                <a:spcPts val="1100"/>
+              </a:spcAft>
+            </a:pPr>
+            <a:r>
+              <a:rPr sz="1600" b="1" i="0">
+                <a:solidFill>
+                  <a:srgbClr val="E8801A"/>
+                </a:solidFill>
+                <a:latin typeface="Montserrat"/>
+              </a:rPr>
+              <a:t>▸  </a:t>
+            </a:r>
+            <a:r>
+              <a:rPr sz="1600" b="0" i="0">
+                <a:solidFill>
+                  <a:srgbClr val="1B2330"/>
+                </a:solidFill>
+                <a:latin typeface="Montserrat"/>
+              </a:rPr>
+              <a:t>Según la ITC-ICG 08</a:t>
+            </a:r>
+          </a:p>
+          <a:p>
+            <a:pPr>
+              <a:spcAft>
+                <a:spcPts val="1100"/>
+              </a:spcAft>
+            </a:pPr>
+            <a:r>
+              <a:rPr sz="1600" b="1" i="0">
+                <a:solidFill>
+                  <a:srgbClr val="E8801A"/>
+                </a:solidFill>
+                <a:latin typeface="Montserrat"/>
+              </a:rPr>
+              <a:t>▸  </a:t>
+            </a:r>
+            <a:r>
+              <a:rPr sz="1600" b="0" i="0">
+                <a:solidFill>
+                  <a:srgbClr val="1B2330"/>
+                </a:solidFill>
+                <a:latin typeface="Montserrat"/>
+              </a:rPr>
+              <a:t>Verifica gas, presión y combustión</a:t>
+            </a:r>
+          </a:p>
+          <a:p>
+            <a:pPr>
+              <a:spcAft>
+                <a:spcPts val="1100"/>
+              </a:spcAft>
+            </a:pPr>
+            <a:r>
+              <a:rPr sz="1600" b="1" i="0">
+                <a:solidFill>
+                  <a:srgbClr val="E8801A"/>
+                </a:solidFill>
+                <a:latin typeface="Montserrat"/>
+              </a:rPr>
+              <a:t>▸  </a:t>
+            </a:r>
+            <a:r>
+              <a:rPr sz="1600" b="0" i="0">
+                <a:solidFill>
+                  <a:srgbClr val="1B2330"/>
+                </a:solidFill>
+                <a:latin typeface="Montserrat"/>
+              </a:rPr>
+              <a:t>Certificado que se entrega al usuario</a:t>
+            </a:r>
+          </a:p>
+        </p:txBody>
+      </p:sp>
+      <p:sp>
+        <p:nvSpPr>
+          <p:cNvPr id="9" name="imgph" descr="IMGQ:technician adjusting gas boiler"/>
+          <p:cNvSpPr/>
+          <p:nvPr/>
+        </p:nvSpPr>
+        <p:spPr>
+          <a:xfrm>
+            <a:off x="6080760" y="1965960"/>
+            <a:ext cx="5303520" cy="4572000"/>
+          </a:xfrm>
+          <a:prstGeom prst="roundRect">
+            <a:avLst/>
+          </a:prstGeom>
+          <a:solidFill>
+            <a:srgbClr val="F3F6FB"/>
+          </a:solidFill>
+          <a:ln w="12700">
+            <a:solidFill>
+              <a:srgbClr val="C7D2E6"/>
+            </a:solidFill>
+          </a:ln>
+          <a:effectLst/>
+        </p:spPr>
+        <p:style>
+          <a:lnRef idx="1">
+            <a:schemeClr val="accent1"/>
+          </a:lnRef>
+          <a:fillRef idx="3">
+            <a:schemeClr val="accent1"/>
+          </a:fillRef>
+          <a:effectRef idx="2">
+            <a:schemeClr val="accent1"/>
+          </a:effectRef>
+          <a:fontRef idx="minor">
+            <a:schemeClr val="lt1"/>
+          </a:fontRef>
+        </p:style>
+        <p:txBody>
+          <a:bodyPr rtlCol="0" anchor="ctr"/>
+          <a:lstStyle/>
+          <a:p>
+            <a:pPr algn="ctr"/>
+          </a:p>
+        </p:txBody>
+      </p:sp>
+      <p:sp>
+        <p:nvSpPr>
+          <p:cNvPr id="10" name="TextBox 9"/>
+          <p:cNvSpPr txBox="1"/>
+          <p:nvPr/>
+        </p:nvSpPr>
+        <p:spPr>
+          <a:xfrm>
+            <a:off x="6355080" y="3611880"/>
+            <a:ext cx="4754880" cy="1280160"/>
+          </a:xfrm>
+          <a:prstGeom prst="rect">
+            <a:avLst/>
+          </a:prstGeom>
+          <a:noFill/>
+        </p:spPr>
+        <p:txBody>
+          <a:bodyPr wrap="square">
+            <a:spAutoFit/>
+          </a:bodyPr>
+          <a:lstStyle/>
+          <a:p>
+            <a:pPr algn="ctr"/>
+            <a:r>
+              <a:rPr sz="1400" b="1" i="0">
+                <a:solidFill>
+                  <a:srgbClr val="64748B"/>
+                </a:solidFill>
+                <a:latin typeface="Montserrat"/>
+              </a:rPr>
+              <a:t>IMAGEN</a:t>
+            </a:r>
+          </a:p>
+          <a:p>
+            <a:pPr algn="ctr"/>
+            <a:r>
+              <a:rPr sz="1100" b="0" i="1">
+                <a:solidFill>
+                  <a:srgbClr val="64748B"/>
+                </a:solidFill>
+                <a:latin typeface="Montserrat"/>
+              </a:rPr>
+              <a:t>technician adjusting gas boiler</a:t>
+            </a:r>
+          </a:p>
+        </p:txBody>
+      </p:sp>
+    </p:spTree>
+  </p:cSld>
+  <p:clrMapOvr>
+    <a:masterClrMapping/>
+  </p:clrMapOvr>
+  <mc:AlternateContent xmlns:mc="http://schemas.openxmlformats.org/markup-compatibility/2006">
+    <mc:Choice xmlns:p14="http://schemas.microsoft.com/office/powerpoint/2010/main" Requires="p14">
+      <p:transition spd="med" p14:dur="700">
+        <p14:cube dir="r"/>
+      </p:transition>
+    </mc:Choice>
+    <mc:Fallback>
+      <p:transition spd="med">
+        <p:push dir="r"/>
+      </p:transition>
+    </mc:Fallback>
+  </mc:AlternateContent>
+</p:sld>
+</file>
+
+<file path=ppt/slides/slide21.xml><?xml version="1.0" encoding="utf-8"?>
+<p:sld xmlns:a="http://schemas.openxmlformats.org/drawingml/2006/main" xmlns:p="http://schemas.openxmlformats.org/presentationml/2006/main" xmlns:r="http://schemas.openxmlformats.org/officeDocument/2006/relationships">
+  <p:cSld>
+    <p:spTree>
+      <p:nvGrpSpPr>
+        <p:cNvPr id="1" name=""/>
+        <p:cNvGrpSpPr/>
+        <p:nvPr/>
+      </p:nvGrpSpPr>
+      <p:grpSpPr/>
+      <p:sp>
+        <p:nvSpPr>
+          <p:cNvPr id="2" name="Rectangle 1"/>
+          <p:cNvSpPr/>
+          <p:nvPr/>
+        </p:nvSpPr>
+        <p:spPr>
+          <a:xfrm>
+            <a:off x="0" y="0"/>
+            <a:ext cx="12191695" cy="6858000"/>
+          </a:xfrm>
+          <a:prstGeom prst="rect">
+            <a:avLst/>
+          </a:prstGeom>
+          <a:solidFill>
+            <a:srgbClr val="FFFFFF"/>
+          </a:solidFill>
+          <a:ln>
+            <a:noFill/>
+          </a:ln>
+          <a:effectLst/>
+        </p:spPr>
+        <p:style>
+          <a:lnRef idx="1">
+            <a:schemeClr val="accent1"/>
+          </a:lnRef>
+          <a:fillRef idx="3">
+            <a:schemeClr val="accent1"/>
+          </a:fillRef>
+          <a:effectRef idx="2">
+            <a:schemeClr val="accent1"/>
+          </a:effectRef>
+          <a:fontRef idx="minor">
+            <a:schemeClr val="lt1"/>
+          </a:fontRef>
+        </p:style>
+        <p:txBody>
+          <a:bodyPr rtlCol="0" anchor="ctr"/>
+          <a:lstStyle/>
+          <a:p>
+            <a:pPr algn="ctr"/>
+          </a:p>
+        </p:txBody>
+      </p:sp>
+      <p:sp>
+        <p:nvSpPr>
+          <p:cNvPr id="3" name="TextBox 2"/>
+          <p:cNvSpPr txBox="1"/>
+          <p:nvPr/>
+        </p:nvSpPr>
+        <p:spPr>
+          <a:xfrm>
+            <a:off x="10607040" y="320040"/>
+            <a:ext cx="1371600" cy="365760"/>
+          </a:xfrm>
+          <a:prstGeom prst="rect">
+            <a:avLst/>
+          </a:prstGeom>
+          <a:noFill/>
+        </p:spPr>
+        <p:txBody>
+          <a:bodyPr wrap="square">
+            <a:spAutoFit/>
+          </a:bodyPr>
+          <a:lstStyle/>
+          <a:p>
+            <a:pPr algn="r"/>
+            <a:r>
+              <a:rPr sz="1000" b="1" i="0">
+                <a:solidFill>
+                  <a:srgbClr val="64748B"/>
+                </a:solidFill>
+                <a:latin typeface="Montserrat"/>
+              </a:rPr>
+              <a:t>021 / 024</a:t>
+            </a:r>
+          </a:p>
+        </p:txBody>
+      </p:sp>
+      <p:sp>
+        <p:nvSpPr>
+          <p:cNvPr id="4" name="TextBox 3"/>
+          <p:cNvSpPr txBox="1"/>
+          <p:nvPr/>
+        </p:nvSpPr>
+        <p:spPr>
+          <a:xfrm>
+            <a:off x="457200" y="6419088"/>
+            <a:ext cx="8229600" cy="365760"/>
+          </a:xfrm>
+          <a:prstGeom prst="rect">
+            <a:avLst/>
+          </a:prstGeom>
+          <a:noFill/>
+        </p:spPr>
+        <p:txBody>
+          <a:bodyPr wrap="square">
+            <a:spAutoFit/>
+          </a:bodyPr>
+          <a:lstStyle/>
+          <a:p>
+            <a:r>
+              <a:rPr sz="900" b="0" i="0">
+                <a:solidFill>
+                  <a:srgbClr val="64748B"/>
+                </a:solidFill>
+                <a:latin typeface="Montserrat"/>
+              </a:rPr>
+              <a:t>Curso Gas B · Tema 00 · El Reglamento de Gas</a:t>
+            </a:r>
+          </a:p>
+        </p:txBody>
+      </p:sp>
+      <p:sp>
+        <p:nvSpPr>
+          <p:cNvPr id="5" name="TextBox 4"/>
+          <p:cNvSpPr txBox="1"/>
+          <p:nvPr/>
+        </p:nvSpPr>
+        <p:spPr>
+          <a:xfrm>
+            <a:off x="822960" y="457200"/>
+            <a:ext cx="10058400" cy="365760"/>
+          </a:xfrm>
+          <a:prstGeom prst="rect">
+            <a:avLst/>
+          </a:prstGeom>
+          <a:noFill/>
+        </p:spPr>
+        <p:txBody>
+          <a:bodyPr wrap="square">
+            <a:spAutoFit/>
+          </a:bodyPr>
+          <a:lstStyle/>
+          <a:p>
+            <a:r>
+              <a:rPr sz="1300" b="1" i="0">
+                <a:solidFill>
+                  <a:srgbClr val="E8801A"/>
+                </a:solidFill>
+                <a:latin typeface="Montserrat"/>
+              </a:rPr>
+              <a:t>ARTÍCULO 5 · LOS TRES CERTIFICADOS</a:t>
+            </a:r>
+          </a:p>
+        </p:txBody>
+      </p:sp>
+      <p:sp>
+        <p:nvSpPr>
+          <p:cNvPr id="6" name="TextBox 5"/>
+          <p:cNvSpPr txBox="1"/>
+          <p:nvPr/>
+        </p:nvSpPr>
+        <p:spPr>
+          <a:xfrm>
+            <a:off x="822960" y="868680"/>
+            <a:ext cx="10515600" cy="914400"/>
+          </a:xfrm>
+          <a:prstGeom prst="rect">
+            <a:avLst/>
+          </a:prstGeom>
+          <a:noFill/>
+        </p:spPr>
+        <p:txBody>
+          <a:bodyPr wrap="square">
+            <a:spAutoFit/>
+          </a:bodyPr>
+          <a:lstStyle/>
+          <a:p>
+            <a:r>
+              <a:rPr sz="2800" b="1" i="0">
+                <a:solidFill>
+                  <a:srgbClr val="1E2761"/>
+                </a:solidFill>
+                <a:latin typeface="Montserrat"/>
+              </a:rPr>
+              <a:t>Quién firma cada papel</a:t>
+            </a:r>
+          </a:p>
+        </p:txBody>
+      </p:sp>
+      <p:sp>
+        <p:nvSpPr>
+          <p:cNvPr id="7" name="Rectangle 6"/>
+          <p:cNvSpPr/>
+          <p:nvPr/>
+        </p:nvSpPr>
+        <p:spPr>
+          <a:xfrm>
+            <a:off x="868680" y="1627632"/>
+            <a:ext cx="2011680" cy="73152"/>
+          </a:xfrm>
+          <a:prstGeom prst="rect">
+            <a:avLst/>
+          </a:prstGeom>
+          <a:solidFill>
+            <a:srgbClr val="E8801A"/>
+          </a:solidFill>
+          <a:ln>
+            <a:noFill/>
+          </a:ln>
+          <a:effectLst/>
+        </p:spPr>
+        <p:style>
+          <a:lnRef idx="1">
+            <a:schemeClr val="accent1"/>
+          </a:lnRef>
+          <a:fillRef idx="3">
+            <a:schemeClr val="accent1"/>
+          </a:fillRef>
+          <a:effectRef idx="2">
+            <a:schemeClr val="accent1"/>
+          </a:effectRef>
+          <a:fontRef idx="minor">
+            <a:schemeClr val="lt1"/>
+          </a:fontRef>
+        </p:style>
+        <p:txBody>
+          <a:bodyPr rtlCol="0" anchor="ctr"/>
+          <a:lstStyle/>
+          <a:p>
+            <a:pPr algn="ctr"/>
+          </a:p>
+        </p:txBody>
+      </p:sp>
+      <p:sp>
+        <p:nvSpPr>
+          <p:cNvPr id="8" name="TextBox 7"/>
+          <p:cNvSpPr txBox="1"/>
+          <p:nvPr/>
+        </p:nvSpPr>
+        <p:spPr>
+          <a:xfrm>
+            <a:off x="6355080" y="1965960"/>
+            <a:ext cx="5029200" cy="4206240"/>
+          </a:xfrm>
+          <a:prstGeom prst="rect">
+            <a:avLst/>
+          </a:prstGeom>
+          <a:noFill/>
+        </p:spPr>
+        <p:txBody>
+          <a:bodyPr wrap="square">
+            <a:spAutoFit/>
+          </a:bodyPr>
+          <a:lstStyle/>
+          <a:p>
+            <a:pPr>
+              <a:spcAft>
+                <a:spcPts val="1100"/>
+              </a:spcAft>
+            </a:pPr>
+            <a:r>
+              <a:rPr sz="1600" b="1" i="0">
+                <a:solidFill>
+                  <a:srgbClr val="E8801A"/>
+                </a:solidFill>
+                <a:latin typeface="Montserrat"/>
+              </a:rPr>
+              <a:t>▸  </a:t>
+            </a:r>
+            <a:r>
+              <a:rPr sz="1600" b="0" i="0">
+                <a:solidFill>
+                  <a:srgbClr val="1B2330"/>
+                </a:solidFill>
+                <a:latin typeface="Montserrat"/>
+              </a:rPr>
+              <a:t>Instalación: la empresa que ejecuta</a:t>
+            </a:r>
+          </a:p>
+          <a:p>
+            <a:pPr>
+              <a:spcAft>
+                <a:spcPts val="1100"/>
+              </a:spcAft>
+            </a:pPr>
+            <a:r>
+              <a:rPr sz="1600" b="1" i="0">
+                <a:solidFill>
+                  <a:srgbClr val="E8801A"/>
+                </a:solidFill>
+                <a:latin typeface="Montserrat"/>
+              </a:rPr>
+              <a:t>▸  </a:t>
+            </a:r>
+            <a:r>
+              <a:rPr sz="1600" b="0" i="0">
+                <a:solidFill>
+                  <a:srgbClr val="1B2330"/>
+                </a:solidFill>
+                <a:latin typeface="Montserrat"/>
+              </a:rPr>
+              <a:t>Dirección de obra: el director (si hay proyecto)</a:t>
+            </a:r>
+          </a:p>
+          <a:p>
+            <a:pPr>
+              <a:spcAft>
+                <a:spcPts val="1100"/>
+              </a:spcAft>
+            </a:pPr>
+            <a:r>
+              <a:rPr sz="1600" b="1" i="0">
+                <a:solidFill>
+                  <a:srgbClr val="E8801A"/>
+                </a:solidFill>
+                <a:latin typeface="Montserrat"/>
+              </a:rPr>
+              <a:t>▸  </a:t>
+            </a:r>
+            <a:r>
+              <a:rPr sz="1600" b="0" i="0">
+                <a:solidFill>
+                  <a:srgbClr val="1B2330"/>
+                </a:solidFill>
+                <a:latin typeface="Montserrat"/>
+              </a:rPr>
+              <a:t>Puesta en marcha: el agente, al usuario</a:t>
+            </a:r>
+          </a:p>
+        </p:txBody>
+      </p:sp>
+      <p:sp>
+        <p:nvSpPr>
+          <p:cNvPr id="9" name="imgph" descr="IMGQ:stack of official signed documents desk"/>
+          <p:cNvSpPr/>
+          <p:nvPr/>
+        </p:nvSpPr>
+        <p:spPr>
+          <a:xfrm>
+            <a:off x="822960" y="1965960"/>
+            <a:ext cx="5303520" cy="4572000"/>
+          </a:xfrm>
+          <a:prstGeom prst="roundRect">
+            <a:avLst/>
+          </a:prstGeom>
+          <a:solidFill>
+            <a:srgbClr val="F3F6FB"/>
+          </a:solidFill>
+          <a:ln w="12700">
+            <a:solidFill>
+              <a:srgbClr val="C7D2E6"/>
+            </a:solidFill>
+          </a:ln>
+          <a:effectLst/>
+        </p:spPr>
+        <p:style>
+          <a:lnRef idx="1">
+            <a:schemeClr val="accent1"/>
+          </a:lnRef>
+          <a:fillRef idx="3">
+            <a:schemeClr val="accent1"/>
+          </a:fillRef>
+          <a:effectRef idx="2">
+            <a:schemeClr val="accent1"/>
+          </a:effectRef>
+          <a:fontRef idx="minor">
+            <a:schemeClr val="lt1"/>
+          </a:fontRef>
+        </p:style>
+        <p:txBody>
+          <a:bodyPr rtlCol="0" anchor="ctr"/>
+          <a:lstStyle/>
+          <a:p>
+            <a:pPr algn="ctr"/>
+          </a:p>
+        </p:txBody>
+      </p:sp>
+      <p:sp>
+        <p:nvSpPr>
+          <p:cNvPr id="10" name="TextBox 9"/>
+          <p:cNvSpPr txBox="1"/>
+          <p:nvPr/>
+        </p:nvSpPr>
+        <p:spPr>
+          <a:xfrm>
+            <a:off x="1097280" y="3611880"/>
+            <a:ext cx="4754880" cy="1280160"/>
+          </a:xfrm>
+          <a:prstGeom prst="rect">
+            <a:avLst/>
+          </a:prstGeom>
+          <a:noFill/>
+        </p:spPr>
+        <p:txBody>
+          <a:bodyPr wrap="square">
+            <a:spAutoFit/>
+          </a:bodyPr>
+          <a:lstStyle/>
+          <a:p>
+            <a:pPr algn="ctr"/>
+            <a:r>
+              <a:rPr sz="1400" b="1" i="0">
+                <a:solidFill>
+                  <a:srgbClr val="64748B"/>
+                </a:solidFill>
+                <a:latin typeface="Montserrat"/>
+              </a:rPr>
+              <a:t>IMAGEN</a:t>
+            </a:r>
+          </a:p>
+          <a:p>
+            <a:pPr algn="ctr"/>
+            <a:r>
+              <a:rPr sz="1100" b="0" i="1">
+                <a:solidFill>
+                  <a:srgbClr val="64748B"/>
+                </a:solidFill>
+                <a:latin typeface="Montserrat"/>
+              </a:rPr>
+              <a:t>stack of official signed documents desk</a:t>
+            </a:r>
+          </a:p>
+        </p:txBody>
+      </p:sp>
+    </p:spTree>
+  </p:cSld>
+  <p:clrMapOvr>
+    <a:masterClrMapping/>
+  </p:clrMapOvr>
+  <mc:AlternateContent xmlns:mc="http://schemas.openxmlformats.org/markup-compatibility/2006">
+    <mc:Choice xmlns:p14="http://schemas.microsoft.com/office/powerpoint/2010/main" Requires="p14">
+      <p:transition spd="med" p14:dur="700">
+        <p14:cube dir="l"/>
+      </p:transition>
+    </mc:Choice>
+    <mc:Fallback>
+      <p:transition spd="med">
+        <p:push dir="l"/>
+      </p:transition>
+    </mc:Fallback>
+  </mc:AlternateContent>
+</p:sld>
+</file>
+
+<file path=ppt/slides/slide22.xml><?xml version="1.0" encoding="utf-8"?>
+<p:sld xmlns:a="http://schemas.openxmlformats.org/drawingml/2006/main" xmlns:p="http://schemas.openxmlformats.org/presentationml/2006/main" xmlns:r="http://schemas.openxmlformats.org/officeDocument/2006/relationships">
+  <p:cSld>
+    <p:spTree>
+      <p:nvGrpSpPr>
+        <p:cNvPr id="1" name=""/>
+        <p:cNvGrpSpPr/>
+        <p:nvPr/>
+      </p:nvGrpSpPr>
+      <p:grpSpPr/>
+      <p:sp>
+        <p:nvSpPr>
+          <p:cNvPr id="2" name="Rectangle 1"/>
+          <p:cNvSpPr/>
+          <p:nvPr/>
+        </p:nvSpPr>
+        <p:spPr>
+          <a:xfrm>
+            <a:off x="0" y="0"/>
+            <a:ext cx="12191695" cy="6858000"/>
+          </a:xfrm>
+          <a:prstGeom prst="rect">
+            <a:avLst/>
+          </a:prstGeom>
+          <a:solidFill>
+            <a:srgbClr val="FFFFFF"/>
+          </a:solidFill>
+          <a:ln>
+            <a:noFill/>
+          </a:ln>
+          <a:effectLst/>
+        </p:spPr>
+        <p:style>
+          <a:lnRef idx="1">
+            <a:schemeClr val="accent1"/>
+          </a:lnRef>
+          <a:fillRef idx="3">
+            <a:schemeClr val="accent1"/>
+          </a:fillRef>
+          <a:effectRef idx="2">
+            <a:schemeClr val="accent1"/>
+          </a:effectRef>
+          <a:fontRef idx="minor">
+            <a:schemeClr val="lt1"/>
+          </a:fontRef>
+        </p:style>
+        <p:txBody>
+          <a:bodyPr rtlCol="0" anchor="ctr"/>
+          <a:lstStyle/>
+          <a:p>
+            <a:pPr algn="ctr"/>
+          </a:p>
+        </p:txBody>
+      </p:sp>
+      <p:sp>
+        <p:nvSpPr>
+          <p:cNvPr id="3" name="TextBox 2"/>
+          <p:cNvSpPr txBox="1"/>
+          <p:nvPr/>
+        </p:nvSpPr>
+        <p:spPr>
+          <a:xfrm>
+            <a:off x="10607040" y="320040"/>
+            <a:ext cx="1371600" cy="365760"/>
+          </a:xfrm>
+          <a:prstGeom prst="rect">
+            <a:avLst/>
+          </a:prstGeom>
+          <a:noFill/>
+        </p:spPr>
+        <p:txBody>
+          <a:bodyPr wrap="square">
+            <a:spAutoFit/>
+          </a:bodyPr>
+          <a:lstStyle/>
+          <a:p>
+            <a:pPr algn="r"/>
+            <a:r>
+              <a:rPr sz="1000" b="1" i="0">
+                <a:solidFill>
+                  <a:srgbClr val="64748B"/>
+                </a:solidFill>
+                <a:latin typeface="Montserrat"/>
+              </a:rPr>
+              <a:t>022 / 024</a:t>
+            </a:r>
+          </a:p>
+        </p:txBody>
+      </p:sp>
+      <p:sp>
+        <p:nvSpPr>
+          <p:cNvPr id="4" name="TextBox 3"/>
+          <p:cNvSpPr txBox="1"/>
+          <p:nvPr/>
+        </p:nvSpPr>
+        <p:spPr>
+          <a:xfrm>
+            <a:off x="457200" y="6419088"/>
+            <a:ext cx="8229600" cy="365760"/>
+          </a:xfrm>
+          <a:prstGeom prst="rect">
+            <a:avLst/>
+          </a:prstGeom>
+          <a:noFill/>
+        </p:spPr>
+        <p:txBody>
+          <a:bodyPr wrap="square">
+            <a:spAutoFit/>
+          </a:bodyPr>
+          <a:lstStyle/>
+          <a:p>
+            <a:r>
+              <a:rPr sz="900" b="0" i="0">
+                <a:solidFill>
+                  <a:srgbClr val="64748B"/>
+                </a:solidFill>
+                <a:latin typeface="Montserrat"/>
+              </a:rPr>
+              <a:t>Curso Gas B · Tema 00 · El Reglamento de Gas</a:t>
+            </a:r>
+          </a:p>
+        </p:txBody>
+      </p:sp>
+      <p:sp>
+        <p:nvSpPr>
+          <p:cNvPr id="5" name="TextBox 4"/>
+          <p:cNvSpPr txBox="1"/>
+          <p:nvPr/>
+        </p:nvSpPr>
+        <p:spPr>
+          <a:xfrm>
+            <a:off x="822960" y="457200"/>
+            <a:ext cx="10058400" cy="365760"/>
+          </a:xfrm>
+          <a:prstGeom prst="rect">
+            <a:avLst/>
+          </a:prstGeom>
+          <a:noFill/>
+        </p:spPr>
+        <p:txBody>
+          <a:bodyPr wrap="square">
+            <a:spAutoFit/>
+          </a:bodyPr>
+          <a:lstStyle/>
+          <a:p>
+            <a:r>
+              <a:rPr sz="1300" b="1" i="0">
+                <a:solidFill>
+                  <a:srgbClr val="E8801A"/>
+                </a:solidFill>
+                <a:latin typeface="Montserrat"/>
+              </a:rPr>
+              <a:t>ARTÍCULO 6 · INFORMACIÓN AL USUARIO</a:t>
+            </a:r>
+          </a:p>
+        </p:txBody>
+      </p:sp>
+      <p:sp>
+        <p:nvSpPr>
+          <p:cNvPr id="6" name="TextBox 5"/>
+          <p:cNvSpPr txBox="1"/>
+          <p:nvPr/>
+        </p:nvSpPr>
+        <p:spPr>
+          <a:xfrm>
+            <a:off x="822960" y="868680"/>
+            <a:ext cx="10515600" cy="914400"/>
+          </a:xfrm>
+          <a:prstGeom prst="rect">
+            <a:avLst/>
+          </a:prstGeom>
+          <a:noFill/>
+        </p:spPr>
+        <p:txBody>
+          <a:bodyPr wrap="square">
+            <a:spAutoFit/>
+          </a:bodyPr>
+          <a:lstStyle/>
+          <a:p>
+            <a:r>
+              <a:rPr sz="2800" b="1" i="0">
+                <a:solidFill>
+                  <a:srgbClr val="1E2761"/>
+                </a:solidFill>
+                <a:latin typeface="Montserrat"/>
+              </a:rPr>
+              <a:t>El croquis y el recordatorio bienal</a:t>
+            </a:r>
+          </a:p>
+        </p:txBody>
+      </p:sp>
+      <p:sp>
+        <p:nvSpPr>
+          <p:cNvPr id="7" name="Rectangle 6"/>
+          <p:cNvSpPr/>
+          <p:nvPr/>
+        </p:nvSpPr>
+        <p:spPr>
+          <a:xfrm>
+            <a:off x="868680" y="1627632"/>
+            <a:ext cx="2011680" cy="73152"/>
+          </a:xfrm>
+          <a:prstGeom prst="rect">
+            <a:avLst/>
+          </a:prstGeom>
+          <a:solidFill>
+            <a:srgbClr val="E8801A"/>
+          </a:solidFill>
+          <a:ln>
+            <a:noFill/>
+          </a:ln>
+          <a:effectLst/>
+        </p:spPr>
+        <p:style>
+          <a:lnRef idx="1">
+            <a:schemeClr val="accent1"/>
+          </a:lnRef>
+          <a:fillRef idx="3">
+            <a:schemeClr val="accent1"/>
+          </a:fillRef>
+          <a:effectRef idx="2">
+            <a:schemeClr val="accent1"/>
+          </a:effectRef>
+          <a:fontRef idx="minor">
+            <a:schemeClr val="lt1"/>
+          </a:fontRef>
+        </p:style>
+        <p:txBody>
+          <a:bodyPr rtlCol="0" anchor="ctr"/>
+          <a:lstStyle/>
+          <a:p>
+            <a:pPr algn="ctr"/>
+          </a:p>
+        </p:txBody>
+      </p:sp>
+      <p:sp>
+        <p:nvSpPr>
+          <p:cNvPr id="8" name="TextBox 7"/>
+          <p:cNvSpPr txBox="1"/>
+          <p:nvPr/>
+        </p:nvSpPr>
+        <p:spPr>
+          <a:xfrm>
+            <a:off x="822960" y="1965960"/>
+            <a:ext cx="5029200" cy="4206240"/>
+          </a:xfrm>
+          <a:prstGeom prst="rect">
+            <a:avLst/>
+          </a:prstGeom>
+          <a:noFill/>
+        </p:spPr>
+        <p:txBody>
+          <a:bodyPr wrap="square">
+            <a:spAutoFit/>
+          </a:bodyPr>
+          <a:lstStyle/>
+          <a:p>
+            <a:pPr>
+              <a:spcAft>
+                <a:spcPts val="1100"/>
+              </a:spcAft>
+            </a:pPr>
+            <a:r>
+              <a:rPr sz="1600" b="1" i="0">
+                <a:solidFill>
+                  <a:srgbClr val="E8801A"/>
+                </a:solidFill>
+                <a:latin typeface="Montserrat"/>
+              </a:rPr>
+              <a:t>▸  </a:t>
+            </a:r>
+            <a:r>
+              <a:rPr sz="1600" b="0" i="0">
+                <a:solidFill>
+                  <a:srgbClr val="1B2330"/>
+                </a:solidFill>
+                <a:latin typeface="Montserrat"/>
+              </a:rPr>
+              <a:t>Instrucciones de uso y mantenimiento</a:t>
+            </a:r>
+          </a:p>
+          <a:p>
+            <a:pPr>
+              <a:spcAft>
+                <a:spcPts val="1100"/>
+              </a:spcAft>
+            </a:pPr>
+            <a:r>
+              <a:rPr sz="1600" b="1" i="0">
+                <a:solidFill>
+                  <a:srgbClr val="E8801A"/>
+                </a:solidFill>
+                <a:latin typeface="Montserrat"/>
+              </a:rPr>
+              <a:t>▸  </a:t>
+            </a:r>
+            <a:r>
+              <a:rPr sz="1600" b="0" i="0">
+                <a:solidFill>
+                  <a:srgbClr val="1B2330"/>
+                </a:solidFill>
+                <a:latin typeface="Montserrat"/>
+              </a:rPr>
+              <a:t>Croquis del trazado, anexo al boletín</a:t>
+            </a:r>
+          </a:p>
+          <a:p>
+            <a:pPr>
+              <a:spcAft>
+                <a:spcPts val="1100"/>
+              </a:spcAft>
+            </a:pPr>
+            <a:r>
+              <a:rPr sz="1600" b="1" i="0">
+                <a:solidFill>
+                  <a:srgbClr val="E8801A"/>
+                </a:solidFill>
+                <a:latin typeface="Montserrat"/>
+              </a:rPr>
+              <a:t>▸  </a:t>
+            </a:r>
+            <a:r>
+              <a:rPr sz="1600" b="0" i="0">
+                <a:solidFill>
+                  <a:srgbClr val="1B2330"/>
+                </a:solidFill>
+                <a:latin typeface="Montserrat"/>
+              </a:rPr>
+              <a:t>Suministrador recuerda, mínimo cada dos años</a:t>
+            </a:r>
+          </a:p>
+        </p:txBody>
+      </p:sp>
+      <p:sp>
+        <p:nvSpPr>
+          <p:cNvPr id="9" name="imgph" descr="IMGQ:hand drawn house pipe sketch plan"/>
+          <p:cNvSpPr/>
+          <p:nvPr/>
+        </p:nvSpPr>
+        <p:spPr>
+          <a:xfrm>
+            <a:off x="6080760" y="1965960"/>
+            <a:ext cx="5303520" cy="4572000"/>
+          </a:xfrm>
+          <a:prstGeom prst="roundRect">
+            <a:avLst/>
+          </a:prstGeom>
+          <a:solidFill>
+            <a:srgbClr val="F3F6FB"/>
+          </a:solidFill>
+          <a:ln w="12700">
+            <a:solidFill>
+              <a:srgbClr val="C7D2E6"/>
+            </a:solidFill>
+          </a:ln>
+          <a:effectLst/>
+        </p:spPr>
+        <p:style>
+          <a:lnRef idx="1">
+            <a:schemeClr val="accent1"/>
+          </a:lnRef>
+          <a:fillRef idx="3">
+            <a:schemeClr val="accent1"/>
+          </a:fillRef>
+          <a:effectRef idx="2">
+            <a:schemeClr val="accent1"/>
+          </a:effectRef>
+          <a:fontRef idx="minor">
+            <a:schemeClr val="lt1"/>
+          </a:fontRef>
+        </p:style>
+        <p:txBody>
+          <a:bodyPr rtlCol="0" anchor="ctr"/>
+          <a:lstStyle/>
+          <a:p>
+            <a:pPr algn="ctr"/>
+          </a:p>
+        </p:txBody>
+      </p:sp>
+      <p:sp>
+        <p:nvSpPr>
+          <p:cNvPr id="10" name="TextBox 9"/>
+          <p:cNvSpPr txBox="1"/>
+          <p:nvPr/>
+        </p:nvSpPr>
+        <p:spPr>
+          <a:xfrm>
+            <a:off x="6355080" y="3611880"/>
+            <a:ext cx="4754880" cy="1280160"/>
+          </a:xfrm>
+          <a:prstGeom prst="rect">
+            <a:avLst/>
+          </a:prstGeom>
+          <a:noFill/>
+        </p:spPr>
+        <p:txBody>
+          <a:bodyPr wrap="square">
+            <a:spAutoFit/>
+          </a:bodyPr>
+          <a:lstStyle/>
+          <a:p>
+            <a:pPr algn="ctr"/>
+            <a:r>
+              <a:rPr sz="1400" b="1" i="0">
+                <a:solidFill>
+                  <a:srgbClr val="64748B"/>
+                </a:solidFill>
+                <a:latin typeface="Montserrat"/>
+              </a:rPr>
+              <a:t>IMAGEN</a:t>
+            </a:r>
+          </a:p>
+          <a:p>
+            <a:pPr algn="ctr"/>
+            <a:r>
+              <a:rPr sz="1100" b="0" i="1">
+                <a:solidFill>
+                  <a:srgbClr val="64748B"/>
+                </a:solidFill>
+                <a:latin typeface="Montserrat"/>
+              </a:rPr>
+              <a:t>hand drawn house pipe sketch plan</a:t>
+            </a:r>
+          </a:p>
+        </p:txBody>
+      </p:sp>
+    </p:spTree>
+  </p:cSld>
+  <p:clrMapOvr>
+    <a:masterClrMapping/>
+  </p:clrMapOvr>
+  <mc:AlternateContent xmlns:mc="http://schemas.openxmlformats.org/markup-compatibility/2006">
+    <mc:Choice xmlns:p14="http://schemas.microsoft.com/office/powerpoint/2010/main" Requires="p14">
+      <p:transition spd="med" p14:dur="700">
+        <p14:cube dir="r"/>
+      </p:transition>
+    </mc:Choice>
+    <mc:Fallback>
+      <p:transition spd="med">
+        <p:push dir="r"/>
+      </p:transition>
+    </mc:Fallback>
+  </mc:AlternateContent>
+</p:sld>
+</file>
+
+<file path=ppt/slides/slide23.xml><?xml version="1.0" encoding="utf-8"?>
+<p:sld xmlns:a="http://schemas.openxmlformats.org/drawingml/2006/main" xmlns:p="http://schemas.openxmlformats.org/presentationml/2006/main" xmlns:r="http://schemas.openxmlformats.org/officeDocument/2006/relationships">
+  <p:cSld>
+    <p:spTree>
+      <p:nvGrpSpPr>
+        <p:cNvPr id="1" name=""/>
+        <p:cNvGrpSpPr/>
+        <p:nvPr/>
+      </p:nvGrpSpPr>
+      <p:grpSpPr/>
+      <p:sp>
+        <p:nvSpPr>
+          <p:cNvPr id="2" name="Rectangle 1"/>
+          <p:cNvSpPr/>
+          <p:nvPr/>
+        </p:nvSpPr>
+        <p:spPr>
+          <a:xfrm>
+            <a:off x="0" y="0"/>
+            <a:ext cx="12191695" cy="6858000"/>
+          </a:xfrm>
+          <a:prstGeom prst="rect">
+            <a:avLst/>
+          </a:prstGeom>
+          <a:solidFill>
+            <a:srgbClr val="FFFFFF"/>
+          </a:solidFill>
+          <a:ln>
+            <a:noFill/>
+          </a:ln>
+          <a:effectLst/>
+        </p:spPr>
+        <p:style>
+          <a:lnRef idx="1">
+            <a:schemeClr val="accent1"/>
+          </a:lnRef>
+          <a:fillRef idx="3">
+            <a:schemeClr val="accent1"/>
+          </a:fillRef>
+          <a:effectRef idx="2">
+            <a:schemeClr val="accent1"/>
+          </a:effectRef>
+          <a:fontRef idx="minor">
+            <a:schemeClr val="lt1"/>
+          </a:fontRef>
+        </p:style>
+        <p:txBody>
+          <a:bodyPr rtlCol="0" anchor="ctr"/>
+          <a:lstStyle/>
+          <a:p>
+            <a:pPr algn="ctr"/>
+          </a:p>
+        </p:txBody>
+      </p:sp>
+      <p:sp>
+        <p:nvSpPr>
+          <p:cNvPr id="3" name="TextBox 2"/>
+          <p:cNvSpPr txBox="1"/>
+          <p:nvPr/>
+        </p:nvSpPr>
+        <p:spPr>
+          <a:xfrm>
+            <a:off x="10607040" y="320040"/>
+            <a:ext cx="1371600" cy="365760"/>
+          </a:xfrm>
+          <a:prstGeom prst="rect">
+            <a:avLst/>
+          </a:prstGeom>
+          <a:noFill/>
+        </p:spPr>
+        <p:txBody>
+          <a:bodyPr wrap="square">
+            <a:spAutoFit/>
+          </a:bodyPr>
+          <a:lstStyle/>
+          <a:p>
+            <a:pPr algn="r"/>
+            <a:r>
+              <a:rPr sz="1000" b="1" i="0">
+                <a:solidFill>
+                  <a:srgbClr val="64748B"/>
+                </a:solidFill>
+                <a:latin typeface="Montserrat"/>
+              </a:rPr>
+              <a:t>023 / 024</a:t>
+            </a:r>
+          </a:p>
+        </p:txBody>
+      </p:sp>
+      <p:sp>
+        <p:nvSpPr>
+          <p:cNvPr id="4" name="TextBox 3"/>
+          <p:cNvSpPr txBox="1"/>
+          <p:nvPr/>
+        </p:nvSpPr>
+        <p:spPr>
+          <a:xfrm>
+            <a:off x="457200" y="6419088"/>
+            <a:ext cx="8229600" cy="365760"/>
+          </a:xfrm>
+          <a:prstGeom prst="rect">
+            <a:avLst/>
+          </a:prstGeom>
+          <a:noFill/>
+        </p:spPr>
+        <p:txBody>
+          <a:bodyPr wrap="square">
+            <a:spAutoFit/>
+          </a:bodyPr>
+          <a:lstStyle/>
+          <a:p>
+            <a:r>
+              <a:rPr sz="900" b="0" i="0">
+                <a:solidFill>
+                  <a:srgbClr val="64748B"/>
+                </a:solidFill>
+                <a:latin typeface="Montserrat"/>
+              </a:rPr>
+              <a:t>Curso Gas B · Tema 00 · El Reglamento de Gas</a:t>
+            </a:r>
+          </a:p>
+        </p:txBody>
+      </p:sp>
+      <p:sp>
+        <p:nvSpPr>
+          <p:cNvPr id="5" name="TextBox 4"/>
+          <p:cNvSpPr txBox="1"/>
+          <p:nvPr/>
+        </p:nvSpPr>
+        <p:spPr>
+          <a:xfrm>
+            <a:off x="822960" y="457200"/>
+            <a:ext cx="10058400" cy="365760"/>
+          </a:xfrm>
+          <a:prstGeom prst="rect">
+            <a:avLst/>
+          </a:prstGeom>
+          <a:noFill/>
+        </p:spPr>
+        <p:txBody>
+          <a:bodyPr wrap="square">
+            <a:spAutoFit/>
+          </a:bodyPr>
+          <a:lstStyle/>
+          <a:p>
+            <a:r>
+              <a:rPr sz="1300" b="1" i="0">
+                <a:solidFill>
+                  <a:srgbClr val="E8801A"/>
+                </a:solidFill>
+                <a:latin typeface="Montserrat"/>
+              </a:rPr>
+              <a:t>REPASO RELÁMPAGO</a:t>
+            </a:r>
+          </a:p>
+        </p:txBody>
+      </p:sp>
+      <p:sp>
+        <p:nvSpPr>
+          <p:cNvPr id="6" name="TextBox 5"/>
+          <p:cNvSpPr txBox="1"/>
+          <p:nvPr/>
+        </p:nvSpPr>
+        <p:spPr>
+          <a:xfrm>
+            <a:off x="822960" y="868680"/>
+            <a:ext cx="10515600" cy="914400"/>
+          </a:xfrm>
+          <a:prstGeom prst="rect">
+            <a:avLst/>
+          </a:prstGeom>
+          <a:noFill/>
+        </p:spPr>
+        <p:txBody>
+          <a:bodyPr wrap="square">
+            <a:spAutoFit/>
+          </a:bodyPr>
+          <a:lstStyle/>
+          <a:p>
+            <a:r>
+              <a:rPr sz="2800" b="1" i="0">
+                <a:solidFill>
+                  <a:srgbClr val="1E2761"/>
+                </a:solidFill>
+                <a:latin typeface="Montserrat"/>
+              </a:rPr>
+              <a:t>Fíjalo en treinta segundos</a:t>
+            </a:r>
+          </a:p>
+        </p:txBody>
+      </p:sp>
+      <p:sp>
+        <p:nvSpPr>
+          <p:cNvPr id="7" name="Rectangle 6"/>
+          <p:cNvSpPr/>
+          <p:nvPr/>
+        </p:nvSpPr>
+        <p:spPr>
+          <a:xfrm>
+            <a:off x="868680" y="1627632"/>
+            <a:ext cx="2011680" cy="73152"/>
+          </a:xfrm>
+          <a:prstGeom prst="rect">
+            <a:avLst/>
+          </a:prstGeom>
+          <a:solidFill>
+            <a:srgbClr val="E8801A"/>
+          </a:solidFill>
+          <a:ln>
+            <a:noFill/>
+          </a:ln>
+          <a:effectLst/>
+        </p:spPr>
+        <p:style>
+          <a:lnRef idx="1">
+            <a:schemeClr val="accent1"/>
+          </a:lnRef>
+          <a:fillRef idx="3">
+            <a:schemeClr val="accent1"/>
+          </a:fillRef>
+          <a:effectRef idx="2">
+            <a:schemeClr val="accent1"/>
+          </a:effectRef>
+          <a:fontRef idx="minor">
+            <a:schemeClr val="lt1"/>
+          </a:fontRef>
+        </p:style>
+        <p:txBody>
+          <a:bodyPr rtlCol="0" anchor="ctr"/>
+          <a:lstStyle/>
+          <a:p>
+            <a:pPr algn="ctr"/>
+          </a:p>
+        </p:txBody>
+      </p:sp>
+      <p:sp>
+        <p:nvSpPr>
+          <p:cNvPr id="8" name="TextBox 7"/>
+          <p:cNvSpPr txBox="1"/>
+          <p:nvPr/>
+        </p:nvSpPr>
+        <p:spPr>
+          <a:xfrm>
+            <a:off x="6355080" y="1965960"/>
+            <a:ext cx="5029200" cy="4206240"/>
+          </a:xfrm>
+          <a:prstGeom prst="rect">
+            <a:avLst/>
+          </a:prstGeom>
+          <a:noFill/>
+        </p:spPr>
+        <p:txBody>
+          <a:bodyPr wrap="square">
+            <a:spAutoFit/>
+          </a:bodyPr>
+          <a:lstStyle/>
+          <a:p>
+            <a:pPr>
+              <a:spcAft>
+                <a:spcPts val="1100"/>
+              </a:spcAft>
+            </a:pPr>
+            <a:r>
+              <a:rPr sz="1600" b="1" i="0">
+                <a:solidFill>
+                  <a:srgbClr val="E8801A"/>
+                </a:solidFill>
+                <a:latin typeface="Montserrat"/>
+              </a:rPr>
+              <a:t>▸  </a:t>
+            </a:r>
+            <a:r>
+              <a:rPr sz="1600" b="0" i="0">
+                <a:solidFill>
+                  <a:srgbClr val="1B2330"/>
+                </a:solidFill>
+                <a:latin typeface="Montserrat"/>
+              </a:rPr>
+              <a:t>Ocho pasos: del diseño al arranque</a:t>
+            </a:r>
+          </a:p>
+          <a:p>
+            <a:pPr>
+              <a:spcAft>
+                <a:spcPts val="1100"/>
+              </a:spcAft>
+            </a:pPr>
+            <a:r>
+              <a:rPr sz="1600" b="1" i="0">
+                <a:solidFill>
+                  <a:srgbClr val="E8801A"/>
+                </a:solidFill>
+                <a:latin typeface="Montserrat"/>
+              </a:rPr>
+              <a:t>▸  </a:t>
+            </a:r>
+            <a:r>
+              <a:rPr sz="1600" b="0" i="0">
+                <a:solidFill>
+                  <a:srgbClr val="1B2330"/>
+                </a:solidFill>
+                <a:latin typeface="Montserrat"/>
+              </a:rPr>
+              <a:t>Boletín siempre; los otros dos, a veces</a:t>
+            </a:r>
+          </a:p>
+          <a:p>
+            <a:pPr>
+              <a:spcAft>
+                <a:spcPts val="1100"/>
+              </a:spcAft>
+            </a:pPr>
+            <a:r>
+              <a:rPr sz="1600" b="1" i="0">
+                <a:solidFill>
+                  <a:srgbClr val="E8801A"/>
+                </a:solidFill>
+                <a:latin typeface="Montserrat"/>
+              </a:rPr>
+              <a:t>▸  </a:t>
+            </a:r>
+            <a:r>
+              <a:rPr sz="1600" b="0" i="0">
+                <a:solidFill>
+                  <a:srgbClr val="1B2330"/>
+                </a:solidFill>
+                <a:latin typeface="Montserrat"/>
+              </a:rPr>
+              <a:t>Titular comunica en 30 días</a:t>
+            </a:r>
+          </a:p>
+          <a:p>
+            <a:pPr>
+              <a:spcAft>
+                <a:spcPts val="1100"/>
+              </a:spcAft>
+            </a:pPr>
+            <a:r>
+              <a:rPr sz="1600" b="1" i="0">
+                <a:solidFill>
+                  <a:srgbClr val="E8801A"/>
+                </a:solidFill>
+                <a:latin typeface="Montserrat"/>
+              </a:rPr>
+              <a:t>▸  </a:t>
+            </a:r>
+            <a:r>
+              <a:rPr sz="1600" b="0" i="0">
+                <a:solidFill>
+                  <a:srgbClr val="1B2330"/>
+                </a:solidFill>
+                <a:latin typeface="Montserrat"/>
+              </a:rPr>
+              <a:t>Parada +1 año = como nueva</a:t>
+            </a:r>
+          </a:p>
+        </p:txBody>
+      </p:sp>
+      <p:sp>
+        <p:nvSpPr>
+          <p:cNvPr id="9" name="imgph" descr="IMGQ:gas installation checklist clipboard"/>
+          <p:cNvSpPr/>
+          <p:nvPr/>
+        </p:nvSpPr>
+        <p:spPr>
+          <a:xfrm>
+            <a:off x="822960" y="1965960"/>
+            <a:ext cx="5303520" cy="4572000"/>
+          </a:xfrm>
+          <a:prstGeom prst="roundRect">
+            <a:avLst/>
+          </a:prstGeom>
+          <a:solidFill>
+            <a:srgbClr val="F3F6FB"/>
+          </a:solidFill>
+          <a:ln w="12700">
+            <a:solidFill>
+              <a:srgbClr val="C7D2E6"/>
+            </a:solidFill>
+          </a:ln>
+          <a:effectLst/>
+        </p:spPr>
+        <p:style>
+          <a:lnRef idx="1">
+            <a:schemeClr val="accent1"/>
+          </a:lnRef>
+          <a:fillRef idx="3">
+            <a:schemeClr val="accent1"/>
+          </a:fillRef>
+          <a:effectRef idx="2">
+            <a:schemeClr val="accent1"/>
+          </a:effectRef>
+          <a:fontRef idx="minor">
+            <a:schemeClr val="lt1"/>
+          </a:fontRef>
+        </p:style>
+        <p:txBody>
+          <a:bodyPr rtlCol="0" anchor="ctr"/>
+          <a:lstStyle/>
+          <a:p>
+            <a:pPr algn="ctr"/>
+          </a:p>
+        </p:txBody>
+      </p:sp>
+      <p:sp>
+        <p:nvSpPr>
+          <p:cNvPr id="10" name="TextBox 9"/>
+          <p:cNvSpPr txBox="1"/>
+          <p:nvPr/>
+        </p:nvSpPr>
+        <p:spPr>
+          <a:xfrm>
+            <a:off x="1097280" y="3611880"/>
+            <a:ext cx="4754880" cy="1280160"/>
+          </a:xfrm>
+          <a:prstGeom prst="rect">
+            <a:avLst/>
+          </a:prstGeom>
+          <a:noFill/>
+        </p:spPr>
+        <p:txBody>
+          <a:bodyPr wrap="square">
+            <a:spAutoFit/>
+          </a:bodyPr>
+          <a:lstStyle/>
+          <a:p>
+            <a:pPr algn="ctr"/>
+            <a:r>
+              <a:rPr sz="1400" b="1" i="0">
+                <a:solidFill>
+                  <a:srgbClr val="64748B"/>
+                </a:solidFill>
+                <a:latin typeface="Montserrat"/>
+              </a:rPr>
+              <a:t>IMAGEN</a:t>
+            </a:r>
+          </a:p>
+          <a:p>
+            <a:pPr algn="ctr"/>
+            <a:r>
+              <a:rPr sz="1100" b="0" i="1">
+                <a:solidFill>
+                  <a:srgbClr val="64748B"/>
+                </a:solidFill>
+                <a:latin typeface="Montserrat"/>
+              </a:rPr>
+              <a:t>gas installation checklist clipboard</a:t>
+            </a:r>
+          </a:p>
+        </p:txBody>
+      </p:sp>
+    </p:spTree>
+  </p:cSld>
+  <p:clrMapOvr>
+    <a:masterClrMapping/>
+  </p:clrMapOvr>
+  <mc:AlternateContent xmlns:mc="http://schemas.openxmlformats.org/markup-compatibility/2006">
+    <mc:Choice xmlns:p14="http://schemas.microsoft.com/office/powerpoint/2010/main" Requires="p14">
+      <p:transition spd="med" p14:dur="700">
+        <p14:cube dir="l"/>
+      </p:transition>
+    </mc:Choice>
+    <mc:Fallback>
+      <p:transition spd="med">
+        <p:push dir="l"/>
+      </p:transition>
+    </mc:Fallback>
+  </mc:AlternateContent>
+</p:sld>
+</file>
+
+<file path=ppt/slides/slide24.xml><?xml version="1.0" encoding="utf-8"?>
+<p:sld xmlns:a="http://schemas.openxmlformats.org/drawingml/2006/main" xmlns:p="http://schemas.openxmlformats.org/presentationml/2006/main" xmlns:r="http://schemas.openxmlformats.org/officeDocument/2006/relationships">
+  <p:cSld>
+    <p:spTree>
+      <p:nvGrpSpPr>
+        <p:cNvPr id="1" name=""/>
+        <p:cNvGrpSpPr/>
+        <p:nvPr/>
+      </p:nvGrpSpPr>
+      <p:grpSpPr/>
+      <p:sp>
+        <p:nvSpPr>
+          <p:cNvPr id="2" name="Rectangle 1"/>
+          <p:cNvSpPr/>
+          <p:nvPr/>
+        </p:nvSpPr>
+        <p:spPr>
+          <a:xfrm>
+            <a:off x="0" y="0"/>
+            <a:ext cx="12191695" cy="6858000"/>
+          </a:xfrm>
+          <a:prstGeom prst="rect">
+            <a:avLst/>
+          </a:prstGeom>
+          <a:solidFill>
+            <a:srgbClr val="1E2761"/>
+          </a:solidFill>
+          <a:ln>
+            <a:noFill/>
+          </a:ln>
+          <a:effectLst/>
+        </p:spPr>
+        <p:style>
+          <a:lnRef idx="1">
+            <a:schemeClr val="accent1"/>
+          </a:lnRef>
+          <a:fillRef idx="3">
+            <a:schemeClr val="accent1"/>
+          </a:fillRef>
+          <a:effectRef idx="2">
+            <a:schemeClr val="accent1"/>
+          </a:effectRef>
+          <a:fontRef idx="minor">
+            <a:schemeClr val="lt1"/>
+          </a:fontRef>
+        </p:style>
+        <p:txBody>
+          <a:bodyPr rtlCol="0" anchor="ctr"/>
+          <a:lstStyle/>
+          <a:p>
+            <a:pPr algn="ctr"/>
+          </a:p>
+        </p:txBody>
+      </p:sp>
+      <p:sp>
+        <p:nvSpPr>
+          <p:cNvPr id="3" name="TextBox 2"/>
+          <p:cNvSpPr txBox="1"/>
+          <p:nvPr/>
+        </p:nvSpPr>
+        <p:spPr>
+          <a:xfrm>
+            <a:off x="822960" y="640080"/>
+            <a:ext cx="10515600" cy="457200"/>
+          </a:xfrm>
+          <a:prstGeom prst="rect">
+            <a:avLst/>
+          </a:prstGeom>
+          <a:noFill/>
+        </p:spPr>
+        <p:txBody>
+          <a:bodyPr wrap="square">
+            <a:spAutoFit/>
+          </a:bodyPr>
+          <a:lstStyle/>
+          <a:p>
+            <a:r>
+              <a:rPr sz="1400" b="1" i="0">
+                <a:solidFill>
+                  <a:srgbClr val="F4A24C"/>
+                </a:solidFill>
+                <a:latin typeface="Montserrat"/>
+              </a:rPr>
+              <a:t>LO QUE YA DOMINAS</a:t>
+            </a:r>
+          </a:p>
+        </p:txBody>
+      </p:sp>
+      <p:sp>
+        <p:nvSpPr>
+          <p:cNvPr id="4" name="Rectangle 3"/>
+          <p:cNvSpPr/>
+          <p:nvPr/>
+        </p:nvSpPr>
+        <p:spPr>
+          <a:xfrm>
+            <a:off x="868680" y="1051560"/>
+            <a:ext cx="1463040" cy="82296"/>
+          </a:xfrm>
+          <a:prstGeom prst="rect">
+            <a:avLst/>
+          </a:prstGeom>
+          <a:solidFill>
+            <a:srgbClr val="E8801A"/>
+          </a:solidFill>
+          <a:ln>
+            <a:noFill/>
+          </a:ln>
+          <a:effectLst/>
+        </p:spPr>
+        <p:style>
+          <a:lnRef idx="1">
+            <a:schemeClr val="accent1"/>
+          </a:lnRef>
+          <a:fillRef idx="3">
+            <a:schemeClr val="accent1"/>
+          </a:fillRef>
+          <a:effectRef idx="2">
+            <a:schemeClr val="accent1"/>
+          </a:effectRef>
+          <a:fontRef idx="minor">
+            <a:schemeClr val="lt1"/>
+          </a:fontRef>
+        </p:style>
+        <p:txBody>
+          <a:bodyPr rtlCol="0" anchor="ctr"/>
+          <a:lstStyle/>
+          <a:p>
+            <a:pPr algn="ctr"/>
+          </a:p>
+        </p:txBody>
+      </p:sp>
+      <p:sp>
+        <p:nvSpPr>
+          <p:cNvPr id="5" name="TextBox 4"/>
+          <p:cNvSpPr txBox="1"/>
+          <p:nvPr/>
+        </p:nvSpPr>
+        <p:spPr>
+          <a:xfrm>
+            <a:off x="822960" y="1234440"/>
+            <a:ext cx="10515600" cy="1097280"/>
+          </a:xfrm>
+          <a:prstGeom prst="rect">
+            <a:avLst/>
+          </a:prstGeom>
+          <a:noFill/>
+        </p:spPr>
+        <p:txBody>
+          <a:bodyPr wrap="square">
+            <a:spAutoFit/>
+          </a:bodyPr>
+          <a:lstStyle/>
+          <a:p>
+            <a:r>
+              <a:rPr sz="3400" b="1" i="0">
+                <a:solidFill>
+                  <a:srgbClr val="FFFFFF"/>
+                </a:solidFill>
+                <a:latin typeface="Montserrat"/>
+              </a:rPr>
+              <a:t>Ya llevas una instalación de cero a gas</a:t>
+            </a:r>
+          </a:p>
+        </p:txBody>
+      </p:sp>
+      <p:sp>
+        <p:nvSpPr>
+          <p:cNvPr id="6" name="TextBox 5"/>
+          <p:cNvSpPr txBox="1"/>
+          <p:nvPr/>
+        </p:nvSpPr>
+        <p:spPr>
+          <a:xfrm>
+            <a:off x="822960" y="2606040"/>
+            <a:ext cx="10515600" cy="2743200"/>
+          </a:xfrm>
+          <a:prstGeom prst="rect">
+            <a:avLst/>
+          </a:prstGeom>
+          <a:noFill/>
+        </p:spPr>
+        <p:txBody>
+          <a:bodyPr wrap="square">
+            <a:spAutoFit/>
+          </a:bodyPr>
+          <a:lstStyle/>
+          <a:p>
+            <a:pPr>
+              <a:spcAft>
+                <a:spcPts val="1200"/>
+              </a:spcAft>
+            </a:pPr>
+            <a:r>
+              <a:rPr sz="2000" b="1" i="0">
+                <a:solidFill>
+                  <a:srgbClr val="F4A24C"/>
+                </a:solidFill>
+                <a:latin typeface="Montserrat"/>
+              </a:rPr>
+              <a:t>✓  </a:t>
+            </a:r>
+            <a:r>
+              <a:rPr sz="1900" b="0" i="0">
+                <a:solidFill>
+                  <a:srgbClr val="FFFFFF"/>
+                </a:solidFill>
+                <a:latin typeface="Montserrat"/>
+              </a:rPr>
+              <a:t>Recorres los ocho pasos sin saltarte ninguno</a:t>
+            </a:r>
+          </a:p>
+          <a:p>
+            <a:pPr>
+              <a:spcAft>
+                <a:spcPts val="1200"/>
+              </a:spcAft>
+            </a:pPr>
+            <a:r>
+              <a:rPr sz="2000" b="1" i="0">
+                <a:solidFill>
+                  <a:srgbClr val="F4A24C"/>
+                </a:solidFill>
+                <a:latin typeface="Montserrat"/>
+              </a:rPr>
+              <a:t>✓  </a:t>
+            </a:r>
+            <a:r>
+              <a:rPr sz="1900" b="0" i="0">
+                <a:solidFill>
+                  <a:srgbClr val="FFFFFF"/>
+                </a:solidFill>
+                <a:latin typeface="Montserrat"/>
+              </a:rPr>
+              <a:t>Sabes qué certificado firma cada quién</a:t>
+            </a:r>
+          </a:p>
+          <a:p>
+            <a:pPr>
+              <a:spcAft>
+                <a:spcPts val="1200"/>
+              </a:spcAft>
+            </a:pPr>
+            <a:r>
+              <a:rPr sz="2000" b="1" i="0">
+                <a:solidFill>
+                  <a:srgbClr val="F4A24C"/>
+                </a:solidFill>
+                <a:latin typeface="Montserrat"/>
+              </a:rPr>
+              <a:t>✓  </a:t>
+            </a:r>
+            <a:r>
+              <a:rPr sz="1900" b="0" i="0">
+                <a:solidFill>
+                  <a:srgbClr val="FFFFFF"/>
+                </a:solidFill>
+                <a:latin typeface="Montserrat"/>
+              </a:rPr>
+              <a:t>Distingues prueba de inspección al vuelo</a:t>
+            </a:r>
+          </a:p>
+          <a:p>
+            <a:pPr>
+              <a:spcAft>
+                <a:spcPts val="1200"/>
+              </a:spcAft>
+            </a:pPr>
+            <a:r>
+              <a:rPr sz="2000" b="1" i="0">
+                <a:solidFill>
+                  <a:srgbClr val="F4A24C"/>
+                </a:solidFill>
+                <a:latin typeface="Montserrat"/>
+              </a:rPr>
+              <a:t>✓  </a:t>
+            </a:r>
+            <a:r>
+              <a:rPr sz="1900" b="0" i="0">
+                <a:solidFill>
+                  <a:srgbClr val="FFFFFF"/>
+                </a:solidFill>
+                <a:latin typeface="Montserrat"/>
+              </a:rPr>
+              <a:t>La regla del año ya no se te escapa</a:t>
+            </a:r>
+          </a:p>
+        </p:txBody>
+      </p:sp>
+      <p:sp>
+        <p:nvSpPr>
+          <p:cNvPr id="7" name="Rounded Rectangle 6"/>
+          <p:cNvSpPr/>
+          <p:nvPr/>
+        </p:nvSpPr>
+        <p:spPr>
+          <a:xfrm>
+            <a:off x="822960" y="5532120"/>
+            <a:ext cx="10515600" cy="822960"/>
+          </a:xfrm>
+          <a:prstGeom prst="roundRect">
+            <a:avLst/>
+          </a:prstGeom>
+          <a:solidFill>
+            <a:srgbClr val="E8801A"/>
+          </a:solidFill>
+          <a:ln>
+            <a:noFill/>
+          </a:ln>
+          <a:effectLst/>
+        </p:spPr>
+        <p:style>
+          <a:lnRef idx="1">
+            <a:schemeClr val="accent1"/>
+          </a:lnRef>
+          <a:fillRef idx="3">
+            <a:schemeClr val="accent1"/>
+          </a:fillRef>
+          <a:effectRef idx="2">
+            <a:schemeClr val="accent1"/>
+          </a:effectRef>
+          <a:fontRef idx="minor">
+            <a:schemeClr val="lt1"/>
+          </a:fontRef>
+        </p:style>
+        <p:txBody>
+          <a:bodyPr rtlCol="0" anchor="ctr"/>
+          <a:lstStyle/>
+          <a:p>
+            <a:pPr algn="ctr"/>
+          </a:p>
+        </p:txBody>
+      </p:sp>
+      <p:sp>
+        <p:nvSpPr>
+          <p:cNvPr id="8" name="TextBox 7"/>
+          <p:cNvSpPr txBox="1"/>
+          <p:nvPr/>
+        </p:nvSpPr>
+        <p:spPr>
+          <a:xfrm>
+            <a:off x="1051560" y="5623560"/>
+            <a:ext cx="10058400" cy="640080"/>
+          </a:xfrm>
+          <a:prstGeom prst="rect">
+            <a:avLst/>
+          </a:prstGeom>
+          <a:noFill/>
+        </p:spPr>
+        <p:txBody>
+          <a:bodyPr wrap="square">
+            <a:spAutoFit/>
+          </a:bodyPr>
+          <a:lstStyle/>
+          <a:p>
+            <a:r>
+              <a:rPr sz="1500" b="1" i="1">
+                <a:solidFill>
+                  <a:srgbClr val="1E2761"/>
+                </a:solidFill>
+                <a:latin typeface="Montserrat"/>
+              </a:rPr>
+              <a:t>Firmar es responsabilizarse, y hoy ya sabes de qué respondes. Nos vemos en el cierre del tema.</a:t>
+            </a:r>
+          </a:p>
+        </p:txBody>
+      </p:sp>
+    </p:spTree>
+  </p:cSld>
+  <p:clrMapOvr>
+    <a:masterClrMapping/>
+  </p:clrMapOvr>
+  <mc:AlternateContent xmlns:mc="http://schemas.openxmlformats.org/markup-compatibility/2006">
+    <mc:Choice xmlns:p14="http://schemas.microsoft.com/office/powerpoint/2010/main" Requires="p14">
+      <p:transition spd="med" p14:dur="700">
+        <p14:cube dir="r"/>
+      </p:transition>
+    </mc:Choice>
+    <mc:Fallback>
+      <p:transition spd="med">
+        <p:push dir="r"/>
+      </p:transition>
+    </mc:Fallback>
+  </mc:AlternateContent>
 </p:sld>
 </file>
 
@@ -9528,7 +14082,7 @@
                 </a:solidFill>
                 <a:latin typeface="Montserrat"/>
               </a:rPr>
-              <a:t>003 / 018</a:t>
+              <a:t>003 / 024</a:t>
             </a:r>
           </a:p>
         </p:txBody>
@@ -9637,7 +14191,7 @@
       </p:sp>
       <p:sp>
         <p:nvSpPr>
-          <p:cNvPr id="7" name="Rounded Rectangle 6"/>
+          <p:cNvPr id="7" name="Rectangle 6"/>
           <p:cNvSpPr/>
           <p:nvPr/>
         </p:nvSpPr>
@@ -9646,7 +14200,7 @@
             <a:off x="868680" y="1673352"/>
             <a:ext cx="2011680" cy="73152"/>
           </a:xfrm>
-          <a:prstGeom prst="roundRect">
+          <a:prstGeom prst="rect">
             <a:avLst/>
           </a:prstGeom>
           <a:solidFill>
@@ -9932,6 +14486,18 @@
   <p:clrMapOvr>
     <a:masterClrMapping/>
   </p:clrMapOvr>
+  <mc:AlternateContent xmlns:mc="http://schemas.openxmlformats.org/markup-compatibility/2006">
+    <mc:Choice xmlns:p14="http://schemas.microsoft.com/office/powerpoint/2010/main" Requires="p14">
+      <p:transition spd="med" p14:dur="700">
+        <p14:cube dir="l"/>
+      </p:transition>
+    </mc:Choice>
+    <mc:Fallback>
+      <p:transition spd="med">
+        <p:push dir="l"/>
+      </p:transition>
+    </mc:Fallback>
+  </mc:AlternateContent>
 </p:sld>
 </file>
 
@@ -10019,7 +14585,7 @@
                 </a:solidFill>
                 <a:latin typeface="Montserrat"/>
               </a:rPr>
-              <a:t>004 / 018</a:t>
+              <a:t>004 / 024</a:t>
             </a:r>
           </a:p>
         </p:txBody>
@@ -10128,7 +14694,7 @@
       </p:sp>
       <p:sp>
         <p:nvSpPr>
-          <p:cNvPr id="7" name="Rounded Rectangle 6"/>
+          <p:cNvPr id="7" name="Rectangle 6"/>
           <p:cNvSpPr/>
           <p:nvPr/>
         </p:nvSpPr>
@@ -10137,7 +14703,7 @@
             <a:off x="868680" y="1627632"/>
             <a:ext cx="2011680" cy="73152"/>
           </a:xfrm>
-          <a:prstGeom prst="roundRect">
+          <a:prstGeom prst="rect">
             <a:avLst/>
           </a:prstGeom>
           <a:solidFill>
@@ -10179,7 +14745,7 @@
         <p:spPr>
           <a:xfrm>
             <a:off x="822960" y="1965960"/>
-            <a:ext cx="4983480" cy="4206240"/>
+            <a:ext cx="5029200" cy="4206240"/>
           </a:xfrm>
           <a:prstGeom prst="rect">
             <a:avLst/>
@@ -10276,8 +14842,8 @@
         </p:nvSpPr>
         <p:spPr>
           <a:xfrm>
-            <a:off x="5806440" y="1051560"/>
-            <a:ext cx="5298947" cy="4629150"/>
+            <a:off x="6080760" y="1965960"/>
+            <a:ext cx="5303520" cy="4572000"/>
           </a:xfrm>
           <a:prstGeom prst="roundRect">
             <a:avLst/>
@@ -10322,8 +14888,8 @@
         </p:nvSpPr>
         <p:spPr>
           <a:xfrm>
-            <a:off x="6080760" y="2726055"/>
-            <a:ext cx="4750307" cy="1280160"/>
+            <a:off x="6355080" y="3611880"/>
+            <a:ext cx="4754880" cy="1280160"/>
           </a:xfrm>
           <a:prstGeom prst="rect">
             <a:avLst/>
@@ -10344,7 +14910,7 @@
                 </a:solidFill>
                 <a:latin typeface="Montserrat"/>
               </a:rPr>
-              <a:t>IMAGEN REALISTA</a:t>
+              <a:t>IMAGEN</a:t>
             </a:r>
           </a:p>
           <a:p>
@@ -10366,6 +14932,18 @@
   <p:clrMapOvr>
     <a:masterClrMapping/>
   </p:clrMapOvr>
+  <mc:AlternateContent xmlns:mc="http://schemas.openxmlformats.org/markup-compatibility/2006">
+    <mc:Choice xmlns:p14="http://schemas.microsoft.com/office/powerpoint/2010/main" Requires="p14">
+      <p:transition spd="med" p14:dur="700">
+        <p14:cube dir="r"/>
+      </p:transition>
+    </mc:Choice>
+    <mc:Fallback>
+      <p:transition spd="med">
+        <p:push dir="r"/>
+      </p:transition>
+    </mc:Fallback>
+  </mc:AlternateContent>
 </p:sld>
 </file>
 
@@ -10453,7 +15031,7 @@
                 </a:solidFill>
                 <a:latin typeface="Montserrat"/>
               </a:rPr>
-              <a:t>005 / 018</a:t>
+              <a:t>005 / 024</a:t>
             </a:r>
           </a:p>
         </p:txBody>
@@ -10562,7 +15140,7 @@
       </p:sp>
       <p:sp>
         <p:nvSpPr>
-          <p:cNvPr id="7" name="Rounded Rectangle 6"/>
+          <p:cNvPr id="7" name="Rectangle 6"/>
           <p:cNvSpPr/>
           <p:nvPr/>
         </p:nvSpPr>
@@ -10571,7 +15149,7 @@
             <a:off x="868680" y="1627632"/>
             <a:ext cx="2011680" cy="73152"/>
           </a:xfrm>
-          <a:prstGeom prst="roundRect">
+          <a:prstGeom prst="rect">
             <a:avLst/>
           </a:prstGeom>
           <a:solidFill>
@@ -10612,8 +15190,8 @@
         </p:nvSpPr>
         <p:spPr>
           <a:xfrm>
-            <a:off x="822960" y="1965960"/>
-            <a:ext cx="4983480" cy="4206240"/>
+            <a:off x="6355080" y="1965960"/>
+            <a:ext cx="5029200" cy="4206240"/>
           </a:xfrm>
           <a:prstGeom prst="rect">
             <a:avLst/>
@@ -10710,8 +15288,8 @@
         </p:nvSpPr>
         <p:spPr>
           <a:xfrm>
-            <a:off x="5806440" y="1051560"/>
-            <a:ext cx="5298947" cy="4629150"/>
+            <a:off x="822960" y="1965960"/>
+            <a:ext cx="5303520" cy="4572000"/>
           </a:xfrm>
           <a:prstGeom prst="roundRect">
             <a:avLst/>
@@ -10756,8 +15334,8 @@
         </p:nvSpPr>
         <p:spPr>
           <a:xfrm>
-            <a:off x="6080760" y="2726055"/>
-            <a:ext cx="4750307" cy="1280160"/>
+            <a:off x="1097280" y="3611880"/>
+            <a:ext cx="4754880" cy="1280160"/>
           </a:xfrm>
           <a:prstGeom prst="rect">
             <a:avLst/>
@@ -10778,7 +15356,7 @@
                 </a:solidFill>
                 <a:latin typeface="Montserrat"/>
               </a:rPr>
-              <a:t>IMAGEN REALISTA</a:t>
+              <a:t>IMAGEN</a:t>
             </a:r>
           </a:p>
           <a:p>
@@ -10800,6 +15378,18 @@
   <p:clrMapOvr>
     <a:masterClrMapping/>
   </p:clrMapOvr>
+  <mc:AlternateContent xmlns:mc="http://schemas.openxmlformats.org/markup-compatibility/2006">
+    <mc:Choice xmlns:p14="http://schemas.microsoft.com/office/powerpoint/2010/main" Requires="p14">
+      <p:transition spd="med" p14:dur="700">
+        <p14:cube dir="l"/>
+      </p:transition>
+    </mc:Choice>
+    <mc:Fallback>
+      <p:transition spd="med">
+        <p:push dir="l"/>
+      </p:transition>
+    </mc:Fallback>
+  </mc:AlternateContent>
 </p:sld>
 </file>
 
@@ -10887,7 +15477,7 @@
                 </a:solidFill>
                 <a:latin typeface="Montserrat"/>
               </a:rPr>
-              <a:t>006 / 018</a:t>
+              <a:t>006 / 024</a:t>
             </a:r>
           </a:p>
         </p:txBody>
@@ -10996,7 +15586,7 @@
       </p:sp>
       <p:sp>
         <p:nvSpPr>
-          <p:cNvPr id="7" name="Rounded Rectangle 6"/>
+          <p:cNvPr id="7" name="Rectangle 6"/>
           <p:cNvSpPr/>
           <p:nvPr/>
         </p:nvSpPr>
@@ -11005,7 +15595,7 @@
             <a:off x="868680" y="1627632"/>
             <a:ext cx="2011680" cy="73152"/>
           </a:xfrm>
-          <a:prstGeom prst="roundRect">
+          <a:prstGeom prst="rect">
             <a:avLst/>
           </a:prstGeom>
           <a:solidFill>
@@ -11047,7 +15637,7 @@
         <p:spPr>
           <a:xfrm>
             <a:off x="822960" y="1965960"/>
-            <a:ext cx="4983480" cy="4206240"/>
+            <a:ext cx="5029200" cy="4206240"/>
           </a:xfrm>
           <a:prstGeom prst="rect">
             <a:avLst/>
@@ -11169,8 +15759,8 @@
         </p:nvSpPr>
         <p:spPr>
           <a:xfrm>
-            <a:off x="5806440" y="1051560"/>
-            <a:ext cx="5298947" cy="4629150"/>
+            <a:off x="6080760" y="1965960"/>
+            <a:ext cx="5303520" cy="4572000"/>
           </a:xfrm>
           <a:prstGeom prst="roundRect">
             <a:avLst/>
@@ -11215,8 +15805,8 @@
         </p:nvSpPr>
         <p:spPr>
           <a:xfrm>
-            <a:off x="6080760" y="2726055"/>
-            <a:ext cx="4750307" cy="1280160"/>
+            <a:off x="6355080" y="3611880"/>
+            <a:ext cx="4754880" cy="1280160"/>
           </a:xfrm>
           <a:prstGeom prst="rect">
             <a:avLst/>
@@ -11237,7 +15827,7 @@
                 </a:solidFill>
                 <a:latin typeface="Montserrat"/>
               </a:rPr>
-              <a:t>IMAGEN REALISTA</a:t>
+              <a:t>IMAGEN</a:t>
             </a:r>
           </a:p>
           <a:p>
@@ -11259,6 +15849,18 @@
   <p:clrMapOvr>
     <a:masterClrMapping/>
   </p:clrMapOvr>
+  <mc:AlternateContent xmlns:mc="http://schemas.openxmlformats.org/markup-compatibility/2006">
+    <mc:Choice xmlns:p14="http://schemas.microsoft.com/office/powerpoint/2010/main" Requires="p14">
+      <p:transition spd="med" p14:dur="700">
+        <p14:cube dir="r"/>
+      </p:transition>
+    </mc:Choice>
+    <mc:Fallback>
+      <p:transition spd="med">
+        <p:push dir="r"/>
+      </p:transition>
+    </mc:Fallback>
+  </mc:AlternateContent>
 </p:sld>
 </file>
 
@@ -11346,7 +15948,7 @@
                 </a:solidFill>
                 <a:latin typeface="Montserrat"/>
               </a:rPr>
-              <a:t>007 / 018</a:t>
+              <a:t>007 / 024</a:t>
             </a:r>
           </a:p>
         </p:txBody>
@@ -11455,7 +16057,7 @@
       </p:sp>
       <p:sp>
         <p:nvSpPr>
-          <p:cNvPr id="7" name="Rounded Rectangle 6"/>
+          <p:cNvPr id="7" name="Rectangle 6"/>
           <p:cNvSpPr/>
           <p:nvPr/>
         </p:nvSpPr>
@@ -11464,7 +16066,7 @@
             <a:off x="868680" y="1627632"/>
             <a:ext cx="2011680" cy="73152"/>
           </a:xfrm>
-          <a:prstGeom prst="roundRect">
+          <a:prstGeom prst="rect">
             <a:avLst/>
           </a:prstGeom>
           <a:solidFill>
@@ -11505,8 +16107,8 @@
         </p:nvSpPr>
         <p:spPr>
           <a:xfrm>
-            <a:off x="822960" y="1965960"/>
-            <a:ext cx="4983480" cy="4206240"/>
+            <a:off x="6355080" y="1965960"/>
+            <a:ext cx="5029200" cy="4206240"/>
           </a:xfrm>
           <a:prstGeom prst="rect">
             <a:avLst/>
@@ -11603,8 +16205,8 @@
         </p:nvSpPr>
         <p:spPr>
           <a:xfrm>
-            <a:off x="5806440" y="1051560"/>
-            <a:ext cx="5298947" cy="4629150"/>
+            <a:off x="822960" y="1965960"/>
+            <a:ext cx="5303520" cy="4572000"/>
           </a:xfrm>
           <a:prstGeom prst="roundRect">
             <a:avLst/>
@@ -11649,8 +16251,8 @@
         </p:nvSpPr>
         <p:spPr>
           <a:xfrm>
-            <a:off x="6080760" y="2726055"/>
-            <a:ext cx="4750307" cy="1280160"/>
+            <a:off x="1097280" y="3611880"/>
+            <a:ext cx="4754880" cy="1280160"/>
           </a:xfrm>
           <a:prstGeom prst="rect">
             <a:avLst/>
@@ -11671,7 +16273,7 @@
                 </a:solidFill>
                 <a:latin typeface="Montserrat"/>
               </a:rPr>
-              <a:t>IMAGEN REALISTA</a:t>
+              <a:t>IMAGEN</a:t>
             </a:r>
           </a:p>
           <a:p>
@@ -11693,6 +16295,18 @@
   <p:clrMapOvr>
     <a:masterClrMapping/>
   </p:clrMapOvr>
+  <mc:AlternateContent xmlns:mc="http://schemas.openxmlformats.org/markup-compatibility/2006">
+    <mc:Choice xmlns:p14="http://schemas.microsoft.com/office/powerpoint/2010/main" Requires="p14">
+      <p:transition spd="med" p14:dur="700">
+        <p14:cube dir="l"/>
+      </p:transition>
+    </mc:Choice>
+    <mc:Fallback>
+      <p:transition spd="med">
+        <p:push dir="l"/>
+      </p:transition>
+    </mc:Fallback>
+  </mc:AlternateContent>
 </p:sld>
 </file>
 
@@ -11780,7 +16394,7 @@
                 </a:solidFill>
                 <a:latin typeface="Montserrat"/>
               </a:rPr>
-              <a:t>008 / 018</a:t>
+              <a:t>008 / 024</a:t>
             </a:r>
           </a:p>
         </p:txBody>
@@ -11889,7 +16503,7 @@
       </p:sp>
       <p:sp>
         <p:nvSpPr>
-          <p:cNvPr id="7" name="Rounded Rectangle 6"/>
+          <p:cNvPr id="7" name="Rectangle 6"/>
           <p:cNvSpPr/>
           <p:nvPr/>
         </p:nvSpPr>
@@ -11898,7 +16512,7 @@
             <a:off x="868680" y="1627632"/>
             <a:ext cx="2011680" cy="73152"/>
           </a:xfrm>
-          <a:prstGeom prst="roundRect">
+          <a:prstGeom prst="rect">
             <a:avLst/>
           </a:prstGeom>
           <a:solidFill>
@@ -11940,7 +16554,7 @@
         <p:spPr>
           <a:xfrm>
             <a:off x="822960" y="1965960"/>
-            <a:ext cx="4983480" cy="4206240"/>
+            <a:ext cx="5029200" cy="4206240"/>
           </a:xfrm>
           <a:prstGeom prst="rect">
             <a:avLst/>
@@ -12037,8 +16651,8 @@
         </p:nvSpPr>
         <p:spPr>
           <a:xfrm>
-            <a:off x="5806440" y="1051560"/>
-            <a:ext cx="5298947" cy="4629150"/>
+            <a:off x="6080760" y="1965960"/>
+            <a:ext cx="5303520" cy="4572000"/>
           </a:xfrm>
           <a:prstGeom prst="roundRect">
             <a:avLst/>
@@ -12083,8 +16697,8 @@
         </p:nvSpPr>
         <p:spPr>
           <a:xfrm>
-            <a:off x="6080760" y="2726055"/>
-            <a:ext cx="4750307" cy="1280160"/>
+            <a:off x="6355080" y="3611880"/>
+            <a:ext cx="4754880" cy="1280160"/>
           </a:xfrm>
           <a:prstGeom prst="rect">
             <a:avLst/>
@@ -12105,7 +16719,7 @@
                 </a:solidFill>
                 <a:latin typeface="Montserrat"/>
               </a:rPr>
-              <a:t>IMAGEN REALISTA</a:t>
+              <a:t>IMAGEN</a:t>
             </a:r>
           </a:p>
           <a:p>
@@ -12127,6 +16741,18 @@
   <p:clrMapOvr>
     <a:masterClrMapping/>
   </p:clrMapOvr>
+  <mc:AlternateContent xmlns:mc="http://schemas.openxmlformats.org/markup-compatibility/2006">
+    <mc:Choice xmlns:p14="http://schemas.microsoft.com/office/powerpoint/2010/main" Requires="p14">
+      <p:transition spd="med" p14:dur="700">
+        <p14:cube dir="r"/>
+      </p:transition>
+    </mc:Choice>
+    <mc:Fallback>
+      <p:transition spd="med">
+        <p:push dir="r"/>
+      </p:transition>
+    </mc:Fallback>
+  </mc:AlternateContent>
 </p:sld>
 </file>
 
@@ -12214,7 +16840,7 @@
                 </a:solidFill>
                 <a:latin typeface="Montserrat"/>
               </a:rPr>
-              <a:t>009 / 018</a:t>
+              <a:t>009 / 024</a:t>
             </a:r>
           </a:p>
         </p:txBody>
@@ -12323,7 +16949,7 @@
       </p:sp>
       <p:sp>
         <p:nvSpPr>
-          <p:cNvPr id="7" name="Rounded Rectangle 6"/>
+          <p:cNvPr id="7" name="Rectangle 6"/>
           <p:cNvSpPr/>
           <p:nvPr/>
         </p:nvSpPr>
@@ -12332,7 +16958,7 @@
             <a:off x="868680" y="1627632"/>
             <a:ext cx="2011680" cy="73152"/>
           </a:xfrm>
-          <a:prstGeom prst="roundRect">
+          <a:prstGeom prst="rect">
             <a:avLst/>
           </a:prstGeom>
           <a:solidFill>
@@ -12373,8 +16999,8 @@
         </p:nvSpPr>
         <p:spPr>
           <a:xfrm>
-            <a:off x="822960" y="1965960"/>
-            <a:ext cx="4983480" cy="4206240"/>
+            <a:off x="6355080" y="1965960"/>
+            <a:ext cx="5029200" cy="4206240"/>
           </a:xfrm>
           <a:prstGeom prst="rect">
             <a:avLst/>
@@ -12471,8 +17097,8 @@
         </p:nvSpPr>
         <p:spPr>
           <a:xfrm>
-            <a:off x="5806440" y="1051560"/>
-            <a:ext cx="5298947" cy="4629150"/>
+            <a:off x="822960" y="1965960"/>
+            <a:ext cx="5303520" cy="4572000"/>
           </a:xfrm>
           <a:prstGeom prst="roundRect">
             <a:avLst/>
@@ -12517,8 +17143,8 @@
         </p:nvSpPr>
         <p:spPr>
           <a:xfrm>
-            <a:off x="6080760" y="2726055"/>
-            <a:ext cx="4750307" cy="1280160"/>
+            <a:off x="1097280" y="3611880"/>
+            <a:ext cx="4754880" cy="1280160"/>
           </a:xfrm>
           <a:prstGeom prst="rect">
             <a:avLst/>
@@ -12539,7 +17165,7 @@
                 </a:solidFill>
                 <a:latin typeface="Montserrat"/>
               </a:rPr>
-              <a:t>IMAGEN REALISTA</a:t>
+              <a:t>IMAGEN</a:t>
             </a:r>
           </a:p>
           <a:p>
@@ -12561,6 +17187,18 @@
   <p:clrMapOvr>
     <a:masterClrMapping/>
   </p:clrMapOvr>
+  <mc:AlternateContent xmlns:mc="http://schemas.openxmlformats.org/markup-compatibility/2006">
+    <mc:Choice xmlns:p14="http://schemas.microsoft.com/office/powerpoint/2010/main" Requires="p14">
+      <p:transition spd="med" p14:dur="700">
+        <p14:cube dir="l"/>
+      </p:transition>
+    </mc:Choice>
+    <mc:Fallback>
+      <p:transition spd="med">
+        <p:push dir="l"/>
+      </p:transition>
+    </mc:Fallback>
+  </mc:AlternateContent>
 </p:sld>
 </file>
 

--- a/Curso Gas B/00 - El Reglamento de Gas - estructura, ambito y generalidades/00 - El Reglamento de Gas - Vídeo 2.pptx
+++ b/Curso Gas B/00 - El Reglamento de Gas - estructura, ambito y generalidades/00 - El Reglamento de Gas - Vídeo 2.pptx
@@ -750,12 +750,12 @@
           <a:lstStyle/>
           <a:p>
             <a:r>
-              <a:t>N1: Tres certificados, pero solo uno no falta jamás. ¿Cuál es?</a:t>
-            </a:r>
-          </a:p>
-          <a:p>
-            <a:r>
-              <a:t>N2: Piensa en el que se pide siempre para poder dar gas, con proyecto o sin él.</a:t>
+              <a:t>N1: Tres certificados de arranque, pero solo uno no falta jamás. La pregunta es: de los certificados de arranque, ¿cuál existe siempre en toda instalación? Opción A, el certificado de dirección de obra. Opción B, el certificado de instalación. Opción C, el certificado de inspección del organismo de control. Opción D, el certificado de puesta en marcha del aparato. Piénsalo un momento y quédate con una.</a:t>
+            </a:r>
+          </a:p>
+          <a:p>
+            <a:r>
+              <a:t>N2: Busca el que se pide siempre para poder dar gas, haya proyecto o no lo haya.</a:t>
             </a:r>
           </a:p>
         </p:txBody>
@@ -825,12 +825,12 @@
           <a:lstStyle/>
           <a:p>
             <a:r>
-              <a:t>N1: ¿Por qué el de instalación?</a:t>
-            </a:r>
-          </a:p>
-          <a:p>
-            <a:r>
-              <a:t>N2: Porque es tu factura de que está bien hecho: sin él no hay gas, y lo firma quien ejecutó. El de dirección de obra solo aparece si hubo proyecto y el de inspección solo si la ITC obligó al organismo de control; por eso esos dos son 'a veces'.</a:t>
+              <a:t>N2: La respuesta correcta es la opción B: el certificado de instalación. Es tu factura de que la obra está bien hecha, y lo firma quien la ejecuta; sin él no hay gas, nunca falta. La opción A, la dirección de obra, solo aparece si hubo proyecto; y la opción C, la inspección, solo si la ITC obligó al organismo de control; por eso esos dos son 'a veces'. La opción D, la puesta en marcha, va del aparato, no de la instalación entera.</a:t>
+            </a:r>
+          </a:p>
+          <a:p>
+            <a:r>
+              <a:t>N1: Instalación siempre; los demás, solo a veces.</a:t>
             </a:r>
           </a:p>
         </p:txBody>
@@ -975,12 +975,12 @@
           <a:lstStyle/>
           <a:p>
             <a:r>
-              <a:t>N1: Una casa cerrada mucho tiempo, ¿se reengancha sin más?</a:t>
-            </a:r>
-          </a:p>
-          <a:p>
-            <a:r>
-              <a:t>N2: Piensa en el año como una fecha de caducidad mental.</a:t>
+              <a:t>N1: La regla del año, que cae fijo. Escucha: una instalación lleva más de un año sin gas, ¿cómo se procede para darle suministro? Opción A, se reengancha directamente, sin ningún trámite. Opción B, basta con una prueba de estanquidad rápida. Opción C, se trata como una instalación nueva, con papeles y pruebas. Opción D, solo hace falta un aviso del suministrador. Elige tu opción.</a:t>
+            </a:r>
+          </a:p>
+          <a:p>
+            <a:r>
+              <a:t>N2: Piensa en el año como una fecha de caducidad mental: pasado ese tiempo, ¿qué toca?</a:t>
             </a:r>
           </a:p>
         </p:txBody>
@@ -1050,12 +1050,12 @@
           <a:lstStyle/>
           <a:p>
             <a:r>
-              <a:t>N1: ¿Por qué como nueva?</a:t>
-            </a:r>
-          </a:p>
-          <a:p>
-            <a:r>
-              <a:t>N2: Porque pasado el año no hay garantía de que la instalación siga segura, así que borrón y cuenta nueva: papeles y pruebas como si se estrenara. Por debajo del año y con su certificado de control en vigor, sí se puede restablecer directamente.</a:t>
+              <a:t>N2: La respuesta correcta es la opción C: se trata como una instalación nueva, con papeles y pruebas. Pasado el año no hay garantía de que la instalación siga siendo segura, así que borrón y cuenta nueva: documentación y pruebas como si se estrenara. Por eso las opciones A, B y D se quedan cortas; ni reenganchar sin más, ni una estanquidad rápida, ni un simple aviso bastan.</a:t>
+            </a:r>
+          </a:p>
+          <a:p>
+            <a:r>
+              <a:t>N1: Y ojo, por debajo del año y con su certificado de control en vigor, entonces sí se puede restablecer directamente.</a:t>
             </a:r>
           </a:p>
         </p:txBody>
@@ -1200,12 +1200,12 @@
           <a:lstStyle/>
           <a:p>
             <a:r>
-              <a:t>N1: Quién y cuándo, las dos juntas. ¿Quién avisa y en qué plazo?</a:t>
-            </a:r>
-          </a:p>
-          <a:p>
-            <a:r>
-              <a:t>N2: Ojo, aunque lo tramite la instaladora, la responsabilidad legal es de otra persona.</a:t>
+              <a:t>N1: Quién y cuándo, las dos preguntas juntas. Escucha bien: ¿quién comunica la instalación a la Administración y en qué plazo? Opción A, la empresa instaladora, antes de quince días. Opción B, el titular, antes de treinta días desde la puesta en servicio. Opción C, el distribuidor, antes de treinta días desde el montaje. Opción D, el instalador, antes de siete días desde las pruebas. Tómate un momento y decide.</a:t>
+            </a:r>
+          </a:p>
+          <a:p>
+            <a:r>
+              <a:t>N2: Ojo, aunque en la práctica lo tramite la instaladora, la responsabilidad legal es de otra persona.</a:t>
             </a:r>
           </a:p>
         </p:txBody>
@@ -1275,12 +1275,12 @@
           <a:lstStyle/>
           <a:p>
             <a:r>
-              <a:t>N1: ¿Por qué el titular y treinta días?</a:t>
-            </a:r>
-          </a:p>
-          <a:p>
-            <a:r>
-              <a:t>N2: Porque comunicar es obligación del dueño, no de la instaladora, aunque esta lo tramite en su nombre. Y el plazo se cuenta desde la puesta en servicio, desde que entra el gas, no desde que acabaste el montaje: ahí está la trampa.</a:t>
+              <a:t>N2: La respuesta correcta es la opción B: el titular, antes de treinta días desde la puesta en servicio. Comunicar es obligación del dueño, no de la instaladora, aunque esta lo tramite en su nombre. Y cuidado con la trampa del plazo: se cuenta desde la puesta en servicio, desde que entra el gas, no desde el montaje ni desde las pruebas; por eso las opciones C y D te la intentan colar cambiando el punto de partida, y la opción A cambia además el plazo a quince días.</a:t>
+            </a:r>
+          </a:p>
+          <a:p>
+            <a:r>
+              <a:t>N1: El dueño avisa, y tiene un mes desde que hay gas.</a:t>
             </a:r>
           </a:p>
         </p:txBody>
